--- a/skills/jira-report/scaffold/template.pptx
+++ b/skills/jira-report/scaffold/template.pptx
@@ -5,21 +5,29 @@
     <p:sldMasterId id="2147483648" r:id="rId1"/>
   </p:sldMasterIdLst>
   <p:notesMasterIdLst>
-    <p:notesMasterId r:id="rId14"/>
+    <p:notesMasterId r:id="rId22"/>
   </p:notesMasterIdLst>
   <p:sldIdLst>
     <p:sldId id="274" r:id="rId2"/>
     <p:sldId id="311" r:id="rId3"/>
     <p:sldId id="315" r:id="rId4"/>
-    <p:sldId id="307" r:id="rId5"/>
-    <p:sldId id="308" r:id="rId6"/>
-    <p:sldId id="309" r:id="rId7"/>
-    <p:sldId id="312" r:id="rId8"/>
-    <p:sldId id="314" r:id="rId9"/>
-    <p:sldId id="313" r:id="rId10"/>
-    <p:sldId id="310" r:id="rId11"/>
-    <p:sldId id="316" r:id="rId12"/>
-    <p:sldId id="317" r:id="rId13"/>
+    <p:sldId id="324" r:id="rId5"/>
+    <p:sldId id="325" r:id="rId6"/>
+    <p:sldId id="307" r:id="rId7"/>
+    <p:sldId id="320" r:id="rId8"/>
+    <p:sldId id="321" r:id="rId9"/>
+    <p:sldId id="319" r:id="rId10"/>
+    <p:sldId id="308" r:id="rId11"/>
+    <p:sldId id="322" r:id="rId12"/>
+    <p:sldId id="323" r:id="rId13"/>
+    <p:sldId id="309" r:id="rId14"/>
+    <p:sldId id="312" r:id="rId15"/>
+    <p:sldId id="314" r:id="rId16"/>
+    <p:sldId id="313" r:id="rId17"/>
+    <p:sldId id="318" r:id="rId18"/>
+    <p:sldId id="310" r:id="rId19"/>
+    <p:sldId id="316" r:id="rId20"/>
+    <p:sldId id="317" r:id="rId21"/>
   </p:sldIdLst>
   <p:sldSz cx="12192000" cy="6858000"/>
   <p:notesSz cx="6858000" cy="9144000"/>
@@ -223,7 +231,7 @@
           </a:lstStyle>
           <a:p>
             <a:fld id="{44F5B78C-9A99-4196-93B5-0952C5AE7F9C}" type="datetimeFigureOut">
-              <a:t>06/08/2026</a:t>
+              <a:t>31/08/2026</a:t>
             </a:fld>
             <a:endParaRPr lang="fr-FR"/>
           </a:p>
@@ -528,7 +536,7 @@
           <a:lstStyle/>
           <a:p>
             <a:fld id="{179A66FE-F4F6-454F-8E0C-628A9DA985DF}" type="datetimeFigureOut">
-              <a:t>06/08/2026</a:t>
+              <a:t>31/08/2026</a:t>
             </a:fld>
             <a:endParaRPr lang="fr-FR"/>
           </a:p>
@@ -674,6 +682,1566 @@
 </file>
 
 <file path=ppt/notesSlides/notesSlide10.xml><?xml version="1.0" encoding="utf-8"?>
+<p:notes xmlns:a="http://schemas.openxmlformats.org/drawingml/2006/main" xmlns:r="http://schemas.openxmlformats.org/officeDocument/2006/relationships" xmlns:p="http://schemas.openxmlformats.org/presentationml/2006/main">
+  <p:cSld>
+    <p:spTree>
+      <p:nvGrpSpPr>
+        <p:cNvPr id="1" name="">
+          <a:extLst>
+            <a:ext uri="{FF2B5EF4-FFF2-40B4-BE49-F238E27FC236}">
+              <a16:creationId xmlns:a16="http://schemas.microsoft.com/office/drawing/2014/main" id="{FF4719E1-368C-0660-6683-02C1C7E2C184}"/>
+            </a:ext>
+          </a:extLst>
+        </p:cNvPr>
+        <p:cNvGrpSpPr/>
+        <p:nvPr/>
+      </p:nvGrpSpPr>
+      <p:grpSpPr>
+        <a:xfrm>
+          <a:off x="0" y="0"/>
+          <a:ext cx="0" cy="0"/>
+          <a:chOff x="0" y="0"/>
+          <a:chExt cx="0" cy="0"/>
+        </a:xfrm>
+      </p:grpSpPr>
+      <p:sp>
+        <p:nvSpPr>
+          <p:cNvPr id="5" name="Espace réservé de la date 2">
+            <a:extLst>
+              <a:ext uri="{FF2B5EF4-FFF2-40B4-BE49-F238E27FC236}">
+                <a16:creationId xmlns:a16="http://schemas.microsoft.com/office/drawing/2014/main" id="{018F4386-9811-1F15-956E-A1DD2D033DA2}"/>
+              </a:ext>
+            </a:extLst>
+          </p:cNvPr>
+          <p:cNvSpPr>
+            <a:spLocks noGrp="1"/>
+          </p:cNvSpPr>
+          <p:nvPr>
+            <p:ph type="dt" idx="1"/>
+          </p:nvPr>
+        </p:nvSpPr>
+        <p:spPr/>
+        <p:txBody>
+          <a:bodyPr vert="horz" lIns="91440" tIns="45720" rIns="91440" bIns="45720" rtlCol="0"/>
+          <a:lstStyle/>
+          <a:p>
+            <a:fld id="{179A66FE-F4F6-454F-8E0C-628A9DA985DF}" type="datetimeFigureOut">
+              <a:t>31/08/2026</a:t>
+            </a:fld>
+            <a:endParaRPr lang="fr-FR"/>
+          </a:p>
+        </p:txBody>
+      </p:sp>
+      <p:sp>
+        <p:nvSpPr>
+          <p:cNvPr id="9" name="Espace réservé du numéro de diapositive 12">
+            <a:extLst>
+              <a:ext uri="{FF2B5EF4-FFF2-40B4-BE49-F238E27FC236}">
+                <a16:creationId xmlns:a16="http://schemas.microsoft.com/office/drawing/2014/main" id="{BF4CC3F1-5956-CF0E-3D2C-DD5071952494}"/>
+              </a:ext>
+            </a:extLst>
+          </p:cNvPr>
+          <p:cNvSpPr txBox="1">
+            <a:spLocks noGrp="1"/>
+          </p:cNvSpPr>
+          <p:nvPr>
+            <p:ph type="sldNum" sz="quarter" idx="5"/>
+          </p:nvPr>
+        </p:nvSpPr>
+        <p:spPr>
+          <a:ln/>
+        </p:spPr>
+        <p:txBody>
+          <a:bodyPr lIns="0" tIns="0" rIns="0" bIns="0" anchor="b" anchorCtr="0">
+            <a:noAutofit/>
+          </a:bodyPr>
+          <a:lstStyle/>
+          <a:p>
+            <a:pPr lvl="0"/>
+            <a:fld id="{0941C839-6C4E-4BA1-AFC6-477B4C42B86E}" type="slidenum">
+              <a:t>10</a:t>
+            </a:fld>
+            <a:endParaRPr lang="fr-FR"/>
+          </a:p>
+        </p:txBody>
+      </p:sp>
+      <p:sp>
+        <p:nvSpPr>
+          <p:cNvPr id="11" name="Espace réservé du numéro de diapositive 6">
+            <a:extLst>
+              <a:ext uri="{FF2B5EF4-FFF2-40B4-BE49-F238E27FC236}">
+                <a16:creationId xmlns:a16="http://schemas.microsoft.com/office/drawing/2014/main" id="{9F0C6434-BDAC-176C-5371-1F5BCB2913C8}"/>
+              </a:ext>
+            </a:extLst>
+          </p:cNvPr>
+          <p:cNvSpPr>
+            <a:spLocks noGrp="1"/>
+          </p:cNvSpPr>
+          <p:nvPr>
+            <p:ph type="sldNum" sz="quarter" idx="5"/>
+          </p:nvPr>
+        </p:nvSpPr>
+        <p:spPr/>
+        <p:txBody>
+          <a:bodyPr vert="horz" lIns="91440" tIns="45720" rIns="91440" bIns="45720" rtlCol="0" anchor="b"/>
+          <a:lstStyle/>
+          <a:p>
+            <a:fld id="{5A8F3918-74C9-4FF7-86C9-18982F794D18}" type="slidenum">
+              <a:t>10</a:t>
+            </a:fld>
+            <a:endParaRPr lang="fr-FR"/>
+          </a:p>
+        </p:txBody>
+      </p:sp>
+      <p:sp>
+        <p:nvSpPr>
+          <p:cNvPr id="2" name="Espace réservé de l'image des diapositives 1">
+            <a:extLst>
+              <a:ext uri="{FF2B5EF4-FFF2-40B4-BE49-F238E27FC236}">
+                <a16:creationId xmlns:a16="http://schemas.microsoft.com/office/drawing/2014/main" id="{28722928-616F-979A-D15F-D39B975F38F4}"/>
+              </a:ext>
+            </a:extLst>
+          </p:cNvPr>
+          <p:cNvSpPr>
+            <a:spLocks noGrp="1" noRot="1" noChangeAspect="1" noResize="1"/>
+          </p:cNvSpPr>
+          <p:nvPr>
+            <p:ph type="sldImg"/>
+          </p:nvPr>
+        </p:nvSpPr>
+        <p:spPr>
+          <a:xfrm>
+            <a:off x="217488" y="812800"/>
+            <a:ext cx="7123112" cy="4008438"/>
+          </a:xfrm>
+          <a:solidFill>
+            <a:schemeClr val="accent1"/>
+          </a:solidFill>
+          <a:ln w="25400">
+            <a:solidFill>
+              <a:schemeClr val="accent1">
+                <a:shade val="50000"/>
+              </a:schemeClr>
+            </a:solidFill>
+            <a:prstDash val="solid"/>
+          </a:ln>
+        </p:spPr>
+      </p:sp>
+      <p:sp>
+        <p:nvSpPr>
+          <p:cNvPr id="3" name="Espace réservé des notes 2">
+            <a:extLst>
+              <a:ext uri="{FF2B5EF4-FFF2-40B4-BE49-F238E27FC236}">
+                <a16:creationId xmlns:a16="http://schemas.microsoft.com/office/drawing/2014/main" id="{94727C8A-2079-D3E3-A86B-973BE027DAD2}"/>
+              </a:ext>
+            </a:extLst>
+          </p:cNvPr>
+          <p:cNvSpPr txBox="1">
+            <a:spLocks noGrp="1"/>
+          </p:cNvSpPr>
+          <p:nvPr>
+            <p:ph type="body" sz="quarter" idx="1"/>
+          </p:nvPr>
+        </p:nvSpPr>
+        <p:spPr>
+          <a:xfrm>
+            <a:off x="756000" y="5078520"/>
+            <a:ext cx="6047640" cy="4811040"/>
+          </a:xfrm>
+          <a:noFill/>
+          <a:ln>
+            <a:noFill/>
+          </a:ln>
+        </p:spPr>
+        <p:txBody>
+          <a:bodyPr lIns="0" tIns="0" rIns="0" bIns="0">
+            <a:spAutoFit/>
+          </a:bodyPr>
+          <a:lstStyle/>
+          <a:p>
+            <a:endParaRPr lang="fr-FR"/>
+          </a:p>
+        </p:txBody>
+      </p:sp>
+    </p:spTree>
+    <p:extLst>
+      <p:ext uri="{BB962C8B-B14F-4D97-AF65-F5344CB8AC3E}">
+        <p14:creationId xmlns:p14="http://schemas.microsoft.com/office/powerpoint/2010/main" val="1513263684"/>
+      </p:ext>
+    </p:extLst>
+  </p:cSld>
+  <p:clrMapOvr>
+    <a:masterClrMapping/>
+  </p:clrMapOvr>
+</p:notes>
+</file>
+
+<file path=ppt/notesSlides/notesSlide11.xml><?xml version="1.0" encoding="utf-8"?>
+<p:notes xmlns:a="http://schemas.openxmlformats.org/drawingml/2006/main" xmlns:r="http://schemas.openxmlformats.org/officeDocument/2006/relationships" xmlns:p="http://schemas.openxmlformats.org/presentationml/2006/main">
+  <p:cSld>
+    <p:spTree>
+      <p:nvGrpSpPr>
+        <p:cNvPr id="1" name="">
+          <a:extLst>
+            <a:ext uri="{FF2B5EF4-FFF2-40B4-BE49-F238E27FC236}">
+              <a16:creationId xmlns:a16="http://schemas.microsoft.com/office/drawing/2014/main" id="{9019F017-6BB6-72C2-CF81-92298D797F6E}"/>
+            </a:ext>
+          </a:extLst>
+        </p:cNvPr>
+        <p:cNvGrpSpPr/>
+        <p:nvPr/>
+      </p:nvGrpSpPr>
+      <p:grpSpPr>
+        <a:xfrm>
+          <a:off x="0" y="0"/>
+          <a:ext cx="0" cy="0"/>
+          <a:chOff x="0" y="0"/>
+          <a:chExt cx="0" cy="0"/>
+        </a:xfrm>
+      </p:grpSpPr>
+      <p:sp>
+        <p:nvSpPr>
+          <p:cNvPr id="5" name="Espace réservé de la date 2">
+            <a:extLst>
+              <a:ext uri="{FF2B5EF4-FFF2-40B4-BE49-F238E27FC236}">
+                <a16:creationId xmlns:a16="http://schemas.microsoft.com/office/drawing/2014/main" id="{477A201D-EF21-F83F-F723-75A33488C45B}"/>
+              </a:ext>
+            </a:extLst>
+          </p:cNvPr>
+          <p:cNvSpPr>
+            <a:spLocks noGrp="1"/>
+          </p:cNvSpPr>
+          <p:nvPr>
+            <p:ph type="dt" idx="1"/>
+          </p:nvPr>
+        </p:nvSpPr>
+        <p:spPr/>
+        <p:txBody>
+          <a:bodyPr vert="horz" lIns="91440" tIns="45720" rIns="91440" bIns="45720" rtlCol="0"/>
+          <a:lstStyle/>
+          <a:p>
+            <a:fld id="{179A66FE-F4F6-454F-8E0C-628A9DA985DF}" type="datetimeFigureOut">
+              <a:t>31/08/2026</a:t>
+            </a:fld>
+            <a:endParaRPr lang="fr-FR"/>
+          </a:p>
+        </p:txBody>
+      </p:sp>
+      <p:sp>
+        <p:nvSpPr>
+          <p:cNvPr id="9" name="Espace réservé du numéro de diapositive 12">
+            <a:extLst>
+              <a:ext uri="{FF2B5EF4-FFF2-40B4-BE49-F238E27FC236}">
+                <a16:creationId xmlns:a16="http://schemas.microsoft.com/office/drawing/2014/main" id="{C8600541-EF9F-D9E3-9A29-9946DB4D1120}"/>
+              </a:ext>
+            </a:extLst>
+          </p:cNvPr>
+          <p:cNvSpPr txBox="1">
+            <a:spLocks noGrp="1"/>
+          </p:cNvSpPr>
+          <p:nvPr>
+            <p:ph type="sldNum" sz="quarter" idx="5"/>
+          </p:nvPr>
+        </p:nvSpPr>
+        <p:spPr>
+          <a:ln/>
+        </p:spPr>
+        <p:txBody>
+          <a:bodyPr lIns="0" tIns="0" rIns="0" bIns="0" anchor="b" anchorCtr="0">
+            <a:noAutofit/>
+          </a:bodyPr>
+          <a:lstStyle/>
+          <a:p>
+            <a:pPr lvl="0"/>
+            <a:fld id="{0941C839-6C4E-4BA1-AFC6-477B4C42B86E}" type="slidenum">
+              <a:t>11</a:t>
+            </a:fld>
+            <a:endParaRPr lang="fr-FR"/>
+          </a:p>
+        </p:txBody>
+      </p:sp>
+      <p:sp>
+        <p:nvSpPr>
+          <p:cNvPr id="11" name="Espace réservé du numéro de diapositive 6">
+            <a:extLst>
+              <a:ext uri="{FF2B5EF4-FFF2-40B4-BE49-F238E27FC236}">
+                <a16:creationId xmlns:a16="http://schemas.microsoft.com/office/drawing/2014/main" id="{8C783D69-321A-4655-8EBD-5DECA065EC89}"/>
+              </a:ext>
+            </a:extLst>
+          </p:cNvPr>
+          <p:cNvSpPr>
+            <a:spLocks noGrp="1"/>
+          </p:cNvSpPr>
+          <p:nvPr>
+            <p:ph type="sldNum" sz="quarter" idx="5"/>
+          </p:nvPr>
+        </p:nvSpPr>
+        <p:spPr/>
+        <p:txBody>
+          <a:bodyPr vert="horz" lIns="91440" tIns="45720" rIns="91440" bIns="45720" rtlCol="0" anchor="b"/>
+          <a:lstStyle/>
+          <a:p>
+            <a:fld id="{5A8F3918-74C9-4FF7-86C9-18982F794D18}" type="slidenum">
+              <a:t>11</a:t>
+            </a:fld>
+            <a:endParaRPr lang="fr-FR"/>
+          </a:p>
+        </p:txBody>
+      </p:sp>
+      <p:sp>
+        <p:nvSpPr>
+          <p:cNvPr id="2" name="Espace réservé de l'image des diapositives 1">
+            <a:extLst>
+              <a:ext uri="{FF2B5EF4-FFF2-40B4-BE49-F238E27FC236}">
+                <a16:creationId xmlns:a16="http://schemas.microsoft.com/office/drawing/2014/main" id="{FB0EFAB1-DD3C-B526-9C16-4FF3C49EDB25}"/>
+              </a:ext>
+            </a:extLst>
+          </p:cNvPr>
+          <p:cNvSpPr>
+            <a:spLocks noGrp="1" noRot="1" noChangeAspect="1" noResize="1"/>
+          </p:cNvSpPr>
+          <p:nvPr>
+            <p:ph type="sldImg"/>
+          </p:nvPr>
+        </p:nvSpPr>
+        <p:spPr>
+          <a:xfrm>
+            <a:off x="217488" y="812800"/>
+            <a:ext cx="7123112" cy="4008438"/>
+          </a:xfrm>
+          <a:solidFill>
+            <a:schemeClr val="accent1"/>
+          </a:solidFill>
+          <a:ln w="25400">
+            <a:solidFill>
+              <a:schemeClr val="accent1">
+                <a:shade val="50000"/>
+              </a:schemeClr>
+            </a:solidFill>
+            <a:prstDash val="solid"/>
+          </a:ln>
+        </p:spPr>
+      </p:sp>
+      <p:sp>
+        <p:nvSpPr>
+          <p:cNvPr id="3" name="Espace réservé des notes 2">
+            <a:extLst>
+              <a:ext uri="{FF2B5EF4-FFF2-40B4-BE49-F238E27FC236}">
+                <a16:creationId xmlns:a16="http://schemas.microsoft.com/office/drawing/2014/main" id="{C96871B5-EA89-118E-4825-D66DC731301F}"/>
+              </a:ext>
+            </a:extLst>
+          </p:cNvPr>
+          <p:cNvSpPr txBox="1">
+            <a:spLocks noGrp="1"/>
+          </p:cNvSpPr>
+          <p:nvPr>
+            <p:ph type="body" sz="quarter" idx="1"/>
+          </p:nvPr>
+        </p:nvSpPr>
+        <p:spPr>
+          <a:xfrm>
+            <a:off x="756000" y="5078520"/>
+            <a:ext cx="6047640" cy="4811040"/>
+          </a:xfrm>
+          <a:noFill/>
+          <a:ln>
+            <a:noFill/>
+          </a:ln>
+        </p:spPr>
+        <p:txBody>
+          <a:bodyPr lIns="0" tIns="0" rIns="0" bIns="0">
+            <a:spAutoFit/>
+          </a:bodyPr>
+          <a:lstStyle/>
+          <a:p>
+            <a:endParaRPr lang="fr-FR"/>
+          </a:p>
+        </p:txBody>
+      </p:sp>
+    </p:spTree>
+    <p:extLst>
+      <p:ext uri="{BB962C8B-B14F-4D97-AF65-F5344CB8AC3E}">
+        <p14:creationId xmlns:p14="http://schemas.microsoft.com/office/powerpoint/2010/main" val="3403930556"/>
+      </p:ext>
+    </p:extLst>
+  </p:cSld>
+  <p:clrMapOvr>
+    <a:masterClrMapping/>
+  </p:clrMapOvr>
+</p:notes>
+</file>
+
+<file path=ppt/notesSlides/notesSlide12.xml><?xml version="1.0" encoding="utf-8"?>
+<p:notes xmlns:a="http://schemas.openxmlformats.org/drawingml/2006/main" xmlns:r="http://schemas.openxmlformats.org/officeDocument/2006/relationships" xmlns:p="http://schemas.openxmlformats.org/presentationml/2006/main">
+  <p:cSld>
+    <p:spTree>
+      <p:nvGrpSpPr>
+        <p:cNvPr id="1" name="">
+          <a:extLst>
+            <a:ext uri="{FF2B5EF4-FFF2-40B4-BE49-F238E27FC236}">
+              <a16:creationId xmlns:a16="http://schemas.microsoft.com/office/drawing/2014/main" id="{C607113E-43C9-1217-B3EF-CB0000084155}"/>
+            </a:ext>
+          </a:extLst>
+        </p:cNvPr>
+        <p:cNvGrpSpPr/>
+        <p:nvPr/>
+      </p:nvGrpSpPr>
+      <p:grpSpPr>
+        <a:xfrm>
+          <a:off x="0" y="0"/>
+          <a:ext cx="0" cy="0"/>
+          <a:chOff x="0" y="0"/>
+          <a:chExt cx="0" cy="0"/>
+        </a:xfrm>
+      </p:grpSpPr>
+      <p:sp>
+        <p:nvSpPr>
+          <p:cNvPr id="5" name="Espace réservé de la date 2">
+            <a:extLst>
+              <a:ext uri="{FF2B5EF4-FFF2-40B4-BE49-F238E27FC236}">
+                <a16:creationId xmlns:a16="http://schemas.microsoft.com/office/drawing/2014/main" id="{4D079003-2F5C-9415-4C85-E0EB8DC4F1B0}"/>
+              </a:ext>
+            </a:extLst>
+          </p:cNvPr>
+          <p:cNvSpPr>
+            <a:spLocks noGrp="1"/>
+          </p:cNvSpPr>
+          <p:nvPr>
+            <p:ph type="dt" idx="1"/>
+          </p:nvPr>
+        </p:nvSpPr>
+        <p:spPr/>
+        <p:txBody>
+          <a:bodyPr vert="horz" lIns="91440" tIns="45720" rIns="91440" bIns="45720" rtlCol="0"/>
+          <a:lstStyle/>
+          <a:p>
+            <a:fld id="{179A66FE-F4F6-454F-8E0C-628A9DA985DF}" type="datetimeFigureOut">
+              <a:t>31/08/2026</a:t>
+            </a:fld>
+            <a:endParaRPr lang="fr-FR"/>
+          </a:p>
+        </p:txBody>
+      </p:sp>
+      <p:sp>
+        <p:nvSpPr>
+          <p:cNvPr id="9" name="Espace réservé du numéro de diapositive 12">
+            <a:extLst>
+              <a:ext uri="{FF2B5EF4-FFF2-40B4-BE49-F238E27FC236}">
+                <a16:creationId xmlns:a16="http://schemas.microsoft.com/office/drawing/2014/main" id="{21322EBC-833A-7A6A-8D72-DA14BA6744CD}"/>
+              </a:ext>
+            </a:extLst>
+          </p:cNvPr>
+          <p:cNvSpPr txBox="1">
+            <a:spLocks noGrp="1"/>
+          </p:cNvSpPr>
+          <p:nvPr>
+            <p:ph type="sldNum" sz="quarter" idx="5"/>
+          </p:nvPr>
+        </p:nvSpPr>
+        <p:spPr>
+          <a:ln/>
+        </p:spPr>
+        <p:txBody>
+          <a:bodyPr lIns="0" tIns="0" rIns="0" bIns="0" anchor="b" anchorCtr="0">
+            <a:noAutofit/>
+          </a:bodyPr>
+          <a:lstStyle/>
+          <a:p>
+            <a:pPr lvl="0"/>
+            <a:fld id="{0941C839-6C4E-4BA1-AFC6-477B4C42B86E}" type="slidenum">
+              <a:t>12</a:t>
+            </a:fld>
+            <a:endParaRPr lang="fr-FR"/>
+          </a:p>
+        </p:txBody>
+      </p:sp>
+      <p:sp>
+        <p:nvSpPr>
+          <p:cNvPr id="11" name="Espace réservé du numéro de diapositive 6">
+            <a:extLst>
+              <a:ext uri="{FF2B5EF4-FFF2-40B4-BE49-F238E27FC236}">
+                <a16:creationId xmlns:a16="http://schemas.microsoft.com/office/drawing/2014/main" id="{1423E756-8C43-0E03-67FE-B169AE2C5BE5}"/>
+              </a:ext>
+            </a:extLst>
+          </p:cNvPr>
+          <p:cNvSpPr>
+            <a:spLocks noGrp="1"/>
+          </p:cNvSpPr>
+          <p:nvPr>
+            <p:ph type="sldNum" sz="quarter" idx="5"/>
+          </p:nvPr>
+        </p:nvSpPr>
+        <p:spPr/>
+        <p:txBody>
+          <a:bodyPr vert="horz" lIns="91440" tIns="45720" rIns="91440" bIns="45720" rtlCol="0" anchor="b"/>
+          <a:lstStyle/>
+          <a:p>
+            <a:fld id="{5A8F3918-74C9-4FF7-86C9-18982F794D18}" type="slidenum">
+              <a:t>12</a:t>
+            </a:fld>
+            <a:endParaRPr lang="fr-FR"/>
+          </a:p>
+        </p:txBody>
+      </p:sp>
+      <p:sp>
+        <p:nvSpPr>
+          <p:cNvPr id="2" name="Espace réservé de l'image des diapositives 1">
+            <a:extLst>
+              <a:ext uri="{FF2B5EF4-FFF2-40B4-BE49-F238E27FC236}">
+                <a16:creationId xmlns:a16="http://schemas.microsoft.com/office/drawing/2014/main" id="{F7613BC7-2D94-91BC-A881-E1E7BCFDB1AE}"/>
+              </a:ext>
+            </a:extLst>
+          </p:cNvPr>
+          <p:cNvSpPr>
+            <a:spLocks noGrp="1" noRot="1" noChangeAspect="1" noResize="1"/>
+          </p:cNvSpPr>
+          <p:nvPr>
+            <p:ph type="sldImg"/>
+          </p:nvPr>
+        </p:nvSpPr>
+        <p:spPr>
+          <a:xfrm>
+            <a:off x="217488" y="812800"/>
+            <a:ext cx="7123112" cy="4008438"/>
+          </a:xfrm>
+          <a:solidFill>
+            <a:schemeClr val="accent1"/>
+          </a:solidFill>
+          <a:ln w="25400">
+            <a:solidFill>
+              <a:schemeClr val="accent1">
+                <a:shade val="50000"/>
+              </a:schemeClr>
+            </a:solidFill>
+            <a:prstDash val="solid"/>
+          </a:ln>
+        </p:spPr>
+      </p:sp>
+      <p:sp>
+        <p:nvSpPr>
+          <p:cNvPr id="3" name="Espace réservé des notes 2">
+            <a:extLst>
+              <a:ext uri="{FF2B5EF4-FFF2-40B4-BE49-F238E27FC236}">
+                <a16:creationId xmlns:a16="http://schemas.microsoft.com/office/drawing/2014/main" id="{A17127AE-0914-5E99-037B-34AC7CBFD9F1}"/>
+              </a:ext>
+            </a:extLst>
+          </p:cNvPr>
+          <p:cNvSpPr txBox="1">
+            <a:spLocks noGrp="1"/>
+          </p:cNvSpPr>
+          <p:nvPr>
+            <p:ph type="body" sz="quarter" idx="1"/>
+          </p:nvPr>
+        </p:nvSpPr>
+        <p:spPr>
+          <a:xfrm>
+            <a:off x="756000" y="5078520"/>
+            <a:ext cx="6047640" cy="4811040"/>
+          </a:xfrm>
+          <a:noFill/>
+          <a:ln>
+            <a:noFill/>
+          </a:ln>
+        </p:spPr>
+        <p:txBody>
+          <a:bodyPr lIns="0" tIns="0" rIns="0" bIns="0">
+            <a:spAutoFit/>
+          </a:bodyPr>
+          <a:lstStyle/>
+          <a:p>
+            <a:endParaRPr lang="fr-FR"/>
+          </a:p>
+        </p:txBody>
+      </p:sp>
+    </p:spTree>
+    <p:extLst>
+      <p:ext uri="{BB962C8B-B14F-4D97-AF65-F5344CB8AC3E}">
+        <p14:creationId xmlns:p14="http://schemas.microsoft.com/office/powerpoint/2010/main" val="2131713060"/>
+      </p:ext>
+    </p:extLst>
+  </p:cSld>
+  <p:clrMapOvr>
+    <a:masterClrMapping/>
+  </p:clrMapOvr>
+</p:notes>
+</file>
+
+<file path=ppt/notesSlides/notesSlide13.xml><?xml version="1.0" encoding="utf-8"?>
+<p:notes xmlns:a="http://schemas.openxmlformats.org/drawingml/2006/main" xmlns:r="http://schemas.openxmlformats.org/officeDocument/2006/relationships" xmlns:p="http://schemas.openxmlformats.org/presentationml/2006/main">
+  <p:cSld>
+    <p:spTree>
+      <p:nvGrpSpPr>
+        <p:cNvPr id="1" name="">
+          <a:extLst>
+            <a:ext uri="{FF2B5EF4-FFF2-40B4-BE49-F238E27FC236}">
+              <a16:creationId xmlns:a16="http://schemas.microsoft.com/office/drawing/2014/main" id="{FF8510F8-B795-D47E-86C1-33C5BAA25E6D}"/>
+            </a:ext>
+          </a:extLst>
+        </p:cNvPr>
+        <p:cNvGrpSpPr/>
+        <p:nvPr/>
+      </p:nvGrpSpPr>
+      <p:grpSpPr>
+        <a:xfrm>
+          <a:off x="0" y="0"/>
+          <a:ext cx="0" cy="0"/>
+          <a:chOff x="0" y="0"/>
+          <a:chExt cx="0" cy="0"/>
+        </a:xfrm>
+      </p:grpSpPr>
+      <p:sp>
+        <p:nvSpPr>
+          <p:cNvPr id="5" name="Espace réservé de la date 2">
+            <a:extLst>
+              <a:ext uri="{FF2B5EF4-FFF2-40B4-BE49-F238E27FC236}">
+                <a16:creationId xmlns:a16="http://schemas.microsoft.com/office/drawing/2014/main" id="{3F591782-4804-2B39-0A95-252B714B9AAB}"/>
+              </a:ext>
+            </a:extLst>
+          </p:cNvPr>
+          <p:cNvSpPr>
+            <a:spLocks noGrp="1"/>
+          </p:cNvSpPr>
+          <p:nvPr>
+            <p:ph type="dt" idx="1"/>
+          </p:nvPr>
+        </p:nvSpPr>
+        <p:spPr/>
+        <p:txBody>
+          <a:bodyPr vert="horz" lIns="91440" tIns="45720" rIns="91440" bIns="45720" rtlCol="0"/>
+          <a:lstStyle/>
+          <a:p>
+            <a:fld id="{179A66FE-F4F6-454F-8E0C-628A9DA985DF}" type="datetimeFigureOut">
+              <a:t>31/08/2026</a:t>
+            </a:fld>
+            <a:endParaRPr lang="fr-FR"/>
+          </a:p>
+        </p:txBody>
+      </p:sp>
+      <p:sp>
+        <p:nvSpPr>
+          <p:cNvPr id="9" name="Espace réservé du numéro de diapositive 12">
+            <a:extLst>
+              <a:ext uri="{FF2B5EF4-FFF2-40B4-BE49-F238E27FC236}">
+                <a16:creationId xmlns:a16="http://schemas.microsoft.com/office/drawing/2014/main" id="{10F4C261-6EA4-C555-564A-2C2AB837BD31}"/>
+              </a:ext>
+            </a:extLst>
+          </p:cNvPr>
+          <p:cNvSpPr txBox="1">
+            <a:spLocks noGrp="1"/>
+          </p:cNvSpPr>
+          <p:nvPr>
+            <p:ph type="sldNum" sz="quarter" idx="5"/>
+          </p:nvPr>
+        </p:nvSpPr>
+        <p:spPr>
+          <a:ln/>
+        </p:spPr>
+        <p:txBody>
+          <a:bodyPr lIns="0" tIns="0" rIns="0" bIns="0" anchor="b" anchorCtr="0">
+            <a:noAutofit/>
+          </a:bodyPr>
+          <a:lstStyle/>
+          <a:p>
+            <a:pPr lvl="0"/>
+            <a:fld id="{0941C839-6C4E-4BA1-AFC6-477B4C42B86E}" type="slidenum">
+              <a:t>13</a:t>
+            </a:fld>
+            <a:endParaRPr lang="fr-FR"/>
+          </a:p>
+        </p:txBody>
+      </p:sp>
+      <p:sp>
+        <p:nvSpPr>
+          <p:cNvPr id="11" name="Espace réservé du numéro de diapositive 6">
+            <a:extLst>
+              <a:ext uri="{FF2B5EF4-FFF2-40B4-BE49-F238E27FC236}">
+                <a16:creationId xmlns:a16="http://schemas.microsoft.com/office/drawing/2014/main" id="{8DA82FD7-F41A-19BA-C1B5-9CCF1ED13502}"/>
+              </a:ext>
+            </a:extLst>
+          </p:cNvPr>
+          <p:cNvSpPr>
+            <a:spLocks noGrp="1"/>
+          </p:cNvSpPr>
+          <p:nvPr>
+            <p:ph type="sldNum" sz="quarter" idx="5"/>
+          </p:nvPr>
+        </p:nvSpPr>
+        <p:spPr/>
+        <p:txBody>
+          <a:bodyPr vert="horz" lIns="91440" tIns="45720" rIns="91440" bIns="45720" rtlCol="0" anchor="b"/>
+          <a:lstStyle/>
+          <a:p>
+            <a:fld id="{5A8F3918-74C9-4FF7-86C9-18982F794D18}" type="slidenum">
+              <a:t>13</a:t>
+            </a:fld>
+            <a:endParaRPr lang="fr-FR"/>
+          </a:p>
+        </p:txBody>
+      </p:sp>
+      <p:sp>
+        <p:nvSpPr>
+          <p:cNvPr id="2" name="Espace réservé de l'image des diapositives 1">
+            <a:extLst>
+              <a:ext uri="{FF2B5EF4-FFF2-40B4-BE49-F238E27FC236}">
+                <a16:creationId xmlns:a16="http://schemas.microsoft.com/office/drawing/2014/main" id="{CDBBB10E-0798-32B5-BB45-19EC72A3E4D7}"/>
+              </a:ext>
+            </a:extLst>
+          </p:cNvPr>
+          <p:cNvSpPr>
+            <a:spLocks noGrp="1" noRot="1" noChangeAspect="1" noResize="1"/>
+          </p:cNvSpPr>
+          <p:nvPr>
+            <p:ph type="sldImg"/>
+          </p:nvPr>
+        </p:nvSpPr>
+        <p:spPr>
+          <a:xfrm>
+            <a:off x="217488" y="812800"/>
+            <a:ext cx="7123112" cy="4008438"/>
+          </a:xfrm>
+          <a:solidFill>
+            <a:schemeClr val="accent1"/>
+          </a:solidFill>
+          <a:ln w="25400">
+            <a:solidFill>
+              <a:schemeClr val="accent1">
+                <a:shade val="50000"/>
+              </a:schemeClr>
+            </a:solidFill>
+            <a:prstDash val="solid"/>
+          </a:ln>
+        </p:spPr>
+      </p:sp>
+      <p:sp>
+        <p:nvSpPr>
+          <p:cNvPr id="3" name="Espace réservé des notes 2">
+            <a:extLst>
+              <a:ext uri="{FF2B5EF4-FFF2-40B4-BE49-F238E27FC236}">
+                <a16:creationId xmlns:a16="http://schemas.microsoft.com/office/drawing/2014/main" id="{67267007-55CA-47CC-1568-AD472070CE9E}"/>
+              </a:ext>
+            </a:extLst>
+          </p:cNvPr>
+          <p:cNvSpPr txBox="1">
+            <a:spLocks noGrp="1"/>
+          </p:cNvSpPr>
+          <p:nvPr>
+            <p:ph type="body" sz="quarter" idx="1"/>
+          </p:nvPr>
+        </p:nvSpPr>
+        <p:spPr>
+          <a:xfrm>
+            <a:off x="756000" y="5078520"/>
+            <a:ext cx="6047640" cy="4811040"/>
+          </a:xfrm>
+          <a:noFill/>
+          <a:ln>
+            <a:noFill/>
+          </a:ln>
+        </p:spPr>
+        <p:txBody>
+          <a:bodyPr lIns="0" tIns="0" rIns="0" bIns="0">
+            <a:spAutoFit/>
+          </a:bodyPr>
+          <a:lstStyle/>
+          <a:p>
+            <a:endParaRPr lang="fr-FR"/>
+          </a:p>
+        </p:txBody>
+      </p:sp>
+    </p:spTree>
+    <p:extLst>
+      <p:ext uri="{BB962C8B-B14F-4D97-AF65-F5344CB8AC3E}">
+        <p14:creationId xmlns:p14="http://schemas.microsoft.com/office/powerpoint/2010/main" val="3878450447"/>
+      </p:ext>
+    </p:extLst>
+  </p:cSld>
+  <p:clrMapOvr>
+    <a:masterClrMapping/>
+  </p:clrMapOvr>
+</p:notes>
+</file>
+
+<file path=ppt/notesSlides/notesSlide14.xml><?xml version="1.0" encoding="utf-8"?>
+<p:notes xmlns:a="http://schemas.openxmlformats.org/drawingml/2006/main" xmlns:r="http://schemas.openxmlformats.org/officeDocument/2006/relationships" xmlns:p="http://schemas.openxmlformats.org/presentationml/2006/main">
+  <p:cSld>
+    <p:spTree>
+      <p:nvGrpSpPr>
+        <p:cNvPr id="1" name="">
+          <a:extLst>
+            <a:ext uri="{FF2B5EF4-FFF2-40B4-BE49-F238E27FC236}">
+              <a16:creationId xmlns:a16="http://schemas.microsoft.com/office/drawing/2014/main" id="{2C72FE95-1D38-6447-ABA5-D9A73C0391D9}"/>
+            </a:ext>
+          </a:extLst>
+        </p:cNvPr>
+        <p:cNvGrpSpPr/>
+        <p:nvPr/>
+      </p:nvGrpSpPr>
+      <p:grpSpPr>
+        <a:xfrm>
+          <a:off x="0" y="0"/>
+          <a:ext cx="0" cy="0"/>
+          <a:chOff x="0" y="0"/>
+          <a:chExt cx="0" cy="0"/>
+        </a:xfrm>
+      </p:grpSpPr>
+      <p:sp>
+        <p:nvSpPr>
+          <p:cNvPr id="5" name="Espace réservé de la date 2">
+            <a:extLst>
+              <a:ext uri="{FF2B5EF4-FFF2-40B4-BE49-F238E27FC236}">
+                <a16:creationId xmlns:a16="http://schemas.microsoft.com/office/drawing/2014/main" id="{647B60BC-FEF4-17B9-C1E2-469F2408EA8F}"/>
+              </a:ext>
+            </a:extLst>
+          </p:cNvPr>
+          <p:cNvSpPr>
+            <a:spLocks noGrp="1"/>
+          </p:cNvSpPr>
+          <p:nvPr>
+            <p:ph type="dt" idx="1"/>
+          </p:nvPr>
+        </p:nvSpPr>
+        <p:spPr/>
+        <p:txBody>
+          <a:bodyPr vert="horz" lIns="91440" tIns="45720" rIns="91440" bIns="45720" rtlCol="0"/>
+          <a:lstStyle/>
+          <a:p>
+            <a:fld id="{179A66FE-F4F6-454F-8E0C-628A9DA985DF}" type="datetimeFigureOut">
+              <a:t>31/08/2026</a:t>
+            </a:fld>
+            <a:endParaRPr lang="fr-FR"/>
+          </a:p>
+        </p:txBody>
+      </p:sp>
+      <p:sp>
+        <p:nvSpPr>
+          <p:cNvPr id="9" name="Espace réservé du numéro de diapositive 12">
+            <a:extLst>
+              <a:ext uri="{FF2B5EF4-FFF2-40B4-BE49-F238E27FC236}">
+                <a16:creationId xmlns:a16="http://schemas.microsoft.com/office/drawing/2014/main" id="{5DCFA3C2-F70D-7E5C-88B8-3D5DB77ECB66}"/>
+              </a:ext>
+            </a:extLst>
+          </p:cNvPr>
+          <p:cNvSpPr txBox="1">
+            <a:spLocks noGrp="1"/>
+          </p:cNvSpPr>
+          <p:nvPr>
+            <p:ph type="sldNum" sz="quarter" idx="5"/>
+          </p:nvPr>
+        </p:nvSpPr>
+        <p:spPr>
+          <a:ln/>
+        </p:spPr>
+        <p:txBody>
+          <a:bodyPr lIns="0" tIns="0" rIns="0" bIns="0" anchor="b" anchorCtr="0">
+            <a:noAutofit/>
+          </a:bodyPr>
+          <a:lstStyle/>
+          <a:p>
+            <a:pPr lvl="0"/>
+            <a:fld id="{0941C839-6C4E-4BA1-AFC6-477B4C42B86E}" type="slidenum">
+              <a:t>14</a:t>
+            </a:fld>
+            <a:endParaRPr lang="fr-FR"/>
+          </a:p>
+        </p:txBody>
+      </p:sp>
+      <p:sp>
+        <p:nvSpPr>
+          <p:cNvPr id="11" name="Espace réservé du numéro de diapositive 6">
+            <a:extLst>
+              <a:ext uri="{FF2B5EF4-FFF2-40B4-BE49-F238E27FC236}">
+                <a16:creationId xmlns:a16="http://schemas.microsoft.com/office/drawing/2014/main" id="{497CA3BD-3B5B-D638-9E8A-AC8705052A71}"/>
+              </a:ext>
+            </a:extLst>
+          </p:cNvPr>
+          <p:cNvSpPr>
+            <a:spLocks noGrp="1"/>
+          </p:cNvSpPr>
+          <p:nvPr>
+            <p:ph type="sldNum" sz="quarter" idx="5"/>
+          </p:nvPr>
+        </p:nvSpPr>
+        <p:spPr/>
+        <p:txBody>
+          <a:bodyPr vert="horz" lIns="91440" tIns="45720" rIns="91440" bIns="45720" rtlCol="0" anchor="b"/>
+          <a:lstStyle/>
+          <a:p>
+            <a:fld id="{5A8F3918-74C9-4FF7-86C9-18982F794D18}" type="slidenum">
+              <a:t>14</a:t>
+            </a:fld>
+            <a:endParaRPr lang="fr-FR"/>
+          </a:p>
+        </p:txBody>
+      </p:sp>
+      <p:sp>
+        <p:nvSpPr>
+          <p:cNvPr id="2" name="Espace réservé de l'image des diapositives 1">
+            <a:extLst>
+              <a:ext uri="{FF2B5EF4-FFF2-40B4-BE49-F238E27FC236}">
+                <a16:creationId xmlns:a16="http://schemas.microsoft.com/office/drawing/2014/main" id="{99DB12CF-A901-27BC-7338-C3D5D41283D8}"/>
+              </a:ext>
+            </a:extLst>
+          </p:cNvPr>
+          <p:cNvSpPr>
+            <a:spLocks noGrp="1" noRot="1" noChangeAspect="1" noResize="1"/>
+          </p:cNvSpPr>
+          <p:nvPr>
+            <p:ph type="sldImg"/>
+          </p:nvPr>
+        </p:nvSpPr>
+        <p:spPr>
+          <a:xfrm>
+            <a:off x="217488" y="812800"/>
+            <a:ext cx="7123112" cy="4008438"/>
+          </a:xfrm>
+          <a:solidFill>
+            <a:schemeClr val="accent1"/>
+          </a:solidFill>
+          <a:ln w="25400">
+            <a:solidFill>
+              <a:schemeClr val="accent1">
+                <a:shade val="50000"/>
+              </a:schemeClr>
+            </a:solidFill>
+            <a:prstDash val="solid"/>
+          </a:ln>
+        </p:spPr>
+      </p:sp>
+      <p:sp>
+        <p:nvSpPr>
+          <p:cNvPr id="3" name="Espace réservé des notes 2">
+            <a:extLst>
+              <a:ext uri="{FF2B5EF4-FFF2-40B4-BE49-F238E27FC236}">
+                <a16:creationId xmlns:a16="http://schemas.microsoft.com/office/drawing/2014/main" id="{F9339234-6039-DDA0-FE46-F754228CF776}"/>
+              </a:ext>
+            </a:extLst>
+          </p:cNvPr>
+          <p:cNvSpPr txBox="1">
+            <a:spLocks noGrp="1"/>
+          </p:cNvSpPr>
+          <p:nvPr>
+            <p:ph type="body" sz="quarter" idx="1"/>
+          </p:nvPr>
+        </p:nvSpPr>
+        <p:spPr>
+          <a:xfrm>
+            <a:off x="756000" y="5078520"/>
+            <a:ext cx="6047640" cy="4811040"/>
+          </a:xfrm>
+          <a:noFill/>
+          <a:ln>
+            <a:noFill/>
+          </a:ln>
+        </p:spPr>
+        <p:txBody>
+          <a:bodyPr lIns="0" tIns="0" rIns="0" bIns="0">
+            <a:spAutoFit/>
+          </a:bodyPr>
+          <a:lstStyle/>
+          <a:p>
+            <a:endParaRPr lang="fr-FR"/>
+          </a:p>
+        </p:txBody>
+      </p:sp>
+    </p:spTree>
+    <p:extLst>
+      <p:ext uri="{BB962C8B-B14F-4D97-AF65-F5344CB8AC3E}">
+        <p14:creationId xmlns:p14="http://schemas.microsoft.com/office/powerpoint/2010/main" val="724406561"/>
+      </p:ext>
+    </p:extLst>
+  </p:cSld>
+  <p:clrMapOvr>
+    <a:masterClrMapping/>
+  </p:clrMapOvr>
+</p:notes>
+</file>
+
+<file path=ppt/notesSlides/notesSlide15.xml><?xml version="1.0" encoding="utf-8"?>
+<p:notes xmlns:a="http://schemas.openxmlformats.org/drawingml/2006/main" xmlns:r="http://schemas.openxmlformats.org/officeDocument/2006/relationships" xmlns:p="http://schemas.openxmlformats.org/presentationml/2006/main">
+  <p:cSld>
+    <p:spTree>
+      <p:nvGrpSpPr>
+        <p:cNvPr id="1" name="">
+          <a:extLst>
+            <a:ext uri="{FF2B5EF4-FFF2-40B4-BE49-F238E27FC236}">
+              <a16:creationId xmlns:a16="http://schemas.microsoft.com/office/drawing/2014/main" id="{5F19521E-FB27-D653-A801-3FF6B2A83DE0}"/>
+            </a:ext>
+          </a:extLst>
+        </p:cNvPr>
+        <p:cNvGrpSpPr/>
+        <p:nvPr/>
+      </p:nvGrpSpPr>
+      <p:grpSpPr>
+        <a:xfrm>
+          <a:off x="0" y="0"/>
+          <a:ext cx="0" cy="0"/>
+          <a:chOff x="0" y="0"/>
+          <a:chExt cx="0" cy="0"/>
+        </a:xfrm>
+      </p:grpSpPr>
+      <p:sp>
+        <p:nvSpPr>
+          <p:cNvPr id="5" name="Espace réservé de la date 2">
+            <a:extLst>
+              <a:ext uri="{FF2B5EF4-FFF2-40B4-BE49-F238E27FC236}">
+                <a16:creationId xmlns:a16="http://schemas.microsoft.com/office/drawing/2014/main" id="{1B3DE8FC-6502-0C3F-5727-9EEF67F4BE6C}"/>
+              </a:ext>
+            </a:extLst>
+          </p:cNvPr>
+          <p:cNvSpPr>
+            <a:spLocks noGrp="1"/>
+          </p:cNvSpPr>
+          <p:nvPr>
+            <p:ph type="dt" idx="1"/>
+          </p:nvPr>
+        </p:nvSpPr>
+        <p:spPr/>
+        <p:txBody>
+          <a:bodyPr vert="horz" lIns="91440" tIns="45720" rIns="91440" bIns="45720" rtlCol="0"/>
+          <a:lstStyle/>
+          <a:p>
+            <a:fld id="{179A66FE-F4F6-454F-8E0C-628A9DA985DF}" type="datetimeFigureOut">
+              <a:t>31/08/2026</a:t>
+            </a:fld>
+            <a:endParaRPr lang="fr-FR"/>
+          </a:p>
+        </p:txBody>
+      </p:sp>
+      <p:sp>
+        <p:nvSpPr>
+          <p:cNvPr id="9" name="Espace réservé du numéro de diapositive 12">
+            <a:extLst>
+              <a:ext uri="{FF2B5EF4-FFF2-40B4-BE49-F238E27FC236}">
+                <a16:creationId xmlns:a16="http://schemas.microsoft.com/office/drawing/2014/main" id="{DFF8B2EB-82DD-3702-14F1-A51500341097}"/>
+              </a:ext>
+            </a:extLst>
+          </p:cNvPr>
+          <p:cNvSpPr txBox="1">
+            <a:spLocks noGrp="1"/>
+          </p:cNvSpPr>
+          <p:nvPr>
+            <p:ph type="sldNum" sz="quarter" idx="5"/>
+          </p:nvPr>
+        </p:nvSpPr>
+        <p:spPr>
+          <a:ln/>
+        </p:spPr>
+        <p:txBody>
+          <a:bodyPr lIns="0" tIns="0" rIns="0" bIns="0" anchor="b" anchorCtr="0">
+            <a:noAutofit/>
+          </a:bodyPr>
+          <a:lstStyle/>
+          <a:p>
+            <a:pPr lvl="0"/>
+            <a:fld id="{0941C839-6C4E-4BA1-AFC6-477B4C42B86E}" type="slidenum">
+              <a:t>15</a:t>
+            </a:fld>
+            <a:endParaRPr lang="fr-FR"/>
+          </a:p>
+        </p:txBody>
+      </p:sp>
+      <p:sp>
+        <p:nvSpPr>
+          <p:cNvPr id="11" name="Espace réservé du numéro de diapositive 6">
+            <a:extLst>
+              <a:ext uri="{FF2B5EF4-FFF2-40B4-BE49-F238E27FC236}">
+                <a16:creationId xmlns:a16="http://schemas.microsoft.com/office/drawing/2014/main" id="{E591BC17-EA1B-5C26-F2E0-71AADCB6BDCB}"/>
+              </a:ext>
+            </a:extLst>
+          </p:cNvPr>
+          <p:cNvSpPr>
+            <a:spLocks noGrp="1"/>
+          </p:cNvSpPr>
+          <p:nvPr>
+            <p:ph type="sldNum" sz="quarter" idx="5"/>
+          </p:nvPr>
+        </p:nvSpPr>
+        <p:spPr/>
+        <p:txBody>
+          <a:bodyPr vert="horz" lIns="91440" tIns="45720" rIns="91440" bIns="45720" rtlCol="0" anchor="b"/>
+          <a:lstStyle/>
+          <a:p>
+            <a:fld id="{5A8F3918-74C9-4FF7-86C9-18982F794D18}" type="slidenum">
+              <a:t>15</a:t>
+            </a:fld>
+            <a:endParaRPr lang="fr-FR"/>
+          </a:p>
+        </p:txBody>
+      </p:sp>
+      <p:sp>
+        <p:nvSpPr>
+          <p:cNvPr id="2" name="Espace réservé de l'image des diapositives 1">
+            <a:extLst>
+              <a:ext uri="{FF2B5EF4-FFF2-40B4-BE49-F238E27FC236}">
+                <a16:creationId xmlns:a16="http://schemas.microsoft.com/office/drawing/2014/main" id="{30EC5E14-9A49-0D2E-575E-AEE5418725C5}"/>
+              </a:ext>
+            </a:extLst>
+          </p:cNvPr>
+          <p:cNvSpPr>
+            <a:spLocks noGrp="1" noRot="1" noChangeAspect="1" noResize="1"/>
+          </p:cNvSpPr>
+          <p:nvPr>
+            <p:ph type="sldImg"/>
+          </p:nvPr>
+        </p:nvSpPr>
+        <p:spPr>
+          <a:xfrm>
+            <a:off x="217488" y="812800"/>
+            <a:ext cx="7123112" cy="4008438"/>
+          </a:xfrm>
+          <a:solidFill>
+            <a:schemeClr val="accent1"/>
+          </a:solidFill>
+          <a:ln w="25400">
+            <a:solidFill>
+              <a:schemeClr val="accent1">
+                <a:shade val="50000"/>
+              </a:schemeClr>
+            </a:solidFill>
+            <a:prstDash val="solid"/>
+          </a:ln>
+        </p:spPr>
+      </p:sp>
+      <p:sp>
+        <p:nvSpPr>
+          <p:cNvPr id="3" name="Espace réservé des notes 2">
+            <a:extLst>
+              <a:ext uri="{FF2B5EF4-FFF2-40B4-BE49-F238E27FC236}">
+                <a16:creationId xmlns:a16="http://schemas.microsoft.com/office/drawing/2014/main" id="{F879B222-E7EE-9E2D-414C-0854D14BF390}"/>
+              </a:ext>
+            </a:extLst>
+          </p:cNvPr>
+          <p:cNvSpPr txBox="1">
+            <a:spLocks noGrp="1"/>
+          </p:cNvSpPr>
+          <p:nvPr>
+            <p:ph type="body" sz="quarter" idx="1"/>
+          </p:nvPr>
+        </p:nvSpPr>
+        <p:spPr>
+          <a:xfrm>
+            <a:off x="756000" y="5078520"/>
+            <a:ext cx="6047640" cy="4811040"/>
+          </a:xfrm>
+          <a:noFill/>
+          <a:ln>
+            <a:noFill/>
+          </a:ln>
+        </p:spPr>
+        <p:txBody>
+          <a:bodyPr lIns="0" tIns="0" rIns="0" bIns="0">
+            <a:spAutoFit/>
+          </a:bodyPr>
+          <a:lstStyle/>
+          <a:p>
+            <a:endParaRPr lang="fr-FR"/>
+          </a:p>
+        </p:txBody>
+      </p:sp>
+    </p:spTree>
+    <p:extLst>
+      <p:ext uri="{BB962C8B-B14F-4D97-AF65-F5344CB8AC3E}">
+        <p14:creationId xmlns:p14="http://schemas.microsoft.com/office/powerpoint/2010/main" val="3077188264"/>
+      </p:ext>
+    </p:extLst>
+  </p:cSld>
+  <p:clrMapOvr>
+    <a:masterClrMapping/>
+  </p:clrMapOvr>
+</p:notes>
+</file>
+
+<file path=ppt/notesSlides/notesSlide16.xml><?xml version="1.0" encoding="utf-8"?>
+<p:notes xmlns:a="http://schemas.openxmlformats.org/drawingml/2006/main" xmlns:r="http://schemas.openxmlformats.org/officeDocument/2006/relationships" xmlns:p="http://schemas.openxmlformats.org/presentationml/2006/main">
+  <p:cSld>
+    <p:spTree>
+      <p:nvGrpSpPr>
+        <p:cNvPr id="1" name="">
+          <a:extLst>
+            <a:ext uri="{FF2B5EF4-FFF2-40B4-BE49-F238E27FC236}">
+              <a16:creationId xmlns:a16="http://schemas.microsoft.com/office/drawing/2014/main" id="{F107597B-0D9A-0611-4A34-9F9ECBAC4DD8}"/>
+            </a:ext>
+          </a:extLst>
+        </p:cNvPr>
+        <p:cNvGrpSpPr/>
+        <p:nvPr/>
+      </p:nvGrpSpPr>
+      <p:grpSpPr>
+        <a:xfrm>
+          <a:off x="0" y="0"/>
+          <a:ext cx="0" cy="0"/>
+          <a:chOff x="0" y="0"/>
+          <a:chExt cx="0" cy="0"/>
+        </a:xfrm>
+      </p:grpSpPr>
+      <p:sp>
+        <p:nvSpPr>
+          <p:cNvPr id="5" name="Espace réservé de la date 2">
+            <a:extLst>
+              <a:ext uri="{FF2B5EF4-FFF2-40B4-BE49-F238E27FC236}">
+                <a16:creationId xmlns:a16="http://schemas.microsoft.com/office/drawing/2014/main" id="{FFBDEB58-D51E-0CF6-DBB1-E4722916AC92}"/>
+              </a:ext>
+            </a:extLst>
+          </p:cNvPr>
+          <p:cNvSpPr>
+            <a:spLocks noGrp="1"/>
+          </p:cNvSpPr>
+          <p:nvPr>
+            <p:ph type="dt" idx="1"/>
+          </p:nvPr>
+        </p:nvSpPr>
+        <p:spPr/>
+        <p:txBody>
+          <a:bodyPr vert="horz" lIns="91440" tIns="45720" rIns="91440" bIns="45720" rtlCol="0"/>
+          <a:lstStyle/>
+          <a:p>
+            <a:fld id="{179A66FE-F4F6-454F-8E0C-628A9DA985DF}" type="datetimeFigureOut">
+              <a:t>31/08/2026</a:t>
+            </a:fld>
+            <a:endParaRPr lang="fr-FR"/>
+          </a:p>
+        </p:txBody>
+      </p:sp>
+      <p:sp>
+        <p:nvSpPr>
+          <p:cNvPr id="9" name="Espace réservé du numéro de diapositive 12">
+            <a:extLst>
+              <a:ext uri="{FF2B5EF4-FFF2-40B4-BE49-F238E27FC236}">
+                <a16:creationId xmlns:a16="http://schemas.microsoft.com/office/drawing/2014/main" id="{103C3885-A870-3B6C-FBDC-986B65F7961C}"/>
+              </a:ext>
+            </a:extLst>
+          </p:cNvPr>
+          <p:cNvSpPr txBox="1">
+            <a:spLocks noGrp="1"/>
+          </p:cNvSpPr>
+          <p:nvPr>
+            <p:ph type="sldNum" sz="quarter" idx="5"/>
+          </p:nvPr>
+        </p:nvSpPr>
+        <p:spPr>
+          <a:ln/>
+        </p:spPr>
+        <p:txBody>
+          <a:bodyPr lIns="0" tIns="0" rIns="0" bIns="0" anchor="b" anchorCtr="0">
+            <a:noAutofit/>
+          </a:bodyPr>
+          <a:lstStyle/>
+          <a:p>
+            <a:pPr lvl="0"/>
+            <a:fld id="{0941C839-6C4E-4BA1-AFC6-477B4C42B86E}" type="slidenum">
+              <a:t>16</a:t>
+            </a:fld>
+            <a:endParaRPr lang="fr-FR"/>
+          </a:p>
+        </p:txBody>
+      </p:sp>
+      <p:sp>
+        <p:nvSpPr>
+          <p:cNvPr id="11" name="Espace réservé du numéro de diapositive 6">
+            <a:extLst>
+              <a:ext uri="{FF2B5EF4-FFF2-40B4-BE49-F238E27FC236}">
+                <a16:creationId xmlns:a16="http://schemas.microsoft.com/office/drawing/2014/main" id="{FC2F4392-85C2-01DA-A340-C6D3B47C3DB6}"/>
+              </a:ext>
+            </a:extLst>
+          </p:cNvPr>
+          <p:cNvSpPr>
+            <a:spLocks noGrp="1"/>
+          </p:cNvSpPr>
+          <p:nvPr>
+            <p:ph type="sldNum" sz="quarter" idx="5"/>
+          </p:nvPr>
+        </p:nvSpPr>
+        <p:spPr/>
+        <p:txBody>
+          <a:bodyPr vert="horz" lIns="91440" tIns="45720" rIns="91440" bIns="45720" rtlCol="0" anchor="b"/>
+          <a:lstStyle/>
+          <a:p>
+            <a:fld id="{5A8F3918-74C9-4FF7-86C9-18982F794D18}" type="slidenum">
+              <a:t>16</a:t>
+            </a:fld>
+            <a:endParaRPr lang="fr-FR"/>
+          </a:p>
+        </p:txBody>
+      </p:sp>
+      <p:sp>
+        <p:nvSpPr>
+          <p:cNvPr id="2" name="Espace réservé de l'image des diapositives 1">
+            <a:extLst>
+              <a:ext uri="{FF2B5EF4-FFF2-40B4-BE49-F238E27FC236}">
+                <a16:creationId xmlns:a16="http://schemas.microsoft.com/office/drawing/2014/main" id="{96480893-3C66-D9A2-BA03-C0512A3DB322}"/>
+              </a:ext>
+            </a:extLst>
+          </p:cNvPr>
+          <p:cNvSpPr>
+            <a:spLocks noGrp="1" noRot="1" noChangeAspect="1" noResize="1"/>
+          </p:cNvSpPr>
+          <p:nvPr>
+            <p:ph type="sldImg"/>
+          </p:nvPr>
+        </p:nvSpPr>
+        <p:spPr>
+          <a:xfrm>
+            <a:off x="217488" y="812800"/>
+            <a:ext cx="7123112" cy="4008438"/>
+          </a:xfrm>
+          <a:solidFill>
+            <a:schemeClr val="accent1"/>
+          </a:solidFill>
+          <a:ln w="25400">
+            <a:solidFill>
+              <a:schemeClr val="accent1">
+                <a:shade val="50000"/>
+              </a:schemeClr>
+            </a:solidFill>
+            <a:prstDash val="solid"/>
+          </a:ln>
+        </p:spPr>
+      </p:sp>
+      <p:sp>
+        <p:nvSpPr>
+          <p:cNvPr id="3" name="Espace réservé des notes 2">
+            <a:extLst>
+              <a:ext uri="{FF2B5EF4-FFF2-40B4-BE49-F238E27FC236}">
+                <a16:creationId xmlns:a16="http://schemas.microsoft.com/office/drawing/2014/main" id="{89149EB0-B48A-F72B-CD9C-360CF5BA6140}"/>
+              </a:ext>
+            </a:extLst>
+          </p:cNvPr>
+          <p:cNvSpPr txBox="1">
+            <a:spLocks noGrp="1"/>
+          </p:cNvSpPr>
+          <p:nvPr>
+            <p:ph type="body" sz="quarter" idx="1"/>
+          </p:nvPr>
+        </p:nvSpPr>
+        <p:spPr>
+          <a:xfrm>
+            <a:off x="756000" y="5078520"/>
+            <a:ext cx="6047640" cy="4811040"/>
+          </a:xfrm>
+          <a:noFill/>
+          <a:ln>
+            <a:noFill/>
+          </a:ln>
+        </p:spPr>
+        <p:txBody>
+          <a:bodyPr lIns="0" tIns="0" rIns="0" bIns="0">
+            <a:spAutoFit/>
+          </a:bodyPr>
+          <a:lstStyle/>
+          <a:p>
+            <a:endParaRPr lang="fr-FR"/>
+          </a:p>
+        </p:txBody>
+      </p:sp>
+    </p:spTree>
+    <p:extLst>
+      <p:ext uri="{BB962C8B-B14F-4D97-AF65-F5344CB8AC3E}">
+        <p14:creationId xmlns:p14="http://schemas.microsoft.com/office/powerpoint/2010/main" val="1917856242"/>
+      </p:ext>
+    </p:extLst>
+  </p:cSld>
+  <p:clrMapOvr>
+    <a:masterClrMapping/>
+  </p:clrMapOvr>
+</p:notes>
+</file>
+
+<file path=ppt/notesSlides/notesSlide17.xml><?xml version="1.0" encoding="utf-8"?>
+<p:notes xmlns:a="http://schemas.openxmlformats.org/drawingml/2006/main" xmlns:r="http://schemas.openxmlformats.org/officeDocument/2006/relationships" xmlns:p="http://schemas.openxmlformats.org/presentationml/2006/main">
+  <p:cSld>
+    <p:spTree>
+      <p:nvGrpSpPr>
+        <p:cNvPr id="1" name="">
+          <a:extLst>
+            <a:ext uri="{FF2B5EF4-FFF2-40B4-BE49-F238E27FC236}">
+              <a16:creationId xmlns:a16="http://schemas.microsoft.com/office/drawing/2014/main" id="{82CA5B97-ECBB-979C-0105-DDF70012317C}"/>
+            </a:ext>
+          </a:extLst>
+        </p:cNvPr>
+        <p:cNvGrpSpPr/>
+        <p:nvPr/>
+      </p:nvGrpSpPr>
+      <p:grpSpPr>
+        <a:xfrm>
+          <a:off x="0" y="0"/>
+          <a:ext cx="0" cy="0"/>
+          <a:chOff x="0" y="0"/>
+          <a:chExt cx="0" cy="0"/>
+        </a:xfrm>
+      </p:grpSpPr>
+      <p:sp>
+        <p:nvSpPr>
+          <p:cNvPr id="5" name="Espace réservé de la date 2">
+            <a:extLst>
+              <a:ext uri="{FF2B5EF4-FFF2-40B4-BE49-F238E27FC236}">
+                <a16:creationId xmlns:a16="http://schemas.microsoft.com/office/drawing/2014/main" id="{9765F78D-53BC-E40E-85A3-C3A38C855CB9}"/>
+              </a:ext>
+            </a:extLst>
+          </p:cNvPr>
+          <p:cNvSpPr>
+            <a:spLocks noGrp="1"/>
+          </p:cNvSpPr>
+          <p:nvPr>
+            <p:ph type="dt" idx="1"/>
+          </p:nvPr>
+        </p:nvSpPr>
+        <p:spPr/>
+        <p:txBody>
+          <a:bodyPr vert="horz" lIns="91440" tIns="45720" rIns="91440" bIns="45720" rtlCol="0"/>
+          <a:lstStyle/>
+          <a:p>
+            <a:fld id="{179A66FE-F4F6-454F-8E0C-628A9DA985DF}" type="datetimeFigureOut">
+              <a:t>31/08/2026</a:t>
+            </a:fld>
+            <a:endParaRPr lang="fr-FR"/>
+          </a:p>
+        </p:txBody>
+      </p:sp>
+      <p:sp>
+        <p:nvSpPr>
+          <p:cNvPr id="9" name="Espace réservé du numéro de diapositive 12">
+            <a:extLst>
+              <a:ext uri="{FF2B5EF4-FFF2-40B4-BE49-F238E27FC236}">
+                <a16:creationId xmlns:a16="http://schemas.microsoft.com/office/drawing/2014/main" id="{48FBF17F-76CC-465D-47B0-33FF60C8D647}"/>
+              </a:ext>
+            </a:extLst>
+          </p:cNvPr>
+          <p:cNvSpPr txBox="1">
+            <a:spLocks noGrp="1"/>
+          </p:cNvSpPr>
+          <p:nvPr>
+            <p:ph type="sldNum" sz="quarter" idx="5"/>
+          </p:nvPr>
+        </p:nvSpPr>
+        <p:spPr>
+          <a:ln/>
+        </p:spPr>
+        <p:txBody>
+          <a:bodyPr lIns="0" tIns="0" rIns="0" bIns="0" anchor="b" anchorCtr="0">
+            <a:noAutofit/>
+          </a:bodyPr>
+          <a:lstStyle/>
+          <a:p>
+            <a:pPr lvl="0"/>
+            <a:fld id="{0941C839-6C4E-4BA1-AFC6-477B4C42B86E}" type="slidenum">
+              <a:t>17</a:t>
+            </a:fld>
+            <a:endParaRPr lang="fr-FR"/>
+          </a:p>
+        </p:txBody>
+      </p:sp>
+      <p:sp>
+        <p:nvSpPr>
+          <p:cNvPr id="11" name="Espace réservé du numéro de diapositive 6">
+            <a:extLst>
+              <a:ext uri="{FF2B5EF4-FFF2-40B4-BE49-F238E27FC236}">
+                <a16:creationId xmlns:a16="http://schemas.microsoft.com/office/drawing/2014/main" id="{10C462FA-5E4D-6E7B-E13D-D8F2A262B991}"/>
+              </a:ext>
+            </a:extLst>
+          </p:cNvPr>
+          <p:cNvSpPr>
+            <a:spLocks noGrp="1"/>
+          </p:cNvSpPr>
+          <p:nvPr>
+            <p:ph type="sldNum" sz="quarter" idx="5"/>
+          </p:nvPr>
+        </p:nvSpPr>
+        <p:spPr/>
+        <p:txBody>
+          <a:bodyPr vert="horz" lIns="91440" tIns="45720" rIns="91440" bIns="45720" rtlCol="0" anchor="b"/>
+          <a:lstStyle/>
+          <a:p>
+            <a:fld id="{5A8F3918-74C9-4FF7-86C9-18982F794D18}" type="slidenum">
+              <a:t>17</a:t>
+            </a:fld>
+            <a:endParaRPr lang="fr-FR"/>
+          </a:p>
+        </p:txBody>
+      </p:sp>
+      <p:sp>
+        <p:nvSpPr>
+          <p:cNvPr id="2" name="Espace réservé de l'image des diapositives 1">
+            <a:extLst>
+              <a:ext uri="{FF2B5EF4-FFF2-40B4-BE49-F238E27FC236}">
+                <a16:creationId xmlns:a16="http://schemas.microsoft.com/office/drawing/2014/main" id="{AE8A270B-C74C-3291-5A11-9AEB3F79689B}"/>
+              </a:ext>
+            </a:extLst>
+          </p:cNvPr>
+          <p:cNvSpPr>
+            <a:spLocks noGrp="1" noRot="1" noChangeAspect="1" noResize="1"/>
+          </p:cNvSpPr>
+          <p:nvPr>
+            <p:ph type="sldImg"/>
+          </p:nvPr>
+        </p:nvSpPr>
+        <p:spPr>
+          <a:xfrm>
+            <a:off x="217488" y="812800"/>
+            <a:ext cx="7123112" cy="4008438"/>
+          </a:xfrm>
+          <a:solidFill>
+            <a:schemeClr val="accent1"/>
+          </a:solidFill>
+          <a:ln w="25400">
+            <a:solidFill>
+              <a:schemeClr val="accent1">
+                <a:shade val="50000"/>
+              </a:schemeClr>
+            </a:solidFill>
+            <a:prstDash val="solid"/>
+          </a:ln>
+        </p:spPr>
+      </p:sp>
+      <p:sp>
+        <p:nvSpPr>
+          <p:cNvPr id="3" name="Espace réservé des notes 2">
+            <a:extLst>
+              <a:ext uri="{FF2B5EF4-FFF2-40B4-BE49-F238E27FC236}">
+                <a16:creationId xmlns:a16="http://schemas.microsoft.com/office/drawing/2014/main" id="{09EADE45-EC71-731E-2A8B-28EDBBC48D11}"/>
+              </a:ext>
+            </a:extLst>
+          </p:cNvPr>
+          <p:cNvSpPr txBox="1">
+            <a:spLocks noGrp="1"/>
+          </p:cNvSpPr>
+          <p:nvPr>
+            <p:ph type="body" sz="quarter" idx="1"/>
+          </p:nvPr>
+        </p:nvSpPr>
+        <p:spPr>
+          <a:xfrm>
+            <a:off x="756000" y="5078520"/>
+            <a:ext cx="6047640" cy="4811040"/>
+          </a:xfrm>
+          <a:noFill/>
+          <a:ln>
+            <a:noFill/>
+          </a:ln>
+        </p:spPr>
+        <p:txBody>
+          <a:bodyPr lIns="0" tIns="0" rIns="0" bIns="0">
+            <a:spAutoFit/>
+          </a:bodyPr>
+          <a:lstStyle/>
+          <a:p>
+            <a:endParaRPr lang="fr-FR"/>
+          </a:p>
+        </p:txBody>
+      </p:sp>
+    </p:spTree>
+    <p:extLst>
+      <p:ext uri="{BB962C8B-B14F-4D97-AF65-F5344CB8AC3E}">
+        <p14:creationId xmlns:p14="http://schemas.microsoft.com/office/powerpoint/2010/main" val="2573635111"/>
+      </p:ext>
+    </p:extLst>
+  </p:cSld>
+  <p:clrMapOvr>
+    <a:masterClrMapping/>
+  </p:clrMapOvr>
+</p:notes>
+</file>
+
+<file path=ppt/notesSlides/notesSlide18.xml><?xml version="1.0" encoding="utf-8"?>
 <p:notes xmlns:a="http://schemas.openxmlformats.org/drawingml/2006/main" xmlns:r="http://schemas.openxmlformats.org/officeDocument/2006/relationships" xmlns:p="http://schemas.openxmlformats.org/presentationml/2006/main">
   <p:cSld>
     <p:spTree>
@@ -718,7 +2286,7 @@
           <a:lstStyle/>
           <a:p>
             <a:fld id="{179A66FE-F4F6-454F-8E0C-628A9DA985DF}" type="datetimeFigureOut">
-              <a:t>06/08/2026</a:t>
+              <a:t>31/08/2026</a:t>
             </a:fld>
             <a:endParaRPr lang="fr-FR"/>
           </a:p>
@@ -751,7 +2319,7 @@
           <a:p>
             <a:pPr lvl="0"/>
             <a:fld id="{0941C839-6C4E-4BA1-AFC6-477B4C42B86E}" type="slidenum">
-              <a:t>10</a:t>
+              <a:t>18</a:t>
             </a:fld>
             <a:endParaRPr lang="fr-FR"/>
           </a:p>
@@ -779,7 +2347,7 @@
           <a:lstStyle/>
           <a:p>
             <a:fld id="{5A8F3918-74C9-4FF7-86C9-18982F794D18}" type="slidenum">
-              <a:t>10</a:t>
+              <a:t>18</a:t>
             </a:fld>
             <a:endParaRPr lang="fr-FR"/>
           </a:p>
@@ -868,7 +2436,7 @@
 </p:notes>
 </file>
 
-<file path=ppt/notesSlides/notesSlide11.xml><?xml version="1.0" encoding="utf-8"?>
+<file path=ppt/notesSlides/notesSlide19.xml><?xml version="1.0" encoding="utf-8"?>
 <p:notes xmlns:a="http://schemas.openxmlformats.org/drawingml/2006/main" xmlns:r="http://schemas.openxmlformats.org/officeDocument/2006/relationships" xmlns:p="http://schemas.openxmlformats.org/presentationml/2006/main">
   <p:cSld>
     <p:spTree>
@@ -913,7 +2481,7 @@
           <a:lstStyle/>
           <a:p>
             <a:fld id="{179A66FE-F4F6-454F-8E0C-628A9DA985DF}" type="datetimeFigureOut">
-              <a:t>06/08/2026</a:t>
+              <a:t>31/08/2026</a:t>
             </a:fld>
             <a:endParaRPr lang="fr-FR"/>
           </a:p>
@@ -946,7 +2514,7 @@
           <a:p>
             <a:pPr lvl="0"/>
             <a:fld id="{0941C839-6C4E-4BA1-AFC6-477B4C42B86E}" type="slidenum">
-              <a:t>11</a:t>
+              <a:t>19</a:t>
             </a:fld>
             <a:endParaRPr lang="fr-FR"/>
           </a:p>
@@ -974,7 +2542,7 @@
           <a:lstStyle/>
           <a:p>
             <a:fld id="{5A8F3918-74C9-4FF7-86C9-18982F794D18}" type="slidenum">
-              <a:t>11</a:t>
+              <a:t>19</a:t>
             </a:fld>
             <a:endParaRPr lang="fr-FR"/>
           </a:p>
@@ -1054,201 +2622,6 @@
     <p:extLst>
       <p:ext uri="{BB962C8B-B14F-4D97-AF65-F5344CB8AC3E}">
         <p14:creationId xmlns:p14="http://schemas.microsoft.com/office/powerpoint/2010/main" val="234841503"/>
-      </p:ext>
-    </p:extLst>
-  </p:cSld>
-  <p:clrMapOvr>
-    <a:masterClrMapping/>
-  </p:clrMapOvr>
-</p:notes>
-</file>
-
-<file path=ppt/notesSlides/notesSlide12.xml><?xml version="1.0" encoding="utf-8"?>
-<p:notes xmlns:a="http://schemas.openxmlformats.org/drawingml/2006/main" xmlns:r="http://schemas.openxmlformats.org/officeDocument/2006/relationships" xmlns:p="http://schemas.openxmlformats.org/presentationml/2006/main">
-  <p:cSld>
-    <p:spTree>
-      <p:nvGrpSpPr>
-        <p:cNvPr id="1" name="">
-          <a:extLst>
-            <a:ext uri="{FF2B5EF4-FFF2-40B4-BE49-F238E27FC236}">
-              <a16:creationId xmlns:a16="http://schemas.microsoft.com/office/drawing/2014/main" id="{FCCEB849-C8B5-46DE-D350-E6C60A244992}"/>
-            </a:ext>
-          </a:extLst>
-        </p:cNvPr>
-        <p:cNvGrpSpPr/>
-        <p:nvPr/>
-      </p:nvGrpSpPr>
-      <p:grpSpPr>
-        <a:xfrm>
-          <a:off x="0" y="0"/>
-          <a:ext cx="0" cy="0"/>
-          <a:chOff x="0" y="0"/>
-          <a:chExt cx="0" cy="0"/>
-        </a:xfrm>
-      </p:grpSpPr>
-      <p:sp>
-        <p:nvSpPr>
-          <p:cNvPr id="5" name="Espace réservé de la date 2">
-            <a:extLst>
-              <a:ext uri="{FF2B5EF4-FFF2-40B4-BE49-F238E27FC236}">
-                <a16:creationId xmlns:a16="http://schemas.microsoft.com/office/drawing/2014/main" id="{845443AC-DAC4-C26F-1AD5-73765339FD8B}"/>
-              </a:ext>
-            </a:extLst>
-          </p:cNvPr>
-          <p:cNvSpPr>
-            <a:spLocks noGrp="1"/>
-          </p:cNvSpPr>
-          <p:nvPr>
-            <p:ph type="dt" idx="1"/>
-          </p:nvPr>
-        </p:nvSpPr>
-        <p:spPr/>
-        <p:txBody>
-          <a:bodyPr vert="horz" lIns="91440" tIns="45720" rIns="91440" bIns="45720" rtlCol="0"/>
-          <a:lstStyle/>
-          <a:p>
-            <a:fld id="{179A66FE-F4F6-454F-8E0C-628A9DA985DF}" type="datetimeFigureOut">
-              <a:t>06/08/2026</a:t>
-            </a:fld>
-            <a:endParaRPr lang="fr-FR"/>
-          </a:p>
-        </p:txBody>
-      </p:sp>
-      <p:sp>
-        <p:nvSpPr>
-          <p:cNvPr id="9" name="Espace réservé du numéro de diapositive 12">
-            <a:extLst>
-              <a:ext uri="{FF2B5EF4-FFF2-40B4-BE49-F238E27FC236}">
-                <a16:creationId xmlns:a16="http://schemas.microsoft.com/office/drawing/2014/main" id="{4BF99372-8EFD-6340-59C3-8D9EEF03EB75}"/>
-              </a:ext>
-            </a:extLst>
-          </p:cNvPr>
-          <p:cNvSpPr txBox="1">
-            <a:spLocks noGrp="1"/>
-          </p:cNvSpPr>
-          <p:nvPr>
-            <p:ph type="sldNum" sz="quarter" idx="5"/>
-          </p:nvPr>
-        </p:nvSpPr>
-        <p:spPr>
-          <a:ln/>
-        </p:spPr>
-        <p:txBody>
-          <a:bodyPr lIns="0" tIns="0" rIns="0" bIns="0" anchor="b" anchorCtr="0">
-            <a:noAutofit/>
-          </a:bodyPr>
-          <a:lstStyle/>
-          <a:p>
-            <a:pPr lvl="0"/>
-            <a:fld id="{0941C839-6C4E-4BA1-AFC6-477B4C42B86E}" type="slidenum">
-              <a:t>12</a:t>
-            </a:fld>
-            <a:endParaRPr lang="fr-FR"/>
-          </a:p>
-        </p:txBody>
-      </p:sp>
-      <p:sp>
-        <p:nvSpPr>
-          <p:cNvPr id="11" name="Espace réservé du numéro de diapositive 6">
-            <a:extLst>
-              <a:ext uri="{FF2B5EF4-FFF2-40B4-BE49-F238E27FC236}">
-                <a16:creationId xmlns:a16="http://schemas.microsoft.com/office/drawing/2014/main" id="{E57CED96-B8EE-758E-0B5E-31CA8A4A569F}"/>
-              </a:ext>
-            </a:extLst>
-          </p:cNvPr>
-          <p:cNvSpPr>
-            <a:spLocks noGrp="1"/>
-          </p:cNvSpPr>
-          <p:nvPr>
-            <p:ph type="sldNum" sz="quarter" idx="5"/>
-          </p:nvPr>
-        </p:nvSpPr>
-        <p:spPr/>
-        <p:txBody>
-          <a:bodyPr vert="horz" lIns="91440" tIns="45720" rIns="91440" bIns="45720" rtlCol="0" anchor="b"/>
-          <a:lstStyle/>
-          <a:p>
-            <a:fld id="{5A8F3918-74C9-4FF7-86C9-18982F794D18}" type="slidenum">
-              <a:t>12</a:t>
-            </a:fld>
-            <a:endParaRPr lang="fr-FR"/>
-          </a:p>
-        </p:txBody>
-      </p:sp>
-      <p:sp>
-        <p:nvSpPr>
-          <p:cNvPr id="2" name="Espace réservé de l'image des diapositives 1">
-            <a:extLst>
-              <a:ext uri="{FF2B5EF4-FFF2-40B4-BE49-F238E27FC236}">
-                <a16:creationId xmlns:a16="http://schemas.microsoft.com/office/drawing/2014/main" id="{3BE99646-53BA-4D59-2172-ED0219A87C15}"/>
-              </a:ext>
-            </a:extLst>
-          </p:cNvPr>
-          <p:cNvSpPr>
-            <a:spLocks noGrp="1" noRot="1" noChangeAspect="1" noResize="1"/>
-          </p:cNvSpPr>
-          <p:nvPr>
-            <p:ph type="sldImg"/>
-          </p:nvPr>
-        </p:nvSpPr>
-        <p:spPr>
-          <a:xfrm>
-            <a:off x="217488" y="812800"/>
-            <a:ext cx="7123112" cy="4008438"/>
-          </a:xfrm>
-          <a:solidFill>
-            <a:schemeClr val="accent1"/>
-          </a:solidFill>
-          <a:ln w="25400">
-            <a:solidFill>
-              <a:schemeClr val="accent1">
-                <a:shade val="50000"/>
-              </a:schemeClr>
-            </a:solidFill>
-            <a:prstDash val="solid"/>
-          </a:ln>
-        </p:spPr>
-      </p:sp>
-      <p:sp>
-        <p:nvSpPr>
-          <p:cNvPr id="3" name="Espace réservé des notes 2">
-            <a:extLst>
-              <a:ext uri="{FF2B5EF4-FFF2-40B4-BE49-F238E27FC236}">
-                <a16:creationId xmlns:a16="http://schemas.microsoft.com/office/drawing/2014/main" id="{C1E999A7-9059-7093-2791-81FB53B25C5F}"/>
-              </a:ext>
-            </a:extLst>
-          </p:cNvPr>
-          <p:cNvSpPr txBox="1">
-            <a:spLocks noGrp="1"/>
-          </p:cNvSpPr>
-          <p:nvPr>
-            <p:ph type="body" sz="quarter" idx="1"/>
-          </p:nvPr>
-        </p:nvSpPr>
-        <p:spPr>
-          <a:xfrm>
-            <a:off x="756000" y="5078520"/>
-            <a:ext cx="6047640" cy="4811040"/>
-          </a:xfrm>
-          <a:noFill/>
-          <a:ln>
-            <a:noFill/>
-          </a:ln>
-        </p:spPr>
-        <p:txBody>
-          <a:bodyPr lIns="0" tIns="0" rIns="0" bIns="0">
-            <a:spAutoFit/>
-          </a:bodyPr>
-          <a:lstStyle/>
-          <a:p>
-            <a:endParaRPr lang="fr-FR"/>
-          </a:p>
-        </p:txBody>
-      </p:sp>
-    </p:spTree>
-    <p:extLst>
-      <p:ext uri="{BB962C8B-B14F-4D97-AF65-F5344CB8AC3E}">
-        <p14:creationId xmlns:p14="http://schemas.microsoft.com/office/powerpoint/2010/main" val="2982566223"/>
       </p:ext>
     </p:extLst>
   </p:cSld>
@@ -1303,7 +2676,7 @@
           <a:lstStyle/>
           <a:p>
             <a:fld id="{179A66FE-F4F6-454F-8E0C-628A9DA985DF}" type="datetimeFigureOut">
-              <a:t>06/08/2026</a:t>
+              <a:t>31/08/2026</a:t>
             </a:fld>
             <a:endParaRPr lang="fr-FR"/>
           </a:p>
@@ -1444,6 +2817,201 @@
     <p:extLst>
       <p:ext uri="{BB962C8B-B14F-4D97-AF65-F5344CB8AC3E}">
         <p14:creationId xmlns:p14="http://schemas.microsoft.com/office/powerpoint/2010/main" val="1573459821"/>
+      </p:ext>
+    </p:extLst>
+  </p:cSld>
+  <p:clrMapOvr>
+    <a:masterClrMapping/>
+  </p:clrMapOvr>
+</p:notes>
+</file>
+
+<file path=ppt/notesSlides/notesSlide20.xml><?xml version="1.0" encoding="utf-8"?>
+<p:notes xmlns:a="http://schemas.openxmlformats.org/drawingml/2006/main" xmlns:r="http://schemas.openxmlformats.org/officeDocument/2006/relationships" xmlns:p="http://schemas.openxmlformats.org/presentationml/2006/main">
+  <p:cSld>
+    <p:spTree>
+      <p:nvGrpSpPr>
+        <p:cNvPr id="1" name="">
+          <a:extLst>
+            <a:ext uri="{FF2B5EF4-FFF2-40B4-BE49-F238E27FC236}">
+              <a16:creationId xmlns:a16="http://schemas.microsoft.com/office/drawing/2014/main" id="{FCCEB849-C8B5-46DE-D350-E6C60A244992}"/>
+            </a:ext>
+          </a:extLst>
+        </p:cNvPr>
+        <p:cNvGrpSpPr/>
+        <p:nvPr/>
+      </p:nvGrpSpPr>
+      <p:grpSpPr>
+        <a:xfrm>
+          <a:off x="0" y="0"/>
+          <a:ext cx="0" cy="0"/>
+          <a:chOff x="0" y="0"/>
+          <a:chExt cx="0" cy="0"/>
+        </a:xfrm>
+      </p:grpSpPr>
+      <p:sp>
+        <p:nvSpPr>
+          <p:cNvPr id="5" name="Espace réservé de la date 2">
+            <a:extLst>
+              <a:ext uri="{FF2B5EF4-FFF2-40B4-BE49-F238E27FC236}">
+                <a16:creationId xmlns:a16="http://schemas.microsoft.com/office/drawing/2014/main" id="{845443AC-DAC4-C26F-1AD5-73765339FD8B}"/>
+              </a:ext>
+            </a:extLst>
+          </p:cNvPr>
+          <p:cNvSpPr>
+            <a:spLocks noGrp="1"/>
+          </p:cNvSpPr>
+          <p:nvPr>
+            <p:ph type="dt" idx="1"/>
+          </p:nvPr>
+        </p:nvSpPr>
+        <p:spPr/>
+        <p:txBody>
+          <a:bodyPr vert="horz" lIns="91440" tIns="45720" rIns="91440" bIns="45720" rtlCol="0"/>
+          <a:lstStyle/>
+          <a:p>
+            <a:fld id="{179A66FE-F4F6-454F-8E0C-628A9DA985DF}" type="datetimeFigureOut">
+              <a:t>31/08/2026</a:t>
+            </a:fld>
+            <a:endParaRPr lang="fr-FR"/>
+          </a:p>
+        </p:txBody>
+      </p:sp>
+      <p:sp>
+        <p:nvSpPr>
+          <p:cNvPr id="9" name="Espace réservé du numéro de diapositive 12">
+            <a:extLst>
+              <a:ext uri="{FF2B5EF4-FFF2-40B4-BE49-F238E27FC236}">
+                <a16:creationId xmlns:a16="http://schemas.microsoft.com/office/drawing/2014/main" id="{4BF99372-8EFD-6340-59C3-8D9EEF03EB75}"/>
+              </a:ext>
+            </a:extLst>
+          </p:cNvPr>
+          <p:cNvSpPr txBox="1">
+            <a:spLocks noGrp="1"/>
+          </p:cNvSpPr>
+          <p:nvPr>
+            <p:ph type="sldNum" sz="quarter" idx="5"/>
+          </p:nvPr>
+        </p:nvSpPr>
+        <p:spPr>
+          <a:ln/>
+        </p:spPr>
+        <p:txBody>
+          <a:bodyPr lIns="0" tIns="0" rIns="0" bIns="0" anchor="b" anchorCtr="0">
+            <a:noAutofit/>
+          </a:bodyPr>
+          <a:lstStyle/>
+          <a:p>
+            <a:pPr lvl="0"/>
+            <a:fld id="{0941C839-6C4E-4BA1-AFC6-477B4C42B86E}" type="slidenum">
+              <a:t>20</a:t>
+            </a:fld>
+            <a:endParaRPr lang="fr-FR"/>
+          </a:p>
+        </p:txBody>
+      </p:sp>
+      <p:sp>
+        <p:nvSpPr>
+          <p:cNvPr id="11" name="Espace réservé du numéro de diapositive 6">
+            <a:extLst>
+              <a:ext uri="{FF2B5EF4-FFF2-40B4-BE49-F238E27FC236}">
+                <a16:creationId xmlns:a16="http://schemas.microsoft.com/office/drawing/2014/main" id="{E57CED96-B8EE-758E-0B5E-31CA8A4A569F}"/>
+              </a:ext>
+            </a:extLst>
+          </p:cNvPr>
+          <p:cNvSpPr>
+            <a:spLocks noGrp="1"/>
+          </p:cNvSpPr>
+          <p:nvPr>
+            <p:ph type="sldNum" sz="quarter" idx="5"/>
+          </p:nvPr>
+        </p:nvSpPr>
+        <p:spPr/>
+        <p:txBody>
+          <a:bodyPr vert="horz" lIns="91440" tIns="45720" rIns="91440" bIns="45720" rtlCol="0" anchor="b"/>
+          <a:lstStyle/>
+          <a:p>
+            <a:fld id="{5A8F3918-74C9-4FF7-86C9-18982F794D18}" type="slidenum">
+              <a:t>20</a:t>
+            </a:fld>
+            <a:endParaRPr lang="fr-FR"/>
+          </a:p>
+        </p:txBody>
+      </p:sp>
+      <p:sp>
+        <p:nvSpPr>
+          <p:cNvPr id="2" name="Espace réservé de l'image des diapositives 1">
+            <a:extLst>
+              <a:ext uri="{FF2B5EF4-FFF2-40B4-BE49-F238E27FC236}">
+                <a16:creationId xmlns:a16="http://schemas.microsoft.com/office/drawing/2014/main" id="{3BE99646-53BA-4D59-2172-ED0219A87C15}"/>
+              </a:ext>
+            </a:extLst>
+          </p:cNvPr>
+          <p:cNvSpPr>
+            <a:spLocks noGrp="1" noRot="1" noChangeAspect="1" noResize="1"/>
+          </p:cNvSpPr>
+          <p:nvPr>
+            <p:ph type="sldImg"/>
+          </p:nvPr>
+        </p:nvSpPr>
+        <p:spPr>
+          <a:xfrm>
+            <a:off x="217488" y="812800"/>
+            <a:ext cx="7123112" cy="4008438"/>
+          </a:xfrm>
+          <a:solidFill>
+            <a:schemeClr val="accent1"/>
+          </a:solidFill>
+          <a:ln w="25400">
+            <a:solidFill>
+              <a:schemeClr val="accent1">
+                <a:shade val="50000"/>
+              </a:schemeClr>
+            </a:solidFill>
+            <a:prstDash val="solid"/>
+          </a:ln>
+        </p:spPr>
+      </p:sp>
+      <p:sp>
+        <p:nvSpPr>
+          <p:cNvPr id="3" name="Espace réservé des notes 2">
+            <a:extLst>
+              <a:ext uri="{FF2B5EF4-FFF2-40B4-BE49-F238E27FC236}">
+                <a16:creationId xmlns:a16="http://schemas.microsoft.com/office/drawing/2014/main" id="{C1E999A7-9059-7093-2791-81FB53B25C5F}"/>
+              </a:ext>
+            </a:extLst>
+          </p:cNvPr>
+          <p:cNvSpPr txBox="1">
+            <a:spLocks noGrp="1"/>
+          </p:cNvSpPr>
+          <p:nvPr>
+            <p:ph type="body" sz="quarter" idx="1"/>
+          </p:nvPr>
+        </p:nvSpPr>
+        <p:spPr>
+          <a:xfrm>
+            <a:off x="756000" y="5078520"/>
+            <a:ext cx="6047640" cy="4811040"/>
+          </a:xfrm>
+          <a:noFill/>
+          <a:ln>
+            <a:noFill/>
+          </a:ln>
+        </p:spPr>
+        <p:txBody>
+          <a:bodyPr lIns="0" tIns="0" rIns="0" bIns="0">
+            <a:spAutoFit/>
+          </a:bodyPr>
+          <a:lstStyle/>
+          <a:p>
+            <a:endParaRPr lang="fr-FR"/>
+          </a:p>
+        </p:txBody>
+      </p:sp>
+    </p:spTree>
+    <p:extLst>
+      <p:ext uri="{BB962C8B-B14F-4D97-AF65-F5344CB8AC3E}">
+        <p14:creationId xmlns:p14="http://schemas.microsoft.com/office/powerpoint/2010/main" val="2982566223"/>
       </p:ext>
     </p:extLst>
   </p:cSld>
@@ -1498,7 +3066,7 @@
           <a:lstStyle/>
           <a:p>
             <a:fld id="{179A66FE-F4F6-454F-8E0C-628A9DA985DF}" type="datetimeFigureOut">
-              <a:t>06/08/2026</a:t>
+              <a:t>31/08/2026</a:t>
             </a:fld>
             <a:endParaRPr lang="fr-FR"/>
           </a:p>
@@ -1649,6 +3217,396 @@
 </file>
 
 <file path=ppt/notesSlides/notesSlide4.xml><?xml version="1.0" encoding="utf-8"?>
+<p:notes xmlns:a="http://schemas.openxmlformats.org/drawingml/2006/main" xmlns:r="http://schemas.openxmlformats.org/officeDocument/2006/relationships" xmlns:p="http://schemas.openxmlformats.org/presentationml/2006/main">
+  <p:cSld>
+    <p:spTree>
+      <p:nvGrpSpPr>
+        <p:cNvPr id="1" name="">
+          <a:extLst>
+            <a:ext uri="{FF2B5EF4-FFF2-40B4-BE49-F238E27FC236}">
+              <a16:creationId xmlns:a16="http://schemas.microsoft.com/office/drawing/2014/main" id="{27DDB1CA-9CA7-0BB1-A57E-62312029BF3C}"/>
+            </a:ext>
+          </a:extLst>
+        </p:cNvPr>
+        <p:cNvGrpSpPr/>
+        <p:nvPr/>
+      </p:nvGrpSpPr>
+      <p:grpSpPr>
+        <a:xfrm>
+          <a:off x="0" y="0"/>
+          <a:ext cx="0" cy="0"/>
+          <a:chOff x="0" y="0"/>
+          <a:chExt cx="0" cy="0"/>
+        </a:xfrm>
+      </p:grpSpPr>
+      <p:sp>
+        <p:nvSpPr>
+          <p:cNvPr id="5" name="Espace réservé de la date 2">
+            <a:extLst>
+              <a:ext uri="{FF2B5EF4-FFF2-40B4-BE49-F238E27FC236}">
+                <a16:creationId xmlns:a16="http://schemas.microsoft.com/office/drawing/2014/main" id="{22CF790B-409D-3C26-69FD-0D813B575442}"/>
+              </a:ext>
+            </a:extLst>
+          </p:cNvPr>
+          <p:cNvSpPr>
+            <a:spLocks noGrp="1"/>
+          </p:cNvSpPr>
+          <p:nvPr>
+            <p:ph type="dt" idx="1"/>
+          </p:nvPr>
+        </p:nvSpPr>
+        <p:spPr/>
+        <p:txBody>
+          <a:bodyPr vert="horz" lIns="91440" tIns="45720" rIns="91440" bIns="45720" rtlCol="0"/>
+          <a:lstStyle/>
+          <a:p>
+            <a:fld id="{179A66FE-F4F6-454F-8E0C-628A9DA985DF}" type="datetimeFigureOut">
+              <a:t>31/08/2026</a:t>
+            </a:fld>
+            <a:endParaRPr lang="fr-FR"/>
+          </a:p>
+        </p:txBody>
+      </p:sp>
+      <p:sp>
+        <p:nvSpPr>
+          <p:cNvPr id="9" name="Espace réservé du numéro de diapositive 12">
+            <a:extLst>
+              <a:ext uri="{FF2B5EF4-FFF2-40B4-BE49-F238E27FC236}">
+                <a16:creationId xmlns:a16="http://schemas.microsoft.com/office/drawing/2014/main" id="{AF16A1C8-4F62-89D6-53AB-C28E776DBEC6}"/>
+              </a:ext>
+            </a:extLst>
+          </p:cNvPr>
+          <p:cNvSpPr txBox="1">
+            <a:spLocks noGrp="1"/>
+          </p:cNvSpPr>
+          <p:nvPr>
+            <p:ph type="sldNum" sz="quarter" idx="5"/>
+          </p:nvPr>
+        </p:nvSpPr>
+        <p:spPr>
+          <a:ln/>
+        </p:spPr>
+        <p:txBody>
+          <a:bodyPr lIns="0" tIns="0" rIns="0" bIns="0" anchor="b" anchorCtr="0">
+            <a:noAutofit/>
+          </a:bodyPr>
+          <a:lstStyle/>
+          <a:p>
+            <a:pPr lvl="0"/>
+            <a:fld id="{0941C839-6C4E-4BA1-AFC6-477B4C42B86E}" type="slidenum">
+              <a:t>4</a:t>
+            </a:fld>
+            <a:endParaRPr lang="fr-FR"/>
+          </a:p>
+        </p:txBody>
+      </p:sp>
+      <p:sp>
+        <p:nvSpPr>
+          <p:cNvPr id="11" name="Espace réservé du numéro de diapositive 6">
+            <a:extLst>
+              <a:ext uri="{FF2B5EF4-FFF2-40B4-BE49-F238E27FC236}">
+                <a16:creationId xmlns:a16="http://schemas.microsoft.com/office/drawing/2014/main" id="{2E6BEC3E-F2FE-1BA9-2964-EFB61C4823BD}"/>
+              </a:ext>
+            </a:extLst>
+          </p:cNvPr>
+          <p:cNvSpPr>
+            <a:spLocks noGrp="1"/>
+          </p:cNvSpPr>
+          <p:nvPr>
+            <p:ph type="sldNum" sz="quarter" idx="5"/>
+          </p:nvPr>
+        </p:nvSpPr>
+        <p:spPr/>
+        <p:txBody>
+          <a:bodyPr vert="horz" lIns="91440" tIns="45720" rIns="91440" bIns="45720" rtlCol="0" anchor="b"/>
+          <a:lstStyle/>
+          <a:p>
+            <a:fld id="{5A8F3918-74C9-4FF7-86C9-18982F794D18}" type="slidenum">
+              <a:t>4</a:t>
+            </a:fld>
+            <a:endParaRPr lang="fr-FR"/>
+          </a:p>
+        </p:txBody>
+      </p:sp>
+      <p:sp>
+        <p:nvSpPr>
+          <p:cNvPr id="2" name="Espace réservé de l'image des diapositives 1">
+            <a:extLst>
+              <a:ext uri="{FF2B5EF4-FFF2-40B4-BE49-F238E27FC236}">
+                <a16:creationId xmlns:a16="http://schemas.microsoft.com/office/drawing/2014/main" id="{504AE8F2-1EF7-206C-A09C-34370D174E69}"/>
+              </a:ext>
+            </a:extLst>
+          </p:cNvPr>
+          <p:cNvSpPr>
+            <a:spLocks noGrp="1" noRot="1" noChangeAspect="1" noResize="1"/>
+          </p:cNvSpPr>
+          <p:nvPr>
+            <p:ph type="sldImg"/>
+          </p:nvPr>
+        </p:nvSpPr>
+        <p:spPr>
+          <a:xfrm>
+            <a:off x="217488" y="812800"/>
+            <a:ext cx="7123112" cy="4008438"/>
+          </a:xfrm>
+          <a:solidFill>
+            <a:schemeClr val="accent1"/>
+          </a:solidFill>
+          <a:ln w="25400">
+            <a:solidFill>
+              <a:schemeClr val="accent1">
+                <a:shade val="50000"/>
+              </a:schemeClr>
+            </a:solidFill>
+            <a:prstDash val="solid"/>
+          </a:ln>
+        </p:spPr>
+      </p:sp>
+      <p:sp>
+        <p:nvSpPr>
+          <p:cNvPr id="3" name="Espace réservé des notes 2">
+            <a:extLst>
+              <a:ext uri="{FF2B5EF4-FFF2-40B4-BE49-F238E27FC236}">
+                <a16:creationId xmlns:a16="http://schemas.microsoft.com/office/drawing/2014/main" id="{E3EDCE5B-42FD-A179-6E01-E00131F07D9D}"/>
+              </a:ext>
+            </a:extLst>
+          </p:cNvPr>
+          <p:cNvSpPr txBox="1">
+            <a:spLocks noGrp="1"/>
+          </p:cNvSpPr>
+          <p:nvPr>
+            <p:ph type="body" sz="quarter" idx="1"/>
+          </p:nvPr>
+        </p:nvSpPr>
+        <p:spPr>
+          <a:xfrm>
+            <a:off x="756000" y="5078520"/>
+            <a:ext cx="6047640" cy="4811040"/>
+          </a:xfrm>
+          <a:noFill/>
+          <a:ln>
+            <a:noFill/>
+          </a:ln>
+        </p:spPr>
+        <p:txBody>
+          <a:bodyPr lIns="0" tIns="0" rIns="0" bIns="0">
+            <a:spAutoFit/>
+          </a:bodyPr>
+          <a:lstStyle/>
+          <a:p>
+            <a:endParaRPr lang="fr-FR"/>
+          </a:p>
+        </p:txBody>
+      </p:sp>
+    </p:spTree>
+    <p:extLst>
+      <p:ext uri="{BB962C8B-B14F-4D97-AF65-F5344CB8AC3E}">
+        <p14:creationId xmlns:p14="http://schemas.microsoft.com/office/powerpoint/2010/main" val="2424255910"/>
+      </p:ext>
+    </p:extLst>
+  </p:cSld>
+  <p:clrMapOvr>
+    <a:masterClrMapping/>
+  </p:clrMapOvr>
+</p:notes>
+</file>
+
+<file path=ppt/notesSlides/notesSlide5.xml><?xml version="1.0" encoding="utf-8"?>
+<p:notes xmlns:a="http://schemas.openxmlformats.org/drawingml/2006/main" xmlns:r="http://schemas.openxmlformats.org/officeDocument/2006/relationships" xmlns:p="http://schemas.openxmlformats.org/presentationml/2006/main">
+  <p:cSld>
+    <p:spTree>
+      <p:nvGrpSpPr>
+        <p:cNvPr id="1" name="">
+          <a:extLst>
+            <a:ext uri="{FF2B5EF4-FFF2-40B4-BE49-F238E27FC236}">
+              <a16:creationId xmlns:a16="http://schemas.microsoft.com/office/drawing/2014/main" id="{0547F5D9-40E6-3612-C609-2B01601AE9FC}"/>
+            </a:ext>
+          </a:extLst>
+        </p:cNvPr>
+        <p:cNvGrpSpPr/>
+        <p:nvPr/>
+      </p:nvGrpSpPr>
+      <p:grpSpPr>
+        <a:xfrm>
+          <a:off x="0" y="0"/>
+          <a:ext cx="0" cy="0"/>
+          <a:chOff x="0" y="0"/>
+          <a:chExt cx="0" cy="0"/>
+        </a:xfrm>
+      </p:grpSpPr>
+      <p:sp>
+        <p:nvSpPr>
+          <p:cNvPr id="5" name="Espace réservé de la date 2">
+            <a:extLst>
+              <a:ext uri="{FF2B5EF4-FFF2-40B4-BE49-F238E27FC236}">
+                <a16:creationId xmlns:a16="http://schemas.microsoft.com/office/drawing/2014/main" id="{0C5E7338-34BA-44CC-0FB2-CFE6B3279900}"/>
+              </a:ext>
+            </a:extLst>
+          </p:cNvPr>
+          <p:cNvSpPr>
+            <a:spLocks noGrp="1"/>
+          </p:cNvSpPr>
+          <p:nvPr>
+            <p:ph type="dt" idx="1"/>
+          </p:nvPr>
+        </p:nvSpPr>
+        <p:spPr/>
+        <p:txBody>
+          <a:bodyPr vert="horz" lIns="91440" tIns="45720" rIns="91440" bIns="45720" rtlCol="0"/>
+          <a:lstStyle/>
+          <a:p>
+            <a:fld id="{179A66FE-F4F6-454F-8E0C-628A9DA985DF}" type="datetimeFigureOut">
+              <a:t>31/08/2026</a:t>
+            </a:fld>
+            <a:endParaRPr lang="fr-FR"/>
+          </a:p>
+        </p:txBody>
+      </p:sp>
+      <p:sp>
+        <p:nvSpPr>
+          <p:cNvPr id="9" name="Espace réservé du numéro de diapositive 12">
+            <a:extLst>
+              <a:ext uri="{FF2B5EF4-FFF2-40B4-BE49-F238E27FC236}">
+                <a16:creationId xmlns:a16="http://schemas.microsoft.com/office/drawing/2014/main" id="{C86402EA-A56D-A924-7479-D92680E340C3}"/>
+              </a:ext>
+            </a:extLst>
+          </p:cNvPr>
+          <p:cNvSpPr txBox="1">
+            <a:spLocks noGrp="1"/>
+          </p:cNvSpPr>
+          <p:nvPr>
+            <p:ph type="sldNum" sz="quarter" idx="5"/>
+          </p:nvPr>
+        </p:nvSpPr>
+        <p:spPr>
+          <a:ln/>
+        </p:spPr>
+        <p:txBody>
+          <a:bodyPr lIns="0" tIns="0" rIns="0" bIns="0" anchor="b" anchorCtr="0">
+            <a:noAutofit/>
+          </a:bodyPr>
+          <a:lstStyle/>
+          <a:p>
+            <a:pPr lvl="0"/>
+            <a:fld id="{0941C839-6C4E-4BA1-AFC6-477B4C42B86E}" type="slidenum">
+              <a:t>5</a:t>
+            </a:fld>
+            <a:endParaRPr lang="fr-FR"/>
+          </a:p>
+        </p:txBody>
+      </p:sp>
+      <p:sp>
+        <p:nvSpPr>
+          <p:cNvPr id="11" name="Espace réservé du numéro de diapositive 6">
+            <a:extLst>
+              <a:ext uri="{FF2B5EF4-FFF2-40B4-BE49-F238E27FC236}">
+                <a16:creationId xmlns:a16="http://schemas.microsoft.com/office/drawing/2014/main" id="{80408A4D-601A-1E6A-63D4-C783A9CFCB2E}"/>
+              </a:ext>
+            </a:extLst>
+          </p:cNvPr>
+          <p:cNvSpPr>
+            <a:spLocks noGrp="1"/>
+          </p:cNvSpPr>
+          <p:nvPr>
+            <p:ph type="sldNum" sz="quarter" idx="5"/>
+          </p:nvPr>
+        </p:nvSpPr>
+        <p:spPr/>
+        <p:txBody>
+          <a:bodyPr vert="horz" lIns="91440" tIns="45720" rIns="91440" bIns="45720" rtlCol="0" anchor="b"/>
+          <a:lstStyle/>
+          <a:p>
+            <a:fld id="{5A8F3918-74C9-4FF7-86C9-18982F794D18}" type="slidenum">
+              <a:t>5</a:t>
+            </a:fld>
+            <a:endParaRPr lang="fr-FR"/>
+          </a:p>
+        </p:txBody>
+      </p:sp>
+      <p:sp>
+        <p:nvSpPr>
+          <p:cNvPr id="2" name="Espace réservé de l'image des diapositives 1">
+            <a:extLst>
+              <a:ext uri="{FF2B5EF4-FFF2-40B4-BE49-F238E27FC236}">
+                <a16:creationId xmlns:a16="http://schemas.microsoft.com/office/drawing/2014/main" id="{A29AE446-E4A7-53D9-1912-913CC5B08931}"/>
+              </a:ext>
+            </a:extLst>
+          </p:cNvPr>
+          <p:cNvSpPr>
+            <a:spLocks noGrp="1" noRot="1" noChangeAspect="1" noResize="1"/>
+          </p:cNvSpPr>
+          <p:nvPr>
+            <p:ph type="sldImg"/>
+          </p:nvPr>
+        </p:nvSpPr>
+        <p:spPr>
+          <a:xfrm>
+            <a:off x="217488" y="812800"/>
+            <a:ext cx="7123112" cy="4008438"/>
+          </a:xfrm>
+          <a:solidFill>
+            <a:schemeClr val="accent1"/>
+          </a:solidFill>
+          <a:ln w="25400">
+            <a:solidFill>
+              <a:schemeClr val="accent1">
+                <a:shade val="50000"/>
+              </a:schemeClr>
+            </a:solidFill>
+            <a:prstDash val="solid"/>
+          </a:ln>
+        </p:spPr>
+      </p:sp>
+      <p:sp>
+        <p:nvSpPr>
+          <p:cNvPr id="3" name="Espace réservé des notes 2">
+            <a:extLst>
+              <a:ext uri="{FF2B5EF4-FFF2-40B4-BE49-F238E27FC236}">
+                <a16:creationId xmlns:a16="http://schemas.microsoft.com/office/drawing/2014/main" id="{AB33F8F9-E5C1-9FA1-49BB-53B9654E336E}"/>
+              </a:ext>
+            </a:extLst>
+          </p:cNvPr>
+          <p:cNvSpPr txBox="1">
+            <a:spLocks noGrp="1"/>
+          </p:cNvSpPr>
+          <p:nvPr>
+            <p:ph type="body" sz="quarter" idx="1"/>
+          </p:nvPr>
+        </p:nvSpPr>
+        <p:spPr>
+          <a:xfrm>
+            <a:off x="756000" y="5078520"/>
+            <a:ext cx="6047640" cy="4811040"/>
+          </a:xfrm>
+          <a:noFill/>
+          <a:ln>
+            <a:noFill/>
+          </a:ln>
+        </p:spPr>
+        <p:txBody>
+          <a:bodyPr lIns="0" tIns="0" rIns="0" bIns="0">
+            <a:spAutoFit/>
+          </a:bodyPr>
+          <a:lstStyle/>
+          <a:p>
+            <a:endParaRPr lang="fr-FR"/>
+          </a:p>
+        </p:txBody>
+      </p:sp>
+    </p:spTree>
+    <p:extLst>
+      <p:ext uri="{BB962C8B-B14F-4D97-AF65-F5344CB8AC3E}">
+        <p14:creationId xmlns:p14="http://schemas.microsoft.com/office/powerpoint/2010/main" val="1483540583"/>
+      </p:ext>
+    </p:extLst>
+  </p:cSld>
+  <p:clrMapOvr>
+    <a:masterClrMapping/>
+  </p:clrMapOvr>
+</p:notes>
+</file>
+
+<file path=ppt/notesSlides/notesSlide6.xml><?xml version="1.0" encoding="utf-8"?>
 <p:notes xmlns:a="http://schemas.openxmlformats.org/drawingml/2006/main" xmlns:r="http://schemas.openxmlformats.org/officeDocument/2006/relationships" xmlns:p="http://schemas.openxmlformats.org/presentationml/2006/main">
   <p:cSld>
     <p:spTree>
@@ -1693,7 +3651,7 @@
           <a:lstStyle/>
           <a:p>
             <a:fld id="{179A66FE-F4F6-454F-8E0C-628A9DA985DF}" type="datetimeFigureOut">
-              <a:t>06/08/2026</a:t>
+              <a:t>31/08/2026</a:t>
             </a:fld>
             <a:endParaRPr lang="fr-FR"/>
           </a:p>
@@ -1726,7 +3684,7 @@
           <a:p>
             <a:pPr lvl="0"/>
             <a:fld id="{0941C839-6C4E-4BA1-AFC6-477B4C42B86E}" type="slidenum">
-              <a:t>4</a:t>
+              <a:t>6</a:t>
             </a:fld>
             <a:endParaRPr lang="fr-FR"/>
           </a:p>
@@ -1754,7 +3712,7 @@
           <a:lstStyle/>
           <a:p>
             <a:fld id="{5A8F3918-74C9-4FF7-86C9-18982F794D18}" type="slidenum">
-              <a:t>4</a:t>
+              <a:t>6</a:t>
             </a:fld>
             <a:endParaRPr lang="fr-FR"/>
           </a:p>
@@ -1843,7 +3801,7 @@
 </p:notes>
 </file>
 
-<file path=ppt/notesSlides/notesSlide5.xml><?xml version="1.0" encoding="utf-8"?>
+<file path=ppt/notesSlides/notesSlide7.xml><?xml version="1.0" encoding="utf-8"?>
 <p:notes xmlns:a="http://schemas.openxmlformats.org/drawingml/2006/main" xmlns:r="http://schemas.openxmlformats.org/officeDocument/2006/relationships" xmlns:p="http://schemas.openxmlformats.org/presentationml/2006/main">
   <p:cSld>
     <p:spTree>
@@ -1851,7 +3809,7 @@
         <p:cNvPr id="1" name="">
           <a:extLst>
             <a:ext uri="{FF2B5EF4-FFF2-40B4-BE49-F238E27FC236}">
-              <a16:creationId xmlns:a16="http://schemas.microsoft.com/office/drawing/2014/main" id="{FF4719E1-368C-0660-6683-02C1C7E2C184}"/>
+              <a16:creationId xmlns:a16="http://schemas.microsoft.com/office/drawing/2014/main" id="{8AC0CAB8-CB83-B824-E2E6-643F57CB1EBC}"/>
             </a:ext>
           </a:extLst>
         </p:cNvPr>
@@ -1871,7 +3829,7 @@
           <p:cNvPr id="5" name="Espace réservé de la date 2">
             <a:extLst>
               <a:ext uri="{FF2B5EF4-FFF2-40B4-BE49-F238E27FC236}">
-                <a16:creationId xmlns:a16="http://schemas.microsoft.com/office/drawing/2014/main" id="{018F4386-9811-1F15-956E-A1DD2D033DA2}"/>
+                <a16:creationId xmlns:a16="http://schemas.microsoft.com/office/drawing/2014/main" id="{881FE12E-242A-B6AB-4E77-4132519D0188}"/>
               </a:ext>
             </a:extLst>
           </p:cNvPr>
@@ -1888,7 +3846,7 @@
           <a:lstStyle/>
           <a:p>
             <a:fld id="{179A66FE-F4F6-454F-8E0C-628A9DA985DF}" type="datetimeFigureOut">
-              <a:t>06/08/2026</a:t>
+              <a:t>31/08/2026</a:t>
             </a:fld>
             <a:endParaRPr lang="fr-FR"/>
           </a:p>
@@ -1899,7 +3857,7 @@
           <p:cNvPr id="9" name="Espace réservé du numéro de diapositive 12">
             <a:extLst>
               <a:ext uri="{FF2B5EF4-FFF2-40B4-BE49-F238E27FC236}">
-                <a16:creationId xmlns:a16="http://schemas.microsoft.com/office/drawing/2014/main" id="{BF4CC3F1-5956-CF0E-3D2C-DD5071952494}"/>
+                <a16:creationId xmlns:a16="http://schemas.microsoft.com/office/drawing/2014/main" id="{12537EE7-0504-7C80-7091-62E048A2A059}"/>
               </a:ext>
             </a:extLst>
           </p:cNvPr>
@@ -1921,7 +3879,7 @@
           <a:p>
             <a:pPr lvl="0"/>
             <a:fld id="{0941C839-6C4E-4BA1-AFC6-477B4C42B86E}" type="slidenum">
-              <a:t>5</a:t>
+              <a:t>7</a:t>
             </a:fld>
             <a:endParaRPr lang="fr-FR"/>
           </a:p>
@@ -1932,7 +3890,7 @@
           <p:cNvPr id="11" name="Espace réservé du numéro de diapositive 6">
             <a:extLst>
               <a:ext uri="{FF2B5EF4-FFF2-40B4-BE49-F238E27FC236}">
-                <a16:creationId xmlns:a16="http://schemas.microsoft.com/office/drawing/2014/main" id="{9F0C6434-BDAC-176C-5371-1F5BCB2913C8}"/>
+                <a16:creationId xmlns:a16="http://schemas.microsoft.com/office/drawing/2014/main" id="{EABFBC94-686A-3730-8830-F4663A65257F}"/>
               </a:ext>
             </a:extLst>
           </p:cNvPr>
@@ -1949,7 +3907,7 @@
           <a:lstStyle/>
           <a:p>
             <a:fld id="{5A8F3918-74C9-4FF7-86C9-18982F794D18}" type="slidenum">
-              <a:t>5</a:t>
+              <a:t>7</a:t>
             </a:fld>
             <a:endParaRPr lang="fr-FR"/>
           </a:p>
@@ -1960,7 +3918,7 @@
           <p:cNvPr id="2" name="Espace réservé de l'image des diapositives 1">
             <a:extLst>
               <a:ext uri="{FF2B5EF4-FFF2-40B4-BE49-F238E27FC236}">
-                <a16:creationId xmlns:a16="http://schemas.microsoft.com/office/drawing/2014/main" id="{28722928-616F-979A-D15F-D39B975F38F4}"/>
+                <a16:creationId xmlns:a16="http://schemas.microsoft.com/office/drawing/2014/main" id="{930E60EF-A834-C65A-0266-F169DB5B9E86}"/>
               </a:ext>
             </a:extLst>
           </p:cNvPr>
@@ -1994,7 +3952,7 @@
           <p:cNvPr id="3" name="Espace réservé des notes 2">
             <a:extLst>
               <a:ext uri="{FF2B5EF4-FFF2-40B4-BE49-F238E27FC236}">
-                <a16:creationId xmlns:a16="http://schemas.microsoft.com/office/drawing/2014/main" id="{94727C8A-2079-D3E3-A86B-973BE027DAD2}"/>
+                <a16:creationId xmlns:a16="http://schemas.microsoft.com/office/drawing/2014/main" id="{95728972-15C5-92A7-539F-D62E8B83B804}"/>
               </a:ext>
             </a:extLst>
           </p:cNvPr>
@@ -2028,7 +3986,7 @@
     </p:spTree>
     <p:extLst>
       <p:ext uri="{BB962C8B-B14F-4D97-AF65-F5344CB8AC3E}">
-        <p14:creationId xmlns:p14="http://schemas.microsoft.com/office/powerpoint/2010/main" val="1513263684"/>
+        <p14:creationId xmlns:p14="http://schemas.microsoft.com/office/powerpoint/2010/main" val="1774904520"/>
       </p:ext>
     </p:extLst>
   </p:cSld>
@@ -2038,7 +3996,7 @@
 </p:notes>
 </file>
 
-<file path=ppt/notesSlides/notesSlide6.xml><?xml version="1.0" encoding="utf-8"?>
+<file path=ppt/notesSlides/notesSlide8.xml><?xml version="1.0" encoding="utf-8"?>
 <p:notes xmlns:a="http://schemas.openxmlformats.org/drawingml/2006/main" xmlns:r="http://schemas.openxmlformats.org/officeDocument/2006/relationships" xmlns:p="http://schemas.openxmlformats.org/presentationml/2006/main">
   <p:cSld>
     <p:spTree>
@@ -2046,7 +4004,7 @@
         <p:cNvPr id="1" name="">
           <a:extLst>
             <a:ext uri="{FF2B5EF4-FFF2-40B4-BE49-F238E27FC236}">
-              <a16:creationId xmlns:a16="http://schemas.microsoft.com/office/drawing/2014/main" id="{FF8510F8-B795-D47E-86C1-33C5BAA25E6D}"/>
+              <a16:creationId xmlns:a16="http://schemas.microsoft.com/office/drawing/2014/main" id="{8DEBF5C9-C61C-7D07-1F40-1A73B28918FC}"/>
             </a:ext>
           </a:extLst>
         </p:cNvPr>
@@ -2066,7 +4024,7 @@
           <p:cNvPr id="5" name="Espace réservé de la date 2">
             <a:extLst>
               <a:ext uri="{FF2B5EF4-FFF2-40B4-BE49-F238E27FC236}">
-                <a16:creationId xmlns:a16="http://schemas.microsoft.com/office/drawing/2014/main" id="{3F591782-4804-2B39-0A95-252B714B9AAB}"/>
+                <a16:creationId xmlns:a16="http://schemas.microsoft.com/office/drawing/2014/main" id="{1C18E065-2217-CB64-D55F-16C1850846B4}"/>
               </a:ext>
             </a:extLst>
           </p:cNvPr>
@@ -2083,7 +4041,7 @@
           <a:lstStyle/>
           <a:p>
             <a:fld id="{179A66FE-F4F6-454F-8E0C-628A9DA985DF}" type="datetimeFigureOut">
-              <a:t>06/08/2026</a:t>
+              <a:t>31/08/2026</a:t>
             </a:fld>
             <a:endParaRPr lang="fr-FR"/>
           </a:p>
@@ -2094,7 +4052,7 @@
           <p:cNvPr id="9" name="Espace réservé du numéro de diapositive 12">
             <a:extLst>
               <a:ext uri="{FF2B5EF4-FFF2-40B4-BE49-F238E27FC236}">
-                <a16:creationId xmlns:a16="http://schemas.microsoft.com/office/drawing/2014/main" id="{10F4C261-6EA4-C555-564A-2C2AB837BD31}"/>
+                <a16:creationId xmlns:a16="http://schemas.microsoft.com/office/drawing/2014/main" id="{6EDBD984-DA7C-D97A-B7AE-1926B39B9AA7}"/>
               </a:ext>
             </a:extLst>
           </p:cNvPr>
@@ -2116,7 +4074,7 @@
           <a:p>
             <a:pPr lvl="0"/>
             <a:fld id="{0941C839-6C4E-4BA1-AFC6-477B4C42B86E}" type="slidenum">
-              <a:t>6</a:t>
+              <a:t>8</a:t>
             </a:fld>
             <a:endParaRPr lang="fr-FR"/>
           </a:p>
@@ -2127,7 +4085,7 @@
           <p:cNvPr id="11" name="Espace réservé du numéro de diapositive 6">
             <a:extLst>
               <a:ext uri="{FF2B5EF4-FFF2-40B4-BE49-F238E27FC236}">
-                <a16:creationId xmlns:a16="http://schemas.microsoft.com/office/drawing/2014/main" id="{8DA82FD7-F41A-19BA-C1B5-9CCF1ED13502}"/>
+                <a16:creationId xmlns:a16="http://schemas.microsoft.com/office/drawing/2014/main" id="{D7D6BCB4-8521-084C-5254-3CDBC72C25A8}"/>
               </a:ext>
             </a:extLst>
           </p:cNvPr>
@@ -2144,7 +4102,7 @@
           <a:lstStyle/>
           <a:p>
             <a:fld id="{5A8F3918-74C9-4FF7-86C9-18982F794D18}" type="slidenum">
-              <a:t>6</a:t>
+              <a:t>8</a:t>
             </a:fld>
             <a:endParaRPr lang="fr-FR"/>
           </a:p>
@@ -2155,7 +4113,7 @@
           <p:cNvPr id="2" name="Espace réservé de l'image des diapositives 1">
             <a:extLst>
               <a:ext uri="{FF2B5EF4-FFF2-40B4-BE49-F238E27FC236}">
-                <a16:creationId xmlns:a16="http://schemas.microsoft.com/office/drawing/2014/main" id="{CDBBB10E-0798-32B5-BB45-19EC72A3E4D7}"/>
+                <a16:creationId xmlns:a16="http://schemas.microsoft.com/office/drawing/2014/main" id="{304AAD96-EA5E-AC04-C6CD-6B1FE7627101}"/>
               </a:ext>
             </a:extLst>
           </p:cNvPr>
@@ -2189,7 +4147,7 @@
           <p:cNvPr id="3" name="Espace réservé des notes 2">
             <a:extLst>
               <a:ext uri="{FF2B5EF4-FFF2-40B4-BE49-F238E27FC236}">
-                <a16:creationId xmlns:a16="http://schemas.microsoft.com/office/drawing/2014/main" id="{67267007-55CA-47CC-1568-AD472070CE9E}"/>
+                <a16:creationId xmlns:a16="http://schemas.microsoft.com/office/drawing/2014/main" id="{19663BC4-D08A-9853-31DB-B3644A518134}"/>
               </a:ext>
             </a:extLst>
           </p:cNvPr>
@@ -2223,7 +4181,7 @@
     </p:spTree>
     <p:extLst>
       <p:ext uri="{BB962C8B-B14F-4D97-AF65-F5344CB8AC3E}">
-        <p14:creationId xmlns:p14="http://schemas.microsoft.com/office/powerpoint/2010/main" val="3878450447"/>
+        <p14:creationId xmlns:p14="http://schemas.microsoft.com/office/powerpoint/2010/main" val="1293604937"/>
       </p:ext>
     </p:extLst>
   </p:cSld>
@@ -2233,7 +4191,7 @@
 </p:notes>
 </file>
 
-<file path=ppt/notesSlides/notesSlide7.xml><?xml version="1.0" encoding="utf-8"?>
+<file path=ppt/notesSlides/notesSlide9.xml><?xml version="1.0" encoding="utf-8"?>
 <p:notes xmlns:a="http://schemas.openxmlformats.org/drawingml/2006/main" xmlns:r="http://schemas.openxmlformats.org/officeDocument/2006/relationships" xmlns:p="http://schemas.openxmlformats.org/presentationml/2006/main">
   <p:cSld>
     <p:spTree>
@@ -2241,7 +4199,7 @@
         <p:cNvPr id="1" name="">
           <a:extLst>
             <a:ext uri="{FF2B5EF4-FFF2-40B4-BE49-F238E27FC236}">
-              <a16:creationId xmlns:a16="http://schemas.microsoft.com/office/drawing/2014/main" id="{2C72FE95-1D38-6447-ABA5-D9A73C0391D9}"/>
+              <a16:creationId xmlns:a16="http://schemas.microsoft.com/office/drawing/2014/main" id="{1AE40C08-D5BF-9549-C2D0-030683B288CA}"/>
             </a:ext>
           </a:extLst>
         </p:cNvPr>
@@ -2261,7 +4219,7 @@
           <p:cNvPr id="5" name="Espace réservé de la date 2">
             <a:extLst>
               <a:ext uri="{FF2B5EF4-FFF2-40B4-BE49-F238E27FC236}">
-                <a16:creationId xmlns:a16="http://schemas.microsoft.com/office/drawing/2014/main" id="{647B60BC-FEF4-17B9-C1E2-469F2408EA8F}"/>
+                <a16:creationId xmlns:a16="http://schemas.microsoft.com/office/drawing/2014/main" id="{42F793BD-82E6-96EC-4435-6B9DD5D3A525}"/>
               </a:ext>
             </a:extLst>
           </p:cNvPr>
@@ -2278,7 +4236,7 @@
           <a:lstStyle/>
           <a:p>
             <a:fld id="{179A66FE-F4F6-454F-8E0C-628A9DA985DF}" type="datetimeFigureOut">
-              <a:t>06/08/2026</a:t>
+              <a:t>31/08/2026</a:t>
             </a:fld>
             <a:endParaRPr lang="fr-FR"/>
           </a:p>
@@ -2289,7 +4247,7 @@
           <p:cNvPr id="9" name="Espace réservé du numéro de diapositive 12">
             <a:extLst>
               <a:ext uri="{FF2B5EF4-FFF2-40B4-BE49-F238E27FC236}">
-                <a16:creationId xmlns:a16="http://schemas.microsoft.com/office/drawing/2014/main" id="{5DCFA3C2-F70D-7E5C-88B8-3D5DB77ECB66}"/>
+                <a16:creationId xmlns:a16="http://schemas.microsoft.com/office/drawing/2014/main" id="{D2BCC873-DA8A-431B-E55E-7A2E92A4C62A}"/>
               </a:ext>
             </a:extLst>
           </p:cNvPr>
@@ -2311,7 +4269,7 @@
           <a:p>
             <a:pPr lvl="0"/>
             <a:fld id="{0941C839-6C4E-4BA1-AFC6-477B4C42B86E}" type="slidenum">
-              <a:t>7</a:t>
+              <a:t>9</a:t>
             </a:fld>
             <a:endParaRPr lang="fr-FR"/>
           </a:p>
@@ -2322,7 +4280,7 @@
           <p:cNvPr id="11" name="Espace réservé du numéro de diapositive 6">
             <a:extLst>
               <a:ext uri="{FF2B5EF4-FFF2-40B4-BE49-F238E27FC236}">
-                <a16:creationId xmlns:a16="http://schemas.microsoft.com/office/drawing/2014/main" id="{497CA3BD-3B5B-D638-9E8A-AC8705052A71}"/>
+                <a16:creationId xmlns:a16="http://schemas.microsoft.com/office/drawing/2014/main" id="{C3860D17-889B-F432-815C-D166F55C1ABA}"/>
               </a:ext>
             </a:extLst>
           </p:cNvPr>
@@ -2339,7 +4297,7 @@
           <a:lstStyle/>
           <a:p>
             <a:fld id="{5A8F3918-74C9-4FF7-86C9-18982F794D18}" type="slidenum">
-              <a:t>7</a:t>
+              <a:t>9</a:t>
             </a:fld>
             <a:endParaRPr lang="fr-FR"/>
           </a:p>
@@ -2350,7 +4308,7 @@
           <p:cNvPr id="2" name="Espace réservé de l'image des diapositives 1">
             <a:extLst>
               <a:ext uri="{FF2B5EF4-FFF2-40B4-BE49-F238E27FC236}">
-                <a16:creationId xmlns:a16="http://schemas.microsoft.com/office/drawing/2014/main" id="{99DB12CF-A901-27BC-7338-C3D5D41283D8}"/>
+                <a16:creationId xmlns:a16="http://schemas.microsoft.com/office/drawing/2014/main" id="{C23EF740-55B3-8181-A428-E057F12ED89A}"/>
               </a:ext>
             </a:extLst>
           </p:cNvPr>
@@ -2384,7 +4342,7 @@
           <p:cNvPr id="3" name="Espace réservé des notes 2">
             <a:extLst>
               <a:ext uri="{FF2B5EF4-FFF2-40B4-BE49-F238E27FC236}">
-                <a16:creationId xmlns:a16="http://schemas.microsoft.com/office/drawing/2014/main" id="{F9339234-6039-DDA0-FE46-F754228CF776}"/>
+                <a16:creationId xmlns:a16="http://schemas.microsoft.com/office/drawing/2014/main" id="{944859E8-DBFE-FEC0-2862-6955A792E42B}"/>
               </a:ext>
             </a:extLst>
           </p:cNvPr>
@@ -2418,397 +4376,7 @@
     </p:spTree>
     <p:extLst>
       <p:ext uri="{BB962C8B-B14F-4D97-AF65-F5344CB8AC3E}">
-        <p14:creationId xmlns:p14="http://schemas.microsoft.com/office/powerpoint/2010/main" val="724406561"/>
-      </p:ext>
-    </p:extLst>
-  </p:cSld>
-  <p:clrMapOvr>
-    <a:masterClrMapping/>
-  </p:clrMapOvr>
-</p:notes>
-</file>
-
-<file path=ppt/notesSlides/notesSlide8.xml><?xml version="1.0" encoding="utf-8"?>
-<p:notes xmlns:a="http://schemas.openxmlformats.org/drawingml/2006/main" xmlns:r="http://schemas.openxmlformats.org/officeDocument/2006/relationships" xmlns:p="http://schemas.openxmlformats.org/presentationml/2006/main">
-  <p:cSld>
-    <p:spTree>
-      <p:nvGrpSpPr>
-        <p:cNvPr id="1" name="">
-          <a:extLst>
-            <a:ext uri="{FF2B5EF4-FFF2-40B4-BE49-F238E27FC236}">
-              <a16:creationId xmlns:a16="http://schemas.microsoft.com/office/drawing/2014/main" id="{5F19521E-FB27-D653-A801-3FF6B2A83DE0}"/>
-            </a:ext>
-          </a:extLst>
-        </p:cNvPr>
-        <p:cNvGrpSpPr/>
-        <p:nvPr/>
-      </p:nvGrpSpPr>
-      <p:grpSpPr>
-        <a:xfrm>
-          <a:off x="0" y="0"/>
-          <a:ext cx="0" cy="0"/>
-          <a:chOff x="0" y="0"/>
-          <a:chExt cx="0" cy="0"/>
-        </a:xfrm>
-      </p:grpSpPr>
-      <p:sp>
-        <p:nvSpPr>
-          <p:cNvPr id="5" name="Espace réservé de la date 2">
-            <a:extLst>
-              <a:ext uri="{FF2B5EF4-FFF2-40B4-BE49-F238E27FC236}">
-                <a16:creationId xmlns:a16="http://schemas.microsoft.com/office/drawing/2014/main" id="{1B3DE8FC-6502-0C3F-5727-9EEF67F4BE6C}"/>
-              </a:ext>
-            </a:extLst>
-          </p:cNvPr>
-          <p:cNvSpPr>
-            <a:spLocks noGrp="1"/>
-          </p:cNvSpPr>
-          <p:nvPr>
-            <p:ph type="dt" idx="1"/>
-          </p:nvPr>
-        </p:nvSpPr>
-        <p:spPr/>
-        <p:txBody>
-          <a:bodyPr vert="horz" lIns="91440" tIns="45720" rIns="91440" bIns="45720" rtlCol="0"/>
-          <a:lstStyle/>
-          <a:p>
-            <a:fld id="{179A66FE-F4F6-454F-8E0C-628A9DA985DF}" type="datetimeFigureOut">
-              <a:t>06/08/2026</a:t>
-            </a:fld>
-            <a:endParaRPr lang="fr-FR"/>
-          </a:p>
-        </p:txBody>
-      </p:sp>
-      <p:sp>
-        <p:nvSpPr>
-          <p:cNvPr id="9" name="Espace réservé du numéro de diapositive 12">
-            <a:extLst>
-              <a:ext uri="{FF2B5EF4-FFF2-40B4-BE49-F238E27FC236}">
-                <a16:creationId xmlns:a16="http://schemas.microsoft.com/office/drawing/2014/main" id="{DFF8B2EB-82DD-3702-14F1-A51500341097}"/>
-              </a:ext>
-            </a:extLst>
-          </p:cNvPr>
-          <p:cNvSpPr txBox="1">
-            <a:spLocks noGrp="1"/>
-          </p:cNvSpPr>
-          <p:nvPr>
-            <p:ph type="sldNum" sz="quarter" idx="5"/>
-          </p:nvPr>
-        </p:nvSpPr>
-        <p:spPr>
-          <a:ln/>
-        </p:spPr>
-        <p:txBody>
-          <a:bodyPr lIns="0" tIns="0" rIns="0" bIns="0" anchor="b" anchorCtr="0">
-            <a:noAutofit/>
-          </a:bodyPr>
-          <a:lstStyle/>
-          <a:p>
-            <a:pPr lvl="0"/>
-            <a:fld id="{0941C839-6C4E-4BA1-AFC6-477B4C42B86E}" type="slidenum">
-              <a:t>8</a:t>
-            </a:fld>
-            <a:endParaRPr lang="fr-FR"/>
-          </a:p>
-        </p:txBody>
-      </p:sp>
-      <p:sp>
-        <p:nvSpPr>
-          <p:cNvPr id="11" name="Espace réservé du numéro de diapositive 6">
-            <a:extLst>
-              <a:ext uri="{FF2B5EF4-FFF2-40B4-BE49-F238E27FC236}">
-                <a16:creationId xmlns:a16="http://schemas.microsoft.com/office/drawing/2014/main" id="{E591BC17-EA1B-5C26-F2E0-71AADCB6BDCB}"/>
-              </a:ext>
-            </a:extLst>
-          </p:cNvPr>
-          <p:cNvSpPr>
-            <a:spLocks noGrp="1"/>
-          </p:cNvSpPr>
-          <p:nvPr>
-            <p:ph type="sldNum" sz="quarter" idx="5"/>
-          </p:nvPr>
-        </p:nvSpPr>
-        <p:spPr/>
-        <p:txBody>
-          <a:bodyPr vert="horz" lIns="91440" tIns="45720" rIns="91440" bIns="45720" rtlCol="0" anchor="b"/>
-          <a:lstStyle/>
-          <a:p>
-            <a:fld id="{5A8F3918-74C9-4FF7-86C9-18982F794D18}" type="slidenum">
-              <a:t>8</a:t>
-            </a:fld>
-            <a:endParaRPr lang="fr-FR"/>
-          </a:p>
-        </p:txBody>
-      </p:sp>
-      <p:sp>
-        <p:nvSpPr>
-          <p:cNvPr id="2" name="Espace réservé de l'image des diapositives 1">
-            <a:extLst>
-              <a:ext uri="{FF2B5EF4-FFF2-40B4-BE49-F238E27FC236}">
-                <a16:creationId xmlns:a16="http://schemas.microsoft.com/office/drawing/2014/main" id="{30EC5E14-9A49-0D2E-575E-AEE5418725C5}"/>
-              </a:ext>
-            </a:extLst>
-          </p:cNvPr>
-          <p:cNvSpPr>
-            <a:spLocks noGrp="1" noRot="1" noChangeAspect="1" noResize="1"/>
-          </p:cNvSpPr>
-          <p:nvPr>
-            <p:ph type="sldImg"/>
-          </p:nvPr>
-        </p:nvSpPr>
-        <p:spPr>
-          <a:xfrm>
-            <a:off x="217488" y="812800"/>
-            <a:ext cx="7123112" cy="4008438"/>
-          </a:xfrm>
-          <a:solidFill>
-            <a:schemeClr val="accent1"/>
-          </a:solidFill>
-          <a:ln w="25400">
-            <a:solidFill>
-              <a:schemeClr val="accent1">
-                <a:shade val="50000"/>
-              </a:schemeClr>
-            </a:solidFill>
-            <a:prstDash val="solid"/>
-          </a:ln>
-        </p:spPr>
-      </p:sp>
-      <p:sp>
-        <p:nvSpPr>
-          <p:cNvPr id="3" name="Espace réservé des notes 2">
-            <a:extLst>
-              <a:ext uri="{FF2B5EF4-FFF2-40B4-BE49-F238E27FC236}">
-                <a16:creationId xmlns:a16="http://schemas.microsoft.com/office/drawing/2014/main" id="{F879B222-E7EE-9E2D-414C-0854D14BF390}"/>
-              </a:ext>
-            </a:extLst>
-          </p:cNvPr>
-          <p:cNvSpPr txBox="1">
-            <a:spLocks noGrp="1"/>
-          </p:cNvSpPr>
-          <p:nvPr>
-            <p:ph type="body" sz="quarter" idx="1"/>
-          </p:nvPr>
-        </p:nvSpPr>
-        <p:spPr>
-          <a:xfrm>
-            <a:off x="756000" y="5078520"/>
-            <a:ext cx="6047640" cy="4811040"/>
-          </a:xfrm>
-          <a:noFill/>
-          <a:ln>
-            <a:noFill/>
-          </a:ln>
-        </p:spPr>
-        <p:txBody>
-          <a:bodyPr lIns="0" tIns="0" rIns="0" bIns="0">
-            <a:spAutoFit/>
-          </a:bodyPr>
-          <a:lstStyle/>
-          <a:p>
-            <a:endParaRPr lang="fr-FR"/>
-          </a:p>
-        </p:txBody>
-      </p:sp>
-    </p:spTree>
-    <p:extLst>
-      <p:ext uri="{BB962C8B-B14F-4D97-AF65-F5344CB8AC3E}">
-        <p14:creationId xmlns:p14="http://schemas.microsoft.com/office/powerpoint/2010/main" val="3077188264"/>
-      </p:ext>
-    </p:extLst>
-  </p:cSld>
-  <p:clrMapOvr>
-    <a:masterClrMapping/>
-  </p:clrMapOvr>
-</p:notes>
-</file>
-
-<file path=ppt/notesSlides/notesSlide9.xml><?xml version="1.0" encoding="utf-8"?>
-<p:notes xmlns:a="http://schemas.openxmlformats.org/drawingml/2006/main" xmlns:r="http://schemas.openxmlformats.org/officeDocument/2006/relationships" xmlns:p="http://schemas.openxmlformats.org/presentationml/2006/main">
-  <p:cSld>
-    <p:spTree>
-      <p:nvGrpSpPr>
-        <p:cNvPr id="1" name="">
-          <a:extLst>
-            <a:ext uri="{FF2B5EF4-FFF2-40B4-BE49-F238E27FC236}">
-              <a16:creationId xmlns:a16="http://schemas.microsoft.com/office/drawing/2014/main" id="{F107597B-0D9A-0611-4A34-9F9ECBAC4DD8}"/>
-            </a:ext>
-          </a:extLst>
-        </p:cNvPr>
-        <p:cNvGrpSpPr/>
-        <p:nvPr/>
-      </p:nvGrpSpPr>
-      <p:grpSpPr>
-        <a:xfrm>
-          <a:off x="0" y="0"/>
-          <a:ext cx="0" cy="0"/>
-          <a:chOff x="0" y="0"/>
-          <a:chExt cx="0" cy="0"/>
-        </a:xfrm>
-      </p:grpSpPr>
-      <p:sp>
-        <p:nvSpPr>
-          <p:cNvPr id="5" name="Espace réservé de la date 2">
-            <a:extLst>
-              <a:ext uri="{FF2B5EF4-FFF2-40B4-BE49-F238E27FC236}">
-                <a16:creationId xmlns:a16="http://schemas.microsoft.com/office/drawing/2014/main" id="{FFBDEB58-D51E-0CF6-DBB1-E4722916AC92}"/>
-              </a:ext>
-            </a:extLst>
-          </p:cNvPr>
-          <p:cNvSpPr>
-            <a:spLocks noGrp="1"/>
-          </p:cNvSpPr>
-          <p:nvPr>
-            <p:ph type="dt" idx="1"/>
-          </p:nvPr>
-        </p:nvSpPr>
-        <p:spPr/>
-        <p:txBody>
-          <a:bodyPr vert="horz" lIns="91440" tIns="45720" rIns="91440" bIns="45720" rtlCol="0"/>
-          <a:lstStyle/>
-          <a:p>
-            <a:fld id="{179A66FE-F4F6-454F-8E0C-628A9DA985DF}" type="datetimeFigureOut">
-              <a:t>06/08/2026</a:t>
-            </a:fld>
-            <a:endParaRPr lang="fr-FR"/>
-          </a:p>
-        </p:txBody>
-      </p:sp>
-      <p:sp>
-        <p:nvSpPr>
-          <p:cNvPr id="9" name="Espace réservé du numéro de diapositive 12">
-            <a:extLst>
-              <a:ext uri="{FF2B5EF4-FFF2-40B4-BE49-F238E27FC236}">
-                <a16:creationId xmlns:a16="http://schemas.microsoft.com/office/drawing/2014/main" id="{103C3885-A870-3B6C-FBDC-986B65F7961C}"/>
-              </a:ext>
-            </a:extLst>
-          </p:cNvPr>
-          <p:cNvSpPr txBox="1">
-            <a:spLocks noGrp="1"/>
-          </p:cNvSpPr>
-          <p:nvPr>
-            <p:ph type="sldNum" sz="quarter" idx="5"/>
-          </p:nvPr>
-        </p:nvSpPr>
-        <p:spPr>
-          <a:ln/>
-        </p:spPr>
-        <p:txBody>
-          <a:bodyPr lIns="0" tIns="0" rIns="0" bIns="0" anchor="b" anchorCtr="0">
-            <a:noAutofit/>
-          </a:bodyPr>
-          <a:lstStyle/>
-          <a:p>
-            <a:pPr lvl="0"/>
-            <a:fld id="{0941C839-6C4E-4BA1-AFC6-477B4C42B86E}" type="slidenum">
-              <a:t>9</a:t>
-            </a:fld>
-            <a:endParaRPr lang="fr-FR"/>
-          </a:p>
-        </p:txBody>
-      </p:sp>
-      <p:sp>
-        <p:nvSpPr>
-          <p:cNvPr id="11" name="Espace réservé du numéro de diapositive 6">
-            <a:extLst>
-              <a:ext uri="{FF2B5EF4-FFF2-40B4-BE49-F238E27FC236}">
-                <a16:creationId xmlns:a16="http://schemas.microsoft.com/office/drawing/2014/main" id="{FC2F4392-85C2-01DA-A340-C6D3B47C3DB6}"/>
-              </a:ext>
-            </a:extLst>
-          </p:cNvPr>
-          <p:cNvSpPr>
-            <a:spLocks noGrp="1"/>
-          </p:cNvSpPr>
-          <p:nvPr>
-            <p:ph type="sldNum" sz="quarter" idx="5"/>
-          </p:nvPr>
-        </p:nvSpPr>
-        <p:spPr/>
-        <p:txBody>
-          <a:bodyPr vert="horz" lIns="91440" tIns="45720" rIns="91440" bIns="45720" rtlCol="0" anchor="b"/>
-          <a:lstStyle/>
-          <a:p>
-            <a:fld id="{5A8F3918-74C9-4FF7-86C9-18982F794D18}" type="slidenum">
-              <a:t>9</a:t>
-            </a:fld>
-            <a:endParaRPr lang="fr-FR"/>
-          </a:p>
-        </p:txBody>
-      </p:sp>
-      <p:sp>
-        <p:nvSpPr>
-          <p:cNvPr id="2" name="Espace réservé de l'image des diapositives 1">
-            <a:extLst>
-              <a:ext uri="{FF2B5EF4-FFF2-40B4-BE49-F238E27FC236}">
-                <a16:creationId xmlns:a16="http://schemas.microsoft.com/office/drawing/2014/main" id="{96480893-3C66-D9A2-BA03-C0512A3DB322}"/>
-              </a:ext>
-            </a:extLst>
-          </p:cNvPr>
-          <p:cNvSpPr>
-            <a:spLocks noGrp="1" noRot="1" noChangeAspect="1" noResize="1"/>
-          </p:cNvSpPr>
-          <p:nvPr>
-            <p:ph type="sldImg"/>
-          </p:nvPr>
-        </p:nvSpPr>
-        <p:spPr>
-          <a:xfrm>
-            <a:off x="217488" y="812800"/>
-            <a:ext cx="7123112" cy="4008438"/>
-          </a:xfrm>
-          <a:solidFill>
-            <a:schemeClr val="accent1"/>
-          </a:solidFill>
-          <a:ln w="25400">
-            <a:solidFill>
-              <a:schemeClr val="accent1">
-                <a:shade val="50000"/>
-              </a:schemeClr>
-            </a:solidFill>
-            <a:prstDash val="solid"/>
-          </a:ln>
-        </p:spPr>
-      </p:sp>
-      <p:sp>
-        <p:nvSpPr>
-          <p:cNvPr id="3" name="Espace réservé des notes 2">
-            <a:extLst>
-              <a:ext uri="{FF2B5EF4-FFF2-40B4-BE49-F238E27FC236}">
-                <a16:creationId xmlns:a16="http://schemas.microsoft.com/office/drawing/2014/main" id="{89149EB0-B48A-F72B-CD9C-360CF5BA6140}"/>
-              </a:ext>
-            </a:extLst>
-          </p:cNvPr>
-          <p:cNvSpPr txBox="1">
-            <a:spLocks noGrp="1"/>
-          </p:cNvSpPr>
-          <p:nvPr>
-            <p:ph type="body" sz="quarter" idx="1"/>
-          </p:nvPr>
-        </p:nvSpPr>
-        <p:spPr>
-          <a:xfrm>
-            <a:off x="756000" y="5078520"/>
-            <a:ext cx="6047640" cy="4811040"/>
-          </a:xfrm>
-          <a:noFill/>
-          <a:ln>
-            <a:noFill/>
-          </a:ln>
-        </p:spPr>
-        <p:txBody>
-          <a:bodyPr lIns="0" tIns="0" rIns="0" bIns="0">
-            <a:spAutoFit/>
-          </a:bodyPr>
-          <a:lstStyle/>
-          <a:p>
-            <a:endParaRPr lang="fr-FR"/>
-          </a:p>
-        </p:txBody>
-      </p:sp>
-    </p:spTree>
-    <p:extLst>
-      <p:ext uri="{BB962C8B-B14F-4D97-AF65-F5344CB8AC3E}">
-        <p14:creationId xmlns:p14="http://schemas.microsoft.com/office/powerpoint/2010/main" val="1917856242"/>
+        <p14:creationId xmlns:p14="http://schemas.microsoft.com/office/powerpoint/2010/main" val="1783775119"/>
       </p:ext>
     </p:extLst>
   </p:cSld>
@@ -2947,7 +4515,7 @@
           <a:p>
             <a:fld id="{638941B0-F4D5-4460-BCAD-F7E2B41A8257}" type="datetimeFigureOut">
               <a:rPr lang="fr-FR" smtClean="0"/>
-              <a:t>06/08/2026</a:t>
+              <a:t>31/08/2026</a:t>
             </a:fld>
             <a:endParaRPr lang="fr-FR"/>
           </a:p>
@@ -3116,7 +4684,7 @@
           <a:p>
             <a:fld id="{638941B0-F4D5-4460-BCAD-F7E2B41A8257}" type="datetimeFigureOut">
               <a:rPr lang="fr-FR" smtClean="0"/>
-              <a:t>06/08/2026</a:t>
+              <a:t>31/08/2026</a:t>
             </a:fld>
             <a:endParaRPr lang="fr-FR"/>
           </a:p>
@@ -3295,7 +4863,7 @@
           <a:p>
             <a:fld id="{638941B0-F4D5-4460-BCAD-F7E2B41A8257}" type="datetimeFigureOut">
               <a:rPr lang="fr-FR" smtClean="0"/>
-              <a:t>06/08/2026</a:t>
+              <a:t>31/08/2026</a:t>
             </a:fld>
             <a:endParaRPr lang="fr-FR"/>
           </a:p>
@@ -3464,7 +5032,7 @@
           <a:p>
             <a:fld id="{638941B0-F4D5-4460-BCAD-F7E2B41A8257}" type="datetimeFigureOut">
               <a:rPr lang="fr-FR" smtClean="0"/>
-              <a:t>06/08/2026</a:t>
+              <a:t>31/08/2026</a:t>
             </a:fld>
             <a:endParaRPr lang="fr-FR"/>
           </a:p>
@@ -3710,7 +5278,7 @@
           <a:p>
             <a:fld id="{638941B0-F4D5-4460-BCAD-F7E2B41A8257}" type="datetimeFigureOut">
               <a:rPr lang="fr-FR" smtClean="0"/>
-              <a:t>06/08/2026</a:t>
+              <a:t>31/08/2026</a:t>
             </a:fld>
             <a:endParaRPr lang="fr-FR"/>
           </a:p>
@@ -3940,7 +5508,7 @@
           <a:p>
             <a:fld id="{638941B0-F4D5-4460-BCAD-F7E2B41A8257}" type="datetimeFigureOut">
               <a:rPr lang="fr-FR" smtClean="0"/>
-              <a:t>06/08/2026</a:t>
+              <a:t>31/08/2026</a:t>
             </a:fld>
             <a:endParaRPr lang="fr-FR"/>
           </a:p>
@@ -4305,7 +5873,7 @@
           <a:p>
             <a:fld id="{638941B0-F4D5-4460-BCAD-F7E2B41A8257}" type="datetimeFigureOut">
               <a:rPr lang="fr-FR" smtClean="0"/>
-              <a:t>06/08/2026</a:t>
+              <a:t>31/08/2026</a:t>
             </a:fld>
             <a:endParaRPr lang="fr-FR"/>
           </a:p>
@@ -4423,7 +5991,7 @@
           <a:p>
             <a:fld id="{638941B0-F4D5-4460-BCAD-F7E2B41A8257}" type="datetimeFigureOut">
               <a:rPr lang="fr-FR" smtClean="0"/>
-              <a:t>06/08/2026</a:t>
+              <a:t>31/08/2026</a:t>
             </a:fld>
             <a:endParaRPr lang="fr-FR"/>
           </a:p>
@@ -4519,7 +6087,7 @@
           <a:p>
             <a:fld id="{638941B0-F4D5-4460-BCAD-F7E2B41A8257}" type="datetimeFigureOut">
               <a:rPr lang="fr-FR" smtClean="0"/>
-              <a:t>06/08/2026</a:t>
+              <a:t>31/08/2026</a:t>
             </a:fld>
             <a:endParaRPr lang="fr-FR"/>
           </a:p>
@@ -4795,7 +6363,7 @@
           <a:p>
             <a:fld id="{638941B0-F4D5-4460-BCAD-F7E2B41A8257}" type="datetimeFigureOut">
               <a:rPr lang="fr-FR" smtClean="0"/>
-              <a:t>06/08/2026</a:t>
+              <a:t>31/08/2026</a:t>
             </a:fld>
             <a:endParaRPr lang="fr-FR"/>
           </a:p>
@@ -5048,7 +6616,7 @@
           <a:p>
             <a:fld id="{638941B0-F4D5-4460-BCAD-F7E2B41A8257}" type="datetimeFigureOut">
               <a:rPr lang="fr-FR" smtClean="0"/>
-              <a:t>06/08/2026</a:t>
+              <a:t>31/08/2026</a:t>
             </a:fld>
             <a:endParaRPr lang="fr-FR"/>
           </a:p>
@@ -5260,7 +6828,7 @@
           <a:p>
             <a:fld id="{638941B0-F4D5-4460-BCAD-F7E2B41A8257}" type="datetimeFigureOut">
               <a:rPr lang="fr-FR" smtClean="0"/>
-              <a:t>06/08/2026</a:t>
+              <a:t>31/08/2026</a:t>
             </a:fld>
             <a:endParaRPr lang="fr-FR"/>
           </a:p>
@@ -5940,6 +7508,3222 @@
         <p:cNvPr id="1" name="">
           <a:extLst>
             <a:ext uri="{FF2B5EF4-FFF2-40B4-BE49-F238E27FC236}">
+              <a16:creationId xmlns:a16="http://schemas.microsoft.com/office/drawing/2014/main" id="{565D99F9-FF70-6781-F9D5-54CC98F74A35}"/>
+            </a:ext>
+          </a:extLst>
+        </p:cNvPr>
+        <p:cNvGrpSpPr/>
+        <p:nvPr/>
+      </p:nvGrpSpPr>
+      <p:grpSpPr>
+        <a:xfrm>
+          <a:off x="0" y="0"/>
+          <a:ext cx="0" cy="0"/>
+          <a:chOff x="0" y="0"/>
+          <a:chExt cx="0" cy="0"/>
+        </a:xfrm>
+      </p:grpSpPr>
+      <p:sp>
+        <p:nvSpPr>
+          <p:cNvPr id="3" name="ZoneTexte 6">
+            <a:extLst>
+              <a:ext uri="{FF2B5EF4-FFF2-40B4-BE49-F238E27FC236}">
+                <a16:creationId xmlns:a16="http://schemas.microsoft.com/office/drawing/2014/main" id="{15C009A0-47F0-2F8B-786B-1F6C7B6147C9}"/>
+              </a:ext>
+            </a:extLst>
+          </p:cNvPr>
+          <p:cNvSpPr txBox="1"/>
+          <p:nvPr/>
+        </p:nvSpPr>
+        <p:spPr>
+          <a:xfrm>
+            <a:off x="692289" y="365303"/>
+            <a:ext cx="8756869" cy="656185"/>
+          </a:xfrm>
+          <a:prstGeom prst="rect">
+            <a:avLst/>
+          </a:prstGeom>
+          <a:noFill/>
+          <a:ln>
+            <a:noFill/>
+          </a:ln>
+        </p:spPr>
+        <p:txBody>
+          <a:bodyPr vert="horz" wrap="square" lIns="91673" tIns="45837" rIns="91673" bIns="45837" anchor="t" anchorCtr="0" compatLnSpc="0">
+            <a:spAutoFit/>
+          </a:bodyPr>
+          <a:lstStyle>
+            <a:defPPr>
+              <a:defRPr lang="fr-FR"/>
+            </a:defPPr>
+            <a:lvl1pPr marL="0" algn="l" defTabSz="930493" rtl="0" eaLnBrk="1" latinLnBrk="0" hangingPunct="1">
+              <a:defRPr sz="1832" kern="1200">
+                <a:solidFill>
+                  <a:schemeClr val="tx1"/>
+                </a:solidFill>
+                <a:latin typeface="+mn-lt"/>
+                <a:ea typeface="+mn-ea"/>
+                <a:cs typeface="+mn-cs"/>
+              </a:defRPr>
+            </a:lvl1pPr>
+            <a:lvl2pPr marL="465247" algn="l" defTabSz="930493" rtl="0" eaLnBrk="1" latinLnBrk="0" hangingPunct="1">
+              <a:defRPr sz="1832" kern="1200">
+                <a:solidFill>
+                  <a:schemeClr val="tx1"/>
+                </a:solidFill>
+                <a:latin typeface="+mn-lt"/>
+                <a:ea typeface="+mn-ea"/>
+                <a:cs typeface="+mn-cs"/>
+              </a:defRPr>
+            </a:lvl2pPr>
+            <a:lvl3pPr marL="930493" algn="l" defTabSz="930493" rtl="0" eaLnBrk="1" latinLnBrk="0" hangingPunct="1">
+              <a:defRPr sz="1832" kern="1200">
+                <a:solidFill>
+                  <a:schemeClr val="tx1"/>
+                </a:solidFill>
+                <a:latin typeface="+mn-lt"/>
+                <a:ea typeface="+mn-ea"/>
+                <a:cs typeface="+mn-cs"/>
+              </a:defRPr>
+            </a:lvl3pPr>
+            <a:lvl4pPr marL="1395740" algn="l" defTabSz="930493" rtl="0" eaLnBrk="1" latinLnBrk="0" hangingPunct="1">
+              <a:defRPr sz="1832" kern="1200">
+                <a:solidFill>
+                  <a:schemeClr val="tx1"/>
+                </a:solidFill>
+                <a:latin typeface="+mn-lt"/>
+                <a:ea typeface="+mn-ea"/>
+                <a:cs typeface="+mn-cs"/>
+              </a:defRPr>
+            </a:lvl4pPr>
+            <a:lvl5pPr marL="1860987" algn="l" defTabSz="930493" rtl="0" eaLnBrk="1" latinLnBrk="0" hangingPunct="1">
+              <a:defRPr sz="1832" kern="1200">
+                <a:solidFill>
+                  <a:schemeClr val="tx1"/>
+                </a:solidFill>
+                <a:latin typeface="+mn-lt"/>
+                <a:ea typeface="+mn-ea"/>
+                <a:cs typeface="+mn-cs"/>
+              </a:defRPr>
+            </a:lvl5pPr>
+            <a:lvl6pPr marL="2326234" algn="l" defTabSz="930493" rtl="0" eaLnBrk="1" latinLnBrk="0" hangingPunct="1">
+              <a:defRPr sz="1832" kern="1200">
+                <a:solidFill>
+                  <a:schemeClr val="tx1"/>
+                </a:solidFill>
+                <a:latin typeface="+mn-lt"/>
+                <a:ea typeface="+mn-ea"/>
+                <a:cs typeface="+mn-cs"/>
+              </a:defRPr>
+            </a:lvl6pPr>
+            <a:lvl7pPr marL="2791480" algn="l" defTabSz="930493" rtl="0" eaLnBrk="1" latinLnBrk="0" hangingPunct="1">
+              <a:defRPr sz="1832" kern="1200">
+                <a:solidFill>
+                  <a:schemeClr val="tx1"/>
+                </a:solidFill>
+                <a:latin typeface="+mn-lt"/>
+                <a:ea typeface="+mn-ea"/>
+                <a:cs typeface="+mn-cs"/>
+              </a:defRPr>
+            </a:lvl7pPr>
+            <a:lvl8pPr marL="3256727" algn="l" defTabSz="930493" rtl="0" eaLnBrk="1" latinLnBrk="0" hangingPunct="1">
+              <a:defRPr sz="1832" kern="1200">
+                <a:solidFill>
+                  <a:schemeClr val="tx1"/>
+                </a:solidFill>
+                <a:latin typeface="+mn-lt"/>
+                <a:ea typeface="+mn-ea"/>
+                <a:cs typeface="+mn-cs"/>
+              </a:defRPr>
+            </a:lvl8pPr>
+            <a:lvl9pPr marL="3721974" algn="l" defTabSz="930493" rtl="0" eaLnBrk="1" latinLnBrk="0" hangingPunct="1">
+              <a:defRPr sz="1832" kern="1200">
+                <a:solidFill>
+                  <a:schemeClr val="tx1"/>
+                </a:solidFill>
+                <a:latin typeface="+mn-lt"/>
+                <a:ea typeface="+mn-ea"/>
+                <a:cs typeface="+mn-cs"/>
+              </a:defRPr>
+            </a:lvl9pPr>
+          </a:lstStyle>
+          <a:p>
+            <a:pPr>
+              <a:defRPr sz="1630"/>
+            </a:pPr>
+            <a:r>
+              <a:rPr lang="fr-FR" sz="3600" kern="0" dirty="0">
+                <a:solidFill>
+                  <a:srgbClr val="1F4E79"/>
+                </a:solidFill>
+                <a:ea typeface="+mn-lt"/>
+                <a:cs typeface="+mn-lt"/>
+              </a:rPr>
+              <a:t>{{</a:t>
+            </a:r>
+            <a:r>
+              <a:rPr lang="fr-FR" sz="3600" kern="0" dirty="0" err="1">
+                <a:solidFill>
+                  <a:srgbClr val="1F4E79"/>
+                </a:solidFill>
+                <a:ea typeface="+mn-lt"/>
+                <a:cs typeface="+mn-lt"/>
+              </a:rPr>
+              <a:t>project_name</a:t>
+            </a:r>
+            <a:r>
+              <a:rPr lang="fr-FR" sz="3600" kern="0" dirty="0">
+                <a:solidFill>
+                  <a:srgbClr val="1F4E79"/>
+                </a:solidFill>
+                <a:ea typeface="+mn-lt"/>
+                <a:cs typeface="+mn-lt"/>
+              </a:rPr>
+              <a:t>}}</a:t>
+            </a:r>
+            <a:endParaRPr lang="fr-FR" sz="3600" kern="0" dirty="0">
+              <a:solidFill>
+                <a:srgbClr val="1F4E79"/>
+              </a:solidFill>
+            </a:endParaRPr>
+          </a:p>
+        </p:txBody>
+      </p:sp>
+      <p:sp>
+        <p:nvSpPr>
+          <p:cNvPr id="4" name="Rectangle 1">
+            <a:extLst>
+              <a:ext uri="{FF2B5EF4-FFF2-40B4-BE49-F238E27FC236}">
+                <a16:creationId xmlns:a16="http://schemas.microsoft.com/office/drawing/2014/main" id="{CD72E0E4-5687-7167-AC4D-92B22160BD1C}"/>
+              </a:ext>
+            </a:extLst>
+          </p:cNvPr>
+          <p:cNvSpPr/>
+          <p:nvPr/>
+        </p:nvSpPr>
+        <p:spPr>
+          <a:xfrm>
+            <a:off x="692289" y="1379467"/>
+            <a:ext cx="10803891" cy="4709834"/>
+          </a:xfrm>
+          <a:prstGeom prst="rect">
+            <a:avLst/>
+          </a:prstGeom>
+          <a:noFill/>
+          <a:ln>
+            <a:noFill/>
+            <a:prstDash val="solid"/>
+          </a:ln>
+        </p:spPr>
+        <p:txBody>
+          <a:bodyPr vert="horz" wrap="square" lIns="91673" tIns="45837" rIns="91673" bIns="45837" anchor="t" anchorCtr="0" compatLnSpc="0">
+            <a:noAutofit/>
+          </a:bodyPr>
+          <a:lstStyle>
+            <a:defPPr>
+              <a:defRPr lang="fr-FR"/>
+            </a:defPPr>
+            <a:lvl1pPr marL="0" algn="l" defTabSz="930493" rtl="0" eaLnBrk="1" latinLnBrk="0" hangingPunct="1">
+              <a:defRPr sz="1832" kern="1200">
+                <a:solidFill>
+                  <a:schemeClr val="tx1"/>
+                </a:solidFill>
+                <a:latin typeface="+mn-lt"/>
+                <a:ea typeface="+mn-ea"/>
+                <a:cs typeface="+mn-cs"/>
+              </a:defRPr>
+            </a:lvl1pPr>
+            <a:lvl2pPr marL="465247" algn="l" defTabSz="930493" rtl="0" eaLnBrk="1" latinLnBrk="0" hangingPunct="1">
+              <a:defRPr sz="1832" kern="1200">
+                <a:solidFill>
+                  <a:schemeClr val="tx1"/>
+                </a:solidFill>
+                <a:latin typeface="+mn-lt"/>
+                <a:ea typeface="+mn-ea"/>
+                <a:cs typeface="+mn-cs"/>
+              </a:defRPr>
+            </a:lvl2pPr>
+            <a:lvl3pPr marL="930493" algn="l" defTabSz="930493" rtl="0" eaLnBrk="1" latinLnBrk="0" hangingPunct="1">
+              <a:defRPr sz="1832" kern="1200">
+                <a:solidFill>
+                  <a:schemeClr val="tx1"/>
+                </a:solidFill>
+                <a:latin typeface="+mn-lt"/>
+                <a:ea typeface="+mn-ea"/>
+                <a:cs typeface="+mn-cs"/>
+              </a:defRPr>
+            </a:lvl3pPr>
+            <a:lvl4pPr marL="1395740" algn="l" defTabSz="930493" rtl="0" eaLnBrk="1" latinLnBrk="0" hangingPunct="1">
+              <a:defRPr sz="1832" kern="1200">
+                <a:solidFill>
+                  <a:schemeClr val="tx1"/>
+                </a:solidFill>
+                <a:latin typeface="+mn-lt"/>
+                <a:ea typeface="+mn-ea"/>
+                <a:cs typeface="+mn-cs"/>
+              </a:defRPr>
+            </a:lvl4pPr>
+            <a:lvl5pPr marL="1860987" algn="l" defTabSz="930493" rtl="0" eaLnBrk="1" latinLnBrk="0" hangingPunct="1">
+              <a:defRPr sz="1832" kern="1200">
+                <a:solidFill>
+                  <a:schemeClr val="tx1"/>
+                </a:solidFill>
+                <a:latin typeface="+mn-lt"/>
+                <a:ea typeface="+mn-ea"/>
+                <a:cs typeface="+mn-cs"/>
+              </a:defRPr>
+            </a:lvl5pPr>
+            <a:lvl6pPr marL="2326234" algn="l" defTabSz="930493" rtl="0" eaLnBrk="1" latinLnBrk="0" hangingPunct="1">
+              <a:defRPr sz="1832" kern="1200">
+                <a:solidFill>
+                  <a:schemeClr val="tx1"/>
+                </a:solidFill>
+                <a:latin typeface="+mn-lt"/>
+                <a:ea typeface="+mn-ea"/>
+                <a:cs typeface="+mn-cs"/>
+              </a:defRPr>
+            </a:lvl6pPr>
+            <a:lvl7pPr marL="2791480" algn="l" defTabSz="930493" rtl="0" eaLnBrk="1" latinLnBrk="0" hangingPunct="1">
+              <a:defRPr sz="1832" kern="1200">
+                <a:solidFill>
+                  <a:schemeClr val="tx1"/>
+                </a:solidFill>
+                <a:latin typeface="+mn-lt"/>
+                <a:ea typeface="+mn-ea"/>
+                <a:cs typeface="+mn-cs"/>
+              </a:defRPr>
+            </a:lvl7pPr>
+            <a:lvl8pPr marL="3256727" algn="l" defTabSz="930493" rtl="0" eaLnBrk="1" latinLnBrk="0" hangingPunct="1">
+              <a:defRPr sz="1832" kern="1200">
+                <a:solidFill>
+                  <a:schemeClr val="tx1"/>
+                </a:solidFill>
+                <a:latin typeface="+mn-lt"/>
+                <a:ea typeface="+mn-ea"/>
+                <a:cs typeface="+mn-cs"/>
+              </a:defRPr>
+            </a:lvl8pPr>
+            <a:lvl9pPr marL="3721974" algn="l" defTabSz="930493" rtl="0" eaLnBrk="1" latinLnBrk="0" hangingPunct="1">
+              <a:defRPr sz="1832" kern="1200">
+                <a:solidFill>
+                  <a:schemeClr val="tx1"/>
+                </a:solidFill>
+                <a:latin typeface="+mn-lt"/>
+                <a:ea typeface="+mn-ea"/>
+                <a:cs typeface="+mn-cs"/>
+              </a:defRPr>
+            </a:lvl9pPr>
+          </a:lstStyle>
+          <a:p>
+            <a:r>
+              <a:rPr lang="fr-FR" dirty="0"/>
+              <a:t>{{</a:t>
+            </a:r>
+            <a:r>
+              <a:rPr lang="fr-FR" dirty="0" err="1"/>
+              <a:t>chart:velocity</a:t>
+            </a:r>
+            <a:r>
+              <a:rPr lang="fr-FR" dirty="0"/>
+              <a:t>}}</a:t>
+            </a:r>
+          </a:p>
+        </p:txBody>
+      </p:sp>
+      <p:sp>
+        <p:nvSpPr>
+          <p:cNvPr id="5" name="Espace réservé du numéro de diapositive 4">
+            <a:extLst>
+              <a:ext uri="{FF2B5EF4-FFF2-40B4-BE49-F238E27FC236}">
+                <a16:creationId xmlns:a16="http://schemas.microsoft.com/office/drawing/2014/main" id="{A681795B-B5D5-D45D-69B7-3569813C69C0}"/>
+              </a:ext>
+            </a:extLst>
+          </p:cNvPr>
+          <p:cNvSpPr>
+            <a:spLocks noGrp="1"/>
+          </p:cNvSpPr>
+          <p:nvPr>
+            <p:ph type="sldNum" sz="quarter" idx="12"/>
+          </p:nvPr>
+        </p:nvSpPr>
+        <p:spPr/>
+        <p:txBody>
+          <a:bodyPr/>
+          <a:lstStyle/>
+          <a:p>
+            <a:fld id="{27C6CCC6-2BE5-4E42-96A4-D1E8E81A3D8E}" type="slidenum">
+              <a:rPr lang="fr-FR" smtClean="0"/>
+              <a:t>10</a:t>
+            </a:fld>
+            <a:endParaRPr lang="fr-FR"/>
+          </a:p>
+        </p:txBody>
+      </p:sp>
+      <p:pic>
+        <p:nvPicPr>
+          <p:cNvPr id="6" name="Image 5" descr="Une image contenant Police, logo, Graphique, symbole&#10;&#10;Le contenu généré par l’IA peut être incorrect.">
+            <a:extLst>
+              <a:ext uri="{FF2B5EF4-FFF2-40B4-BE49-F238E27FC236}">
+                <a16:creationId xmlns:a16="http://schemas.microsoft.com/office/drawing/2014/main" id="{3C10B4A9-4EEE-DDBB-F8B3-7565E7812743}"/>
+              </a:ext>
+            </a:extLst>
+          </p:cNvPr>
+          <p:cNvPicPr>
+            <a:picLocks noChangeAspect="1"/>
+          </p:cNvPicPr>
+          <p:nvPr/>
+        </p:nvPicPr>
+        <p:blipFill>
+          <a:blip r:embed="rId3"/>
+          <a:stretch>
+            <a:fillRect/>
+          </a:stretch>
+        </p:blipFill>
+        <p:spPr>
+          <a:xfrm>
+            <a:off x="9978572" y="507546"/>
+            <a:ext cx="1524000" cy="400050"/>
+          </a:xfrm>
+          <a:prstGeom prst="rect">
+            <a:avLst/>
+          </a:prstGeom>
+        </p:spPr>
+      </p:pic>
+    </p:spTree>
+    <p:extLst>
+      <p:ext uri="{BB962C8B-B14F-4D97-AF65-F5344CB8AC3E}">
+        <p14:creationId xmlns:p14="http://schemas.microsoft.com/office/powerpoint/2010/main" val="1211203897"/>
+      </p:ext>
+    </p:extLst>
+  </p:cSld>
+  <p:clrMapOvr>
+    <a:masterClrMapping/>
+  </p:clrMapOvr>
+</p:sld>
+</file>
+
+<file path=ppt/slides/slide11.xml><?xml version="1.0" encoding="utf-8"?>
+<p:sld xmlns:a="http://schemas.openxmlformats.org/drawingml/2006/main" xmlns:r="http://schemas.openxmlformats.org/officeDocument/2006/relationships" xmlns:p="http://schemas.openxmlformats.org/presentationml/2006/main">
+  <p:cSld>
+    <p:spTree>
+      <p:nvGrpSpPr>
+        <p:cNvPr id="1" name="">
+          <a:extLst>
+            <a:ext uri="{FF2B5EF4-FFF2-40B4-BE49-F238E27FC236}">
+              <a16:creationId xmlns:a16="http://schemas.microsoft.com/office/drawing/2014/main" id="{474176F0-7CE1-ABB8-35B6-61109FDC6A2A}"/>
+            </a:ext>
+          </a:extLst>
+        </p:cNvPr>
+        <p:cNvGrpSpPr/>
+        <p:nvPr/>
+      </p:nvGrpSpPr>
+      <p:grpSpPr>
+        <a:xfrm>
+          <a:off x="0" y="0"/>
+          <a:ext cx="0" cy="0"/>
+          <a:chOff x="0" y="0"/>
+          <a:chExt cx="0" cy="0"/>
+        </a:xfrm>
+      </p:grpSpPr>
+      <p:sp>
+        <p:nvSpPr>
+          <p:cNvPr id="3" name="ZoneTexte 6">
+            <a:extLst>
+              <a:ext uri="{FF2B5EF4-FFF2-40B4-BE49-F238E27FC236}">
+                <a16:creationId xmlns:a16="http://schemas.microsoft.com/office/drawing/2014/main" id="{75F6C4EA-67BC-448F-16AB-ED01F9EE7FFD}"/>
+              </a:ext>
+            </a:extLst>
+          </p:cNvPr>
+          <p:cNvSpPr txBox="1"/>
+          <p:nvPr/>
+        </p:nvSpPr>
+        <p:spPr>
+          <a:xfrm>
+            <a:off x="692289" y="365303"/>
+            <a:ext cx="8756869" cy="656185"/>
+          </a:xfrm>
+          <a:prstGeom prst="rect">
+            <a:avLst/>
+          </a:prstGeom>
+          <a:noFill/>
+          <a:ln>
+            <a:noFill/>
+          </a:ln>
+        </p:spPr>
+        <p:txBody>
+          <a:bodyPr vert="horz" wrap="square" lIns="91673" tIns="45837" rIns="91673" bIns="45837" anchor="t" anchorCtr="0" compatLnSpc="0">
+            <a:spAutoFit/>
+          </a:bodyPr>
+          <a:lstStyle>
+            <a:defPPr>
+              <a:defRPr lang="fr-FR"/>
+            </a:defPPr>
+            <a:lvl1pPr marL="0" algn="l" defTabSz="930493" rtl="0" eaLnBrk="1" latinLnBrk="0" hangingPunct="1">
+              <a:defRPr sz="1832" kern="1200">
+                <a:solidFill>
+                  <a:schemeClr val="tx1"/>
+                </a:solidFill>
+                <a:latin typeface="+mn-lt"/>
+                <a:ea typeface="+mn-ea"/>
+                <a:cs typeface="+mn-cs"/>
+              </a:defRPr>
+            </a:lvl1pPr>
+            <a:lvl2pPr marL="465247" algn="l" defTabSz="930493" rtl="0" eaLnBrk="1" latinLnBrk="0" hangingPunct="1">
+              <a:defRPr sz="1832" kern="1200">
+                <a:solidFill>
+                  <a:schemeClr val="tx1"/>
+                </a:solidFill>
+                <a:latin typeface="+mn-lt"/>
+                <a:ea typeface="+mn-ea"/>
+                <a:cs typeface="+mn-cs"/>
+              </a:defRPr>
+            </a:lvl2pPr>
+            <a:lvl3pPr marL="930493" algn="l" defTabSz="930493" rtl="0" eaLnBrk="1" latinLnBrk="0" hangingPunct="1">
+              <a:defRPr sz="1832" kern="1200">
+                <a:solidFill>
+                  <a:schemeClr val="tx1"/>
+                </a:solidFill>
+                <a:latin typeface="+mn-lt"/>
+                <a:ea typeface="+mn-ea"/>
+                <a:cs typeface="+mn-cs"/>
+              </a:defRPr>
+            </a:lvl3pPr>
+            <a:lvl4pPr marL="1395740" algn="l" defTabSz="930493" rtl="0" eaLnBrk="1" latinLnBrk="0" hangingPunct="1">
+              <a:defRPr sz="1832" kern="1200">
+                <a:solidFill>
+                  <a:schemeClr val="tx1"/>
+                </a:solidFill>
+                <a:latin typeface="+mn-lt"/>
+                <a:ea typeface="+mn-ea"/>
+                <a:cs typeface="+mn-cs"/>
+              </a:defRPr>
+            </a:lvl4pPr>
+            <a:lvl5pPr marL="1860987" algn="l" defTabSz="930493" rtl="0" eaLnBrk="1" latinLnBrk="0" hangingPunct="1">
+              <a:defRPr sz="1832" kern="1200">
+                <a:solidFill>
+                  <a:schemeClr val="tx1"/>
+                </a:solidFill>
+                <a:latin typeface="+mn-lt"/>
+                <a:ea typeface="+mn-ea"/>
+                <a:cs typeface="+mn-cs"/>
+              </a:defRPr>
+            </a:lvl5pPr>
+            <a:lvl6pPr marL="2326234" algn="l" defTabSz="930493" rtl="0" eaLnBrk="1" latinLnBrk="0" hangingPunct="1">
+              <a:defRPr sz="1832" kern="1200">
+                <a:solidFill>
+                  <a:schemeClr val="tx1"/>
+                </a:solidFill>
+                <a:latin typeface="+mn-lt"/>
+                <a:ea typeface="+mn-ea"/>
+                <a:cs typeface="+mn-cs"/>
+              </a:defRPr>
+            </a:lvl6pPr>
+            <a:lvl7pPr marL="2791480" algn="l" defTabSz="930493" rtl="0" eaLnBrk="1" latinLnBrk="0" hangingPunct="1">
+              <a:defRPr sz="1832" kern="1200">
+                <a:solidFill>
+                  <a:schemeClr val="tx1"/>
+                </a:solidFill>
+                <a:latin typeface="+mn-lt"/>
+                <a:ea typeface="+mn-ea"/>
+                <a:cs typeface="+mn-cs"/>
+              </a:defRPr>
+            </a:lvl7pPr>
+            <a:lvl8pPr marL="3256727" algn="l" defTabSz="930493" rtl="0" eaLnBrk="1" latinLnBrk="0" hangingPunct="1">
+              <a:defRPr sz="1832" kern="1200">
+                <a:solidFill>
+                  <a:schemeClr val="tx1"/>
+                </a:solidFill>
+                <a:latin typeface="+mn-lt"/>
+                <a:ea typeface="+mn-ea"/>
+                <a:cs typeface="+mn-cs"/>
+              </a:defRPr>
+            </a:lvl8pPr>
+            <a:lvl9pPr marL="3721974" algn="l" defTabSz="930493" rtl="0" eaLnBrk="1" latinLnBrk="0" hangingPunct="1">
+              <a:defRPr sz="1832" kern="1200">
+                <a:solidFill>
+                  <a:schemeClr val="tx1"/>
+                </a:solidFill>
+                <a:latin typeface="+mn-lt"/>
+                <a:ea typeface="+mn-ea"/>
+                <a:cs typeface="+mn-cs"/>
+              </a:defRPr>
+            </a:lvl9pPr>
+          </a:lstStyle>
+          <a:p>
+            <a:pPr>
+              <a:defRPr sz="1630"/>
+            </a:pPr>
+            <a:r>
+              <a:rPr lang="fr-FR" sz="3600" kern="0" dirty="0">
+                <a:solidFill>
+                  <a:srgbClr val="1F4E79"/>
+                </a:solidFill>
+                <a:ea typeface="+mn-lt"/>
+                <a:cs typeface="+mn-lt"/>
+              </a:rPr>
+              <a:t>{{</a:t>
+            </a:r>
+            <a:r>
+              <a:rPr lang="fr-FR" sz="3600" kern="0" dirty="0" err="1">
+                <a:solidFill>
+                  <a:srgbClr val="1F4E79"/>
+                </a:solidFill>
+                <a:ea typeface="+mn-lt"/>
+                <a:cs typeface="+mn-lt"/>
+              </a:rPr>
+              <a:t>project_name</a:t>
+            </a:r>
+            <a:r>
+              <a:rPr lang="fr-FR" sz="3600" kern="0" dirty="0">
+                <a:solidFill>
+                  <a:srgbClr val="1F4E79"/>
+                </a:solidFill>
+                <a:ea typeface="+mn-lt"/>
+                <a:cs typeface="+mn-lt"/>
+              </a:rPr>
+              <a:t>}}</a:t>
+            </a:r>
+            <a:endParaRPr lang="fr-FR" sz="3600" kern="0" dirty="0">
+              <a:solidFill>
+                <a:srgbClr val="1F4E79"/>
+              </a:solidFill>
+            </a:endParaRPr>
+          </a:p>
+        </p:txBody>
+      </p:sp>
+      <p:sp>
+        <p:nvSpPr>
+          <p:cNvPr id="4" name="Rectangle 1">
+            <a:extLst>
+              <a:ext uri="{FF2B5EF4-FFF2-40B4-BE49-F238E27FC236}">
+                <a16:creationId xmlns:a16="http://schemas.microsoft.com/office/drawing/2014/main" id="{84E31738-8CB8-88EC-761F-D9E5E11785B4}"/>
+              </a:ext>
+            </a:extLst>
+          </p:cNvPr>
+          <p:cNvSpPr/>
+          <p:nvPr/>
+        </p:nvSpPr>
+        <p:spPr>
+          <a:xfrm>
+            <a:off x="692289" y="1379467"/>
+            <a:ext cx="10803891" cy="4709834"/>
+          </a:xfrm>
+          <a:prstGeom prst="rect">
+            <a:avLst/>
+          </a:prstGeom>
+          <a:noFill/>
+          <a:ln>
+            <a:noFill/>
+            <a:prstDash val="solid"/>
+          </a:ln>
+        </p:spPr>
+        <p:txBody>
+          <a:bodyPr vert="horz" wrap="square" lIns="91673" tIns="45837" rIns="91673" bIns="45837" anchor="t" anchorCtr="0" compatLnSpc="0">
+            <a:noAutofit/>
+          </a:bodyPr>
+          <a:lstStyle>
+            <a:defPPr>
+              <a:defRPr lang="fr-FR"/>
+            </a:defPPr>
+            <a:lvl1pPr marL="0" algn="l" defTabSz="930493" rtl="0" eaLnBrk="1" latinLnBrk="0" hangingPunct="1">
+              <a:defRPr sz="1832" kern="1200">
+                <a:solidFill>
+                  <a:schemeClr val="tx1"/>
+                </a:solidFill>
+                <a:latin typeface="+mn-lt"/>
+                <a:ea typeface="+mn-ea"/>
+                <a:cs typeface="+mn-cs"/>
+              </a:defRPr>
+            </a:lvl1pPr>
+            <a:lvl2pPr marL="465247" algn="l" defTabSz="930493" rtl="0" eaLnBrk="1" latinLnBrk="0" hangingPunct="1">
+              <a:defRPr sz="1832" kern="1200">
+                <a:solidFill>
+                  <a:schemeClr val="tx1"/>
+                </a:solidFill>
+                <a:latin typeface="+mn-lt"/>
+                <a:ea typeface="+mn-ea"/>
+                <a:cs typeface="+mn-cs"/>
+              </a:defRPr>
+            </a:lvl2pPr>
+            <a:lvl3pPr marL="930493" algn="l" defTabSz="930493" rtl="0" eaLnBrk="1" latinLnBrk="0" hangingPunct="1">
+              <a:defRPr sz="1832" kern="1200">
+                <a:solidFill>
+                  <a:schemeClr val="tx1"/>
+                </a:solidFill>
+                <a:latin typeface="+mn-lt"/>
+                <a:ea typeface="+mn-ea"/>
+                <a:cs typeface="+mn-cs"/>
+              </a:defRPr>
+            </a:lvl3pPr>
+            <a:lvl4pPr marL="1395740" algn="l" defTabSz="930493" rtl="0" eaLnBrk="1" latinLnBrk="0" hangingPunct="1">
+              <a:defRPr sz="1832" kern="1200">
+                <a:solidFill>
+                  <a:schemeClr val="tx1"/>
+                </a:solidFill>
+                <a:latin typeface="+mn-lt"/>
+                <a:ea typeface="+mn-ea"/>
+                <a:cs typeface="+mn-cs"/>
+              </a:defRPr>
+            </a:lvl4pPr>
+            <a:lvl5pPr marL="1860987" algn="l" defTabSz="930493" rtl="0" eaLnBrk="1" latinLnBrk="0" hangingPunct="1">
+              <a:defRPr sz="1832" kern="1200">
+                <a:solidFill>
+                  <a:schemeClr val="tx1"/>
+                </a:solidFill>
+                <a:latin typeface="+mn-lt"/>
+                <a:ea typeface="+mn-ea"/>
+                <a:cs typeface="+mn-cs"/>
+              </a:defRPr>
+            </a:lvl5pPr>
+            <a:lvl6pPr marL="2326234" algn="l" defTabSz="930493" rtl="0" eaLnBrk="1" latinLnBrk="0" hangingPunct="1">
+              <a:defRPr sz="1832" kern="1200">
+                <a:solidFill>
+                  <a:schemeClr val="tx1"/>
+                </a:solidFill>
+                <a:latin typeface="+mn-lt"/>
+                <a:ea typeface="+mn-ea"/>
+                <a:cs typeface="+mn-cs"/>
+              </a:defRPr>
+            </a:lvl6pPr>
+            <a:lvl7pPr marL="2791480" algn="l" defTabSz="930493" rtl="0" eaLnBrk="1" latinLnBrk="0" hangingPunct="1">
+              <a:defRPr sz="1832" kern="1200">
+                <a:solidFill>
+                  <a:schemeClr val="tx1"/>
+                </a:solidFill>
+                <a:latin typeface="+mn-lt"/>
+                <a:ea typeface="+mn-ea"/>
+                <a:cs typeface="+mn-cs"/>
+              </a:defRPr>
+            </a:lvl7pPr>
+            <a:lvl8pPr marL="3256727" algn="l" defTabSz="930493" rtl="0" eaLnBrk="1" latinLnBrk="0" hangingPunct="1">
+              <a:defRPr sz="1832" kern="1200">
+                <a:solidFill>
+                  <a:schemeClr val="tx1"/>
+                </a:solidFill>
+                <a:latin typeface="+mn-lt"/>
+                <a:ea typeface="+mn-ea"/>
+                <a:cs typeface="+mn-cs"/>
+              </a:defRPr>
+            </a:lvl8pPr>
+            <a:lvl9pPr marL="3721974" algn="l" defTabSz="930493" rtl="0" eaLnBrk="1" latinLnBrk="0" hangingPunct="1">
+              <a:defRPr sz="1832" kern="1200">
+                <a:solidFill>
+                  <a:schemeClr val="tx1"/>
+                </a:solidFill>
+                <a:latin typeface="+mn-lt"/>
+                <a:ea typeface="+mn-ea"/>
+                <a:cs typeface="+mn-cs"/>
+              </a:defRPr>
+            </a:lvl9pPr>
+          </a:lstStyle>
+          <a:p>
+            <a:r>
+              <a:rPr lang="fr-FR" dirty="0"/>
+              <a:t>{{</a:t>
+            </a:r>
+            <a:r>
+              <a:rPr lang="fr-FR" dirty="0" err="1"/>
+              <a:t>chart:velocity_US</a:t>
+            </a:r>
+            <a:r>
+              <a:rPr lang="fr-FR" dirty="0"/>
+              <a:t>}}</a:t>
+            </a:r>
+          </a:p>
+        </p:txBody>
+      </p:sp>
+      <p:sp>
+        <p:nvSpPr>
+          <p:cNvPr id="5" name="Espace réservé du numéro de diapositive 4">
+            <a:extLst>
+              <a:ext uri="{FF2B5EF4-FFF2-40B4-BE49-F238E27FC236}">
+                <a16:creationId xmlns:a16="http://schemas.microsoft.com/office/drawing/2014/main" id="{0081260E-736B-8AFD-6FAC-C5E182879B48}"/>
+              </a:ext>
+            </a:extLst>
+          </p:cNvPr>
+          <p:cNvSpPr>
+            <a:spLocks noGrp="1"/>
+          </p:cNvSpPr>
+          <p:nvPr>
+            <p:ph type="sldNum" sz="quarter" idx="12"/>
+          </p:nvPr>
+        </p:nvSpPr>
+        <p:spPr/>
+        <p:txBody>
+          <a:bodyPr/>
+          <a:lstStyle/>
+          <a:p>
+            <a:fld id="{27C6CCC6-2BE5-4E42-96A4-D1E8E81A3D8E}" type="slidenum">
+              <a:rPr lang="fr-FR" smtClean="0"/>
+              <a:t>11</a:t>
+            </a:fld>
+            <a:endParaRPr lang="fr-FR"/>
+          </a:p>
+        </p:txBody>
+      </p:sp>
+      <p:pic>
+        <p:nvPicPr>
+          <p:cNvPr id="6" name="Image 5" descr="Une image contenant Police, logo, Graphique, symbole&#10;&#10;Le contenu généré par l’IA peut être incorrect.">
+            <a:extLst>
+              <a:ext uri="{FF2B5EF4-FFF2-40B4-BE49-F238E27FC236}">
+                <a16:creationId xmlns:a16="http://schemas.microsoft.com/office/drawing/2014/main" id="{806B39D9-B9D9-C930-D74C-A8D6656D3CD4}"/>
+              </a:ext>
+            </a:extLst>
+          </p:cNvPr>
+          <p:cNvPicPr>
+            <a:picLocks noChangeAspect="1"/>
+          </p:cNvPicPr>
+          <p:nvPr/>
+        </p:nvPicPr>
+        <p:blipFill>
+          <a:blip r:embed="rId3"/>
+          <a:stretch>
+            <a:fillRect/>
+          </a:stretch>
+        </p:blipFill>
+        <p:spPr>
+          <a:xfrm>
+            <a:off x="9978572" y="507546"/>
+            <a:ext cx="1524000" cy="400050"/>
+          </a:xfrm>
+          <a:prstGeom prst="rect">
+            <a:avLst/>
+          </a:prstGeom>
+        </p:spPr>
+      </p:pic>
+    </p:spTree>
+    <p:extLst>
+      <p:ext uri="{BB962C8B-B14F-4D97-AF65-F5344CB8AC3E}">
+        <p14:creationId xmlns:p14="http://schemas.microsoft.com/office/powerpoint/2010/main" val="3762299178"/>
+      </p:ext>
+    </p:extLst>
+  </p:cSld>
+  <p:clrMapOvr>
+    <a:masterClrMapping/>
+  </p:clrMapOvr>
+</p:sld>
+</file>
+
+<file path=ppt/slides/slide12.xml><?xml version="1.0" encoding="utf-8"?>
+<p:sld xmlns:a="http://schemas.openxmlformats.org/drawingml/2006/main" xmlns:r="http://schemas.openxmlformats.org/officeDocument/2006/relationships" xmlns:p="http://schemas.openxmlformats.org/presentationml/2006/main">
+  <p:cSld>
+    <p:spTree>
+      <p:nvGrpSpPr>
+        <p:cNvPr id="1" name="">
+          <a:extLst>
+            <a:ext uri="{FF2B5EF4-FFF2-40B4-BE49-F238E27FC236}">
+              <a16:creationId xmlns:a16="http://schemas.microsoft.com/office/drawing/2014/main" id="{637356F9-9392-849E-1186-9A92B687572B}"/>
+            </a:ext>
+          </a:extLst>
+        </p:cNvPr>
+        <p:cNvGrpSpPr/>
+        <p:nvPr/>
+      </p:nvGrpSpPr>
+      <p:grpSpPr>
+        <a:xfrm>
+          <a:off x="0" y="0"/>
+          <a:ext cx="0" cy="0"/>
+          <a:chOff x="0" y="0"/>
+          <a:chExt cx="0" cy="0"/>
+        </a:xfrm>
+      </p:grpSpPr>
+      <p:sp>
+        <p:nvSpPr>
+          <p:cNvPr id="3" name="ZoneTexte 6">
+            <a:extLst>
+              <a:ext uri="{FF2B5EF4-FFF2-40B4-BE49-F238E27FC236}">
+                <a16:creationId xmlns:a16="http://schemas.microsoft.com/office/drawing/2014/main" id="{0D065C64-6AF6-CCB4-DDE8-C7E10F50D774}"/>
+              </a:ext>
+            </a:extLst>
+          </p:cNvPr>
+          <p:cNvSpPr txBox="1"/>
+          <p:nvPr/>
+        </p:nvSpPr>
+        <p:spPr>
+          <a:xfrm>
+            <a:off x="692289" y="365303"/>
+            <a:ext cx="8756869" cy="656185"/>
+          </a:xfrm>
+          <a:prstGeom prst="rect">
+            <a:avLst/>
+          </a:prstGeom>
+          <a:noFill/>
+          <a:ln>
+            <a:noFill/>
+          </a:ln>
+        </p:spPr>
+        <p:txBody>
+          <a:bodyPr vert="horz" wrap="square" lIns="91673" tIns="45837" rIns="91673" bIns="45837" anchor="t" anchorCtr="0" compatLnSpc="0">
+            <a:spAutoFit/>
+          </a:bodyPr>
+          <a:lstStyle>
+            <a:defPPr>
+              <a:defRPr lang="fr-FR"/>
+            </a:defPPr>
+            <a:lvl1pPr marL="0" algn="l" defTabSz="930493" rtl="0" eaLnBrk="1" latinLnBrk="0" hangingPunct="1">
+              <a:defRPr sz="1832" kern="1200">
+                <a:solidFill>
+                  <a:schemeClr val="tx1"/>
+                </a:solidFill>
+                <a:latin typeface="+mn-lt"/>
+                <a:ea typeface="+mn-ea"/>
+                <a:cs typeface="+mn-cs"/>
+              </a:defRPr>
+            </a:lvl1pPr>
+            <a:lvl2pPr marL="465247" algn="l" defTabSz="930493" rtl="0" eaLnBrk="1" latinLnBrk="0" hangingPunct="1">
+              <a:defRPr sz="1832" kern="1200">
+                <a:solidFill>
+                  <a:schemeClr val="tx1"/>
+                </a:solidFill>
+                <a:latin typeface="+mn-lt"/>
+                <a:ea typeface="+mn-ea"/>
+                <a:cs typeface="+mn-cs"/>
+              </a:defRPr>
+            </a:lvl2pPr>
+            <a:lvl3pPr marL="930493" algn="l" defTabSz="930493" rtl="0" eaLnBrk="1" latinLnBrk="0" hangingPunct="1">
+              <a:defRPr sz="1832" kern="1200">
+                <a:solidFill>
+                  <a:schemeClr val="tx1"/>
+                </a:solidFill>
+                <a:latin typeface="+mn-lt"/>
+                <a:ea typeface="+mn-ea"/>
+                <a:cs typeface="+mn-cs"/>
+              </a:defRPr>
+            </a:lvl3pPr>
+            <a:lvl4pPr marL="1395740" algn="l" defTabSz="930493" rtl="0" eaLnBrk="1" latinLnBrk="0" hangingPunct="1">
+              <a:defRPr sz="1832" kern="1200">
+                <a:solidFill>
+                  <a:schemeClr val="tx1"/>
+                </a:solidFill>
+                <a:latin typeface="+mn-lt"/>
+                <a:ea typeface="+mn-ea"/>
+                <a:cs typeface="+mn-cs"/>
+              </a:defRPr>
+            </a:lvl4pPr>
+            <a:lvl5pPr marL="1860987" algn="l" defTabSz="930493" rtl="0" eaLnBrk="1" latinLnBrk="0" hangingPunct="1">
+              <a:defRPr sz="1832" kern="1200">
+                <a:solidFill>
+                  <a:schemeClr val="tx1"/>
+                </a:solidFill>
+                <a:latin typeface="+mn-lt"/>
+                <a:ea typeface="+mn-ea"/>
+                <a:cs typeface="+mn-cs"/>
+              </a:defRPr>
+            </a:lvl5pPr>
+            <a:lvl6pPr marL="2326234" algn="l" defTabSz="930493" rtl="0" eaLnBrk="1" latinLnBrk="0" hangingPunct="1">
+              <a:defRPr sz="1832" kern="1200">
+                <a:solidFill>
+                  <a:schemeClr val="tx1"/>
+                </a:solidFill>
+                <a:latin typeface="+mn-lt"/>
+                <a:ea typeface="+mn-ea"/>
+                <a:cs typeface="+mn-cs"/>
+              </a:defRPr>
+            </a:lvl6pPr>
+            <a:lvl7pPr marL="2791480" algn="l" defTabSz="930493" rtl="0" eaLnBrk="1" latinLnBrk="0" hangingPunct="1">
+              <a:defRPr sz="1832" kern="1200">
+                <a:solidFill>
+                  <a:schemeClr val="tx1"/>
+                </a:solidFill>
+                <a:latin typeface="+mn-lt"/>
+                <a:ea typeface="+mn-ea"/>
+                <a:cs typeface="+mn-cs"/>
+              </a:defRPr>
+            </a:lvl7pPr>
+            <a:lvl8pPr marL="3256727" algn="l" defTabSz="930493" rtl="0" eaLnBrk="1" latinLnBrk="0" hangingPunct="1">
+              <a:defRPr sz="1832" kern="1200">
+                <a:solidFill>
+                  <a:schemeClr val="tx1"/>
+                </a:solidFill>
+                <a:latin typeface="+mn-lt"/>
+                <a:ea typeface="+mn-ea"/>
+                <a:cs typeface="+mn-cs"/>
+              </a:defRPr>
+            </a:lvl8pPr>
+            <a:lvl9pPr marL="3721974" algn="l" defTabSz="930493" rtl="0" eaLnBrk="1" latinLnBrk="0" hangingPunct="1">
+              <a:defRPr sz="1832" kern="1200">
+                <a:solidFill>
+                  <a:schemeClr val="tx1"/>
+                </a:solidFill>
+                <a:latin typeface="+mn-lt"/>
+                <a:ea typeface="+mn-ea"/>
+                <a:cs typeface="+mn-cs"/>
+              </a:defRPr>
+            </a:lvl9pPr>
+          </a:lstStyle>
+          <a:p>
+            <a:pPr>
+              <a:defRPr sz="1630"/>
+            </a:pPr>
+            <a:r>
+              <a:rPr lang="fr-FR" sz="3600" kern="0" dirty="0">
+                <a:solidFill>
+                  <a:srgbClr val="1F4E79"/>
+                </a:solidFill>
+                <a:ea typeface="+mn-lt"/>
+                <a:cs typeface="+mn-lt"/>
+              </a:rPr>
+              <a:t>{{</a:t>
+            </a:r>
+            <a:r>
+              <a:rPr lang="fr-FR" sz="3600" kern="0" dirty="0" err="1">
+                <a:solidFill>
+                  <a:srgbClr val="1F4E79"/>
+                </a:solidFill>
+                <a:ea typeface="+mn-lt"/>
+                <a:cs typeface="+mn-lt"/>
+              </a:rPr>
+              <a:t>project_name</a:t>
+            </a:r>
+            <a:r>
+              <a:rPr lang="fr-FR" sz="3600" kern="0" dirty="0">
+                <a:solidFill>
+                  <a:srgbClr val="1F4E79"/>
+                </a:solidFill>
+                <a:ea typeface="+mn-lt"/>
+                <a:cs typeface="+mn-lt"/>
+              </a:rPr>
+              <a:t>}}</a:t>
+            </a:r>
+            <a:endParaRPr lang="fr-FR" sz="3600" kern="0" dirty="0">
+              <a:solidFill>
+                <a:srgbClr val="1F4E79"/>
+              </a:solidFill>
+            </a:endParaRPr>
+          </a:p>
+        </p:txBody>
+      </p:sp>
+      <p:sp>
+        <p:nvSpPr>
+          <p:cNvPr id="4" name="Rectangle 1">
+            <a:extLst>
+              <a:ext uri="{FF2B5EF4-FFF2-40B4-BE49-F238E27FC236}">
+                <a16:creationId xmlns:a16="http://schemas.microsoft.com/office/drawing/2014/main" id="{692388BB-04EA-B760-49FF-6FB09DCEC444}"/>
+              </a:ext>
+            </a:extLst>
+          </p:cNvPr>
+          <p:cNvSpPr/>
+          <p:nvPr/>
+        </p:nvSpPr>
+        <p:spPr>
+          <a:xfrm>
+            <a:off x="692289" y="1379467"/>
+            <a:ext cx="10803891" cy="4709834"/>
+          </a:xfrm>
+          <a:prstGeom prst="rect">
+            <a:avLst/>
+          </a:prstGeom>
+          <a:noFill/>
+          <a:ln>
+            <a:noFill/>
+            <a:prstDash val="solid"/>
+          </a:ln>
+        </p:spPr>
+        <p:txBody>
+          <a:bodyPr vert="horz" wrap="square" lIns="91673" tIns="45837" rIns="91673" bIns="45837" anchor="t" anchorCtr="0" compatLnSpc="0">
+            <a:noAutofit/>
+          </a:bodyPr>
+          <a:lstStyle>
+            <a:defPPr>
+              <a:defRPr lang="fr-FR"/>
+            </a:defPPr>
+            <a:lvl1pPr marL="0" algn="l" defTabSz="930493" rtl="0" eaLnBrk="1" latinLnBrk="0" hangingPunct="1">
+              <a:defRPr sz="1832" kern="1200">
+                <a:solidFill>
+                  <a:schemeClr val="tx1"/>
+                </a:solidFill>
+                <a:latin typeface="+mn-lt"/>
+                <a:ea typeface="+mn-ea"/>
+                <a:cs typeface="+mn-cs"/>
+              </a:defRPr>
+            </a:lvl1pPr>
+            <a:lvl2pPr marL="465247" algn="l" defTabSz="930493" rtl="0" eaLnBrk="1" latinLnBrk="0" hangingPunct="1">
+              <a:defRPr sz="1832" kern="1200">
+                <a:solidFill>
+                  <a:schemeClr val="tx1"/>
+                </a:solidFill>
+                <a:latin typeface="+mn-lt"/>
+                <a:ea typeface="+mn-ea"/>
+                <a:cs typeface="+mn-cs"/>
+              </a:defRPr>
+            </a:lvl2pPr>
+            <a:lvl3pPr marL="930493" algn="l" defTabSz="930493" rtl="0" eaLnBrk="1" latinLnBrk="0" hangingPunct="1">
+              <a:defRPr sz="1832" kern="1200">
+                <a:solidFill>
+                  <a:schemeClr val="tx1"/>
+                </a:solidFill>
+                <a:latin typeface="+mn-lt"/>
+                <a:ea typeface="+mn-ea"/>
+                <a:cs typeface="+mn-cs"/>
+              </a:defRPr>
+            </a:lvl3pPr>
+            <a:lvl4pPr marL="1395740" algn="l" defTabSz="930493" rtl="0" eaLnBrk="1" latinLnBrk="0" hangingPunct="1">
+              <a:defRPr sz="1832" kern="1200">
+                <a:solidFill>
+                  <a:schemeClr val="tx1"/>
+                </a:solidFill>
+                <a:latin typeface="+mn-lt"/>
+                <a:ea typeface="+mn-ea"/>
+                <a:cs typeface="+mn-cs"/>
+              </a:defRPr>
+            </a:lvl4pPr>
+            <a:lvl5pPr marL="1860987" algn="l" defTabSz="930493" rtl="0" eaLnBrk="1" latinLnBrk="0" hangingPunct="1">
+              <a:defRPr sz="1832" kern="1200">
+                <a:solidFill>
+                  <a:schemeClr val="tx1"/>
+                </a:solidFill>
+                <a:latin typeface="+mn-lt"/>
+                <a:ea typeface="+mn-ea"/>
+                <a:cs typeface="+mn-cs"/>
+              </a:defRPr>
+            </a:lvl5pPr>
+            <a:lvl6pPr marL="2326234" algn="l" defTabSz="930493" rtl="0" eaLnBrk="1" latinLnBrk="0" hangingPunct="1">
+              <a:defRPr sz="1832" kern="1200">
+                <a:solidFill>
+                  <a:schemeClr val="tx1"/>
+                </a:solidFill>
+                <a:latin typeface="+mn-lt"/>
+                <a:ea typeface="+mn-ea"/>
+                <a:cs typeface="+mn-cs"/>
+              </a:defRPr>
+            </a:lvl6pPr>
+            <a:lvl7pPr marL="2791480" algn="l" defTabSz="930493" rtl="0" eaLnBrk="1" latinLnBrk="0" hangingPunct="1">
+              <a:defRPr sz="1832" kern="1200">
+                <a:solidFill>
+                  <a:schemeClr val="tx1"/>
+                </a:solidFill>
+                <a:latin typeface="+mn-lt"/>
+                <a:ea typeface="+mn-ea"/>
+                <a:cs typeface="+mn-cs"/>
+              </a:defRPr>
+            </a:lvl7pPr>
+            <a:lvl8pPr marL="3256727" algn="l" defTabSz="930493" rtl="0" eaLnBrk="1" latinLnBrk="0" hangingPunct="1">
+              <a:defRPr sz="1832" kern="1200">
+                <a:solidFill>
+                  <a:schemeClr val="tx1"/>
+                </a:solidFill>
+                <a:latin typeface="+mn-lt"/>
+                <a:ea typeface="+mn-ea"/>
+                <a:cs typeface="+mn-cs"/>
+              </a:defRPr>
+            </a:lvl8pPr>
+            <a:lvl9pPr marL="3721974" algn="l" defTabSz="930493" rtl="0" eaLnBrk="1" latinLnBrk="0" hangingPunct="1">
+              <a:defRPr sz="1832" kern="1200">
+                <a:solidFill>
+                  <a:schemeClr val="tx1"/>
+                </a:solidFill>
+                <a:latin typeface="+mn-lt"/>
+                <a:ea typeface="+mn-ea"/>
+                <a:cs typeface="+mn-cs"/>
+              </a:defRPr>
+            </a:lvl9pPr>
+          </a:lstStyle>
+          <a:p>
+            <a:r>
+              <a:rPr lang="fr-FR" dirty="0"/>
+              <a:t>{{</a:t>
+            </a:r>
+            <a:r>
+              <a:rPr lang="fr-FR" dirty="0" err="1"/>
+              <a:t>chart:velocity_SP</a:t>
+            </a:r>
+            <a:r>
+              <a:rPr lang="fr-FR" dirty="0"/>
+              <a:t>}}</a:t>
+            </a:r>
+          </a:p>
+        </p:txBody>
+      </p:sp>
+      <p:sp>
+        <p:nvSpPr>
+          <p:cNvPr id="5" name="Espace réservé du numéro de diapositive 4">
+            <a:extLst>
+              <a:ext uri="{FF2B5EF4-FFF2-40B4-BE49-F238E27FC236}">
+                <a16:creationId xmlns:a16="http://schemas.microsoft.com/office/drawing/2014/main" id="{750901C2-4167-0A86-6E55-70128F9F29E6}"/>
+              </a:ext>
+            </a:extLst>
+          </p:cNvPr>
+          <p:cNvSpPr>
+            <a:spLocks noGrp="1"/>
+          </p:cNvSpPr>
+          <p:nvPr>
+            <p:ph type="sldNum" sz="quarter" idx="12"/>
+          </p:nvPr>
+        </p:nvSpPr>
+        <p:spPr/>
+        <p:txBody>
+          <a:bodyPr/>
+          <a:lstStyle/>
+          <a:p>
+            <a:fld id="{27C6CCC6-2BE5-4E42-96A4-D1E8E81A3D8E}" type="slidenum">
+              <a:rPr lang="fr-FR" smtClean="0"/>
+              <a:t>12</a:t>
+            </a:fld>
+            <a:endParaRPr lang="fr-FR"/>
+          </a:p>
+        </p:txBody>
+      </p:sp>
+      <p:pic>
+        <p:nvPicPr>
+          <p:cNvPr id="6" name="Image 5" descr="Une image contenant Police, logo, Graphique, symbole&#10;&#10;Le contenu généré par l’IA peut être incorrect.">
+            <a:extLst>
+              <a:ext uri="{FF2B5EF4-FFF2-40B4-BE49-F238E27FC236}">
+                <a16:creationId xmlns:a16="http://schemas.microsoft.com/office/drawing/2014/main" id="{29309025-8B1B-33B4-7186-6E5115913998}"/>
+              </a:ext>
+            </a:extLst>
+          </p:cNvPr>
+          <p:cNvPicPr>
+            <a:picLocks noChangeAspect="1"/>
+          </p:cNvPicPr>
+          <p:nvPr/>
+        </p:nvPicPr>
+        <p:blipFill>
+          <a:blip r:embed="rId3"/>
+          <a:stretch>
+            <a:fillRect/>
+          </a:stretch>
+        </p:blipFill>
+        <p:spPr>
+          <a:xfrm>
+            <a:off x="9978572" y="507546"/>
+            <a:ext cx="1524000" cy="400050"/>
+          </a:xfrm>
+          <a:prstGeom prst="rect">
+            <a:avLst/>
+          </a:prstGeom>
+        </p:spPr>
+      </p:pic>
+    </p:spTree>
+    <p:extLst>
+      <p:ext uri="{BB962C8B-B14F-4D97-AF65-F5344CB8AC3E}">
+        <p14:creationId xmlns:p14="http://schemas.microsoft.com/office/powerpoint/2010/main" val="2513443156"/>
+      </p:ext>
+    </p:extLst>
+  </p:cSld>
+  <p:clrMapOvr>
+    <a:masterClrMapping/>
+  </p:clrMapOvr>
+</p:sld>
+</file>
+
+<file path=ppt/slides/slide13.xml><?xml version="1.0" encoding="utf-8"?>
+<p:sld xmlns:a="http://schemas.openxmlformats.org/drawingml/2006/main" xmlns:r="http://schemas.openxmlformats.org/officeDocument/2006/relationships" xmlns:p="http://schemas.openxmlformats.org/presentationml/2006/main">
+  <p:cSld>
+    <p:spTree>
+      <p:nvGrpSpPr>
+        <p:cNvPr id="1" name="">
+          <a:extLst>
+            <a:ext uri="{FF2B5EF4-FFF2-40B4-BE49-F238E27FC236}">
+              <a16:creationId xmlns:a16="http://schemas.microsoft.com/office/drawing/2014/main" id="{49FF3FB7-C385-0EC5-14C0-0D54AE39E41F}"/>
+            </a:ext>
+          </a:extLst>
+        </p:cNvPr>
+        <p:cNvGrpSpPr/>
+        <p:nvPr/>
+      </p:nvGrpSpPr>
+      <p:grpSpPr>
+        <a:xfrm>
+          <a:off x="0" y="0"/>
+          <a:ext cx="0" cy="0"/>
+          <a:chOff x="0" y="0"/>
+          <a:chExt cx="0" cy="0"/>
+        </a:xfrm>
+      </p:grpSpPr>
+      <p:sp>
+        <p:nvSpPr>
+          <p:cNvPr id="3" name="ZoneTexte 6">
+            <a:extLst>
+              <a:ext uri="{FF2B5EF4-FFF2-40B4-BE49-F238E27FC236}">
+                <a16:creationId xmlns:a16="http://schemas.microsoft.com/office/drawing/2014/main" id="{70A45353-3FD2-55C6-3D10-C5F0031550AE}"/>
+              </a:ext>
+            </a:extLst>
+          </p:cNvPr>
+          <p:cNvSpPr txBox="1"/>
+          <p:nvPr/>
+        </p:nvSpPr>
+        <p:spPr>
+          <a:xfrm>
+            <a:off x="692289" y="365303"/>
+            <a:ext cx="8756869" cy="656185"/>
+          </a:xfrm>
+          <a:prstGeom prst="rect">
+            <a:avLst/>
+          </a:prstGeom>
+          <a:noFill/>
+          <a:ln>
+            <a:noFill/>
+          </a:ln>
+        </p:spPr>
+        <p:txBody>
+          <a:bodyPr vert="horz" wrap="square" lIns="91673" tIns="45837" rIns="91673" bIns="45837" anchor="t" anchorCtr="0" compatLnSpc="0">
+            <a:spAutoFit/>
+          </a:bodyPr>
+          <a:lstStyle>
+            <a:defPPr>
+              <a:defRPr lang="fr-FR"/>
+            </a:defPPr>
+            <a:lvl1pPr marL="0" algn="l" defTabSz="930493" rtl="0" eaLnBrk="1" latinLnBrk="0" hangingPunct="1">
+              <a:defRPr sz="1832" kern="1200">
+                <a:solidFill>
+                  <a:schemeClr val="tx1"/>
+                </a:solidFill>
+                <a:latin typeface="+mn-lt"/>
+                <a:ea typeface="+mn-ea"/>
+                <a:cs typeface="+mn-cs"/>
+              </a:defRPr>
+            </a:lvl1pPr>
+            <a:lvl2pPr marL="465247" algn="l" defTabSz="930493" rtl="0" eaLnBrk="1" latinLnBrk="0" hangingPunct="1">
+              <a:defRPr sz="1832" kern="1200">
+                <a:solidFill>
+                  <a:schemeClr val="tx1"/>
+                </a:solidFill>
+                <a:latin typeface="+mn-lt"/>
+                <a:ea typeface="+mn-ea"/>
+                <a:cs typeface="+mn-cs"/>
+              </a:defRPr>
+            </a:lvl2pPr>
+            <a:lvl3pPr marL="930493" algn="l" defTabSz="930493" rtl="0" eaLnBrk="1" latinLnBrk="0" hangingPunct="1">
+              <a:defRPr sz="1832" kern="1200">
+                <a:solidFill>
+                  <a:schemeClr val="tx1"/>
+                </a:solidFill>
+                <a:latin typeface="+mn-lt"/>
+                <a:ea typeface="+mn-ea"/>
+                <a:cs typeface="+mn-cs"/>
+              </a:defRPr>
+            </a:lvl3pPr>
+            <a:lvl4pPr marL="1395740" algn="l" defTabSz="930493" rtl="0" eaLnBrk="1" latinLnBrk="0" hangingPunct="1">
+              <a:defRPr sz="1832" kern="1200">
+                <a:solidFill>
+                  <a:schemeClr val="tx1"/>
+                </a:solidFill>
+                <a:latin typeface="+mn-lt"/>
+                <a:ea typeface="+mn-ea"/>
+                <a:cs typeface="+mn-cs"/>
+              </a:defRPr>
+            </a:lvl4pPr>
+            <a:lvl5pPr marL="1860987" algn="l" defTabSz="930493" rtl="0" eaLnBrk="1" latinLnBrk="0" hangingPunct="1">
+              <a:defRPr sz="1832" kern="1200">
+                <a:solidFill>
+                  <a:schemeClr val="tx1"/>
+                </a:solidFill>
+                <a:latin typeface="+mn-lt"/>
+                <a:ea typeface="+mn-ea"/>
+                <a:cs typeface="+mn-cs"/>
+              </a:defRPr>
+            </a:lvl5pPr>
+            <a:lvl6pPr marL="2326234" algn="l" defTabSz="930493" rtl="0" eaLnBrk="1" latinLnBrk="0" hangingPunct="1">
+              <a:defRPr sz="1832" kern="1200">
+                <a:solidFill>
+                  <a:schemeClr val="tx1"/>
+                </a:solidFill>
+                <a:latin typeface="+mn-lt"/>
+                <a:ea typeface="+mn-ea"/>
+                <a:cs typeface="+mn-cs"/>
+              </a:defRPr>
+            </a:lvl6pPr>
+            <a:lvl7pPr marL="2791480" algn="l" defTabSz="930493" rtl="0" eaLnBrk="1" latinLnBrk="0" hangingPunct="1">
+              <a:defRPr sz="1832" kern="1200">
+                <a:solidFill>
+                  <a:schemeClr val="tx1"/>
+                </a:solidFill>
+                <a:latin typeface="+mn-lt"/>
+                <a:ea typeface="+mn-ea"/>
+                <a:cs typeface="+mn-cs"/>
+              </a:defRPr>
+            </a:lvl7pPr>
+            <a:lvl8pPr marL="3256727" algn="l" defTabSz="930493" rtl="0" eaLnBrk="1" latinLnBrk="0" hangingPunct="1">
+              <a:defRPr sz="1832" kern="1200">
+                <a:solidFill>
+                  <a:schemeClr val="tx1"/>
+                </a:solidFill>
+                <a:latin typeface="+mn-lt"/>
+                <a:ea typeface="+mn-ea"/>
+                <a:cs typeface="+mn-cs"/>
+              </a:defRPr>
+            </a:lvl8pPr>
+            <a:lvl9pPr marL="3721974" algn="l" defTabSz="930493" rtl="0" eaLnBrk="1" latinLnBrk="0" hangingPunct="1">
+              <a:defRPr sz="1832" kern="1200">
+                <a:solidFill>
+                  <a:schemeClr val="tx1"/>
+                </a:solidFill>
+                <a:latin typeface="+mn-lt"/>
+                <a:ea typeface="+mn-ea"/>
+                <a:cs typeface="+mn-cs"/>
+              </a:defRPr>
+            </a:lvl9pPr>
+          </a:lstStyle>
+          <a:p>
+            <a:pPr>
+              <a:defRPr sz="1630"/>
+            </a:pPr>
+            <a:r>
+              <a:rPr lang="fr-FR" sz="3600" kern="0" dirty="0">
+                <a:solidFill>
+                  <a:srgbClr val="1F4E79"/>
+                </a:solidFill>
+                <a:ea typeface="+mn-lt"/>
+                <a:cs typeface="+mn-lt"/>
+              </a:rPr>
+              <a:t>{{</a:t>
+            </a:r>
+            <a:r>
+              <a:rPr lang="fr-FR" sz="3600" kern="0" dirty="0" err="1">
+                <a:solidFill>
+                  <a:srgbClr val="1F4E79"/>
+                </a:solidFill>
+                <a:ea typeface="+mn-lt"/>
+                <a:cs typeface="+mn-lt"/>
+              </a:rPr>
+              <a:t>project_name</a:t>
+            </a:r>
+            <a:r>
+              <a:rPr lang="fr-FR" sz="3600" kern="0" dirty="0">
+                <a:solidFill>
+                  <a:srgbClr val="1F4E79"/>
+                </a:solidFill>
+                <a:ea typeface="+mn-lt"/>
+                <a:cs typeface="+mn-lt"/>
+              </a:rPr>
+              <a:t>}}</a:t>
+            </a:r>
+            <a:endParaRPr lang="fr-FR" sz="3600" kern="0" dirty="0">
+              <a:solidFill>
+                <a:srgbClr val="1F4E79"/>
+              </a:solidFill>
+            </a:endParaRPr>
+          </a:p>
+        </p:txBody>
+      </p:sp>
+      <p:sp>
+        <p:nvSpPr>
+          <p:cNvPr id="4" name="Rectangle 1">
+            <a:extLst>
+              <a:ext uri="{FF2B5EF4-FFF2-40B4-BE49-F238E27FC236}">
+                <a16:creationId xmlns:a16="http://schemas.microsoft.com/office/drawing/2014/main" id="{7B644419-65CA-B230-76B0-3D11922BABC3}"/>
+              </a:ext>
+            </a:extLst>
+          </p:cNvPr>
+          <p:cNvSpPr/>
+          <p:nvPr/>
+        </p:nvSpPr>
+        <p:spPr>
+          <a:xfrm>
+            <a:off x="692289" y="1379467"/>
+            <a:ext cx="10803891" cy="4750028"/>
+          </a:xfrm>
+          <a:prstGeom prst="rect">
+            <a:avLst/>
+          </a:prstGeom>
+          <a:noFill/>
+          <a:ln>
+            <a:noFill/>
+            <a:prstDash val="solid"/>
+          </a:ln>
+        </p:spPr>
+        <p:txBody>
+          <a:bodyPr vert="horz" wrap="square" lIns="91673" tIns="45837" rIns="91673" bIns="45837" anchor="t" anchorCtr="0" compatLnSpc="0">
+            <a:noAutofit/>
+          </a:bodyPr>
+          <a:lstStyle>
+            <a:defPPr>
+              <a:defRPr lang="fr-FR"/>
+            </a:defPPr>
+            <a:lvl1pPr marL="0" algn="l" defTabSz="930493" rtl="0" eaLnBrk="1" latinLnBrk="0" hangingPunct="1">
+              <a:defRPr sz="1832" kern="1200">
+                <a:solidFill>
+                  <a:schemeClr val="tx1"/>
+                </a:solidFill>
+                <a:latin typeface="+mn-lt"/>
+                <a:ea typeface="+mn-ea"/>
+                <a:cs typeface="+mn-cs"/>
+              </a:defRPr>
+            </a:lvl1pPr>
+            <a:lvl2pPr marL="465247" algn="l" defTabSz="930493" rtl="0" eaLnBrk="1" latinLnBrk="0" hangingPunct="1">
+              <a:defRPr sz="1832" kern="1200">
+                <a:solidFill>
+                  <a:schemeClr val="tx1"/>
+                </a:solidFill>
+                <a:latin typeface="+mn-lt"/>
+                <a:ea typeface="+mn-ea"/>
+                <a:cs typeface="+mn-cs"/>
+              </a:defRPr>
+            </a:lvl2pPr>
+            <a:lvl3pPr marL="930493" algn="l" defTabSz="930493" rtl="0" eaLnBrk="1" latinLnBrk="0" hangingPunct="1">
+              <a:defRPr sz="1832" kern="1200">
+                <a:solidFill>
+                  <a:schemeClr val="tx1"/>
+                </a:solidFill>
+                <a:latin typeface="+mn-lt"/>
+                <a:ea typeface="+mn-ea"/>
+                <a:cs typeface="+mn-cs"/>
+              </a:defRPr>
+            </a:lvl3pPr>
+            <a:lvl4pPr marL="1395740" algn="l" defTabSz="930493" rtl="0" eaLnBrk="1" latinLnBrk="0" hangingPunct="1">
+              <a:defRPr sz="1832" kern="1200">
+                <a:solidFill>
+                  <a:schemeClr val="tx1"/>
+                </a:solidFill>
+                <a:latin typeface="+mn-lt"/>
+                <a:ea typeface="+mn-ea"/>
+                <a:cs typeface="+mn-cs"/>
+              </a:defRPr>
+            </a:lvl4pPr>
+            <a:lvl5pPr marL="1860987" algn="l" defTabSz="930493" rtl="0" eaLnBrk="1" latinLnBrk="0" hangingPunct="1">
+              <a:defRPr sz="1832" kern="1200">
+                <a:solidFill>
+                  <a:schemeClr val="tx1"/>
+                </a:solidFill>
+                <a:latin typeface="+mn-lt"/>
+                <a:ea typeface="+mn-ea"/>
+                <a:cs typeface="+mn-cs"/>
+              </a:defRPr>
+            </a:lvl5pPr>
+            <a:lvl6pPr marL="2326234" algn="l" defTabSz="930493" rtl="0" eaLnBrk="1" latinLnBrk="0" hangingPunct="1">
+              <a:defRPr sz="1832" kern="1200">
+                <a:solidFill>
+                  <a:schemeClr val="tx1"/>
+                </a:solidFill>
+                <a:latin typeface="+mn-lt"/>
+                <a:ea typeface="+mn-ea"/>
+                <a:cs typeface="+mn-cs"/>
+              </a:defRPr>
+            </a:lvl6pPr>
+            <a:lvl7pPr marL="2791480" algn="l" defTabSz="930493" rtl="0" eaLnBrk="1" latinLnBrk="0" hangingPunct="1">
+              <a:defRPr sz="1832" kern="1200">
+                <a:solidFill>
+                  <a:schemeClr val="tx1"/>
+                </a:solidFill>
+                <a:latin typeface="+mn-lt"/>
+                <a:ea typeface="+mn-ea"/>
+                <a:cs typeface="+mn-cs"/>
+              </a:defRPr>
+            </a:lvl7pPr>
+            <a:lvl8pPr marL="3256727" algn="l" defTabSz="930493" rtl="0" eaLnBrk="1" latinLnBrk="0" hangingPunct="1">
+              <a:defRPr sz="1832" kern="1200">
+                <a:solidFill>
+                  <a:schemeClr val="tx1"/>
+                </a:solidFill>
+                <a:latin typeface="+mn-lt"/>
+                <a:ea typeface="+mn-ea"/>
+                <a:cs typeface="+mn-cs"/>
+              </a:defRPr>
+            </a:lvl8pPr>
+            <a:lvl9pPr marL="3721974" algn="l" defTabSz="930493" rtl="0" eaLnBrk="1" latinLnBrk="0" hangingPunct="1">
+              <a:defRPr sz="1832" kern="1200">
+                <a:solidFill>
+                  <a:schemeClr val="tx1"/>
+                </a:solidFill>
+                <a:latin typeface="+mn-lt"/>
+                <a:ea typeface="+mn-ea"/>
+                <a:cs typeface="+mn-cs"/>
+              </a:defRPr>
+            </a:lvl9pPr>
+          </a:lstStyle>
+          <a:p>
+            <a:r>
+              <a:rPr lang="fr-FR" dirty="0"/>
+              <a:t> {{</a:t>
+            </a:r>
+            <a:r>
+              <a:rPr lang="fr-FR" dirty="0" err="1"/>
+              <a:t>chart:status</a:t>
+            </a:r>
+            <a:r>
+              <a:rPr lang="fr-FR" dirty="0"/>
+              <a:t>}}</a:t>
+            </a:r>
+          </a:p>
+        </p:txBody>
+      </p:sp>
+      <p:sp>
+        <p:nvSpPr>
+          <p:cNvPr id="5" name="Espace réservé du numéro de diapositive 4">
+            <a:extLst>
+              <a:ext uri="{FF2B5EF4-FFF2-40B4-BE49-F238E27FC236}">
+                <a16:creationId xmlns:a16="http://schemas.microsoft.com/office/drawing/2014/main" id="{74A26D81-9636-B7E4-E10A-37AD26D81284}"/>
+              </a:ext>
+            </a:extLst>
+          </p:cNvPr>
+          <p:cNvSpPr>
+            <a:spLocks noGrp="1"/>
+          </p:cNvSpPr>
+          <p:nvPr>
+            <p:ph type="sldNum" sz="quarter" idx="12"/>
+          </p:nvPr>
+        </p:nvSpPr>
+        <p:spPr/>
+        <p:txBody>
+          <a:bodyPr/>
+          <a:lstStyle/>
+          <a:p>
+            <a:fld id="{27C6CCC6-2BE5-4E42-96A4-D1E8E81A3D8E}" type="slidenum">
+              <a:rPr lang="fr-FR" smtClean="0"/>
+              <a:t>13</a:t>
+            </a:fld>
+            <a:endParaRPr lang="fr-FR"/>
+          </a:p>
+        </p:txBody>
+      </p:sp>
+      <p:pic>
+        <p:nvPicPr>
+          <p:cNvPr id="6" name="Image 5" descr="Une image contenant Police, logo, Graphique, symbole&#10;&#10;Le contenu généré par l’IA peut être incorrect.">
+            <a:extLst>
+              <a:ext uri="{FF2B5EF4-FFF2-40B4-BE49-F238E27FC236}">
+                <a16:creationId xmlns:a16="http://schemas.microsoft.com/office/drawing/2014/main" id="{BE95F7AB-8310-C5D1-33E3-BFFC5D382C7A}"/>
+              </a:ext>
+            </a:extLst>
+          </p:cNvPr>
+          <p:cNvPicPr>
+            <a:picLocks noChangeAspect="1"/>
+          </p:cNvPicPr>
+          <p:nvPr/>
+        </p:nvPicPr>
+        <p:blipFill>
+          <a:blip r:embed="rId3"/>
+          <a:stretch>
+            <a:fillRect/>
+          </a:stretch>
+        </p:blipFill>
+        <p:spPr>
+          <a:xfrm>
+            <a:off x="9978572" y="507546"/>
+            <a:ext cx="1524000" cy="400050"/>
+          </a:xfrm>
+          <a:prstGeom prst="rect">
+            <a:avLst/>
+          </a:prstGeom>
+        </p:spPr>
+      </p:pic>
+    </p:spTree>
+    <p:extLst>
+      <p:ext uri="{BB962C8B-B14F-4D97-AF65-F5344CB8AC3E}">
+        <p14:creationId xmlns:p14="http://schemas.microsoft.com/office/powerpoint/2010/main" val="425265609"/>
+      </p:ext>
+    </p:extLst>
+  </p:cSld>
+  <p:clrMapOvr>
+    <a:masterClrMapping/>
+  </p:clrMapOvr>
+</p:sld>
+</file>
+
+<file path=ppt/slides/slide14.xml><?xml version="1.0" encoding="utf-8"?>
+<p:sld xmlns:a="http://schemas.openxmlformats.org/drawingml/2006/main" xmlns:r="http://schemas.openxmlformats.org/officeDocument/2006/relationships" xmlns:p="http://schemas.openxmlformats.org/presentationml/2006/main">
+  <p:cSld>
+    <p:spTree>
+      <p:nvGrpSpPr>
+        <p:cNvPr id="1" name="">
+          <a:extLst>
+            <a:ext uri="{FF2B5EF4-FFF2-40B4-BE49-F238E27FC236}">
+              <a16:creationId xmlns:a16="http://schemas.microsoft.com/office/drawing/2014/main" id="{BCB5FE94-CE39-5ABD-1C97-67D6C38E6D3D}"/>
+            </a:ext>
+          </a:extLst>
+        </p:cNvPr>
+        <p:cNvGrpSpPr/>
+        <p:nvPr/>
+      </p:nvGrpSpPr>
+      <p:grpSpPr>
+        <a:xfrm>
+          <a:off x="0" y="0"/>
+          <a:ext cx="0" cy="0"/>
+          <a:chOff x="0" y="0"/>
+          <a:chExt cx="0" cy="0"/>
+        </a:xfrm>
+      </p:grpSpPr>
+      <p:sp>
+        <p:nvSpPr>
+          <p:cNvPr id="3" name="ZoneTexte 6">
+            <a:extLst>
+              <a:ext uri="{FF2B5EF4-FFF2-40B4-BE49-F238E27FC236}">
+                <a16:creationId xmlns:a16="http://schemas.microsoft.com/office/drawing/2014/main" id="{4CE22694-8091-D734-27B9-8D878832A0A8}"/>
+              </a:ext>
+            </a:extLst>
+          </p:cNvPr>
+          <p:cNvSpPr txBox="1"/>
+          <p:nvPr/>
+        </p:nvSpPr>
+        <p:spPr>
+          <a:xfrm>
+            <a:off x="692289" y="365303"/>
+            <a:ext cx="8756869" cy="656185"/>
+          </a:xfrm>
+          <a:prstGeom prst="rect">
+            <a:avLst/>
+          </a:prstGeom>
+          <a:noFill/>
+          <a:ln>
+            <a:noFill/>
+          </a:ln>
+        </p:spPr>
+        <p:txBody>
+          <a:bodyPr vert="horz" wrap="square" lIns="91673" tIns="45837" rIns="91673" bIns="45837" anchor="t" anchorCtr="0" compatLnSpc="0">
+            <a:spAutoFit/>
+          </a:bodyPr>
+          <a:lstStyle>
+            <a:defPPr>
+              <a:defRPr lang="fr-FR"/>
+            </a:defPPr>
+            <a:lvl1pPr marL="0" algn="l" defTabSz="930493" rtl="0" eaLnBrk="1" latinLnBrk="0" hangingPunct="1">
+              <a:defRPr sz="1832" kern="1200">
+                <a:solidFill>
+                  <a:schemeClr val="tx1"/>
+                </a:solidFill>
+                <a:latin typeface="+mn-lt"/>
+                <a:ea typeface="+mn-ea"/>
+                <a:cs typeface="+mn-cs"/>
+              </a:defRPr>
+            </a:lvl1pPr>
+            <a:lvl2pPr marL="465247" algn="l" defTabSz="930493" rtl="0" eaLnBrk="1" latinLnBrk="0" hangingPunct="1">
+              <a:defRPr sz="1832" kern="1200">
+                <a:solidFill>
+                  <a:schemeClr val="tx1"/>
+                </a:solidFill>
+                <a:latin typeface="+mn-lt"/>
+                <a:ea typeface="+mn-ea"/>
+                <a:cs typeface="+mn-cs"/>
+              </a:defRPr>
+            </a:lvl2pPr>
+            <a:lvl3pPr marL="930493" algn="l" defTabSz="930493" rtl="0" eaLnBrk="1" latinLnBrk="0" hangingPunct="1">
+              <a:defRPr sz="1832" kern="1200">
+                <a:solidFill>
+                  <a:schemeClr val="tx1"/>
+                </a:solidFill>
+                <a:latin typeface="+mn-lt"/>
+                <a:ea typeface="+mn-ea"/>
+                <a:cs typeface="+mn-cs"/>
+              </a:defRPr>
+            </a:lvl3pPr>
+            <a:lvl4pPr marL="1395740" algn="l" defTabSz="930493" rtl="0" eaLnBrk="1" latinLnBrk="0" hangingPunct="1">
+              <a:defRPr sz="1832" kern="1200">
+                <a:solidFill>
+                  <a:schemeClr val="tx1"/>
+                </a:solidFill>
+                <a:latin typeface="+mn-lt"/>
+                <a:ea typeface="+mn-ea"/>
+                <a:cs typeface="+mn-cs"/>
+              </a:defRPr>
+            </a:lvl4pPr>
+            <a:lvl5pPr marL="1860987" algn="l" defTabSz="930493" rtl="0" eaLnBrk="1" latinLnBrk="0" hangingPunct="1">
+              <a:defRPr sz="1832" kern="1200">
+                <a:solidFill>
+                  <a:schemeClr val="tx1"/>
+                </a:solidFill>
+                <a:latin typeface="+mn-lt"/>
+                <a:ea typeface="+mn-ea"/>
+                <a:cs typeface="+mn-cs"/>
+              </a:defRPr>
+            </a:lvl5pPr>
+            <a:lvl6pPr marL="2326234" algn="l" defTabSz="930493" rtl="0" eaLnBrk="1" latinLnBrk="0" hangingPunct="1">
+              <a:defRPr sz="1832" kern="1200">
+                <a:solidFill>
+                  <a:schemeClr val="tx1"/>
+                </a:solidFill>
+                <a:latin typeface="+mn-lt"/>
+                <a:ea typeface="+mn-ea"/>
+                <a:cs typeface="+mn-cs"/>
+              </a:defRPr>
+            </a:lvl6pPr>
+            <a:lvl7pPr marL="2791480" algn="l" defTabSz="930493" rtl="0" eaLnBrk="1" latinLnBrk="0" hangingPunct="1">
+              <a:defRPr sz="1832" kern="1200">
+                <a:solidFill>
+                  <a:schemeClr val="tx1"/>
+                </a:solidFill>
+                <a:latin typeface="+mn-lt"/>
+                <a:ea typeface="+mn-ea"/>
+                <a:cs typeface="+mn-cs"/>
+              </a:defRPr>
+            </a:lvl7pPr>
+            <a:lvl8pPr marL="3256727" algn="l" defTabSz="930493" rtl="0" eaLnBrk="1" latinLnBrk="0" hangingPunct="1">
+              <a:defRPr sz="1832" kern="1200">
+                <a:solidFill>
+                  <a:schemeClr val="tx1"/>
+                </a:solidFill>
+                <a:latin typeface="+mn-lt"/>
+                <a:ea typeface="+mn-ea"/>
+                <a:cs typeface="+mn-cs"/>
+              </a:defRPr>
+            </a:lvl8pPr>
+            <a:lvl9pPr marL="3721974" algn="l" defTabSz="930493" rtl="0" eaLnBrk="1" latinLnBrk="0" hangingPunct="1">
+              <a:defRPr sz="1832" kern="1200">
+                <a:solidFill>
+                  <a:schemeClr val="tx1"/>
+                </a:solidFill>
+                <a:latin typeface="+mn-lt"/>
+                <a:ea typeface="+mn-ea"/>
+                <a:cs typeface="+mn-cs"/>
+              </a:defRPr>
+            </a:lvl9pPr>
+          </a:lstStyle>
+          <a:p>
+            <a:pPr>
+              <a:defRPr sz="1630"/>
+            </a:pPr>
+            <a:r>
+              <a:rPr lang="fr-FR" sz="3600" kern="0" dirty="0">
+                <a:solidFill>
+                  <a:srgbClr val="1F4E79"/>
+                </a:solidFill>
+                <a:ea typeface="+mn-lt"/>
+                <a:cs typeface="+mn-lt"/>
+              </a:rPr>
+              <a:t>{{</a:t>
+            </a:r>
+            <a:r>
+              <a:rPr lang="fr-FR" sz="3600" kern="0" dirty="0" err="1">
+                <a:solidFill>
+                  <a:srgbClr val="1F4E79"/>
+                </a:solidFill>
+                <a:ea typeface="+mn-lt"/>
+                <a:cs typeface="+mn-lt"/>
+              </a:rPr>
+              <a:t>project_name</a:t>
+            </a:r>
+            <a:r>
+              <a:rPr lang="fr-FR" sz="3600" kern="0" dirty="0">
+                <a:solidFill>
+                  <a:srgbClr val="1F4E79"/>
+                </a:solidFill>
+                <a:ea typeface="+mn-lt"/>
+                <a:cs typeface="+mn-lt"/>
+              </a:rPr>
+              <a:t>}}</a:t>
+            </a:r>
+            <a:endParaRPr lang="fr-FR" sz="3600" kern="0" dirty="0">
+              <a:solidFill>
+                <a:srgbClr val="1F4E79"/>
+              </a:solidFill>
+            </a:endParaRPr>
+          </a:p>
+        </p:txBody>
+      </p:sp>
+      <p:sp>
+        <p:nvSpPr>
+          <p:cNvPr id="4" name="Rectangle 1">
+            <a:extLst>
+              <a:ext uri="{FF2B5EF4-FFF2-40B4-BE49-F238E27FC236}">
+                <a16:creationId xmlns:a16="http://schemas.microsoft.com/office/drawing/2014/main" id="{6DA08C98-DE60-19CD-8D69-0E036D4081B5}"/>
+              </a:ext>
+            </a:extLst>
+          </p:cNvPr>
+          <p:cNvSpPr/>
+          <p:nvPr/>
+        </p:nvSpPr>
+        <p:spPr>
+          <a:xfrm>
+            <a:off x="692289" y="1379467"/>
+            <a:ext cx="10803891" cy="4750028"/>
+          </a:xfrm>
+          <a:prstGeom prst="rect">
+            <a:avLst/>
+          </a:prstGeom>
+          <a:noFill/>
+          <a:ln>
+            <a:noFill/>
+            <a:prstDash val="solid"/>
+          </a:ln>
+        </p:spPr>
+        <p:txBody>
+          <a:bodyPr vert="horz" wrap="square" lIns="91673" tIns="45837" rIns="91673" bIns="45837" anchor="t" anchorCtr="0" compatLnSpc="0">
+            <a:noAutofit/>
+          </a:bodyPr>
+          <a:lstStyle>
+            <a:defPPr>
+              <a:defRPr lang="fr-FR"/>
+            </a:defPPr>
+            <a:lvl1pPr marL="0" algn="l" defTabSz="930493" rtl="0" eaLnBrk="1" latinLnBrk="0" hangingPunct="1">
+              <a:defRPr sz="1832" kern="1200">
+                <a:solidFill>
+                  <a:schemeClr val="tx1"/>
+                </a:solidFill>
+                <a:latin typeface="+mn-lt"/>
+                <a:ea typeface="+mn-ea"/>
+                <a:cs typeface="+mn-cs"/>
+              </a:defRPr>
+            </a:lvl1pPr>
+            <a:lvl2pPr marL="465247" algn="l" defTabSz="930493" rtl="0" eaLnBrk="1" latinLnBrk="0" hangingPunct="1">
+              <a:defRPr sz="1832" kern="1200">
+                <a:solidFill>
+                  <a:schemeClr val="tx1"/>
+                </a:solidFill>
+                <a:latin typeface="+mn-lt"/>
+                <a:ea typeface="+mn-ea"/>
+                <a:cs typeface="+mn-cs"/>
+              </a:defRPr>
+            </a:lvl2pPr>
+            <a:lvl3pPr marL="930493" algn="l" defTabSz="930493" rtl="0" eaLnBrk="1" latinLnBrk="0" hangingPunct="1">
+              <a:defRPr sz="1832" kern="1200">
+                <a:solidFill>
+                  <a:schemeClr val="tx1"/>
+                </a:solidFill>
+                <a:latin typeface="+mn-lt"/>
+                <a:ea typeface="+mn-ea"/>
+                <a:cs typeface="+mn-cs"/>
+              </a:defRPr>
+            </a:lvl3pPr>
+            <a:lvl4pPr marL="1395740" algn="l" defTabSz="930493" rtl="0" eaLnBrk="1" latinLnBrk="0" hangingPunct="1">
+              <a:defRPr sz="1832" kern="1200">
+                <a:solidFill>
+                  <a:schemeClr val="tx1"/>
+                </a:solidFill>
+                <a:latin typeface="+mn-lt"/>
+                <a:ea typeface="+mn-ea"/>
+                <a:cs typeface="+mn-cs"/>
+              </a:defRPr>
+            </a:lvl4pPr>
+            <a:lvl5pPr marL="1860987" algn="l" defTabSz="930493" rtl="0" eaLnBrk="1" latinLnBrk="0" hangingPunct="1">
+              <a:defRPr sz="1832" kern="1200">
+                <a:solidFill>
+                  <a:schemeClr val="tx1"/>
+                </a:solidFill>
+                <a:latin typeface="+mn-lt"/>
+                <a:ea typeface="+mn-ea"/>
+                <a:cs typeface="+mn-cs"/>
+              </a:defRPr>
+            </a:lvl5pPr>
+            <a:lvl6pPr marL="2326234" algn="l" defTabSz="930493" rtl="0" eaLnBrk="1" latinLnBrk="0" hangingPunct="1">
+              <a:defRPr sz="1832" kern="1200">
+                <a:solidFill>
+                  <a:schemeClr val="tx1"/>
+                </a:solidFill>
+                <a:latin typeface="+mn-lt"/>
+                <a:ea typeface="+mn-ea"/>
+                <a:cs typeface="+mn-cs"/>
+              </a:defRPr>
+            </a:lvl6pPr>
+            <a:lvl7pPr marL="2791480" algn="l" defTabSz="930493" rtl="0" eaLnBrk="1" latinLnBrk="0" hangingPunct="1">
+              <a:defRPr sz="1832" kern="1200">
+                <a:solidFill>
+                  <a:schemeClr val="tx1"/>
+                </a:solidFill>
+                <a:latin typeface="+mn-lt"/>
+                <a:ea typeface="+mn-ea"/>
+                <a:cs typeface="+mn-cs"/>
+              </a:defRPr>
+            </a:lvl7pPr>
+            <a:lvl8pPr marL="3256727" algn="l" defTabSz="930493" rtl="0" eaLnBrk="1" latinLnBrk="0" hangingPunct="1">
+              <a:defRPr sz="1832" kern="1200">
+                <a:solidFill>
+                  <a:schemeClr val="tx1"/>
+                </a:solidFill>
+                <a:latin typeface="+mn-lt"/>
+                <a:ea typeface="+mn-ea"/>
+                <a:cs typeface="+mn-cs"/>
+              </a:defRPr>
+            </a:lvl8pPr>
+            <a:lvl9pPr marL="3721974" algn="l" defTabSz="930493" rtl="0" eaLnBrk="1" latinLnBrk="0" hangingPunct="1">
+              <a:defRPr sz="1832" kern="1200">
+                <a:solidFill>
+                  <a:schemeClr val="tx1"/>
+                </a:solidFill>
+                <a:latin typeface="+mn-lt"/>
+                <a:ea typeface="+mn-ea"/>
+                <a:cs typeface="+mn-cs"/>
+              </a:defRPr>
+            </a:lvl9pPr>
+          </a:lstStyle>
+          <a:p>
+            <a:r>
+              <a:rPr lang="fr-FR" dirty="0"/>
+              <a:t> {{</a:t>
+            </a:r>
+            <a:r>
+              <a:rPr lang="fr-FR" dirty="0" err="1"/>
+              <a:t>chart:types</a:t>
+            </a:r>
+            <a:r>
+              <a:rPr lang="fr-FR" dirty="0"/>
+              <a:t>}}</a:t>
+            </a:r>
+          </a:p>
+        </p:txBody>
+      </p:sp>
+      <p:sp>
+        <p:nvSpPr>
+          <p:cNvPr id="5" name="Espace réservé du numéro de diapositive 4">
+            <a:extLst>
+              <a:ext uri="{FF2B5EF4-FFF2-40B4-BE49-F238E27FC236}">
+                <a16:creationId xmlns:a16="http://schemas.microsoft.com/office/drawing/2014/main" id="{34DF3F68-011F-66D1-2C15-3315AB94AD66}"/>
+              </a:ext>
+            </a:extLst>
+          </p:cNvPr>
+          <p:cNvSpPr>
+            <a:spLocks noGrp="1"/>
+          </p:cNvSpPr>
+          <p:nvPr>
+            <p:ph type="sldNum" sz="quarter" idx="12"/>
+          </p:nvPr>
+        </p:nvSpPr>
+        <p:spPr/>
+        <p:txBody>
+          <a:bodyPr/>
+          <a:lstStyle/>
+          <a:p>
+            <a:fld id="{27C6CCC6-2BE5-4E42-96A4-D1E8E81A3D8E}" type="slidenum">
+              <a:rPr lang="fr-FR" smtClean="0"/>
+              <a:t>14</a:t>
+            </a:fld>
+            <a:endParaRPr lang="fr-FR"/>
+          </a:p>
+        </p:txBody>
+      </p:sp>
+      <p:pic>
+        <p:nvPicPr>
+          <p:cNvPr id="6" name="Image 5" descr="Une image contenant Police, logo, Graphique, symbole&#10;&#10;Le contenu généré par l’IA peut être incorrect.">
+            <a:extLst>
+              <a:ext uri="{FF2B5EF4-FFF2-40B4-BE49-F238E27FC236}">
+                <a16:creationId xmlns:a16="http://schemas.microsoft.com/office/drawing/2014/main" id="{E23286A1-7071-4CBA-3011-588367EA5D17}"/>
+              </a:ext>
+            </a:extLst>
+          </p:cNvPr>
+          <p:cNvPicPr>
+            <a:picLocks noChangeAspect="1"/>
+          </p:cNvPicPr>
+          <p:nvPr/>
+        </p:nvPicPr>
+        <p:blipFill>
+          <a:blip r:embed="rId3"/>
+          <a:stretch>
+            <a:fillRect/>
+          </a:stretch>
+        </p:blipFill>
+        <p:spPr>
+          <a:xfrm>
+            <a:off x="9978572" y="507546"/>
+            <a:ext cx="1524000" cy="400050"/>
+          </a:xfrm>
+          <a:prstGeom prst="rect">
+            <a:avLst/>
+          </a:prstGeom>
+        </p:spPr>
+      </p:pic>
+    </p:spTree>
+    <p:extLst>
+      <p:ext uri="{BB962C8B-B14F-4D97-AF65-F5344CB8AC3E}">
+        <p14:creationId xmlns:p14="http://schemas.microsoft.com/office/powerpoint/2010/main" val="2987312959"/>
+      </p:ext>
+    </p:extLst>
+  </p:cSld>
+  <p:clrMapOvr>
+    <a:masterClrMapping/>
+  </p:clrMapOvr>
+</p:sld>
+</file>
+
+<file path=ppt/slides/slide15.xml><?xml version="1.0" encoding="utf-8"?>
+<p:sld xmlns:a="http://schemas.openxmlformats.org/drawingml/2006/main" xmlns:r="http://schemas.openxmlformats.org/officeDocument/2006/relationships" xmlns:p="http://schemas.openxmlformats.org/presentationml/2006/main">
+  <p:cSld>
+    <p:spTree>
+      <p:nvGrpSpPr>
+        <p:cNvPr id="1" name="">
+          <a:extLst>
+            <a:ext uri="{FF2B5EF4-FFF2-40B4-BE49-F238E27FC236}">
+              <a16:creationId xmlns:a16="http://schemas.microsoft.com/office/drawing/2014/main" id="{B42C7235-8D19-C7A5-EBEE-B3C0A9259820}"/>
+            </a:ext>
+          </a:extLst>
+        </p:cNvPr>
+        <p:cNvGrpSpPr/>
+        <p:nvPr/>
+      </p:nvGrpSpPr>
+      <p:grpSpPr>
+        <a:xfrm>
+          <a:off x="0" y="0"/>
+          <a:ext cx="0" cy="0"/>
+          <a:chOff x="0" y="0"/>
+          <a:chExt cx="0" cy="0"/>
+        </a:xfrm>
+      </p:grpSpPr>
+      <p:sp>
+        <p:nvSpPr>
+          <p:cNvPr id="3" name="ZoneTexte 6">
+            <a:extLst>
+              <a:ext uri="{FF2B5EF4-FFF2-40B4-BE49-F238E27FC236}">
+                <a16:creationId xmlns:a16="http://schemas.microsoft.com/office/drawing/2014/main" id="{E4F3CC4C-8826-5849-DC88-6E6682E7BE78}"/>
+              </a:ext>
+            </a:extLst>
+          </p:cNvPr>
+          <p:cNvSpPr txBox="1"/>
+          <p:nvPr/>
+        </p:nvSpPr>
+        <p:spPr>
+          <a:xfrm>
+            <a:off x="692289" y="365303"/>
+            <a:ext cx="8756869" cy="656185"/>
+          </a:xfrm>
+          <a:prstGeom prst="rect">
+            <a:avLst/>
+          </a:prstGeom>
+          <a:noFill/>
+          <a:ln>
+            <a:noFill/>
+          </a:ln>
+        </p:spPr>
+        <p:txBody>
+          <a:bodyPr vert="horz" wrap="square" lIns="91673" tIns="45837" rIns="91673" bIns="45837" anchor="t" anchorCtr="0" compatLnSpc="0">
+            <a:spAutoFit/>
+          </a:bodyPr>
+          <a:lstStyle>
+            <a:defPPr>
+              <a:defRPr lang="fr-FR"/>
+            </a:defPPr>
+            <a:lvl1pPr marL="0" algn="l" defTabSz="930493" rtl="0" eaLnBrk="1" latinLnBrk="0" hangingPunct="1">
+              <a:defRPr sz="1832" kern="1200">
+                <a:solidFill>
+                  <a:schemeClr val="tx1"/>
+                </a:solidFill>
+                <a:latin typeface="+mn-lt"/>
+                <a:ea typeface="+mn-ea"/>
+                <a:cs typeface="+mn-cs"/>
+              </a:defRPr>
+            </a:lvl1pPr>
+            <a:lvl2pPr marL="465247" algn="l" defTabSz="930493" rtl="0" eaLnBrk="1" latinLnBrk="0" hangingPunct="1">
+              <a:defRPr sz="1832" kern="1200">
+                <a:solidFill>
+                  <a:schemeClr val="tx1"/>
+                </a:solidFill>
+                <a:latin typeface="+mn-lt"/>
+                <a:ea typeface="+mn-ea"/>
+                <a:cs typeface="+mn-cs"/>
+              </a:defRPr>
+            </a:lvl2pPr>
+            <a:lvl3pPr marL="930493" algn="l" defTabSz="930493" rtl="0" eaLnBrk="1" latinLnBrk="0" hangingPunct="1">
+              <a:defRPr sz="1832" kern="1200">
+                <a:solidFill>
+                  <a:schemeClr val="tx1"/>
+                </a:solidFill>
+                <a:latin typeface="+mn-lt"/>
+                <a:ea typeface="+mn-ea"/>
+                <a:cs typeface="+mn-cs"/>
+              </a:defRPr>
+            </a:lvl3pPr>
+            <a:lvl4pPr marL="1395740" algn="l" defTabSz="930493" rtl="0" eaLnBrk="1" latinLnBrk="0" hangingPunct="1">
+              <a:defRPr sz="1832" kern="1200">
+                <a:solidFill>
+                  <a:schemeClr val="tx1"/>
+                </a:solidFill>
+                <a:latin typeface="+mn-lt"/>
+                <a:ea typeface="+mn-ea"/>
+                <a:cs typeface="+mn-cs"/>
+              </a:defRPr>
+            </a:lvl4pPr>
+            <a:lvl5pPr marL="1860987" algn="l" defTabSz="930493" rtl="0" eaLnBrk="1" latinLnBrk="0" hangingPunct="1">
+              <a:defRPr sz="1832" kern="1200">
+                <a:solidFill>
+                  <a:schemeClr val="tx1"/>
+                </a:solidFill>
+                <a:latin typeface="+mn-lt"/>
+                <a:ea typeface="+mn-ea"/>
+                <a:cs typeface="+mn-cs"/>
+              </a:defRPr>
+            </a:lvl5pPr>
+            <a:lvl6pPr marL="2326234" algn="l" defTabSz="930493" rtl="0" eaLnBrk="1" latinLnBrk="0" hangingPunct="1">
+              <a:defRPr sz="1832" kern="1200">
+                <a:solidFill>
+                  <a:schemeClr val="tx1"/>
+                </a:solidFill>
+                <a:latin typeface="+mn-lt"/>
+                <a:ea typeface="+mn-ea"/>
+                <a:cs typeface="+mn-cs"/>
+              </a:defRPr>
+            </a:lvl6pPr>
+            <a:lvl7pPr marL="2791480" algn="l" defTabSz="930493" rtl="0" eaLnBrk="1" latinLnBrk="0" hangingPunct="1">
+              <a:defRPr sz="1832" kern="1200">
+                <a:solidFill>
+                  <a:schemeClr val="tx1"/>
+                </a:solidFill>
+                <a:latin typeface="+mn-lt"/>
+                <a:ea typeface="+mn-ea"/>
+                <a:cs typeface="+mn-cs"/>
+              </a:defRPr>
+            </a:lvl7pPr>
+            <a:lvl8pPr marL="3256727" algn="l" defTabSz="930493" rtl="0" eaLnBrk="1" latinLnBrk="0" hangingPunct="1">
+              <a:defRPr sz="1832" kern="1200">
+                <a:solidFill>
+                  <a:schemeClr val="tx1"/>
+                </a:solidFill>
+                <a:latin typeface="+mn-lt"/>
+                <a:ea typeface="+mn-ea"/>
+                <a:cs typeface="+mn-cs"/>
+              </a:defRPr>
+            </a:lvl8pPr>
+            <a:lvl9pPr marL="3721974" algn="l" defTabSz="930493" rtl="0" eaLnBrk="1" latinLnBrk="0" hangingPunct="1">
+              <a:defRPr sz="1832" kern="1200">
+                <a:solidFill>
+                  <a:schemeClr val="tx1"/>
+                </a:solidFill>
+                <a:latin typeface="+mn-lt"/>
+                <a:ea typeface="+mn-ea"/>
+                <a:cs typeface="+mn-cs"/>
+              </a:defRPr>
+            </a:lvl9pPr>
+          </a:lstStyle>
+          <a:p>
+            <a:pPr>
+              <a:defRPr sz="1630"/>
+            </a:pPr>
+            <a:r>
+              <a:rPr lang="fr-FR" sz="3600" kern="0" dirty="0">
+                <a:solidFill>
+                  <a:srgbClr val="1F4E79"/>
+                </a:solidFill>
+                <a:ea typeface="+mn-lt"/>
+                <a:cs typeface="+mn-lt"/>
+              </a:rPr>
+              <a:t>{{</a:t>
+            </a:r>
+            <a:r>
+              <a:rPr lang="fr-FR" sz="3600" kern="0" dirty="0" err="1">
+                <a:solidFill>
+                  <a:srgbClr val="1F4E79"/>
+                </a:solidFill>
+                <a:ea typeface="+mn-lt"/>
+                <a:cs typeface="+mn-lt"/>
+              </a:rPr>
+              <a:t>project_name</a:t>
+            </a:r>
+            <a:r>
+              <a:rPr lang="fr-FR" sz="3600" kern="0" dirty="0">
+                <a:solidFill>
+                  <a:srgbClr val="1F4E79"/>
+                </a:solidFill>
+                <a:ea typeface="+mn-lt"/>
+                <a:cs typeface="+mn-lt"/>
+              </a:rPr>
+              <a:t>}}</a:t>
+            </a:r>
+            <a:endParaRPr lang="fr-FR" sz="3600" kern="0" dirty="0">
+              <a:solidFill>
+                <a:srgbClr val="1F4E79"/>
+              </a:solidFill>
+            </a:endParaRPr>
+          </a:p>
+        </p:txBody>
+      </p:sp>
+      <p:sp>
+        <p:nvSpPr>
+          <p:cNvPr id="4" name="Rectangle 1">
+            <a:extLst>
+              <a:ext uri="{FF2B5EF4-FFF2-40B4-BE49-F238E27FC236}">
+                <a16:creationId xmlns:a16="http://schemas.microsoft.com/office/drawing/2014/main" id="{86293E5A-80FC-F271-BDE8-F0BD674E2AC6}"/>
+              </a:ext>
+            </a:extLst>
+          </p:cNvPr>
+          <p:cNvSpPr/>
+          <p:nvPr/>
+        </p:nvSpPr>
+        <p:spPr>
+          <a:xfrm>
+            <a:off x="692289" y="1379467"/>
+            <a:ext cx="10803891" cy="4750028"/>
+          </a:xfrm>
+          <a:prstGeom prst="rect">
+            <a:avLst/>
+          </a:prstGeom>
+          <a:noFill/>
+          <a:ln>
+            <a:noFill/>
+            <a:prstDash val="solid"/>
+          </a:ln>
+        </p:spPr>
+        <p:txBody>
+          <a:bodyPr vert="horz" wrap="square" lIns="91673" tIns="45837" rIns="91673" bIns="45837" anchor="t" anchorCtr="0" compatLnSpc="0">
+            <a:noAutofit/>
+          </a:bodyPr>
+          <a:lstStyle>
+            <a:defPPr>
+              <a:defRPr lang="fr-FR"/>
+            </a:defPPr>
+            <a:lvl1pPr marL="0" algn="l" defTabSz="930493" rtl="0" eaLnBrk="1" latinLnBrk="0" hangingPunct="1">
+              <a:defRPr sz="1832" kern="1200">
+                <a:solidFill>
+                  <a:schemeClr val="tx1"/>
+                </a:solidFill>
+                <a:latin typeface="+mn-lt"/>
+                <a:ea typeface="+mn-ea"/>
+                <a:cs typeface="+mn-cs"/>
+              </a:defRPr>
+            </a:lvl1pPr>
+            <a:lvl2pPr marL="465247" algn="l" defTabSz="930493" rtl="0" eaLnBrk="1" latinLnBrk="0" hangingPunct="1">
+              <a:defRPr sz="1832" kern="1200">
+                <a:solidFill>
+                  <a:schemeClr val="tx1"/>
+                </a:solidFill>
+                <a:latin typeface="+mn-lt"/>
+                <a:ea typeface="+mn-ea"/>
+                <a:cs typeface="+mn-cs"/>
+              </a:defRPr>
+            </a:lvl2pPr>
+            <a:lvl3pPr marL="930493" algn="l" defTabSz="930493" rtl="0" eaLnBrk="1" latinLnBrk="0" hangingPunct="1">
+              <a:defRPr sz="1832" kern="1200">
+                <a:solidFill>
+                  <a:schemeClr val="tx1"/>
+                </a:solidFill>
+                <a:latin typeface="+mn-lt"/>
+                <a:ea typeface="+mn-ea"/>
+                <a:cs typeface="+mn-cs"/>
+              </a:defRPr>
+            </a:lvl3pPr>
+            <a:lvl4pPr marL="1395740" algn="l" defTabSz="930493" rtl="0" eaLnBrk="1" latinLnBrk="0" hangingPunct="1">
+              <a:defRPr sz="1832" kern="1200">
+                <a:solidFill>
+                  <a:schemeClr val="tx1"/>
+                </a:solidFill>
+                <a:latin typeface="+mn-lt"/>
+                <a:ea typeface="+mn-ea"/>
+                <a:cs typeface="+mn-cs"/>
+              </a:defRPr>
+            </a:lvl4pPr>
+            <a:lvl5pPr marL="1860987" algn="l" defTabSz="930493" rtl="0" eaLnBrk="1" latinLnBrk="0" hangingPunct="1">
+              <a:defRPr sz="1832" kern="1200">
+                <a:solidFill>
+                  <a:schemeClr val="tx1"/>
+                </a:solidFill>
+                <a:latin typeface="+mn-lt"/>
+                <a:ea typeface="+mn-ea"/>
+                <a:cs typeface="+mn-cs"/>
+              </a:defRPr>
+            </a:lvl5pPr>
+            <a:lvl6pPr marL="2326234" algn="l" defTabSz="930493" rtl="0" eaLnBrk="1" latinLnBrk="0" hangingPunct="1">
+              <a:defRPr sz="1832" kern="1200">
+                <a:solidFill>
+                  <a:schemeClr val="tx1"/>
+                </a:solidFill>
+                <a:latin typeface="+mn-lt"/>
+                <a:ea typeface="+mn-ea"/>
+                <a:cs typeface="+mn-cs"/>
+              </a:defRPr>
+            </a:lvl6pPr>
+            <a:lvl7pPr marL="2791480" algn="l" defTabSz="930493" rtl="0" eaLnBrk="1" latinLnBrk="0" hangingPunct="1">
+              <a:defRPr sz="1832" kern="1200">
+                <a:solidFill>
+                  <a:schemeClr val="tx1"/>
+                </a:solidFill>
+                <a:latin typeface="+mn-lt"/>
+                <a:ea typeface="+mn-ea"/>
+                <a:cs typeface="+mn-cs"/>
+              </a:defRPr>
+            </a:lvl7pPr>
+            <a:lvl8pPr marL="3256727" algn="l" defTabSz="930493" rtl="0" eaLnBrk="1" latinLnBrk="0" hangingPunct="1">
+              <a:defRPr sz="1832" kern="1200">
+                <a:solidFill>
+                  <a:schemeClr val="tx1"/>
+                </a:solidFill>
+                <a:latin typeface="+mn-lt"/>
+                <a:ea typeface="+mn-ea"/>
+                <a:cs typeface="+mn-cs"/>
+              </a:defRPr>
+            </a:lvl8pPr>
+            <a:lvl9pPr marL="3721974" algn="l" defTabSz="930493" rtl="0" eaLnBrk="1" latinLnBrk="0" hangingPunct="1">
+              <a:defRPr sz="1832" kern="1200">
+                <a:solidFill>
+                  <a:schemeClr val="tx1"/>
+                </a:solidFill>
+                <a:latin typeface="+mn-lt"/>
+                <a:ea typeface="+mn-ea"/>
+                <a:cs typeface="+mn-cs"/>
+              </a:defRPr>
+            </a:lvl9pPr>
+          </a:lstStyle>
+          <a:p>
+            <a:r>
+              <a:rPr lang="fr-FR" dirty="0"/>
+              <a:t> {{</a:t>
+            </a:r>
+            <a:r>
+              <a:rPr lang="fr-FR" dirty="0" err="1"/>
+              <a:t>chart:types_conso</a:t>
+            </a:r>
+            <a:r>
+              <a:rPr lang="fr-FR" dirty="0"/>
+              <a:t>}}</a:t>
+            </a:r>
+          </a:p>
+        </p:txBody>
+      </p:sp>
+      <p:sp>
+        <p:nvSpPr>
+          <p:cNvPr id="5" name="Espace réservé du numéro de diapositive 4">
+            <a:extLst>
+              <a:ext uri="{FF2B5EF4-FFF2-40B4-BE49-F238E27FC236}">
+                <a16:creationId xmlns:a16="http://schemas.microsoft.com/office/drawing/2014/main" id="{9D2BA1EF-32B9-67FD-03DC-579D11B0111C}"/>
+              </a:ext>
+            </a:extLst>
+          </p:cNvPr>
+          <p:cNvSpPr>
+            <a:spLocks noGrp="1"/>
+          </p:cNvSpPr>
+          <p:nvPr>
+            <p:ph type="sldNum" sz="quarter" idx="12"/>
+          </p:nvPr>
+        </p:nvSpPr>
+        <p:spPr/>
+        <p:txBody>
+          <a:bodyPr/>
+          <a:lstStyle/>
+          <a:p>
+            <a:fld id="{27C6CCC6-2BE5-4E42-96A4-D1E8E81A3D8E}" type="slidenum">
+              <a:rPr lang="fr-FR" smtClean="0"/>
+              <a:t>15</a:t>
+            </a:fld>
+            <a:endParaRPr lang="fr-FR"/>
+          </a:p>
+        </p:txBody>
+      </p:sp>
+      <p:pic>
+        <p:nvPicPr>
+          <p:cNvPr id="6" name="Image 5" descr="Une image contenant Police, logo, Graphique, symbole&#10;&#10;Le contenu généré par l’IA peut être incorrect.">
+            <a:extLst>
+              <a:ext uri="{FF2B5EF4-FFF2-40B4-BE49-F238E27FC236}">
+                <a16:creationId xmlns:a16="http://schemas.microsoft.com/office/drawing/2014/main" id="{D0A65CC1-4B96-627A-BEE7-4F6952A70C77}"/>
+              </a:ext>
+            </a:extLst>
+          </p:cNvPr>
+          <p:cNvPicPr>
+            <a:picLocks noChangeAspect="1"/>
+          </p:cNvPicPr>
+          <p:nvPr/>
+        </p:nvPicPr>
+        <p:blipFill>
+          <a:blip r:embed="rId3"/>
+          <a:stretch>
+            <a:fillRect/>
+          </a:stretch>
+        </p:blipFill>
+        <p:spPr>
+          <a:xfrm>
+            <a:off x="9978572" y="507546"/>
+            <a:ext cx="1524000" cy="400050"/>
+          </a:xfrm>
+          <a:prstGeom prst="rect">
+            <a:avLst/>
+          </a:prstGeom>
+        </p:spPr>
+      </p:pic>
+    </p:spTree>
+    <p:extLst>
+      <p:ext uri="{BB962C8B-B14F-4D97-AF65-F5344CB8AC3E}">
+        <p14:creationId xmlns:p14="http://schemas.microsoft.com/office/powerpoint/2010/main" val="1262607477"/>
+      </p:ext>
+    </p:extLst>
+  </p:cSld>
+  <p:clrMapOvr>
+    <a:masterClrMapping/>
+  </p:clrMapOvr>
+</p:sld>
+</file>
+
+<file path=ppt/slides/slide16.xml><?xml version="1.0" encoding="utf-8"?>
+<p:sld xmlns:a="http://schemas.openxmlformats.org/drawingml/2006/main" xmlns:r="http://schemas.openxmlformats.org/officeDocument/2006/relationships" xmlns:p="http://schemas.openxmlformats.org/presentationml/2006/main">
+  <p:cSld>
+    <p:spTree>
+      <p:nvGrpSpPr>
+        <p:cNvPr id="1" name="">
+          <a:extLst>
+            <a:ext uri="{FF2B5EF4-FFF2-40B4-BE49-F238E27FC236}">
+              <a16:creationId xmlns:a16="http://schemas.microsoft.com/office/drawing/2014/main" id="{322B55C1-531A-C1A0-EE63-7FC14F3DE318}"/>
+            </a:ext>
+          </a:extLst>
+        </p:cNvPr>
+        <p:cNvGrpSpPr/>
+        <p:nvPr/>
+      </p:nvGrpSpPr>
+      <p:grpSpPr>
+        <a:xfrm>
+          <a:off x="0" y="0"/>
+          <a:ext cx="0" cy="0"/>
+          <a:chOff x="0" y="0"/>
+          <a:chExt cx="0" cy="0"/>
+        </a:xfrm>
+      </p:grpSpPr>
+      <p:sp>
+        <p:nvSpPr>
+          <p:cNvPr id="3" name="ZoneTexte 6">
+            <a:extLst>
+              <a:ext uri="{FF2B5EF4-FFF2-40B4-BE49-F238E27FC236}">
+                <a16:creationId xmlns:a16="http://schemas.microsoft.com/office/drawing/2014/main" id="{F8E051DD-27A9-B713-F917-AEEC05ACEF37}"/>
+              </a:ext>
+            </a:extLst>
+          </p:cNvPr>
+          <p:cNvSpPr txBox="1"/>
+          <p:nvPr/>
+        </p:nvSpPr>
+        <p:spPr>
+          <a:xfrm>
+            <a:off x="692289" y="365303"/>
+            <a:ext cx="8756869" cy="656185"/>
+          </a:xfrm>
+          <a:prstGeom prst="rect">
+            <a:avLst/>
+          </a:prstGeom>
+          <a:noFill/>
+          <a:ln>
+            <a:noFill/>
+          </a:ln>
+        </p:spPr>
+        <p:txBody>
+          <a:bodyPr vert="horz" wrap="square" lIns="91673" tIns="45837" rIns="91673" bIns="45837" anchor="t" anchorCtr="0" compatLnSpc="0">
+            <a:spAutoFit/>
+          </a:bodyPr>
+          <a:lstStyle>
+            <a:defPPr>
+              <a:defRPr lang="fr-FR"/>
+            </a:defPPr>
+            <a:lvl1pPr marL="0" algn="l" defTabSz="930493" rtl="0" eaLnBrk="1" latinLnBrk="0" hangingPunct="1">
+              <a:defRPr sz="1832" kern="1200">
+                <a:solidFill>
+                  <a:schemeClr val="tx1"/>
+                </a:solidFill>
+                <a:latin typeface="+mn-lt"/>
+                <a:ea typeface="+mn-ea"/>
+                <a:cs typeface="+mn-cs"/>
+              </a:defRPr>
+            </a:lvl1pPr>
+            <a:lvl2pPr marL="465247" algn="l" defTabSz="930493" rtl="0" eaLnBrk="1" latinLnBrk="0" hangingPunct="1">
+              <a:defRPr sz="1832" kern="1200">
+                <a:solidFill>
+                  <a:schemeClr val="tx1"/>
+                </a:solidFill>
+                <a:latin typeface="+mn-lt"/>
+                <a:ea typeface="+mn-ea"/>
+                <a:cs typeface="+mn-cs"/>
+              </a:defRPr>
+            </a:lvl2pPr>
+            <a:lvl3pPr marL="930493" algn="l" defTabSz="930493" rtl="0" eaLnBrk="1" latinLnBrk="0" hangingPunct="1">
+              <a:defRPr sz="1832" kern="1200">
+                <a:solidFill>
+                  <a:schemeClr val="tx1"/>
+                </a:solidFill>
+                <a:latin typeface="+mn-lt"/>
+                <a:ea typeface="+mn-ea"/>
+                <a:cs typeface="+mn-cs"/>
+              </a:defRPr>
+            </a:lvl3pPr>
+            <a:lvl4pPr marL="1395740" algn="l" defTabSz="930493" rtl="0" eaLnBrk="1" latinLnBrk="0" hangingPunct="1">
+              <a:defRPr sz="1832" kern="1200">
+                <a:solidFill>
+                  <a:schemeClr val="tx1"/>
+                </a:solidFill>
+                <a:latin typeface="+mn-lt"/>
+                <a:ea typeface="+mn-ea"/>
+                <a:cs typeface="+mn-cs"/>
+              </a:defRPr>
+            </a:lvl4pPr>
+            <a:lvl5pPr marL="1860987" algn="l" defTabSz="930493" rtl="0" eaLnBrk="1" latinLnBrk="0" hangingPunct="1">
+              <a:defRPr sz="1832" kern="1200">
+                <a:solidFill>
+                  <a:schemeClr val="tx1"/>
+                </a:solidFill>
+                <a:latin typeface="+mn-lt"/>
+                <a:ea typeface="+mn-ea"/>
+                <a:cs typeface="+mn-cs"/>
+              </a:defRPr>
+            </a:lvl5pPr>
+            <a:lvl6pPr marL="2326234" algn="l" defTabSz="930493" rtl="0" eaLnBrk="1" latinLnBrk="0" hangingPunct="1">
+              <a:defRPr sz="1832" kern="1200">
+                <a:solidFill>
+                  <a:schemeClr val="tx1"/>
+                </a:solidFill>
+                <a:latin typeface="+mn-lt"/>
+                <a:ea typeface="+mn-ea"/>
+                <a:cs typeface="+mn-cs"/>
+              </a:defRPr>
+            </a:lvl6pPr>
+            <a:lvl7pPr marL="2791480" algn="l" defTabSz="930493" rtl="0" eaLnBrk="1" latinLnBrk="0" hangingPunct="1">
+              <a:defRPr sz="1832" kern="1200">
+                <a:solidFill>
+                  <a:schemeClr val="tx1"/>
+                </a:solidFill>
+                <a:latin typeface="+mn-lt"/>
+                <a:ea typeface="+mn-ea"/>
+                <a:cs typeface="+mn-cs"/>
+              </a:defRPr>
+            </a:lvl7pPr>
+            <a:lvl8pPr marL="3256727" algn="l" defTabSz="930493" rtl="0" eaLnBrk="1" latinLnBrk="0" hangingPunct="1">
+              <a:defRPr sz="1832" kern="1200">
+                <a:solidFill>
+                  <a:schemeClr val="tx1"/>
+                </a:solidFill>
+                <a:latin typeface="+mn-lt"/>
+                <a:ea typeface="+mn-ea"/>
+                <a:cs typeface="+mn-cs"/>
+              </a:defRPr>
+            </a:lvl8pPr>
+            <a:lvl9pPr marL="3721974" algn="l" defTabSz="930493" rtl="0" eaLnBrk="1" latinLnBrk="0" hangingPunct="1">
+              <a:defRPr sz="1832" kern="1200">
+                <a:solidFill>
+                  <a:schemeClr val="tx1"/>
+                </a:solidFill>
+                <a:latin typeface="+mn-lt"/>
+                <a:ea typeface="+mn-ea"/>
+                <a:cs typeface="+mn-cs"/>
+              </a:defRPr>
+            </a:lvl9pPr>
+          </a:lstStyle>
+          <a:p>
+            <a:pPr>
+              <a:defRPr sz="1630"/>
+            </a:pPr>
+            <a:r>
+              <a:rPr lang="fr-FR" sz="3600" kern="0" dirty="0">
+                <a:solidFill>
+                  <a:srgbClr val="1F4E79"/>
+                </a:solidFill>
+                <a:ea typeface="+mn-lt"/>
+                <a:cs typeface="+mn-lt"/>
+              </a:rPr>
+              <a:t>{{</a:t>
+            </a:r>
+            <a:r>
+              <a:rPr lang="fr-FR" sz="3600" kern="0" dirty="0" err="1">
+                <a:solidFill>
+                  <a:srgbClr val="1F4E79"/>
+                </a:solidFill>
+                <a:ea typeface="+mn-lt"/>
+                <a:cs typeface="+mn-lt"/>
+              </a:rPr>
+              <a:t>project_name</a:t>
+            </a:r>
+            <a:r>
+              <a:rPr lang="fr-FR" sz="3600" kern="0" dirty="0">
+                <a:solidFill>
+                  <a:srgbClr val="1F4E79"/>
+                </a:solidFill>
+                <a:ea typeface="+mn-lt"/>
+                <a:cs typeface="+mn-lt"/>
+              </a:rPr>
+              <a:t>}}</a:t>
+            </a:r>
+            <a:endParaRPr lang="fr-FR" sz="3600" kern="0" dirty="0">
+              <a:solidFill>
+                <a:srgbClr val="1F4E79"/>
+              </a:solidFill>
+            </a:endParaRPr>
+          </a:p>
+        </p:txBody>
+      </p:sp>
+      <p:sp>
+        <p:nvSpPr>
+          <p:cNvPr id="4" name="Rectangle 1">
+            <a:extLst>
+              <a:ext uri="{FF2B5EF4-FFF2-40B4-BE49-F238E27FC236}">
+                <a16:creationId xmlns:a16="http://schemas.microsoft.com/office/drawing/2014/main" id="{75D236C2-2A20-8FE6-D391-E48D4F14A540}"/>
+              </a:ext>
+            </a:extLst>
+          </p:cNvPr>
+          <p:cNvSpPr/>
+          <p:nvPr/>
+        </p:nvSpPr>
+        <p:spPr>
+          <a:xfrm>
+            <a:off x="692289" y="1379467"/>
+            <a:ext cx="10803891" cy="4750028"/>
+          </a:xfrm>
+          <a:prstGeom prst="rect">
+            <a:avLst/>
+          </a:prstGeom>
+          <a:noFill/>
+          <a:ln>
+            <a:noFill/>
+            <a:prstDash val="solid"/>
+          </a:ln>
+        </p:spPr>
+        <p:txBody>
+          <a:bodyPr vert="horz" wrap="square" lIns="91673" tIns="45837" rIns="91673" bIns="45837" anchor="t" anchorCtr="0" compatLnSpc="0">
+            <a:noAutofit/>
+          </a:bodyPr>
+          <a:lstStyle>
+            <a:defPPr>
+              <a:defRPr lang="fr-FR"/>
+            </a:defPPr>
+            <a:lvl1pPr marL="0" algn="l" defTabSz="930493" rtl="0" eaLnBrk="1" latinLnBrk="0" hangingPunct="1">
+              <a:defRPr sz="1832" kern="1200">
+                <a:solidFill>
+                  <a:schemeClr val="tx1"/>
+                </a:solidFill>
+                <a:latin typeface="+mn-lt"/>
+                <a:ea typeface="+mn-ea"/>
+                <a:cs typeface="+mn-cs"/>
+              </a:defRPr>
+            </a:lvl1pPr>
+            <a:lvl2pPr marL="465247" algn="l" defTabSz="930493" rtl="0" eaLnBrk="1" latinLnBrk="0" hangingPunct="1">
+              <a:defRPr sz="1832" kern="1200">
+                <a:solidFill>
+                  <a:schemeClr val="tx1"/>
+                </a:solidFill>
+                <a:latin typeface="+mn-lt"/>
+                <a:ea typeface="+mn-ea"/>
+                <a:cs typeface="+mn-cs"/>
+              </a:defRPr>
+            </a:lvl2pPr>
+            <a:lvl3pPr marL="930493" algn="l" defTabSz="930493" rtl="0" eaLnBrk="1" latinLnBrk="0" hangingPunct="1">
+              <a:defRPr sz="1832" kern="1200">
+                <a:solidFill>
+                  <a:schemeClr val="tx1"/>
+                </a:solidFill>
+                <a:latin typeface="+mn-lt"/>
+                <a:ea typeface="+mn-ea"/>
+                <a:cs typeface="+mn-cs"/>
+              </a:defRPr>
+            </a:lvl3pPr>
+            <a:lvl4pPr marL="1395740" algn="l" defTabSz="930493" rtl="0" eaLnBrk="1" latinLnBrk="0" hangingPunct="1">
+              <a:defRPr sz="1832" kern="1200">
+                <a:solidFill>
+                  <a:schemeClr val="tx1"/>
+                </a:solidFill>
+                <a:latin typeface="+mn-lt"/>
+                <a:ea typeface="+mn-ea"/>
+                <a:cs typeface="+mn-cs"/>
+              </a:defRPr>
+            </a:lvl4pPr>
+            <a:lvl5pPr marL="1860987" algn="l" defTabSz="930493" rtl="0" eaLnBrk="1" latinLnBrk="0" hangingPunct="1">
+              <a:defRPr sz="1832" kern="1200">
+                <a:solidFill>
+                  <a:schemeClr val="tx1"/>
+                </a:solidFill>
+                <a:latin typeface="+mn-lt"/>
+                <a:ea typeface="+mn-ea"/>
+                <a:cs typeface="+mn-cs"/>
+              </a:defRPr>
+            </a:lvl5pPr>
+            <a:lvl6pPr marL="2326234" algn="l" defTabSz="930493" rtl="0" eaLnBrk="1" latinLnBrk="0" hangingPunct="1">
+              <a:defRPr sz="1832" kern="1200">
+                <a:solidFill>
+                  <a:schemeClr val="tx1"/>
+                </a:solidFill>
+                <a:latin typeface="+mn-lt"/>
+                <a:ea typeface="+mn-ea"/>
+                <a:cs typeface="+mn-cs"/>
+              </a:defRPr>
+            </a:lvl6pPr>
+            <a:lvl7pPr marL="2791480" algn="l" defTabSz="930493" rtl="0" eaLnBrk="1" latinLnBrk="0" hangingPunct="1">
+              <a:defRPr sz="1832" kern="1200">
+                <a:solidFill>
+                  <a:schemeClr val="tx1"/>
+                </a:solidFill>
+                <a:latin typeface="+mn-lt"/>
+                <a:ea typeface="+mn-ea"/>
+                <a:cs typeface="+mn-cs"/>
+              </a:defRPr>
+            </a:lvl7pPr>
+            <a:lvl8pPr marL="3256727" algn="l" defTabSz="930493" rtl="0" eaLnBrk="1" latinLnBrk="0" hangingPunct="1">
+              <a:defRPr sz="1832" kern="1200">
+                <a:solidFill>
+                  <a:schemeClr val="tx1"/>
+                </a:solidFill>
+                <a:latin typeface="+mn-lt"/>
+                <a:ea typeface="+mn-ea"/>
+                <a:cs typeface="+mn-cs"/>
+              </a:defRPr>
+            </a:lvl8pPr>
+            <a:lvl9pPr marL="3721974" algn="l" defTabSz="930493" rtl="0" eaLnBrk="1" latinLnBrk="0" hangingPunct="1">
+              <a:defRPr sz="1832" kern="1200">
+                <a:solidFill>
+                  <a:schemeClr val="tx1"/>
+                </a:solidFill>
+                <a:latin typeface="+mn-lt"/>
+                <a:ea typeface="+mn-ea"/>
+                <a:cs typeface="+mn-cs"/>
+              </a:defRPr>
+            </a:lvl9pPr>
+          </a:lstStyle>
+          <a:p>
+            <a:r>
+              <a:rPr lang="fr-FR" dirty="0"/>
+              <a:t> {{</a:t>
+            </a:r>
+            <a:r>
+              <a:rPr lang="fr-FR" dirty="0" err="1"/>
+              <a:t>chart:cycle_time</a:t>
+            </a:r>
+            <a:r>
+              <a:rPr lang="fr-FR" dirty="0"/>
+              <a:t>}}</a:t>
+            </a:r>
+          </a:p>
+        </p:txBody>
+      </p:sp>
+      <p:sp>
+        <p:nvSpPr>
+          <p:cNvPr id="5" name="Espace réservé du numéro de diapositive 4">
+            <a:extLst>
+              <a:ext uri="{FF2B5EF4-FFF2-40B4-BE49-F238E27FC236}">
+                <a16:creationId xmlns:a16="http://schemas.microsoft.com/office/drawing/2014/main" id="{3A5F20CE-4B2D-6098-5E28-99B86EBBF701}"/>
+              </a:ext>
+            </a:extLst>
+          </p:cNvPr>
+          <p:cNvSpPr>
+            <a:spLocks noGrp="1"/>
+          </p:cNvSpPr>
+          <p:nvPr>
+            <p:ph type="sldNum" sz="quarter" idx="12"/>
+          </p:nvPr>
+        </p:nvSpPr>
+        <p:spPr/>
+        <p:txBody>
+          <a:bodyPr/>
+          <a:lstStyle/>
+          <a:p>
+            <a:fld id="{27C6CCC6-2BE5-4E42-96A4-D1E8E81A3D8E}" type="slidenum">
+              <a:rPr lang="fr-FR" smtClean="0"/>
+              <a:t>16</a:t>
+            </a:fld>
+            <a:endParaRPr lang="fr-FR"/>
+          </a:p>
+        </p:txBody>
+      </p:sp>
+      <p:pic>
+        <p:nvPicPr>
+          <p:cNvPr id="6" name="Image 5" descr="Une image contenant Police, logo, Graphique, symbole&#10;&#10;Le contenu généré par l’IA peut être incorrect.">
+            <a:extLst>
+              <a:ext uri="{FF2B5EF4-FFF2-40B4-BE49-F238E27FC236}">
+                <a16:creationId xmlns:a16="http://schemas.microsoft.com/office/drawing/2014/main" id="{A3B9D28A-36CC-78FF-3BA1-A3B948F4E481}"/>
+              </a:ext>
+            </a:extLst>
+          </p:cNvPr>
+          <p:cNvPicPr>
+            <a:picLocks noChangeAspect="1"/>
+          </p:cNvPicPr>
+          <p:nvPr/>
+        </p:nvPicPr>
+        <p:blipFill>
+          <a:blip r:embed="rId3"/>
+          <a:stretch>
+            <a:fillRect/>
+          </a:stretch>
+        </p:blipFill>
+        <p:spPr>
+          <a:xfrm>
+            <a:off x="9978572" y="507546"/>
+            <a:ext cx="1524000" cy="400050"/>
+          </a:xfrm>
+          <a:prstGeom prst="rect">
+            <a:avLst/>
+          </a:prstGeom>
+        </p:spPr>
+      </p:pic>
+    </p:spTree>
+    <p:extLst>
+      <p:ext uri="{BB962C8B-B14F-4D97-AF65-F5344CB8AC3E}">
+        <p14:creationId xmlns:p14="http://schemas.microsoft.com/office/powerpoint/2010/main" val="3354197382"/>
+      </p:ext>
+    </p:extLst>
+  </p:cSld>
+  <p:clrMapOvr>
+    <a:masterClrMapping/>
+  </p:clrMapOvr>
+</p:sld>
+</file>
+
+<file path=ppt/slides/slide17.xml><?xml version="1.0" encoding="utf-8"?>
+<p:sld xmlns:a="http://schemas.openxmlformats.org/drawingml/2006/main" xmlns:r="http://schemas.openxmlformats.org/officeDocument/2006/relationships" xmlns:p="http://schemas.openxmlformats.org/presentationml/2006/main">
+  <p:cSld>
+    <p:spTree>
+      <p:nvGrpSpPr>
+        <p:cNvPr id="1" name="">
+          <a:extLst>
+            <a:ext uri="{FF2B5EF4-FFF2-40B4-BE49-F238E27FC236}">
+              <a16:creationId xmlns:a16="http://schemas.microsoft.com/office/drawing/2014/main" id="{52DC7BEB-A0C8-5668-D00C-5A13F6FE218E}"/>
+            </a:ext>
+          </a:extLst>
+        </p:cNvPr>
+        <p:cNvGrpSpPr/>
+        <p:nvPr/>
+      </p:nvGrpSpPr>
+      <p:grpSpPr>
+        <a:xfrm>
+          <a:off x="0" y="0"/>
+          <a:ext cx="0" cy="0"/>
+          <a:chOff x="0" y="0"/>
+          <a:chExt cx="0" cy="0"/>
+        </a:xfrm>
+      </p:grpSpPr>
+      <p:sp>
+        <p:nvSpPr>
+          <p:cNvPr id="3" name="ZoneTexte 6">
+            <a:extLst>
+              <a:ext uri="{FF2B5EF4-FFF2-40B4-BE49-F238E27FC236}">
+                <a16:creationId xmlns:a16="http://schemas.microsoft.com/office/drawing/2014/main" id="{C8D3DA82-7886-76EC-0072-D4A0BBD98DC7}"/>
+              </a:ext>
+            </a:extLst>
+          </p:cNvPr>
+          <p:cNvSpPr txBox="1"/>
+          <p:nvPr/>
+        </p:nvSpPr>
+        <p:spPr>
+          <a:xfrm>
+            <a:off x="692289" y="365303"/>
+            <a:ext cx="8756869" cy="656185"/>
+          </a:xfrm>
+          <a:prstGeom prst="rect">
+            <a:avLst/>
+          </a:prstGeom>
+          <a:noFill/>
+          <a:ln>
+            <a:noFill/>
+          </a:ln>
+        </p:spPr>
+        <p:txBody>
+          <a:bodyPr vert="horz" wrap="square" lIns="91673" tIns="45837" rIns="91673" bIns="45837" anchor="t" anchorCtr="0" compatLnSpc="0">
+            <a:spAutoFit/>
+          </a:bodyPr>
+          <a:lstStyle>
+            <a:defPPr>
+              <a:defRPr lang="fr-FR"/>
+            </a:defPPr>
+            <a:lvl1pPr marL="0" algn="l" defTabSz="930493" rtl="0" eaLnBrk="1" latinLnBrk="0" hangingPunct="1">
+              <a:defRPr sz="1832" kern="1200">
+                <a:solidFill>
+                  <a:schemeClr val="tx1"/>
+                </a:solidFill>
+                <a:latin typeface="+mn-lt"/>
+                <a:ea typeface="+mn-ea"/>
+                <a:cs typeface="+mn-cs"/>
+              </a:defRPr>
+            </a:lvl1pPr>
+            <a:lvl2pPr marL="465247" algn="l" defTabSz="930493" rtl="0" eaLnBrk="1" latinLnBrk="0" hangingPunct="1">
+              <a:defRPr sz="1832" kern="1200">
+                <a:solidFill>
+                  <a:schemeClr val="tx1"/>
+                </a:solidFill>
+                <a:latin typeface="+mn-lt"/>
+                <a:ea typeface="+mn-ea"/>
+                <a:cs typeface="+mn-cs"/>
+              </a:defRPr>
+            </a:lvl2pPr>
+            <a:lvl3pPr marL="930493" algn="l" defTabSz="930493" rtl="0" eaLnBrk="1" latinLnBrk="0" hangingPunct="1">
+              <a:defRPr sz="1832" kern="1200">
+                <a:solidFill>
+                  <a:schemeClr val="tx1"/>
+                </a:solidFill>
+                <a:latin typeface="+mn-lt"/>
+                <a:ea typeface="+mn-ea"/>
+                <a:cs typeface="+mn-cs"/>
+              </a:defRPr>
+            </a:lvl3pPr>
+            <a:lvl4pPr marL="1395740" algn="l" defTabSz="930493" rtl="0" eaLnBrk="1" latinLnBrk="0" hangingPunct="1">
+              <a:defRPr sz="1832" kern="1200">
+                <a:solidFill>
+                  <a:schemeClr val="tx1"/>
+                </a:solidFill>
+                <a:latin typeface="+mn-lt"/>
+                <a:ea typeface="+mn-ea"/>
+                <a:cs typeface="+mn-cs"/>
+              </a:defRPr>
+            </a:lvl4pPr>
+            <a:lvl5pPr marL="1860987" algn="l" defTabSz="930493" rtl="0" eaLnBrk="1" latinLnBrk="0" hangingPunct="1">
+              <a:defRPr sz="1832" kern="1200">
+                <a:solidFill>
+                  <a:schemeClr val="tx1"/>
+                </a:solidFill>
+                <a:latin typeface="+mn-lt"/>
+                <a:ea typeface="+mn-ea"/>
+                <a:cs typeface="+mn-cs"/>
+              </a:defRPr>
+            </a:lvl5pPr>
+            <a:lvl6pPr marL="2326234" algn="l" defTabSz="930493" rtl="0" eaLnBrk="1" latinLnBrk="0" hangingPunct="1">
+              <a:defRPr sz="1832" kern="1200">
+                <a:solidFill>
+                  <a:schemeClr val="tx1"/>
+                </a:solidFill>
+                <a:latin typeface="+mn-lt"/>
+                <a:ea typeface="+mn-ea"/>
+                <a:cs typeface="+mn-cs"/>
+              </a:defRPr>
+            </a:lvl6pPr>
+            <a:lvl7pPr marL="2791480" algn="l" defTabSz="930493" rtl="0" eaLnBrk="1" latinLnBrk="0" hangingPunct="1">
+              <a:defRPr sz="1832" kern="1200">
+                <a:solidFill>
+                  <a:schemeClr val="tx1"/>
+                </a:solidFill>
+                <a:latin typeface="+mn-lt"/>
+                <a:ea typeface="+mn-ea"/>
+                <a:cs typeface="+mn-cs"/>
+              </a:defRPr>
+            </a:lvl7pPr>
+            <a:lvl8pPr marL="3256727" algn="l" defTabSz="930493" rtl="0" eaLnBrk="1" latinLnBrk="0" hangingPunct="1">
+              <a:defRPr sz="1832" kern="1200">
+                <a:solidFill>
+                  <a:schemeClr val="tx1"/>
+                </a:solidFill>
+                <a:latin typeface="+mn-lt"/>
+                <a:ea typeface="+mn-ea"/>
+                <a:cs typeface="+mn-cs"/>
+              </a:defRPr>
+            </a:lvl8pPr>
+            <a:lvl9pPr marL="3721974" algn="l" defTabSz="930493" rtl="0" eaLnBrk="1" latinLnBrk="0" hangingPunct="1">
+              <a:defRPr sz="1832" kern="1200">
+                <a:solidFill>
+                  <a:schemeClr val="tx1"/>
+                </a:solidFill>
+                <a:latin typeface="+mn-lt"/>
+                <a:ea typeface="+mn-ea"/>
+                <a:cs typeface="+mn-cs"/>
+              </a:defRPr>
+            </a:lvl9pPr>
+          </a:lstStyle>
+          <a:p>
+            <a:pPr>
+              <a:defRPr sz="1630"/>
+            </a:pPr>
+            <a:r>
+              <a:rPr lang="fr-FR" sz="3600" kern="0" dirty="0">
+                <a:solidFill>
+                  <a:srgbClr val="1F4E79"/>
+                </a:solidFill>
+                <a:ea typeface="+mn-lt"/>
+                <a:cs typeface="+mn-lt"/>
+              </a:rPr>
+              <a:t>{{</a:t>
+            </a:r>
+            <a:r>
+              <a:rPr lang="fr-FR" sz="3600" kern="0" dirty="0" err="1">
+                <a:solidFill>
+                  <a:srgbClr val="1F4E79"/>
+                </a:solidFill>
+                <a:ea typeface="+mn-lt"/>
+                <a:cs typeface="+mn-lt"/>
+              </a:rPr>
+              <a:t>project_name</a:t>
+            </a:r>
+            <a:r>
+              <a:rPr lang="fr-FR" sz="3600" kern="0" dirty="0">
+                <a:solidFill>
+                  <a:srgbClr val="1F4E79"/>
+                </a:solidFill>
+                <a:ea typeface="+mn-lt"/>
+                <a:cs typeface="+mn-lt"/>
+              </a:rPr>
+              <a:t>}}</a:t>
+            </a:r>
+            <a:endParaRPr lang="fr-FR" sz="3600" kern="0" dirty="0">
+              <a:solidFill>
+                <a:srgbClr val="1F4E79"/>
+              </a:solidFill>
+            </a:endParaRPr>
+          </a:p>
+        </p:txBody>
+      </p:sp>
+      <p:sp>
+        <p:nvSpPr>
+          <p:cNvPr id="4" name="Rectangle 1">
+            <a:extLst>
+              <a:ext uri="{FF2B5EF4-FFF2-40B4-BE49-F238E27FC236}">
+                <a16:creationId xmlns:a16="http://schemas.microsoft.com/office/drawing/2014/main" id="{02646716-7349-E4CE-757A-AAED041188FB}"/>
+              </a:ext>
+            </a:extLst>
+          </p:cNvPr>
+          <p:cNvSpPr/>
+          <p:nvPr/>
+        </p:nvSpPr>
+        <p:spPr>
+          <a:xfrm>
+            <a:off x="692289" y="1379467"/>
+            <a:ext cx="10803891" cy="4750028"/>
+          </a:xfrm>
+          <a:prstGeom prst="rect">
+            <a:avLst/>
+          </a:prstGeom>
+          <a:noFill/>
+          <a:ln>
+            <a:noFill/>
+            <a:prstDash val="solid"/>
+          </a:ln>
+        </p:spPr>
+        <p:txBody>
+          <a:bodyPr vert="horz" wrap="square" lIns="91673" tIns="45837" rIns="91673" bIns="45837" anchor="t" anchorCtr="0" compatLnSpc="0">
+            <a:noAutofit/>
+          </a:bodyPr>
+          <a:lstStyle>
+            <a:defPPr>
+              <a:defRPr lang="fr-FR"/>
+            </a:defPPr>
+            <a:lvl1pPr marL="0" algn="l" defTabSz="930493" rtl="0" eaLnBrk="1" latinLnBrk="0" hangingPunct="1">
+              <a:defRPr sz="1832" kern="1200">
+                <a:solidFill>
+                  <a:schemeClr val="tx1"/>
+                </a:solidFill>
+                <a:latin typeface="+mn-lt"/>
+                <a:ea typeface="+mn-ea"/>
+                <a:cs typeface="+mn-cs"/>
+              </a:defRPr>
+            </a:lvl1pPr>
+            <a:lvl2pPr marL="465247" algn="l" defTabSz="930493" rtl="0" eaLnBrk="1" latinLnBrk="0" hangingPunct="1">
+              <a:defRPr sz="1832" kern="1200">
+                <a:solidFill>
+                  <a:schemeClr val="tx1"/>
+                </a:solidFill>
+                <a:latin typeface="+mn-lt"/>
+                <a:ea typeface="+mn-ea"/>
+                <a:cs typeface="+mn-cs"/>
+              </a:defRPr>
+            </a:lvl2pPr>
+            <a:lvl3pPr marL="930493" algn="l" defTabSz="930493" rtl="0" eaLnBrk="1" latinLnBrk="0" hangingPunct="1">
+              <a:defRPr sz="1832" kern="1200">
+                <a:solidFill>
+                  <a:schemeClr val="tx1"/>
+                </a:solidFill>
+                <a:latin typeface="+mn-lt"/>
+                <a:ea typeface="+mn-ea"/>
+                <a:cs typeface="+mn-cs"/>
+              </a:defRPr>
+            </a:lvl3pPr>
+            <a:lvl4pPr marL="1395740" algn="l" defTabSz="930493" rtl="0" eaLnBrk="1" latinLnBrk="0" hangingPunct="1">
+              <a:defRPr sz="1832" kern="1200">
+                <a:solidFill>
+                  <a:schemeClr val="tx1"/>
+                </a:solidFill>
+                <a:latin typeface="+mn-lt"/>
+                <a:ea typeface="+mn-ea"/>
+                <a:cs typeface="+mn-cs"/>
+              </a:defRPr>
+            </a:lvl4pPr>
+            <a:lvl5pPr marL="1860987" algn="l" defTabSz="930493" rtl="0" eaLnBrk="1" latinLnBrk="0" hangingPunct="1">
+              <a:defRPr sz="1832" kern="1200">
+                <a:solidFill>
+                  <a:schemeClr val="tx1"/>
+                </a:solidFill>
+                <a:latin typeface="+mn-lt"/>
+                <a:ea typeface="+mn-ea"/>
+                <a:cs typeface="+mn-cs"/>
+              </a:defRPr>
+            </a:lvl5pPr>
+            <a:lvl6pPr marL="2326234" algn="l" defTabSz="930493" rtl="0" eaLnBrk="1" latinLnBrk="0" hangingPunct="1">
+              <a:defRPr sz="1832" kern="1200">
+                <a:solidFill>
+                  <a:schemeClr val="tx1"/>
+                </a:solidFill>
+                <a:latin typeface="+mn-lt"/>
+                <a:ea typeface="+mn-ea"/>
+                <a:cs typeface="+mn-cs"/>
+              </a:defRPr>
+            </a:lvl6pPr>
+            <a:lvl7pPr marL="2791480" algn="l" defTabSz="930493" rtl="0" eaLnBrk="1" latinLnBrk="0" hangingPunct="1">
+              <a:defRPr sz="1832" kern="1200">
+                <a:solidFill>
+                  <a:schemeClr val="tx1"/>
+                </a:solidFill>
+                <a:latin typeface="+mn-lt"/>
+                <a:ea typeface="+mn-ea"/>
+                <a:cs typeface="+mn-cs"/>
+              </a:defRPr>
+            </a:lvl7pPr>
+            <a:lvl8pPr marL="3256727" algn="l" defTabSz="930493" rtl="0" eaLnBrk="1" latinLnBrk="0" hangingPunct="1">
+              <a:defRPr sz="1832" kern="1200">
+                <a:solidFill>
+                  <a:schemeClr val="tx1"/>
+                </a:solidFill>
+                <a:latin typeface="+mn-lt"/>
+                <a:ea typeface="+mn-ea"/>
+                <a:cs typeface="+mn-cs"/>
+              </a:defRPr>
+            </a:lvl8pPr>
+            <a:lvl9pPr marL="3721974" algn="l" defTabSz="930493" rtl="0" eaLnBrk="1" latinLnBrk="0" hangingPunct="1">
+              <a:defRPr sz="1832" kern="1200">
+                <a:solidFill>
+                  <a:schemeClr val="tx1"/>
+                </a:solidFill>
+                <a:latin typeface="+mn-lt"/>
+                <a:ea typeface="+mn-ea"/>
+                <a:cs typeface="+mn-cs"/>
+              </a:defRPr>
+            </a:lvl9pPr>
+          </a:lstStyle>
+          <a:p>
+            <a:r>
+              <a:rPr lang="fr-FR" dirty="0"/>
+              <a:t>{{</a:t>
+            </a:r>
+            <a:r>
+              <a:rPr lang="fr-FR" dirty="0" err="1"/>
+              <a:t>chart:sprint_spread</a:t>
+            </a:r>
+            <a:r>
+              <a:rPr lang="fr-FR" dirty="0"/>
+              <a:t>}}</a:t>
+            </a:r>
+          </a:p>
+        </p:txBody>
+      </p:sp>
+      <p:sp>
+        <p:nvSpPr>
+          <p:cNvPr id="5" name="Espace réservé du numéro de diapositive 4">
+            <a:extLst>
+              <a:ext uri="{FF2B5EF4-FFF2-40B4-BE49-F238E27FC236}">
+                <a16:creationId xmlns:a16="http://schemas.microsoft.com/office/drawing/2014/main" id="{23D9C0E0-F4BF-BC4B-AC48-69E74FC86614}"/>
+              </a:ext>
+            </a:extLst>
+          </p:cNvPr>
+          <p:cNvSpPr>
+            <a:spLocks noGrp="1"/>
+          </p:cNvSpPr>
+          <p:nvPr>
+            <p:ph type="sldNum" sz="quarter" idx="12"/>
+          </p:nvPr>
+        </p:nvSpPr>
+        <p:spPr/>
+        <p:txBody>
+          <a:bodyPr/>
+          <a:lstStyle/>
+          <a:p>
+            <a:fld id="{27C6CCC6-2BE5-4E42-96A4-D1E8E81A3D8E}" type="slidenum">
+              <a:rPr lang="fr-FR" smtClean="0"/>
+              <a:t>17</a:t>
+            </a:fld>
+            <a:endParaRPr lang="fr-FR"/>
+          </a:p>
+        </p:txBody>
+      </p:sp>
+      <p:pic>
+        <p:nvPicPr>
+          <p:cNvPr id="6" name="Image 5" descr="Une image contenant Police, logo, Graphique, symbole&#10;&#10;Le contenu généré par l’IA peut être incorrect.">
+            <a:extLst>
+              <a:ext uri="{FF2B5EF4-FFF2-40B4-BE49-F238E27FC236}">
+                <a16:creationId xmlns:a16="http://schemas.microsoft.com/office/drawing/2014/main" id="{90443B85-84DC-44F4-A802-3878BF7E6E35}"/>
+              </a:ext>
+            </a:extLst>
+          </p:cNvPr>
+          <p:cNvPicPr>
+            <a:picLocks noChangeAspect="1"/>
+          </p:cNvPicPr>
+          <p:nvPr/>
+        </p:nvPicPr>
+        <p:blipFill>
+          <a:blip r:embed="rId3"/>
+          <a:stretch>
+            <a:fillRect/>
+          </a:stretch>
+        </p:blipFill>
+        <p:spPr>
+          <a:xfrm>
+            <a:off x="9978572" y="507546"/>
+            <a:ext cx="1524000" cy="400050"/>
+          </a:xfrm>
+          <a:prstGeom prst="rect">
+            <a:avLst/>
+          </a:prstGeom>
+        </p:spPr>
+      </p:pic>
+    </p:spTree>
+    <p:extLst>
+      <p:ext uri="{BB962C8B-B14F-4D97-AF65-F5344CB8AC3E}">
+        <p14:creationId xmlns:p14="http://schemas.microsoft.com/office/powerpoint/2010/main" val="3237748381"/>
+      </p:ext>
+    </p:extLst>
+  </p:cSld>
+  <p:clrMapOvr>
+    <a:masterClrMapping/>
+  </p:clrMapOvr>
+</p:sld>
+</file>
+
+<file path=ppt/slides/slide18.xml><?xml version="1.0" encoding="utf-8"?>
+<p:sld xmlns:a="http://schemas.openxmlformats.org/drawingml/2006/main" xmlns:r="http://schemas.openxmlformats.org/officeDocument/2006/relationships" xmlns:p="http://schemas.openxmlformats.org/presentationml/2006/main">
+  <p:cSld>
+    <p:spTree>
+      <p:nvGrpSpPr>
+        <p:cNvPr id="1" name="">
+          <a:extLst>
+            <a:ext uri="{FF2B5EF4-FFF2-40B4-BE49-F238E27FC236}">
               <a16:creationId xmlns:a16="http://schemas.microsoft.com/office/drawing/2014/main" id="{E64F4507-4003-6B47-37B5-AF2FF333D19F}"/>
             </a:ext>
           </a:extLst>
@@ -6285,7 +11069,7 @@
           <a:p>
             <a:fld id="{27C6CCC6-2BE5-4E42-96A4-D1E8E81A3D8E}" type="slidenum">
               <a:rPr lang="fr-FR" smtClean="0"/>
-              <a:t>10</a:t>
+              <a:t>18</a:t>
             </a:fld>
             <a:endParaRPr lang="fr-FR"/>
           </a:p>
@@ -6334,7 +11118,7 @@
 </p:sld>
 </file>
 
-<file path=ppt/slides/slide11.xml><?xml version="1.0" encoding="utf-8"?>
+<file path=ppt/slides/slide19.xml><?xml version="1.0" encoding="utf-8"?>
 <p:sld xmlns:a="http://schemas.openxmlformats.org/drawingml/2006/main" xmlns:r="http://schemas.openxmlformats.org/officeDocument/2006/relationships" xmlns:p="http://schemas.openxmlformats.org/presentationml/2006/main">
   <p:cSld>
     <p:spTree>
@@ -6684,7 +11468,7 @@
           <a:p>
             <a:fld id="{27C6CCC6-2BE5-4E42-96A4-D1E8E81A3D8E}" type="slidenum">
               <a:rPr lang="fr-FR" smtClean="0"/>
-              <a:t>11</a:t>
+              <a:t>19</a:t>
             </a:fld>
             <a:endParaRPr lang="fr-FR"/>
           </a:p>
@@ -6733,7 +11517,420 @@
 </p:sld>
 </file>
 
-<file path=ppt/slides/slide12.xml><?xml version="1.0" encoding="utf-8"?>
+<file path=ppt/slides/slide2.xml><?xml version="1.0" encoding="utf-8"?>
+<p:sld xmlns:a="http://schemas.openxmlformats.org/drawingml/2006/main" xmlns:r="http://schemas.openxmlformats.org/officeDocument/2006/relationships" xmlns:p="http://schemas.openxmlformats.org/presentationml/2006/main">
+  <p:cSld>
+    <p:spTree>
+      <p:nvGrpSpPr>
+        <p:cNvPr id="1" name="">
+          <a:extLst>
+            <a:ext uri="{FF2B5EF4-FFF2-40B4-BE49-F238E27FC236}">
+              <a16:creationId xmlns:a16="http://schemas.microsoft.com/office/drawing/2014/main" id="{EAC8104B-BAE4-6D61-7726-A846E9975D99}"/>
+            </a:ext>
+          </a:extLst>
+        </p:cNvPr>
+        <p:cNvGrpSpPr/>
+        <p:nvPr/>
+      </p:nvGrpSpPr>
+      <p:grpSpPr>
+        <a:xfrm>
+          <a:off x="0" y="0"/>
+          <a:ext cx="0" cy="0"/>
+          <a:chOff x="0" y="0"/>
+          <a:chExt cx="0" cy="0"/>
+        </a:xfrm>
+      </p:grpSpPr>
+      <p:sp>
+        <p:nvSpPr>
+          <p:cNvPr id="3" name="ZoneTexte 6">
+            <a:extLst>
+              <a:ext uri="{FF2B5EF4-FFF2-40B4-BE49-F238E27FC236}">
+                <a16:creationId xmlns:a16="http://schemas.microsoft.com/office/drawing/2014/main" id="{1BAC0679-F6FD-40AB-A882-1252626A4B97}"/>
+              </a:ext>
+            </a:extLst>
+          </p:cNvPr>
+          <p:cNvSpPr txBox="1"/>
+          <p:nvPr/>
+        </p:nvSpPr>
+        <p:spPr>
+          <a:xfrm>
+            <a:off x="692289" y="365303"/>
+            <a:ext cx="8756869" cy="656185"/>
+          </a:xfrm>
+          <a:prstGeom prst="rect">
+            <a:avLst/>
+          </a:prstGeom>
+          <a:noFill/>
+          <a:ln>
+            <a:noFill/>
+          </a:ln>
+        </p:spPr>
+        <p:txBody>
+          <a:bodyPr vert="horz" wrap="square" lIns="91673" tIns="45837" rIns="91673" bIns="45837" anchor="t" anchorCtr="0" compatLnSpc="0">
+            <a:spAutoFit/>
+          </a:bodyPr>
+          <a:lstStyle>
+            <a:defPPr>
+              <a:defRPr lang="fr-FR"/>
+            </a:defPPr>
+            <a:lvl1pPr marL="0" algn="l" defTabSz="930493" rtl="0" eaLnBrk="1" latinLnBrk="0" hangingPunct="1">
+              <a:defRPr sz="1832" kern="1200">
+                <a:solidFill>
+                  <a:schemeClr val="tx1"/>
+                </a:solidFill>
+                <a:latin typeface="+mn-lt"/>
+                <a:ea typeface="+mn-ea"/>
+                <a:cs typeface="+mn-cs"/>
+              </a:defRPr>
+            </a:lvl1pPr>
+            <a:lvl2pPr marL="465247" algn="l" defTabSz="930493" rtl="0" eaLnBrk="1" latinLnBrk="0" hangingPunct="1">
+              <a:defRPr sz="1832" kern="1200">
+                <a:solidFill>
+                  <a:schemeClr val="tx1"/>
+                </a:solidFill>
+                <a:latin typeface="+mn-lt"/>
+                <a:ea typeface="+mn-ea"/>
+                <a:cs typeface="+mn-cs"/>
+              </a:defRPr>
+            </a:lvl2pPr>
+            <a:lvl3pPr marL="930493" algn="l" defTabSz="930493" rtl="0" eaLnBrk="1" latinLnBrk="0" hangingPunct="1">
+              <a:defRPr sz="1832" kern="1200">
+                <a:solidFill>
+                  <a:schemeClr val="tx1"/>
+                </a:solidFill>
+                <a:latin typeface="+mn-lt"/>
+                <a:ea typeface="+mn-ea"/>
+                <a:cs typeface="+mn-cs"/>
+              </a:defRPr>
+            </a:lvl3pPr>
+            <a:lvl4pPr marL="1395740" algn="l" defTabSz="930493" rtl="0" eaLnBrk="1" latinLnBrk="0" hangingPunct="1">
+              <a:defRPr sz="1832" kern="1200">
+                <a:solidFill>
+                  <a:schemeClr val="tx1"/>
+                </a:solidFill>
+                <a:latin typeface="+mn-lt"/>
+                <a:ea typeface="+mn-ea"/>
+                <a:cs typeface="+mn-cs"/>
+              </a:defRPr>
+            </a:lvl4pPr>
+            <a:lvl5pPr marL="1860987" algn="l" defTabSz="930493" rtl="0" eaLnBrk="1" latinLnBrk="0" hangingPunct="1">
+              <a:defRPr sz="1832" kern="1200">
+                <a:solidFill>
+                  <a:schemeClr val="tx1"/>
+                </a:solidFill>
+                <a:latin typeface="+mn-lt"/>
+                <a:ea typeface="+mn-ea"/>
+                <a:cs typeface="+mn-cs"/>
+              </a:defRPr>
+            </a:lvl5pPr>
+            <a:lvl6pPr marL="2326234" algn="l" defTabSz="930493" rtl="0" eaLnBrk="1" latinLnBrk="0" hangingPunct="1">
+              <a:defRPr sz="1832" kern="1200">
+                <a:solidFill>
+                  <a:schemeClr val="tx1"/>
+                </a:solidFill>
+                <a:latin typeface="+mn-lt"/>
+                <a:ea typeface="+mn-ea"/>
+                <a:cs typeface="+mn-cs"/>
+              </a:defRPr>
+            </a:lvl6pPr>
+            <a:lvl7pPr marL="2791480" algn="l" defTabSz="930493" rtl="0" eaLnBrk="1" latinLnBrk="0" hangingPunct="1">
+              <a:defRPr sz="1832" kern="1200">
+                <a:solidFill>
+                  <a:schemeClr val="tx1"/>
+                </a:solidFill>
+                <a:latin typeface="+mn-lt"/>
+                <a:ea typeface="+mn-ea"/>
+                <a:cs typeface="+mn-cs"/>
+              </a:defRPr>
+            </a:lvl7pPr>
+            <a:lvl8pPr marL="3256727" algn="l" defTabSz="930493" rtl="0" eaLnBrk="1" latinLnBrk="0" hangingPunct="1">
+              <a:defRPr sz="1832" kern="1200">
+                <a:solidFill>
+                  <a:schemeClr val="tx1"/>
+                </a:solidFill>
+                <a:latin typeface="+mn-lt"/>
+                <a:ea typeface="+mn-ea"/>
+                <a:cs typeface="+mn-cs"/>
+              </a:defRPr>
+            </a:lvl8pPr>
+            <a:lvl9pPr marL="3721974" algn="l" defTabSz="930493" rtl="0" eaLnBrk="1" latinLnBrk="0" hangingPunct="1">
+              <a:defRPr sz="1832" kern="1200">
+                <a:solidFill>
+                  <a:schemeClr val="tx1"/>
+                </a:solidFill>
+                <a:latin typeface="+mn-lt"/>
+                <a:ea typeface="+mn-ea"/>
+                <a:cs typeface="+mn-cs"/>
+              </a:defRPr>
+            </a:lvl9pPr>
+          </a:lstStyle>
+          <a:p>
+            <a:pPr>
+              <a:defRPr sz="1630"/>
+            </a:pPr>
+            <a:r>
+              <a:rPr lang="fr-FR" sz="3600" kern="0" dirty="0">
+                <a:solidFill>
+                  <a:srgbClr val="1F4E79"/>
+                </a:solidFill>
+                <a:ea typeface="+mn-lt"/>
+                <a:cs typeface="+mn-lt"/>
+              </a:rPr>
+              <a:t>{{</a:t>
+            </a:r>
+            <a:r>
+              <a:rPr lang="fr-FR" sz="3600" kern="0" dirty="0" err="1">
+                <a:solidFill>
+                  <a:srgbClr val="1F4E79"/>
+                </a:solidFill>
+                <a:ea typeface="+mn-lt"/>
+                <a:cs typeface="+mn-lt"/>
+              </a:rPr>
+              <a:t>project_name</a:t>
+            </a:r>
+            <a:r>
+              <a:rPr lang="fr-FR" sz="3600" kern="0" dirty="0">
+                <a:solidFill>
+                  <a:srgbClr val="1F4E79"/>
+                </a:solidFill>
+                <a:ea typeface="+mn-lt"/>
+                <a:cs typeface="+mn-lt"/>
+              </a:rPr>
+              <a:t>}}</a:t>
+            </a:r>
+            <a:endParaRPr lang="fr-FR" sz="3600" kern="0" dirty="0">
+              <a:solidFill>
+                <a:srgbClr val="1F4E79"/>
+              </a:solidFill>
+            </a:endParaRPr>
+          </a:p>
+        </p:txBody>
+      </p:sp>
+      <p:sp>
+        <p:nvSpPr>
+          <p:cNvPr id="4" name="Rectangle 1">
+            <a:extLst>
+              <a:ext uri="{FF2B5EF4-FFF2-40B4-BE49-F238E27FC236}">
+                <a16:creationId xmlns:a16="http://schemas.microsoft.com/office/drawing/2014/main" id="{6809DCE2-34B5-689B-F1E4-372BACF9CB75}"/>
+              </a:ext>
+            </a:extLst>
+          </p:cNvPr>
+          <p:cNvSpPr/>
+          <p:nvPr/>
+        </p:nvSpPr>
+        <p:spPr>
+          <a:xfrm>
+            <a:off x="692289" y="1379466"/>
+            <a:ext cx="10803891" cy="5185236"/>
+          </a:xfrm>
+          <a:prstGeom prst="rect">
+            <a:avLst/>
+          </a:prstGeom>
+          <a:ln/>
+        </p:spPr>
+        <p:style>
+          <a:lnRef idx="2">
+            <a:schemeClr val="dk1"/>
+          </a:lnRef>
+          <a:fillRef idx="1">
+            <a:schemeClr val="lt1"/>
+          </a:fillRef>
+          <a:effectRef idx="0">
+            <a:schemeClr val="dk1"/>
+          </a:effectRef>
+          <a:fontRef idx="minor">
+            <a:schemeClr val="dk1"/>
+          </a:fontRef>
+        </p:style>
+        <p:txBody>
+          <a:bodyPr vert="horz" wrap="square" lIns="91673" tIns="45837" rIns="91673" bIns="45837" anchor="t" anchorCtr="0" compatLnSpc="0">
+            <a:noAutofit/>
+          </a:bodyPr>
+          <a:lstStyle>
+            <a:defPPr>
+              <a:defRPr lang="fr-FR"/>
+            </a:defPPr>
+            <a:lvl1pPr marL="0" algn="l" defTabSz="930493" rtl="0" eaLnBrk="1" latinLnBrk="0" hangingPunct="1">
+              <a:defRPr sz="1832" kern="1200">
+                <a:solidFill>
+                  <a:schemeClr val="tx1"/>
+                </a:solidFill>
+                <a:latin typeface="+mn-lt"/>
+                <a:ea typeface="+mn-ea"/>
+                <a:cs typeface="+mn-cs"/>
+              </a:defRPr>
+            </a:lvl1pPr>
+            <a:lvl2pPr marL="465247" algn="l" defTabSz="930493" rtl="0" eaLnBrk="1" latinLnBrk="0" hangingPunct="1">
+              <a:defRPr sz="1832" kern="1200">
+                <a:solidFill>
+                  <a:schemeClr val="tx1"/>
+                </a:solidFill>
+                <a:latin typeface="+mn-lt"/>
+                <a:ea typeface="+mn-ea"/>
+                <a:cs typeface="+mn-cs"/>
+              </a:defRPr>
+            </a:lvl2pPr>
+            <a:lvl3pPr marL="930493" algn="l" defTabSz="930493" rtl="0" eaLnBrk="1" latinLnBrk="0" hangingPunct="1">
+              <a:defRPr sz="1832" kern="1200">
+                <a:solidFill>
+                  <a:schemeClr val="tx1"/>
+                </a:solidFill>
+                <a:latin typeface="+mn-lt"/>
+                <a:ea typeface="+mn-ea"/>
+                <a:cs typeface="+mn-cs"/>
+              </a:defRPr>
+            </a:lvl3pPr>
+            <a:lvl4pPr marL="1395740" algn="l" defTabSz="930493" rtl="0" eaLnBrk="1" latinLnBrk="0" hangingPunct="1">
+              <a:defRPr sz="1832" kern="1200">
+                <a:solidFill>
+                  <a:schemeClr val="tx1"/>
+                </a:solidFill>
+                <a:latin typeface="+mn-lt"/>
+                <a:ea typeface="+mn-ea"/>
+                <a:cs typeface="+mn-cs"/>
+              </a:defRPr>
+            </a:lvl4pPr>
+            <a:lvl5pPr marL="1860987" algn="l" defTabSz="930493" rtl="0" eaLnBrk="1" latinLnBrk="0" hangingPunct="1">
+              <a:defRPr sz="1832" kern="1200">
+                <a:solidFill>
+                  <a:schemeClr val="tx1"/>
+                </a:solidFill>
+                <a:latin typeface="+mn-lt"/>
+                <a:ea typeface="+mn-ea"/>
+                <a:cs typeface="+mn-cs"/>
+              </a:defRPr>
+            </a:lvl5pPr>
+            <a:lvl6pPr marL="2326234" algn="l" defTabSz="930493" rtl="0" eaLnBrk="1" latinLnBrk="0" hangingPunct="1">
+              <a:defRPr sz="1832" kern="1200">
+                <a:solidFill>
+                  <a:schemeClr val="tx1"/>
+                </a:solidFill>
+                <a:latin typeface="+mn-lt"/>
+                <a:ea typeface="+mn-ea"/>
+                <a:cs typeface="+mn-cs"/>
+              </a:defRPr>
+            </a:lvl6pPr>
+            <a:lvl7pPr marL="2791480" algn="l" defTabSz="930493" rtl="0" eaLnBrk="1" latinLnBrk="0" hangingPunct="1">
+              <a:defRPr sz="1832" kern="1200">
+                <a:solidFill>
+                  <a:schemeClr val="tx1"/>
+                </a:solidFill>
+                <a:latin typeface="+mn-lt"/>
+                <a:ea typeface="+mn-ea"/>
+                <a:cs typeface="+mn-cs"/>
+              </a:defRPr>
+            </a:lvl7pPr>
+            <a:lvl8pPr marL="3256727" algn="l" defTabSz="930493" rtl="0" eaLnBrk="1" latinLnBrk="0" hangingPunct="1">
+              <a:defRPr sz="1832" kern="1200">
+                <a:solidFill>
+                  <a:schemeClr val="tx1"/>
+                </a:solidFill>
+                <a:latin typeface="+mn-lt"/>
+                <a:ea typeface="+mn-ea"/>
+                <a:cs typeface="+mn-cs"/>
+              </a:defRPr>
+            </a:lvl8pPr>
+            <a:lvl9pPr marL="3721974" algn="l" defTabSz="930493" rtl="0" eaLnBrk="1" latinLnBrk="0" hangingPunct="1">
+              <a:defRPr sz="1832" kern="1200">
+                <a:solidFill>
+                  <a:schemeClr val="tx1"/>
+                </a:solidFill>
+                <a:latin typeface="+mn-lt"/>
+                <a:ea typeface="+mn-ea"/>
+                <a:cs typeface="+mn-cs"/>
+              </a:defRPr>
+            </a:lvl9pPr>
+          </a:lstStyle>
+          <a:p>
+            <a:r>
+              <a:rPr lang="fr-FR" dirty="0"/>
+              <a:t>{{</a:t>
+            </a:r>
+            <a:r>
+              <a:rPr lang="fr-FR" dirty="0" err="1"/>
+              <a:t>liste_sprints</a:t>
+            </a:r>
+            <a:r>
+              <a:rPr lang="fr-FR"/>
+              <a:t>}} </a:t>
+            </a:r>
+            <a:endParaRPr lang="fr-FR" dirty="0"/>
+          </a:p>
+        </p:txBody>
+      </p:sp>
+      <p:sp>
+        <p:nvSpPr>
+          <p:cNvPr id="5" name="Espace réservé du numéro de diapositive 4">
+            <a:extLst>
+              <a:ext uri="{FF2B5EF4-FFF2-40B4-BE49-F238E27FC236}">
+                <a16:creationId xmlns:a16="http://schemas.microsoft.com/office/drawing/2014/main" id="{9CB61189-C996-97C0-21DD-92F55E295D70}"/>
+              </a:ext>
+            </a:extLst>
+          </p:cNvPr>
+          <p:cNvSpPr>
+            <a:spLocks noGrp="1"/>
+          </p:cNvSpPr>
+          <p:nvPr>
+            <p:ph type="sldNum" sz="quarter" idx="12"/>
+          </p:nvPr>
+        </p:nvSpPr>
+        <p:spPr/>
+        <p:txBody>
+          <a:bodyPr/>
+          <a:lstStyle/>
+          <a:p>
+            <a:fld id="{27C6CCC6-2BE5-4E42-96A4-D1E8E81A3D8E}" type="slidenum">
+              <a:rPr lang="fr-FR" smtClean="0"/>
+              <a:t>2</a:t>
+            </a:fld>
+            <a:endParaRPr lang="fr-FR"/>
+          </a:p>
+        </p:txBody>
+      </p:sp>
+      <p:pic>
+        <p:nvPicPr>
+          <p:cNvPr id="6" name="Image 5" descr="Une image contenant Police, logo, Graphique, symbole&#10;&#10;Le contenu généré par l’IA peut être incorrect.">
+            <a:extLst>
+              <a:ext uri="{FF2B5EF4-FFF2-40B4-BE49-F238E27FC236}">
+                <a16:creationId xmlns:a16="http://schemas.microsoft.com/office/drawing/2014/main" id="{322BCBC3-4109-6C13-2BF6-4DDA4436F350}"/>
+              </a:ext>
+            </a:extLst>
+          </p:cNvPr>
+          <p:cNvPicPr>
+            <a:picLocks noChangeAspect="1"/>
+          </p:cNvPicPr>
+          <p:nvPr/>
+        </p:nvPicPr>
+        <p:blipFill>
+          <a:blip r:embed="rId3"/>
+          <a:stretch>
+            <a:fillRect/>
+          </a:stretch>
+        </p:blipFill>
+        <p:spPr>
+          <a:xfrm>
+            <a:off x="9978572" y="507546"/>
+            <a:ext cx="1524000" cy="400050"/>
+          </a:xfrm>
+          <a:prstGeom prst="rect">
+            <a:avLst/>
+          </a:prstGeom>
+        </p:spPr>
+      </p:pic>
+    </p:spTree>
+    <p:extLst>
+      <p:ext uri="{BB962C8B-B14F-4D97-AF65-F5344CB8AC3E}">
+        <p14:creationId xmlns:p14="http://schemas.microsoft.com/office/powerpoint/2010/main" val="1622312815"/>
+      </p:ext>
+    </p:extLst>
+  </p:cSld>
+  <p:clrMapOvr>
+    <a:masterClrMapping/>
+  </p:clrMapOvr>
+</p:sld>
+</file>
+
+<file path=ppt/slides/slide20.xml><?xml version="1.0" encoding="utf-8"?>
 <p:sld xmlns:a="http://schemas.openxmlformats.org/drawingml/2006/main" xmlns:r="http://schemas.openxmlformats.org/officeDocument/2006/relationships" xmlns:p="http://schemas.openxmlformats.org/presentationml/2006/main">
   <p:cSld>
     <p:spTree>
@@ -7087,7 +12284,7 @@
           <a:p>
             <a:fld id="{27C6CCC6-2BE5-4E42-96A4-D1E8E81A3D8E}" type="slidenum">
               <a:rPr lang="fr-FR" smtClean="0"/>
-              <a:t>12</a:t>
+              <a:t>20</a:t>
             </a:fld>
             <a:endParaRPr lang="fr-FR"/>
           </a:p>
@@ -7127,419 +12324,6 @@
     <p:extLst>
       <p:ext uri="{BB962C8B-B14F-4D97-AF65-F5344CB8AC3E}">
         <p14:creationId xmlns:p14="http://schemas.microsoft.com/office/powerpoint/2010/main" val="2227163990"/>
-      </p:ext>
-    </p:extLst>
-  </p:cSld>
-  <p:clrMapOvr>
-    <a:masterClrMapping/>
-  </p:clrMapOvr>
-</p:sld>
-</file>
-
-<file path=ppt/slides/slide2.xml><?xml version="1.0" encoding="utf-8"?>
-<p:sld xmlns:a="http://schemas.openxmlformats.org/drawingml/2006/main" xmlns:r="http://schemas.openxmlformats.org/officeDocument/2006/relationships" xmlns:p="http://schemas.openxmlformats.org/presentationml/2006/main">
-  <p:cSld>
-    <p:spTree>
-      <p:nvGrpSpPr>
-        <p:cNvPr id="1" name="">
-          <a:extLst>
-            <a:ext uri="{FF2B5EF4-FFF2-40B4-BE49-F238E27FC236}">
-              <a16:creationId xmlns:a16="http://schemas.microsoft.com/office/drawing/2014/main" id="{EAC8104B-BAE4-6D61-7726-A846E9975D99}"/>
-            </a:ext>
-          </a:extLst>
-        </p:cNvPr>
-        <p:cNvGrpSpPr/>
-        <p:nvPr/>
-      </p:nvGrpSpPr>
-      <p:grpSpPr>
-        <a:xfrm>
-          <a:off x="0" y="0"/>
-          <a:ext cx="0" cy="0"/>
-          <a:chOff x="0" y="0"/>
-          <a:chExt cx="0" cy="0"/>
-        </a:xfrm>
-      </p:grpSpPr>
-      <p:sp>
-        <p:nvSpPr>
-          <p:cNvPr id="3" name="ZoneTexte 6">
-            <a:extLst>
-              <a:ext uri="{FF2B5EF4-FFF2-40B4-BE49-F238E27FC236}">
-                <a16:creationId xmlns:a16="http://schemas.microsoft.com/office/drawing/2014/main" id="{1BAC0679-F6FD-40AB-A882-1252626A4B97}"/>
-              </a:ext>
-            </a:extLst>
-          </p:cNvPr>
-          <p:cNvSpPr txBox="1"/>
-          <p:nvPr/>
-        </p:nvSpPr>
-        <p:spPr>
-          <a:xfrm>
-            <a:off x="692289" y="365303"/>
-            <a:ext cx="8756869" cy="656185"/>
-          </a:xfrm>
-          <a:prstGeom prst="rect">
-            <a:avLst/>
-          </a:prstGeom>
-          <a:noFill/>
-          <a:ln>
-            <a:noFill/>
-          </a:ln>
-        </p:spPr>
-        <p:txBody>
-          <a:bodyPr vert="horz" wrap="square" lIns="91673" tIns="45837" rIns="91673" bIns="45837" anchor="t" anchorCtr="0" compatLnSpc="0">
-            <a:spAutoFit/>
-          </a:bodyPr>
-          <a:lstStyle>
-            <a:defPPr>
-              <a:defRPr lang="fr-FR"/>
-            </a:defPPr>
-            <a:lvl1pPr marL="0" algn="l" defTabSz="930493" rtl="0" eaLnBrk="1" latinLnBrk="0" hangingPunct="1">
-              <a:defRPr sz="1832" kern="1200">
-                <a:solidFill>
-                  <a:schemeClr val="tx1"/>
-                </a:solidFill>
-                <a:latin typeface="+mn-lt"/>
-                <a:ea typeface="+mn-ea"/>
-                <a:cs typeface="+mn-cs"/>
-              </a:defRPr>
-            </a:lvl1pPr>
-            <a:lvl2pPr marL="465247" algn="l" defTabSz="930493" rtl="0" eaLnBrk="1" latinLnBrk="0" hangingPunct="1">
-              <a:defRPr sz="1832" kern="1200">
-                <a:solidFill>
-                  <a:schemeClr val="tx1"/>
-                </a:solidFill>
-                <a:latin typeface="+mn-lt"/>
-                <a:ea typeface="+mn-ea"/>
-                <a:cs typeface="+mn-cs"/>
-              </a:defRPr>
-            </a:lvl2pPr>
-            <a:lvl3pPr marL="930493" algn="l" defTabSz="930493" rtl="0" eaLnBrk="1" latinLnBrk="0" hangingPunct="1">
-              <a:defRPr sz="1832" kern="1200">
-                <a:solidFill>
-                  <a:schemeClr val="tx1"/>
-                </a:solidFill>
-                <a:latin typeface="+mn-lt"/>
-                <a:ea typeface="+mn-ea"/>
-                <a:cs typeface="+mn-cs"/>
-              </a:defRPr>
-            </a:lvl3pPr>
-            <a:lvl4pPr marL="1395740" algn="l" defTabSz="930493" rtl="0" eaLnBrk="1" latinLnBrk="0" hangingPunct="1">
-              <a:defRPr sz="1832" kern="1200">
-                <a:solidFill>
-                  <a:schemeClr val="tx1"/>
-                </a:solidFill>
-                <a:latin typeface="+mn-lt"/>
-                <a:ea typeface="+mn-ea"/>
-                <a:cs typeface="+mn-cs"/>
-              </a:defRPr>
-            </a:lvl4pPr>
-            <a:lvl5pPr marL="1860987" algn="l" defTabSz="930493" rtl="0" eaLnBrk="1" latinLnBrk="0" hangingPunct="1">
-              <a:defRPr sz="1832" kern="1200">
-                <a:solidFill>
-                  <a:schemeClr val="tx1"/>
-                </a:solidFill>
-                <a:latin typeface="+mn-lt"/>
-                <a:ea typeface="+mn-ea"/>
-                <a:cs typeface="+mn-cs"/>
-              </a:defRPr>
-            </a:lvl5pPr>
-            <a:lvl6pPr marL="2326234" algn="l" defTabSz="930493" rtl="0" eaLnBrk="1" latinLnBrk="0" hangingPunct="1">
-              <a:defRPr sz="1832" kern="1200">
-                <a:solidFill>
-                  <a:schemeClr val="tx1"/>
-                </a:solidFill>
-                <a:latin typeface="+mn-lt"/>
-                <a:ea typeface="+mn-ea"/>
-                <a:cs typeface="+mn-cs"/>
-              </a:defRPr>
-            </a:lvl6pPr>
-            <a:lvl7pPr marL="2791480" algn="l" defTabSz="930493" rtl="0" eaLnBrk="1" latinLnBrk="0" hangingPunct="1">
-              <a:defRPr sz="1832" kern="1200">
-                <a:solidFill>
-                  <a:schemeClr val="tx1"/>
-                </a:solidFill>
-                <a:latin typeface="+mn-lt"/>
-                <a:ea typeface="+mn-ea"/>
-                <a:cs typeface="+mn-cs"/>
-              </a:defRPr>
-            </a:lvl7pPr>
-            <a:lvl8pPr marL="3256727" algn="l" defTabSz="930493" rtl="0" eaLnBrk="1" latinLnBrk="0" hangingPunct="1">
-              <a:defRPr sz="1832" kern="1200">
-                <a:solidFill>
-                  <a:schemeClr val="tx1"/>
-                </a:solidFill>
-                <a:latin typeface="+mn-lt"/>
-                <a:ea typeface="+mn-ea"/>
-                <a:cs typeface="+mn-cs"/>
-              </a:defRPr>
-            </a:lvl8pPr>
-            <a:lvl9pPr marL="3721974" algn="l" defTabSz="930493" rtl="0" eaLnBrk="1" latinLnBrk="0" hangingPunct="1">
-              <a:defRPr sz="1832" kern="1200">
-                <a:solidFill>
-                  <a:schemeClr val="tx1"/>
-                </a:solidFill>
-                <a:latin typeface="+mn-lt"/>
-                <a:ea typeface="+mn-ea"/>
-                <a:cs typeface="+mn-cs"/>
-              </a:defRPr>
-            </a:lvl9pPr>
-          </a:lstStyle>
-          <a:p>
-            <a:pPr>
-              <a:defRPr sz="1630"/>
-            </a:pPr>
-            <a:r>
-              <a:rPr lang="fr-FR" sz="3600" kern="0" dirty="0">
-                <a:solidFill>
-                  <a:srgbClr val="1F4E79"/>
-                </a:solidFill>
-                <a:ea typeface="+mn-lt"/>
-                <a:cs typeface="+mn-lt"/>
-              </a:rPr>
-              <a:t>{{</a:t>
-            </a:r>
-            <a:r>
-              <a:rPr lang="fr-FR" sz="3600" kern="0" dirty="0" err="1">
-                <a:solidFill>
-                  <a:srgbClr val="1F4E79"/>
-                </a:solidFill>
-                <a:ea typeface="+mn-lt"/>
-                <a:cs typeface="+mn-lt"/>
-              </a:rPr>
-              <a:t>project_name</a:t>
-            </a:r>
-            <a:r>
-              <a:rPr lang="fr-FR" sz="3600" kern="0" dirty="0">
-                <a:solidFill>
-                  <a:srgbClr val="1F4E79"/>
-                </a:solidFill>
-                <a:ea typeface="+mn-lt"/>
-                <a:cs typeface="+mn-lt"/>
-              </a:rPr>
-              <a:t>}}</a:t>
-            </a:r>
-            <a:endParaRPr lang="fr-FR" sz="3600" kern="0" dirty="0">
-              <a:solidFill>
-                <a:srgbClr val="1F4E79"/>
-              </a:solidFill>
-            </a:endParaRPr>
-          </a:p>
-        </p:txBody>
-      </p:sp>
-      <p:sp>
-        <p:nvSpPr>
-          <p:cNvPr id="4" name="Rectangle 1">
-            <a:extLst>
-              <a:ext uri="{FF2B5EF4-FFF2-40B4-BE49-F238E27FC236}">
-                <a16:creationId xmlns:a16="http://schemas.microsoft.com/office/drawing/2014/main" id="{6809DCE2-34B5-689B-F1E4-372BACF9CB75}"/>
-              </a:ext>
-            </a:extLst>
-          </p:cNvPr>
-          <p:cNvSpPr/>
-          <p:nvPr/>
-        </p:nvSpPr>
-        <p:spPr>
-          <a:xfrm>
-            <a:off x="692289" y="1379466"/>
-            <a:ext cx="10803891" cy="5185236"/>
-          </a:xfrm>
-          <a:prstGeom prst="rect">
-            <a:avLst/>
-          </a:prstGeom>
-          <a:ln/>
-        </p:spPr>
-        <p:style>
-          <a:lnRef idx="2">
-            <a:schemeClr val="dk1"/>
-          </a:lnRef>
-          <a:fillRef idx="1">
-            <a:schemeClr val="lt1"/>
-          </a:fillRef>
-          <a:effectRef idx="0">
-            <a:schemeClr val="dk1"/>
-          </a:effectRef>
-          <a:fontRef idx="minor">
-            <a:schemeClr val="dk1"/>
-          </a:fontRef>
-        </p:style>
-        <p:txBody>
-          <a:bodyPr vert="horz" wrap="square" lIns="91673" tIns="45837" rIns="91673" bIns="45837" anchor="t" anchorCtr="0" compatLnSpc="0">
-            <a:noAutofit/>
-          </a:bodyPr>
-          <a:lstStyle>
-            <a:defPPr>
-              <a:defRPr lang="fr-FR"/>
-            </a:defPPr>
-            <a:lvl1pPr marL="0" algn="l" defTabSz="930493" rtl="0" eaLnBrk="1" latinLnBrk="0" hangingPunct="1">
-              <a:defRPr sz="1832" kern="1200">
-                <a:solidFill>
-                  <a:schemeClr val="tx1"/>
-                </a:solidFill>
-                <a:latin typeface="+mn-lt"/>
-                <a:ea typeface="+mn-ea"/>
-                <a:cs typeface="+mn-cs"/>
-              </a:defRPr>
-            </a:lvl1pPr>
-            <a:lvl2pPr marL="465247" algn="l" defTabSz="930493" rtl="0" eaLnBrk="1" latinLnBrk="0" hangingPunct="1">
-              <a:defRPr sz="1832" kern="1200">
-                <a:solidFill>
-                  <a:schemeClr val="tx1"/>
-                </a:solidFill>
-                <a:latin typeface="+mn-lt"/>
-                <a:ea typeface="+mn-ea"/>
-                <a:cs typeface="+mn-cs"/>
-              </a:defRPr>
-            </a:lvl2pPr>
-            <a:lvl3pPr marL="930493" algn="l" defTabSz="930493" rtl="0" eaLnBrk="1" latinLnBrk="0" hangingPunct="1">
-              <a:defRPr sz="1832" kern="1200">
-                <a:solidFill>
-                  <a:schemeClr val="tx1"/>
-                </a:solidFill>
-                <a:latin typeface="+mn-lt"/>
-                <a:ea typeface="+mn-ea"/>
-                <a:cs typeface="+mn-cs"/>
-              </a:defRPr>
-            </a:lvl3pPr>
-            <a:lvl4pPr marL="1395740" algn="l" defTabSz="930493" rtl="0" eaLnBrk="1" latinLnBrk="0" hangingPunct="1">
-              <a:defRPr sz="1832" kern="1200">
-                <a:solidFill>
-                  <a:schemeClr val="tx1"/>
-                </a:solidFill>
-                <a:latin typeface="+mn-lt"/>
-                <a:ea typeface="+mn-ea"/>
-                <a:cs typeface="+mn-cs"/>
-              </a:defRPr>
-            </a:lvl4pPr>
-            <a:lvl5pPr marL="1860987" algn="l" defTabSz="930493" rtl="0" eaLnBrk="1" latinLnBrk="0" hangingPunct="1">
-              <a:defRPr sz="1832" kern="1200">
-                <a:solidFill>
-                  <a:schemeClr val="tx1"/>
-                </a:solidFill>
-                <a:latin typeface="+mn-lt"/>
-                <a:ea typeface="+mn-ea"/>
-                <a:cs typeface="+mn-cs"/>
-              </a:defRPr>
-            </a:lvl5pPr>
-            <a:lvl6pPr marL="2326234" algn="l" defTabSz="930493" rtl="0" eaLnBrk="1" latinLnBrk="0" hangingPunct="1">
-              <a:defRPr sz="1832" kern="1200">
-                <a:solidFill>
-                  <a:schemeClr val="tx1"/>
-                </a:solidFill>
-                <a:latin typeface="+mn-lt"/>
-                <a:ea typeface="+mn-ea"/>
-                <a:cs typeface="+mn-cs"/>
-              </a:defRPr>
-            </a:lvl6pPr>
-            <a:lvl7pPr marL="2791480" algn="l" defTabSz="930493" rtl="0" eaLnBrk="1" latinLnBrk="0" hangingPunct="1">
-              <a:defRPr sz="1832" kern="1200">
-                <a:solidFill>
-                  <a:schemeClr val="tx1"/>
-                </a:solidFill>
-                <a:latin typeface="+mn-lt"/>
-                <a:ea typeface="+mn-ea"/>
-                <a:cs typeface="+mn-cs"/>
-              </a:defRPr>
-            </a:lvl7pPr>
-            <a:lvl8pPr marL="3256727" algn="l" defTabSz="930493" rtl="0" eaLnBrk="1" latinLnBrk="0" hangingPunct="1">
-              <a:defRPr sz="1832" kern="1200">
-                <a:solidFill>
-                  <a:schemeClr val="tx1"/>
-                </a:solidFill>
-                <a:latin typeface="+mn-lt"/>
-                <a:ea typeface="+mn-ea"/>
-                <a:cs typeface="+mn-cs"/>
-              </a:defRPr>
-            </a:lvl8pPr>
-            <a:lvl9pPr marL="3721974" algn="l" defTabSz="930493" rtl="0" eaLnBrk="1" latinLnBrk="0" hangingPunct="1">
-              <a:defRPr sz="1832" kern="1200">
-                <a:solidFill>
-                  <a:schemeClr val="tx1"/>
-                </a:solidFill>
-                <a:latin typeface="+mn-lt"/>
-                <a:ea typeface="+mn-ea"/>
-                <a:cs typeface="+mn-cs"/>
-              </a:defRPr>
-            </a:lvl9pPr>
-          </a:lstStyle>
-          <a:p>
-            <a:r>
-              <a:rPr lang="fr-FR" dirty="0"/>
-              <a:t>{{</a:t>
-            </a:r>
-            <a:r>
-              <a:rPr lang="fr-FR" dirty="0" err="1"/>
-              <a:t>liste_sprints</a:t>
-            </a:r>
-            <a:r>
-              <a:rPr lang="fr-FR"/>
-              <a:t>}} </a:t>
-            </a:r>
-            <a:endParaRPr lang="fr-FR" dirty="0"/>
-          </a:p>
-        </p:txBody>
-      </p:sp>
-      <p:sp>
-        <p:nvSpPr>
-          <p:cNvPr id="5" name="Espace réservé du numéro de diapositive 4">
-            <a:extLst>
-              <a:ext uri="{FF2B5EF4-FFF2-40B4-BE49-F238E27FC236}">
-                <a16:creationId xmlns:a16="http://schemas.microsoft.com/office/drawing/2014/main" id="{9CB61189-C996-97C0-21DD-92F55E295D70}"/>
-              </a:ext>
-            </a:extLst>
-          </p:cNvPr>
-          <p:cNvSpPr>
-            <a:spLocks noGrp="1"/>
-          </p:cNvSpPr>
-          <p:nvPr>
-            <p:ph type="sldNum" sz="quarter" idx="12"/>
-          </p:nvPr>
-        </p:nvSpPr>
-        <p:spPr/>
-        <p:txBody>
-          <a:bodyPr/>
-          <a:lstStyle/>
-          <a:p>
-            <a:fld id="{27C6CCC6-2BE5-4E42-96A4-D1E8E81A3D8E}" type="slidenum">
-              <a:rPr lang="fr-FR" smtClean="0"/>
-              <a:t>2</a:t>
-            </a:fld>
-            <a:endParaRPr lang="fr-FR"/>
-          </a:p>
-        </p:txBody>
-      </p:sp>
-      <p:pic>
-        <p:nvPicPr>
-          <p:cNvPr id="6" name="Image 5" descr="Une image contenant Police, logo, Graphique, symbole&#10;&#10;Le contenu généré par l’IA peut être incorrect.">
-            <a:extLst>
-              <a:ext uri="{FF2B5EF4-FFF2-40B4-BE49-F238E27FC236}">
-                <a16:creationId xmlns:a16="http://schemas.microsoft.com/office/drawing/2014/main" id="{322BCBC3-4109-6C13-2BF6-4DDA4436F350}"/>
-              </a:ext>
-            </a:extLst>
-          </p:cNvPr>
-          <p:cNvPicPr>
-            <a:picLocks noChangeAspect="1"/>
-          </p:cNvPicPr>
-          <p:nvPr/>
-        </p:nvPicPr>
-        <p:blipFill>
-          <a:blip r:embed="rId3"/>
-          <a:stretch>
-            <a:fillRect/>
-          </a:stretch>
-        </p:blipFill>
-        <p:spPr>
-          <a:xfrm>
-            <a:off x="9978572" y="507546"/>
-            <a:ext cx="1524000" cy="400050"/>
-          </a:xfrm>
-          <a:prstGeom prst="rect">
-            <a:avLst/>
-          </a:prstGeom>
-        </p:spPr>
-      </p:pic>
-    </p:spTree>
-    <p:extLst>
-      <p:ext uri="{BB962C8B-B14F-4D97-AF65-F5344CB8AC3E}">
-        <p14:creationId xmlns:p14="http://schemas.microsoft.com/office/powerpoint/2010/main" val="1622312815"/>
       </p:ext>
     </p:extLst>
   </p:cSld>
@@ -7974,6 +12758,830 @@
         <p:cNvPr id="1" name="">
           <a:extLst>
             <a:ext uri="{FF2B5EF4-FFF2-40B4-BE49-F238E27FC236}">
+              <a16:creationId xmlns:a16="http://schemas.microsoft.com/office/drawing/2014/main" id="{AB7CC796-2390-D0B6-2F9A-4FEE112FE572}"/>
+            </a:ext>
+          </a:extLst>
+        </p:cNvPr>
+        <p:cNvGrpSpPr/>
+        <p:nvPr/>
+      </p:nvGrpSpPr>
+      <p:grpSpPr>
+        <a:xfrm>
+          <a:off x="0" y="0"/>
+          <a:ext cx="0" cy="0"/>
+          <a:chOff x="0" y="0"/>
+          <a:chExt cx="0" cy="0"/>
+        </a:xfrm>
+      </p:grpSpPr>
+      <p:sp>
+        <p:nvSpPr>
+          <p:cNvPr id="3" name="ZoneTexte 6">
+            <a:extLst>
+              <a:ext uri="{FF2B5EF4-FFF2-40B4-BE49-F238E27FC236}">
+                <a16:creationId xmlns:a16="http://schemas.microsoft.com/office/drawing/2014/main" id="{13D76715-EC73-DF22-676A-895ED13CCF89}"/>
+              </a:ext>
+            </a:extLst>
+          </p:cNvPr>
+          <p:cNvSpPr txBox="1"/>
+          <p:nvPr/>
+        </p:nvSpPr>
+        <p:spPr>
+          <a:xfrm>
+            <a:off x="692289" y="365303"/>
+            <a:ext cx="8756869" cy="656185"/>
+          </a:xfrm>
+          <a:prstGeom prst="rect">
+            <a:avLst/>
+          </a:prstGeom>
+          <a:noFill/>
+          <a:ln>
+            <a:noFill/>
+          </a:ln>
+        </p:spPr>
+        <p:txBody>
+          <a:bodyPr vert="horz" wrap="square" lIns="91673" tIns="45837" rIns="91673" bIns="45837" anchor="t" anchorCtr="0" compatLnSpc="0">
+            <a:spAutoFit/>
+          </a:bodyPr>
+          <a:lstStyle>
+            <a:defPPr>
+              <a:defRPr lang="fr-FR"/>
+            </a:defPPr>
+            <a:lvl1pPr marL="0" algn="l" defTabSz="930493" rtl="0" eaLnBrk="1" latinLnBrk="0" hangingPunct="1">
+              <a:defRPr sz="1832" kern="1200">
+                <a:solidFill>
+                  <a:schemeClr val="tx1"/>
+                </a:solidFill>
+                <a:latin typeface="+mn-lt"/>
+                <a:ea typeface="+mn-ea"/>
+                <a:cs typeface="+mn-cs"/>
+              </a:defRPr>
+            </a:lvl1pPr>
+            <a:lvl2pPr marL="465247" algn="l" defTabSz="930493" rtl="0" eaLnBrk="1" latinLnBrk="0" hangingPunct="1">
+              <a:defRPr sz="1832" kern="1200">
+                <a:solidFill>
+                  <a:schemeClr val="tx1"/>
+                </a:solidFill>
+                <a:latin typeface="+mn-lt"/>
+                <a:ea typeface="+mn-ea"/>
+                <a:cs typeface="+mn-cs"/>
+              </a:defRPr>
+            </a:lvl2pPr>
+            <a:lvl3pPr marL="930493" algn="l" defTabSz="930493" rtl="0" eaLnBrk="1" latinLnBrk="0" hangingPunct="1">
+              <a:defRPr sz="1832" kern="1200">
+                <a:solidFill>
+                  <a:schemeClr val="tx1"/>
+                </a:solidFill>
+                <a:latin typeface="+mn-lt"/>
+                <a:ea typeface="+mn-ea"/>
+                <a:cs typeface="+mn-cs"/>
+              </a:defRPr>
+            </a:lvl3pPr>
+            <a:lvl4pPr marL="1395740" algn="l" defTabSz="930493" rtl="0" eaLnBrk="1" latinLnBrk="0" hangingPunct="1">
+              <a:defRPr sz="1832" kern="1200">
+                <a:solidFill>
+                  <a:schemeClr val="tx1"/>
+                </a:solidFill>
+                <a:latin typeface="+mn-lt"/>
+                <a:ea typeface="+mn-ea"/>
+                <a:cs typeface="+mn-cs"/>
+              </a:defRPr>
+            </a:lvl4pPr>
+            <a:lvl5pPr marL="1860987" algn="l" defTabSz="930493" rtl="0" eaLnBrk="1" latinLnBrk="0" hangingPunct="1">
+              <a:defRPr sz="1832" kern="1200">
+                <a:solidFill>
+                  <a:schemeClr val="tx1"/>
+                </a:solidFill>
+                <a:latin typeface="+mn-lt"/>
+                <a:ea typeface="+mn-ea"/>
+                <a:cs typeface="+mn-cs"/>
+              </a:defRPr>
+            </a:lvl5pPr>
+            <a:lvl6pPr marL="2326234" algn="l" defTabSz="930493" rtl="0" eaLnBrk="1" latinLnBrk="0" hangingPunct="1">
+              <a:defRPr sz="1832" kern="1200">
+                <a:solidFill>
+                  <a:schemeClr val="tx1"/>
+                </a:solidFill>
+                <a:latin typeface="+mn-lt"/>
+                <a:ea typeface="+mn-ea"/>
+                <a:cs typeface="+mn-cs"/>
+              </a:defRPr>
+            </a:lvl6pPr>
+            <a:lvl7pPr marL="2791480" algn="l" defTabSz="930493" rtl="0" eaLnBrk="1" latinLnBrk="0" hangingPunct="1">
+              <a:defRPr sz="1832" kern="1200">
+                <a:solidFill>
+                  <a:schemeClr val="tx1"/>
+                </a:solidFill>
+                <a:latin typeface="+mn-lt"/>
+                <a:ea typeface="+mn-ea"/>
+                <a:cs typeface="+mn-cs"/>
+              </a:defRPr>
+            </a:lvl7pPr>
+            <a:lvl8pPr marL="3256727" algn="l" defTabSz="930493" rtl="0" eaLnBrk="1" latinLnBrk="0" hangingPunct="1">
+              <a:defRPr sz="1832" kern="1200">
+                <a:solidFill>
+                  <a:schemeClr val="tx1"/>
+                </a:solidFill>
+                <a:latin typeface="+mn-lt"/>
+                <a:ea typeface="+mn-ea"/>
+                <a:cs typeface="+mn-cs"/>
+              </a:defRPr>
+            </a:lvl8pPr>
+            <a:lvl9pPr marL="3721974" algn="l" defTabSz="930493" rtl="0" eaLnBrk="1" latinLnBrk="0" hangingPunct="1">
+              <a:defRPr sz="1832" kern="1200">
+                <a:solidFill>
+                  <a:schemeClr val="tx1"/>
+                </a:solidFill>
+                <a:latin typeface="+mn-lt"/>
+                <a:ea typeface="+mn-ea"/>
+                <a:cs typeface="+mn-cs"/>
+              </a:defRPr>
+            </a:lvl9pPr>
+          </a:lstStyle>
+          <a:p>
+            <a:pPr>
+              <a:defRPr sz="1630"/>
+            </a:pPr>
+            <a:r>
+              <a:rPr lang="fr-FR" sz="3600" kern="0" dirty="0">
+                <a:solidFill>
+                  <a:srgbClr val="1F4E79"/>
+                </a:solidFill>
+                <a:ea typeface="+mn-lt"/>
+                <a:cs typeface="+mn-lt"/>
+              </a:rPr>
+              <a:t>{{</a:t>
+            </a:r>
+            <a:r>
+              <a:rPr lang="fr-FR" sz="3600" kern="0" dirty="0" err="1">
+                <a:solidFill>
+                  <a:srgbClr val="1F4E79"/>
+                </a:solidFill>
+                <a:ea typeface="+mn-lt"/>
+                <a:cs typeface="+mn-lt"/>
+              </a:rPr>
+              <a:t>project_name</a:t>
+            </a:r>
+            <a:r>
+              <a:rPr lang="fr-FR" sz="3600" kern="0" dirty="0">
+                <a:solidFill>
+                  <a:srgbClr val="1F4E79"/>
+                </a:solidFill>
+                <a:ea typeface="+mn-lt"/>
+                <a:cs typeface="+mn-lt"/>
+              </a:rPr>
+              <a:t>}}</a:t>
+            </a:r>
+            <a:endParaRPr lang="fr-FR" sz="3600" kern="0" dirty="0">
+              <a:solidFill>
+                <a:srgbClr val="1F4E79"/>
+              </a:solidFill>
+            </a:endParaRPr>
+          </a:p>
+        </p:txBody>
+      </p:sp>
+      <p:sp>
+        <p:nvSpPr>
+          <p:cNvPr id="4" name="Rectangle 1">
+            <a:extLst>
+              <a:ext uri="{FF2B5EF4-FFF2-40B4-BE49-F238E27FC236}">
+                <a16:creationId xmlns:a16="http://schemas.microsoft.com/office/drawing/2014/main" id="{26F1C0AB-C3FD-6D07-E1A0-E733DA8A3874}"/>
+              </a:ext>
+            </a:extLst>
+          </p:cNvPr>
+          <p:cNvSpPr/>
+          <p:nvPr/>
+        </p:nvSpPr>
+        <p:spPr>
+          <a:xfrm>
+            <a:off x="692289" y="1379466"/>
+            <a:ext cx="10803891" cy="5185236"/>
+          </a:xfrm>
+          <a:prstGeom prst="rect">
+            <a:avLst/>
+          </a:prstGeom>
+          <a:ln/>
+        </p:spPr>
+        <p:style>
+          <a:lnRef idx="2">
+            <a:schemeClr val="dk1"/>
+          </a:lnRef>
+          <a:fillRef idx="1">
+            <a:schemeClr val="lt1"/>
+          </a:fillRef>
+          <a:effectRef idx="0">
+            <a:schemeClr val="dk1"/>
+          </a:effectRef>
+          <a:fontRef idx="minor">
+            <a:schemeClr val="dk1"/>
+          </a:fontRef>
+        </p:style>
+        <p:txBody>
+          <a:bodyPr vert="horz" wrap="square" lIns="91673" tIns="45837" rIns="91673" bIns="45837" anchor="t" anchorCtr="0" compatLnSpc="0">
+            <a:noAutofit/>
+          </a:bodyPr>
+          <a:lstStyle>
+            <a:defPPr>
+              <a:defRPr lang="fr-FR"/>
+            </a:defPPr>
+            <a:lvl1pPr marL="0" algn="l" defTabSz="930493" rtl="0" eaLnBrk="1" latinLnBrk="0" hangingPunct="1">
+              <a:defRPr sz="1832" kern="1200">
+                <a:solidFill>
+                  <a:schemeClr val="tx1"/>
+                </a:solidFill>
+                <a:latin typeface="+mn-lt"/>
+                <a:ea typeface="+mn-ea"/>
+                <a:cs typeface="+mn-cs"/>
+              </a:defRPr>
+            </a:lvl1pPr>
+            <a:lvl2pPr marL="465247" algn="l" defTabSz="930493" rtl="0" eaLnBrk="1" latinLnBrk="0" hangingPunct="1">
+              <a:defRPr sz="1832" kern="1200">
+                <a:solidFill>
+                  <a:schemeClr val="tx1"/>
+                </a:solidFill>
+                <a:latin typeface="+mn-lt"/>
+                <a:ea typeface="+mn-ea"/>
+                <a:cs typeface="+mn-cs"/>
+              </a:defRPr>
+            </a:lvl2pPr>
+            <a:lvl3pPr marL="930493" algn="l" defTabSz="930493" rtl="0" eaLnBrk="1" latinLnBrk="0" hangingPunct="1">
+              <a:defRPr sz="1832" kern="1200">
+                <a:solidFill>
+                  <a:schemeClr val="tx1"/>
+                </a:solidFill>
+                <a:latin typeface="+mn-lt"/>
+                <a:ea typeface="+mn-ea"/>
+                <a:cs typeface="+mn-cs"/>
+              </a:defRPr>
+            </a:lvl3pPr>
+            <a:lvl4pPr marL="1395740" algn="l" defTabSz="930493" rtl="0" eaLnBrk="1" latinLnBrk="0" hangingPunct="1">
+              <a:defRPr sz="1832" kern="1200">
+                <a:solidFill>
+                  <a:schemeClr val="tx1"/>
+                </a:solidFill>
+                <a:latin typeface="+mn-lt"/>
+                <a:ea typeface="+mn-ea"/>
+                <a:cs typeface="+mn-cs"/>
+              </a:defRPr>
+            </a:lvl4pPr>
+            <a:lvl5pPr marL="1860987" algn="l" defTabSz="930493" rtl="0" eaLnBrk="1" latinLnBrk="0" hangingPunct="1">
+              <a:defRPr sz="1832" kern="1200">
+                <a:solidFill>
+                  <a:schemeClr val="tx1"/>
+                </a:solidFill>
+                <a:latin typeface="+mn-lt"/>
+                <a:ea typeface="+mn-ea"/>
+                <a:cs typeface="+mn-cs"/>
+              </a:defRPr>
+            </a:lvl5pPr>
+            <a:lvl6pPr marL="2326234" algn="l" defTabSz="930493" rtl="0" eaLnBrk="1" latinLnBrk="0" hangingPunct="1">
+              <a:defRPr sz="1832" kern="1200">
+                <a:solidFill>
+                  <a:schemeClr val="tx1"/>
+                </a:solidFill>
+                <a:latin typeface="+mn-lt"/>
+                <a:ea typeface="+mn-ea"/>
+                <a:cs typeface="+mn-cs"/>
+              </a:defRPr>
+            </a:lvl6pPr>
+            <a:lvl7pPr marL="2791480" algn="l" defTabSz="930493" rtl="0" eaLnBrk="1" latinLnBrk="0" hangingPunct="1">
+              <a:defRPr sz="1832" kern="1200">
+                <a:solidFill>
+                  <a:schemeClr val="tx1"/>
+                </a:solidFill>
+                <a:latin typeface="+mn-lt"/>
+                <a:ea typeface="+mn-ea"/>
+                <a:cs typeface="+mn-cs"/>
+              </a:defRPr>
+            </a:lvl7pPr>
+            <a:lvl8pPr marL="3256727" algn="l" defTabSz="930493" rtl="0" eaLnBrk="1" latinLnBrk="0" hangingPunct="1">
+              <a:defRPr sz="1832" kern="1200">
+                <a:solidFill>
+                  <a:schemeClr val="tx1"/>
+                </a:solidFill>
+                <a:latin typeface="+mn-lt"/>
+                <a:ea typeface="+mn-ea"/>
+                <a:cs typeface="+mn-cs"/>
+              </a:defRPr>
+            </a:lvl8pPr>
+            <a:lvl9pPr marL="3721974" algn="l" defTabSz="930493" rtl="0" eaLnBrk="1" latinLnBrk="0" hangingPunct="1">
+              <a:defRPr sz="1832" kern="1200">
+                <a:solidFill>
+                  <a:schemeClr val="tx1"/>
+                </a:solidFill>
+                <a:latin typeface="+mn-lt"/>
+                <a:ea typeface="+mn-ea"/>
+                <a:cs typeface="+mn-cs"/>
+              </a:defRPr>
+            </a:lvl9pPr>
+          </a:lstStyle>
+          <a:p>
+            <a:r>
+              <a:rPr lang="fr-FR" dirty="0"/>
+              <a:t>{{</a:t>
+            </a:r>
+            <a:r>
+              <a:rPr lang="fr-FR" dirty="0" err="1"/>
+              <a:t>chart:burndown_US</a:t>
+            </a:r>
+            <a:r>
+              <a:rPr lang="fr-FR" dirty="0"/>
+              <a:t>}}</a:t>
+            </a:r>
+          </a:p>
+        </p:txBody>
+      </p:sp>
+      <p:sp>
+        <p:nvSpPr>
+          <p:cNvPr id="5" name="Espace réservé du numéro de diapositive 4">
+            <a:extLst>
+              <a:ext uri="{FF2B5EF4-FFF2-40B4-BE49-F238E27FC236}">
+                <a16:creationId xmlns:a16="http://schemas.microsoft.com/office/drawing/2014/main" id="{59DB9AE9-ED10-E4E9-584E-6F522E1C6A8D}"/>
+              </a:ext>
+            </a:extLst>
+          </p:cNvPr>
+          <p:cNvSpPr>
+            <a:spLocks noGrp="1"/>
+          </p:cNvSpPr>
+          <p:nvPr>
+            <p:ph type="sldNum" sz="quarter" idx="12"/>
+          </p:nvPr>
+        </p:nvSpPr>
+        <p:spPr/>
+        <p:txBody>
+          <a:bodyPr/>
+          <a:lstStyle/>
+          <a:p>
+            <a:fld id="{27C6CCC6-2BE5-4E42-96A4-D1E8E81A3D8E}" type="slidenum">
+              <a:rPr lang="fr-FR" smtClean="0"/>
+              <a:t>4</a:t>
+            </a:fld>
+            <a:endParaRPr lang="fr-FR"/>
+          </a:p>
+        </p:txBody>
+      </p:sp>
+      <p:pic>
+        <p:nvPicPr>
+          <p:cNvPr id="6" name="Image 5" descr="Une image contenant Police, logo, Graphique, symbole&#10;&#10;Le contenu généré par l’IA peut être incorrect.">
+            <a:extLst>
+              <a:ext uri="{FF2B5EF4-FFF2-40B4-BE49-F238E27FC236}">
+                <a16:creationId xmlns:a16="http://schemas.microsoft.com/office/drawing/2014/main" id="{6A37FBC8-EB19-DCCA-EA69-4EF8B118EBB9}"/>
+              </a:ext>
+            </a:extLst>
+          </p:cNvPr>
+          <p:cNvPicPr>
+            <a:picLocks noChangeAspect="1"/>
+          </p:cNvPicPr>
+          <p:nvPr/>
+        </p:nvPicPr>
+        <p:blipFill>
+          <a:blip r:embed="rId3"/>
+          <a:stretch>
+            <a:fillRect/>
+          </a:stretch>
+        </p:blipFill>
+        <p:spPr>
+          <a:xfrm>
+            <a:off x="9978572" y="507546"/>
+            <a:ext cx="1524000" cy="400050"/>
+          </a:xfrm>
+          <a:prstGeom prst="rect">
+            <a:avLst/>
+          </a:prstGeom>
+        </p:spPr>
+      </p:pic>
+    </p:spTree>
+    <p:extLst>
+      <p:ext uri="{BB962C8B-B14F-4D97-AF65-F5344CB8AC3E}">
+        <p14:creationId xmlns:p14="http://schemas.microsoft.com/office/powerpoint/2010/main" val="3877039755"/>
+      </p:ext>
+    </p:extLst>
+  </p:cSld>
+  <p:clrMapOvr>
+    <a:masterClrMapping/>
+  </p:clrMapOvr>
+</p:sld>
+</file>
+
+<file path=ppt/slides/slide5.xml><?xml version="1.0" encoding="utf-8"?>
+<p:sld xmlns:a="http://schemas.openxmlformats.org/drawingml/2006/main" xmlns:r="http://schemas.openxmlformats.org/officeDocument/2006/relationships" xmlns:p="http://schemas.openxmlformats.org/presentationml/2006/main">
+  <p:cSld>
+    <p:spTree>
+      <p:nvGrpSpPr>
+        <p:cNvPr id="1" name="">
+          <a:extLst>
+            <a:ext uri="{FF2B5EF4-FFF2-40B4-BE49-F238E27FC236}">
+              <a16:creationId xmlns:a16="http://schemas.microsoft.com/office/drawing/2014/main" id="{FDAA1291-244E-D907-80C5-6D0F22FE15D6}"/>
+            </a:ext>
+          </a:extLst>
+        </p:cNvPr>
+        <p:cNvGrpSpPr/>
+        <p:nvPr/>
+      </p:nvGrpSpPr>
+      <p:grpSpPr>
+        <a:xfrm>
+          <a:off x="0" y="0"/>
+          <a:ext cx="0" cy="0"/>
+          <a:chOff x="0" y="0"/>
+          <a:chExt cx="0" cy="0"/>
+        </a:xfrm>
+      </p:grpSpPr>
+      <p:sp>
+        <p:nvSpPr>
+          <p:cNvPr id="3" name="ZoneTexte 6">
+            <a:extLst>
+              <a:ext uri="{FF2B5EF4-FFF2-40B4-BE49-F238E27FC236}">
+                <a16:creationId xmlns:a16="http://schemas.microsoft.com/office/drawing/2014/main" id="{DAAC45C8-F7C9-79D0-2426-BCA007AAD452}"/>
+              </a:ext>
+            </a:extLst>
+          </p:cNvPr>
+          <p:cNvSpPr txBox="1"/>
+          <p:nvPr/>
+        </p:nvSpPr>
+        <p:spPr>
+          <a:xfrm>
+            <a:off x="692289" y="365303"/>
+            <a:ext cx="8756869" cy="656185"/>
+          </a:xfrm>
+          <a:prstGeom prst="rect">
+            <a:avLst/>
+          </a:prstGeom>
+          <a:noFill/>
+          <a:ln>
+            <a:noFill/>
+          </a:ln>
+        </p:spPr>
+        <p:txBody>
+          <a:bodyPr vert="horz" wrap="square" lIns="91673" tIns="45837" rIns="91673" bIns="45837" anchor="t" anchorCtr="0" compatLnSpc="0">
+            <a:spAutoFit/>
+          </a:bodyPr>
+          <a:lstStyle>
+            <a:defPPr>
+              <a:defRPr lang="fr-FR"/>
+            </a:defPPr>
+            <a:lvl1pPr marL="0" algn="l" defTabSz="930493" rtl="0" eaLnBrk="1" latinLnBrk="0" hangingPunct="1">
+              <a:defRPr sz="1832" kern="1200">
+                <a:solidFill>
+                  <a:schemeClr val="tx1"/>
+                </a:solidFill>
+                <a:latin typeface="+mn-lt"/>
+                <a:ea typeface="+mn-ea"/>
+                <a:cs typeface="+mn-cs"/>
+              </a:defRPr>
+            </a:lvl1pPr>
+            <a:lvl2pPr marL="465247" algn="l" defTabSz="930493" rtl="0" eaLnBrk="1" latinLnBrk="0" hangingPunct="1">
+              <a:defRPr sz="1832" kern="1200">
+                <a:solidFill>
+                  <a:schemeClr val="tx1"/>
+                </a:solidFill>
+                <a:latin typeface="+mn-lt"/>
+                <a:ea typeface="+mn-ea"/>
+                <a:cs typeface="+mn-cs"/>
+              </a:defRPr>
+            </a:lvl2pPr>
+            <a:lvl3pPr marL="930493" algn="l" defTabSz="930493" rtl="0" eaLnBrk="1" latinLnBrk="0" hangingPunct="1">
+              <a:defRPr sz="1832" kern="1200">
+                <a:solidFill>
+                  <a:schemeClr val="tx1"/>
+                </a:solidFill>
+                <a:latin typeface="+mn-lt"/>
+                <a:ea typeface="+mn-ea"/>
+                <a:cs typeface="+mn-cs"/>
+              </a:defRPr>
+            </a:lvl3pPr>
+            <a:lvl4pPr marL="1395740" algn="l" defTabSz="930493" rtl="0" eaLnBrk="1" latinLnBrk="0" hangingPunct="1">
+              <a:defRPr sz="1832" kern="1200">
+                <a:solidFill>
+                  <a:schemeClr val="tx1"/>
+                </a:solidFill>
+                <a:latin typeface="+mn-lt"/>
+                <a:ea typeface="+mn-ea"/>
+                <a:cs typeface="+mn-cs"/>
+              </a:defRPr>
+            </a:lvl4pPr>
+            <a:lvl5pPr marL="1860987" algn="l" defTabSz="930493" rtl="0" eaLnBrk="1" latinLnBrk="0" hangingPunct="1">
+              <a:defRPr sz="1832" kern="1200">
+                <a:solidFill>
+                  <a:schemeClr val="tx1"/>
+                </a:solidFill>
+                <a:latin typeface="+mn-lt"/>
+                <a:ea typeface="+mn-ea"/>
+                <a:cs typeface="+mn-cs"/>
+              </a:defRPr>
+            </a:lvl5pPr>
+            <a:lvl6pPr marL="2326234" algn="l" defTabSz="930493" rtl="0" eaLnBrk="1" latinLnBrk="0" hangingPunct="1">
+              <a:defRPr sz="1832" kern="1200">
+                <a:solidFill>
+                  <a:schemeClr val="tx1"/>
+                </a:solidFill>
+                <a:latin typeface="+mn-lt"/>
+                <a:ea typeface="+mn-ea"/>
+                <a:cs typeface="+mn-cs"/>
+              </a:defRPr>
+            </a:lvl6pPr>
+            <a:lvl7pPr marL="2791480" algn="l" defTabSz="930493" rtl="0" eaLnBrk="1" latinLnBrk="0" hangingPunct="1">
+              <a:defRPr sz="1832" kern="1200">
+                <a:solidFill>
+                  <a:schemeClr val="tx1"/>
+                </a:solidFill>
+                <a:latin typeface="+mn-lt"/>
+                <a:ea typeface="+mn-ea"/>
+                <a:cs typeface="+mn-cs"/>
+              </a:defRPr>
+            </a:lvl7pPr>
+            <a:lvl8pPr marL="3256727" algn="l" defTabSz="930493" rtl="0" eaLnBrk="1" latinLnBrk="0" hangingPunct="1">
+              <a:defRPr sz="1832" kern="1200">
+                <a:solidFill>
+                  <a:schemeClr val="tx1"/>
+                </a:solidFill>
+                <a:latin typeface="+mn-lt"/>
+                <a:ea typeface="+mn-ea"/>
+                <a:cs typeface="+mn-cs"/>
+              </a:defRPr>
+            </a:lvl8pPr>
+            <a:lvl9pPr marL="3721974" algn="l" defTabSz="930493" rtl="0" eaLnBrk="1" latinLnBrk="0" hangingPunct="1">
+              <a:defRPr sz="1832" kern="1200">
+                <a:solidFill>
+                  <a:schemeClr val="tx1"/>
+                </a:solidFill>
+                <a:latin typeface="+mn-lt"/>
+                <a:ea typeface="+mn-ea"/>
+                <a:cs typeface="+mn-cs"/>
+              </a:defRPr>
+            </a:lvl9pPr>
+          </a:lstStyle>
+          <a:p>
+            <a:pPr>
+              <a:defRPr sz="1630"/>
+            </a:pPr>
+            <a:r>
+              <a:rPr lang="fr-FR" sz="3600" kern="0" dirty="0">
+                <a:solidFill>
+                  <a:srgbClr val="1F4E79"/>
+                </a:solidFill>
+                <a:ea typeface="+mn-lt"/>
+                <a:cs typeface="+mn-lt"/>
+              </a:rPr>
+              <a:t>{{</a:t>
+            </a:r>
+            <a:r>
+              <a:rPr lang="fr-FR" sz="3600" kern="0" dirty="0" err="1">
+                <a:solidFill>
+                  <a:srgbClr val="1F4E79"/>
+                </a:solidFill>
+                <a:ea typeface="+mn-lt"/>
+                <a:cs typeface="+mn-lt"/>
+              </a:rPr>
+              <a:t>project_name</a:t>
+            </a:r>
+            <a:r>
+              <a:rPr lang="fr-FR" sz="3600" kern="0" dirty="0">
+                <a:solidFill>
+                  <a:srgbClr val="1F4E79"/>
+                </a:solidFill>
+                <a:ea typeface="+mn-lt"/>
+                <a:cs typeface="+mn-lt"/>
+              </a:rPr>
+              <a:t>}}</a:t>
+            </a:r>
+            <a:endParaRPr lang="fr-FR" sz="3600" kern="0" dirty="0">
+              <a:solidFill>
+                <a:srgbClr val="1F4E79"/>
+              </a:solidFill>
+            </a:endParaRPr>
+          </a:p>
+        </p:txBody>
+      </p:sp>
+      <p:sp>
+        <p:nvSpPr>
+          <p:cNvPr id="4" name="Rectangle 1">
+            <a:extLst>
+              <a:ext uri="{FF2B5EF4-FFF2-40B4-BE49-F238E27FC236}">
+                <a16:creationId xmlns:a16="http://schemas.microsoft.com/office/drawing/2014/main" id="{5692AFC3-8E8B-14FD-45A4-C3C747620DFF}"/>
+              </a:ext>
+            </a:extLst>
+          </p:cNvPr>
+          <p:cNvSpPr/>
+          <p:nvPr/>
+        </p:nvSpPr>
+        <p:spPr>
+          <a:xfrm>
+            <a:off x="692289" y="1379466"/>
+            <a:ext cx="10803891" cy="5185236"/>
+          </a:xfrm>
+          <a:prstGeom prst="rect">
+            <a:avLst/>
+          </a:prstGeom>
+          <a:ln/>
+        </p:spPr>
+        <p:style>
+          <a:lnRef idx="2">
+            <a:schemeClr val="dk1"/>
+          </a:lnRef>
+          <a:fillRef idx="1">
+            <a:schemeClr val="lt1"/>
+          </a:fillRef>
+          <a:effectRef idx="0">
+            <a:schemeClr val="dk1"/>
+          </a:effectRef>
+          <a:fontRef idx="minor">
+            <a:schemeClr val="dk1"/>
+          </a:fontRef>
+        </p:style>
+        <p:txBody>
+          <a:bodyPr vert="horz" wrap="square" lIns="91673" tIns="45837" rIns="91673" bIns="45837" anchor="t" anchorCtr="0" compatLnSpc="0">
+            <a:noAutofit/>
+          </a:bodyPr>
+          <a:lstStyle>
+            <a:defPPr>
+              <a:defRPr lang="fr-FR"/>
+            </a:defPPr>
+            <a:lvl1pPr marL="0" algn="l" defTabSz="930493" rtl="0" eaLnBrk="1" latinLnBrk="0" hangingPunct="1">
+              <a:defRPr sz="1832" kern="1200">
+                <a:solidFill>
+                  <a:schemeClr val="tx1"/>
+                </a:solidFill>
+                <a:latin typeface="+mn-lt"/>
+                <a:ea typeface="+mn-ea"/>
+                <a:cs typeface="+mn-cs"/>
+              </a:defRPr>
+            </a:lvl1pPr>
+            <a:lvl2pPr marL="465247" algn="l" defTabSz="930493" rtl="0" eaLnBrk="1" latinLnBrk="0" hangingPunct="1">
+              <a:defRPr sz="1832" kern="1200">
+                <a:solidFill>
+                  <a:schemeClr val="tx1"/>
+                </a:solidFill>
+                <a:latin typeface="+mn-lt"/>
+                <a:ea typeface="+mn-ea"/>
+                <a:cs typeface="+mn-cs"/>
+              </a:defRPr>
+            </a:lvl2pPr>
+            <a:lvl3pPr marL="930493" algn="l" defTabSz="930493" rtl="0" eaLnBrk="1" latinLnBrk="0" hangingPunct="1">
+              <a:defRPr sz="1832" kern="1200">
+                <a:solidFill>
+                  <a:schemeClr val="tx1"/>
+                </a:solidFill>
+                <a:latin typeface="+mn-lt"/>
+                <a:ea typeface="+mn-ea"/>
+                <a:cs typeface="+mn-cs"/>
+              </a:defRPr>
+            </a:lvl3pPr>
+            <a:lvl4pPr marL="1395740" algn="l" defTabSz="930493" rtl="0" eaLnBrk="1" latinLnBrk="0" hangingPunct="1">
+              <a:defRPr sz="1832" kern="1200">
+                <a:solidFill>
+                  <a:schemeClr val="tx1"/>
+                </a:solidFill>
+                <a:latin typeface="+mn-lt"/>
+                <a:ea typeface="+mn-ea"/>
+                <a:cs typeface="+mn-cs"/>
+              </a:defRPr>
+            </a:lvl4pPr>
+            <a:lvl5pPr marL="1860987" algn="l" defTabSz="930493" rtl="0" eaLnBrk="1" latinLnBrk="0" hangingPunct="1">
+              <a:defRPr sz="1832" kern="1200">
+                <a:solidFill>
+                  <a:schemeClr val="tx1"/>
+                </a:solidFill>
+                <a:latin typeface="+mn-lt"/>
+                <a:ea typeface="+mn-ea"/>
+                <a:cs typeface="+mn-cs"/>
+              </a:defRPr>
+            </a:lvl5pPr>
+            <a:lvl6pPr marL="2326234" algn="l" defTabSz="930493" rtl="0" eaLnBrk="1" latinLnBrk="0" hangingPunct="1">
+              <a:defRPr sz="1832" kern="1200">
+                <a:solidFill>
+                  <a:schemeClr val="tx1"/>
+                </a:solidFill>
+                <a:latin typeface="+mn-lt"/>
+                <a:ea typeface="+mn-ea"/>
+                <a:cs typeface="+mn-cs"/>
+              </a:defRPr>
+            </a:lvl6pPr>
+            <a:lvl7pPr marL="2791480" algn="l" defTabSz="930493" rtl="0" eaLnBrk="1" latinLnBrk="0" hangingPunct="1">
+              <a:defRPr sz="1832" kern="1200">
+                <a:solidFill>
+                  <a:schemeClr val="tx1"/>
+                </a:solidFill>
+                <a:latin typeface="+mn-lt"/>
+                <a:ea typeface="+mn-ea"/>
+                <a:cs typeface="+mn-cs"/>
+              </a:defRPr>
+            </a:lvl7pPr>
+            <a:lvl8pPr marL="3256727" algn="l" defTabSz="930493" rtl="0" eaLnBrk="1" latinLnBrk="0" hangingPunct="1">
+              <a:defRPr sz="1832" kern="1200">
+                <a:solidFill>
+                  <a:schemeClr val="tx1"/>
+                </a:solidFill>
+                <a:latin typeface="+mn-lt"/>
+                <a:ea typeface="+mn-ea"/>
+                <a:cs typeface="+mn-cs"/>
+              </a:defRPr>
+            </a:lvl8pPr>
+            <a:lvl9pPr marL="3721974" algn="l" defTabSz="930493" rtl="0" eaLnBrk="1" latinLnBrk="0" hangingPunct="1">
+              <a:defRPr sz="1832" kern="1200">
+                <a:solidFill>
+                  <a:schemeClr val="tx1"/>
+                </a:solidFill>
+                <a:latin typeface="+mn-lt"/>
+                <a:ea typeface="+mn-ea"/>
+                <a:cs typeface="+mn-cs"/>
+              </a:defRPr>
+            </a:lvl9pPr>
+          </a:lstStyle>
+          <a:p>
+            <a:r>
+              <a:rPr lang="fr-FR" dirty="0"/>
+              <a:t>{{</a:t>
+            </a:r>
+            <a:r>
+              <a:rPr lang="fr-FR" dirty="0" err="1"/>
+              <a:t>chart:burndown_SP</a:t>
+            </a:r>
+            <a:r>
+              <a:rPr lang="fr-FR" dirty="0"/>
+              <a:t>}}</a:t>
+            </a:r>
+          </a:p>
+        </p:txBody>
+      </p:sp>
+      <p:sp>
+        <p:nvSpPr>
+          <p:cNvPr id="5" name="Espace réservé du numéro de diapositive 4">
+            <a:extLst>
+              <a:ext uri="{FF2B5EF4-FFF2-40B4-BE49-F238E27FC236}">
+                <a16:creationId xmlns:a16="http://schemas.microsoft.com/office/drawing/2014/main" id="{A48E335E-11BF-7B40-65AD-C21B9DD12B75}"/>
+              </a:ext>
+            </a:extLst>
+          </p:cNvPr>
+          <p:cNvSpPr>
+            <a:spLocks noGrp="1"/>
+          </p:cNvSpPr>
+          <p:nvPr>
+            <p:ph type="sldNum" sz="quarter" idx="12"/>
+          </p:nvPr>
+        </p:nvSpPr>
+        <p:spPr/>
+        <p:txBody>
+          <a:bodyPr/>
+          <a:lstStyle/>
+          <a:p>
+            <a:fld id="{27C6CCC6-2BE5-4E42-96A4-D1E8E81A3D8E}" type="slidenum">
+              <a:rPr lang="fr-FR" smtClean="0"/>
+              <a:t>5</a:t>
+            </a:fld>
+            <a:endParaRPr lang="fr-FR"/>
+          </a:p>
+        </p:txBody>
+      </p:sp>
+      <p:pic>
+        <p:nvPicPr>
+          <p:cNvPr id="6" name="Image 5" descr="Une image contenant Police, logo, Graphique, symbole&#10;&#10;Le contenu généré par l’IA peut être incorrect.">
+            <a:extLst>
+              <a:ext uri="{FF2B5EF4-FFF2-40B4-BE49-F238E27FC236}">
+                <a16:creationId xmlns:a16="http://schemas.microsoft.com/office/drawing/2014/main" id="{25533AFA-39DC-02CC-7FDF-809D593907E9}"/>
+              </a:ext>
+            </a:extLst>
+          </p:cNvPr>
+          <p:cNvPicPr>
+            <a:picLocks noChangeAspect="1"/>
+          </p:cNvPicPr>
+          <p:nvPr/>
+        </p:nvPicPr>
+        <p:blipFill>
+          <a:blip r:embed="rId3"/>
+          <a:stretch>
+            <a:fillRect/>
+          </a:stretch>
+        </p:blipFill>
+        <p:spPr>
+          <a:xfrm>
+            <a:off x="9978572" y="507546"/>
+            <a:ext cx="1524000" cy="400050"/>
+          </a:xfrm>
+          <a:prstGeom prst="rect">
+            <a:avLst/>
+          </a:prstGeom>
+        </p:spPr>
+      </p:pic>
+    </p:spTree>
+    <p:extLst>
+      <p:ext uri="{BB962C8B-B14F-4D97-AF65-F5344CB8AC3E}">
+        <p14:creationId xmlns:p14="http://schemas.microsoft.com/office/powerpoint/2010/main" val="2545155112"/>
+      </p:ext>
+    </p:extLst>
+  </p:cSld>
+  <p:clrMapOvr>
+    <a:masterClrMapping/>
+  </p:clrMapOvr>
+</p:sld>
+</file>
+
+<file path=ppt/slides/slide6.xml><?xml version="1.0" encoding="utf-8"?>
+<p:sld xmlns:a="http://schemas.openxmlformats.org/drawingml/2006/main" xmlns:r="http://schemas.openxmlformats.org/officeDocument/2006/relationships" xmlns:p="http://schemas.openxmlformats.org/presentationml/2006/main">
+  <p:cSld>
+    <p:spTree>
+      <p:nvGrpSpPr>
+        <p:cNvPr id="1" name="">
+          <a:extLst>
+            <a:ext uri="{FF2B5EF4-FFF2-40B4-BE49-F238E27FC236}">
               <a16:creationId xmlns:a16="http://schemas.microsoft.com/office/drawing/2014/main" id="{CC7252F2-DADE-AD3A-CEB2-FF192354B43F}"/>
             </a:ext>
           </a:extLst>
@@ -8329,7 +13937,7 @@
           <a:p>
             <a:fld id="{27C6CCC6-2BE5-4E42-96A4-D1E8E81A3D8E}" type="slidenum">
               <a:rPr lang="fr-FR" smtClean="0"/>
-              <a:t>4</a:t>
+              <a:t>6</a:t>
             </a:fld>
             <a:endParaRPr lang="fr-FR"/>
           </a:p>
@@ -8378,7 +13986,7 @@
 </p:sld>
 </file>
 
-<file path=ppt/slides/slide5.xml><?xml version="1.0" encoding="utf-8"?>
+<file path=ppt/slides/slide7.xml><?xml version="1.0" encoding="utf-8"?>
 <p:sld xmlns:a="http://schemas.openxmlformats.org/drawingml/2006/main" xmlns:r="http://schemas.openxmlformats.org/officeDocument/2006/relationships" xmlns:p="http://schemas.openxmlformats.org/presentationml/2006/main">
   <p:cSld>
     <p:spTree>
@@ -8386,7 +13994,7 @@
         <p:cNvPr id="1" name="">
           <a:extLst>
             <a:ext uri="{FF2B5EF4-FFF2-40B4-BE49-F238E27FC236}">
-              <a16:creationId xmlns:a16="http://schemas.microsoft.com/office/drawing/2014/main" id="{565D99F9-FF70-6781-F9D5-54CC98F74A35}"/>
+              <a16:creationId xmlns:a16="http://schemas.microsoft.com/office/drawing/2014/main" id="{CDCAD302-89AC-41FA-AB1C-698340642FEB}"/>
             </a:ext>
           </a:extLst>
         </p:cNvPr>
@@ -8406,7 +14014,7 @@
           <p:cNvPr id="3" name="ZoneTexte 6">
             <a:extLst>
               <a:ext uri="{FF2B5EF4-FFF2-40B4-BE49-F238E27FC236}">
-                <a16:creationId xmlns:a16="http://schemas.microsoft.com/office/drawing/2014/main" id="{15C009A0-47F0-2F8B-786B-1F6C7B6147C9}"/>
+                <a16:creationId xmlns:a16="http://schemas.microsoft.com/office/drawing/2014/main" id="{532E7F21-9349-D5B2-3E9E-724C1DF2F7F6}"/>
               </a:ext>
             </a:extLst>
           </p:cNvPr>
@@ -8572,7 +14180,7 @@
           <p:cNvPr id="4" name="Rectangle 1">
             <a:extLst>
               <a:ext uri="{FF2B5EF4-FFF2-40B4-BE49-F238E27FC236}">
-                <a16:creationId xmlns:a16="http://schemas.microsoft.com/office/drawing/2014/main" id="{CD72E0E4-5687-7167-AC4D-92B22160BD1C}"/>
+                <a16:creationId xmlns:a16="http://schemas.microsoft.com/office/drawing/2014/main" id="{AFFB82F0-983D-A735-CECD-77A62E2EC6E3}"/>
               </a:ext>
             </a:extLst>
           </p:cNvPr>
@@ -8581,18 +14189,28 @@
         </p:nvSpPr>
         <p:spPr>
           <a:xfrm>
-            <a:off x="692289" y="1379467"/>
-            <a:ext cx="10803891" cy="4709834"/>
+            <a:off x="692289" y="1379466"/>
+            <a:ext cx="10803891" cy="3252823"/>
           </a:xfrm>
           <a:prstGeom prst="rect">
             <a:avLst/>
           </a:prstGeom>
-          <a:noFill/>
-          <a:ln>
-            <a:noFill/>
-            <a:prstDash val="solid"/>
-          </a:ln>
+          <a:ln/>
         </p:spPr>
+        <p:style>
+          <a:lnRef idx="2">
+            <a:schemeClr val="dk1"/>
+          </a:lnRef>
+          <a:fillRef idx="1">
+            <a:schemeClr val="lt1"/>
+          </a:fillRef>
+          <a:effectRef idx="0">
+            <a:schemeClr val="dk1"/>
+          </a:effectRef>
+          <a:fontRef idx="minor">
+            <a:schemeClr val="dk1"/>
+          </a:fontRef>
+        </p:style>
         <p:txBody>
           <a:bodyPr vert="horz" wrap="square" lIns="91673" tIns="45837" rIns="91673" bIns="45837" anchor="t" anchorCtr="0" compatLnSpc="0">
             <a:noAutofit/>
@@ -8699,7 +14317,7 @@
             </a:r>
             <a:r>
               <a:rPr lang="fr-FR" dirty="0" err="1"/>
-              <a:t>chart:velocity</a:t>
+              <a:t>chart:burnup_NB</a:t>
             </a:r>
             <a:r>
               <a:rPr lang="fr-FR" dirty="0"/>
@@ -8713,7 +14331,7 @@
           <p:cNvPr id="5" name="Espace réservé du numéro de diapositive 4">
             <a:extLst>
               <a:ext uri="{FF2B5EF4-FFF2-40B4-BE49-F238E27FC236}">
-                <a16:creationId xmlns:a16="http://schemas.microsoft.com/office/drawing/2014/main" id="{A681795B-B5D5-D45D-69B7-3569813C69C0}"/>
+                <a16:creationId xmlns:a16="http://schemas.microsoft.com/office/drawing/2014/main" id="{D3CC8616-F6AF-6031-234F-A8C117329DBA}"/>
               </a:ext>
             </a:extLst>
           </p:cNvPr>
@@ -8731,7 +14349,7 @@
           <a:p>
             <a:fld id="{27C6CCC6-2BE5-4E42-96A4-D1E8E81A3D8E}" type="slidenum">
               <a:rPr lang="fr-FR" smtClean="0"/>
-              <a:t>5</a:t>
+              <a:t>7</a:t>
             </a:fld>
             <a:endParaRPr lang="fr-FR"/>
           </a:p>
@@ -8742,7 +14360,7 @@
           <p:cNvPr id="6" name="Image 5" descr="Une image contenant Police, logo, Graphique, symbole&#10;&#10;Le contenu généré par l’IA peut être incorrect.">
             <a:extLst>
               <a:ext uri="{FF2B5EF4-FFF2-40B4-BE49-F238E27FC236}">
-                <a16:creationId xmlns:a16="http://schemas.microsoft.com/office/drawing/2014/main" id="{3C10B4A9-4EEE-DDBB-F8B3-7565E7812743}"/>
+                <a16:creationId xmlns:a16="http://schemas.microsoft.com/office/drawing/2014/main" id="{5429D165-5914-27F6-AC55-917D03C87C5E}"/>
               </a:ext>
             </a:extLst>
           </p:cNvPr>
@@ -8770,7 +14388,7 @@
     </p:spTree>
     <p:extLst>
       <p:ext uri="{BB962C8B-B14F-4D97-AF65-F5344CB8AC3E}">
-        <p14:creationId xmlns:p14="http://schemas.microsoft.com/office/powerpoint/2010/main" val="1211203897"/>
+        <p14:creationId xmlns:p14="http://schemas.microsoft.com/office/powerpoint/2010/main" val="3876217111"/>
       </p:ext>
     </p:extLst>
   </p:cSld>
@@ -8780,7 +14398,7 @@
 </p:sld>
 </file>
 
-<file path=ppt/slides/slide6.xml><?xml version="1.0" encoding="utf-8"?>
+<file path=ppt/slides/slide8.xml><?xml version="1.0" encoding="utf-8"?>
 <p:sld xmlns:a="http://schemas.openxmlformats.org/drawingml/2006/main" xmlns:r="http://schemas.openxmlformats.org/officeDocument/2006/relationships" xmlns:p="http://schemas.openxmlformats.org/presentationml/2006/main">
   <p:cSld>
     <p:spTree>
@@ -8788,7 +14406,7 @@
         <p:cNvPr id="1" name="">
           <a:extLst>
             <a:ext uri="{FF2B5EF4-FFF2-40B4-BE49-F238E27FC236}">
-              <a16:creationId xmlns:a16="http://schemas.microsoft.com/office/drawing/2014/main" id="{49FF3FB7-C385-0EC5-14C0-0D54AE39E41F}"/>
+              <a16:creationId xmlns:a16="http://schemas.microsoft.com/office/drawing/2014/main" id="{5DC486C7-4F02-19A2-A98D-29D3BB789EC5}"/>
             </a:ext>
           </a:extLst>
         </p:cNvPr>
@@ -8808,7 +14426,7 @@
           <p:cNvPr id="3" name="ZoneTexte 6">
             <a:extLst>
               <a:ext uri="{FF2B5EF4-FFF2-40B4-BE49-F238E27FC236}">
-                <a16:creationId xmlns:a16="http://schemas.microsoft.com/office/drawing/2014/main" id="{70A45353-3FD2-55C6-3D10-C5F0031550AE}"/>
+                <a16:creationId xmlns:a16="http://schemas.microsoft.com/office/drawing/2014/main" id="{1399BBBB-B4EC-04B4-75A8-E7E92D410535}"/>
               </a:ext>
             </a:extLst>
           </p:cNvPr>
@@ -8974,7 +14592,7 @@
           <p:cNvPr id="4" name="Rectangle 1">
             <a:extLst>
               <a:ext uri="{FF2B5EF4-FFF2-40B4-BE49-F238E27FC236}">
-                <a16:creationId xmlns:a16="http://schemas.microsoft.com/office/drawing/2014/main" id="{7B644419-65CA-B230-76B0-3D11922BABC3}"/>
+                <a16:creationId xmlns:a16="http://schemas.microsoft.com/office/drawing/2014/main" id="{79A0A04E-F9FF-8C26-1CE3-7693B18E4B0D}"/>
               </a:ext>
             </a:extLst>
           </p:cNvPr>
@@ -8983,18 +14601,28 @@
         </p:nvSpPr>
         <p:spPr>
           <a:xfrm>
-            <a:off x="692289" y="1379467"/>
-            <a:ext cx="10803891" cy="4750028"/>
+            <a:off x="692289" y="1379466"/>
+            <a:ext cx="10803891" cy="3252823"/>
           </a:xfrm>
           <a:prstGeom prst="rect">
             <a:avLst/>
           </a:prstGeom>
-          <a:noFill/>
-          <a:ln>
-            <a:noFill/>
-            <a:prstDash val="solid"/>
-          </a:ln>
+          <a:ln/>
         </p:spPr>
+        <p:style>
+          <a:lnRef idx="2">
+            <a:schemeClr val="dk1"/>
+          </a:lnRef>
+          <a:fillRef idx="1">
+            <a:schemeClr val="lt1"/>
+          </a:fillRef>
+          <a:effectRef idx="0">
+            <a:schemeClr val="dk1"/>
+          </a:effectRef>
+          <a:fontRef idx="minor">
+            <a:schemeClr val="dk1"/>
+          </a:fontRef>
+        </p:style>
         <p:txBody>
           <a:bodyPr vert="horz" wrap="square" lIns="91673" tIns="45837" rIns="91673" bIns="45837" anchor="t" anchorCtr="0" compatLnSpc="0">
             <a:noAutofit/>
@@ -9097,11 +14725,11 @@
           <a:p>
             <a:r>
               <a:rPr lang="fr-FR" dirty="0"/>
-              <a:t> {{</a:t>
+              <a:t>{{</a:t>
             </a:r>
             <a:r>
               <a:rPr lang="fr-FR" dirty="0" err="1"/>
-              <a:t>chart:status</a:t>
+              <a:t>chart:burnup_SP</a:t>
             </a:r>
             <a:r>
               <a:rPr lang="fr-FR" dirty="0"/>
@@ -9115,7 +14743,7 @@
           <p:cNvPr id="5" name="Espace réservé du numéro de diapositive 4">
             <a:extLst>
               <a:ext uri="{FF2B5EF4-FFF2-40B4-BE49-F238E27FC236}">
-                <a16:creationId xmlns:a16="http://schemas.microsoft.com/office/drawing/2014/main" id="{74A26D81-9636-B7E4-E10A-37AD26D81284}"/>
+                <a16:creationId xmlns:a16="http://schemas.microsoft.com/office/drawing/2014/main" id="{4A451857-5C1E-EF2E-6EFD-7ACB0BB53595}"/>
               </a:ext>
             </a:extLst>
           </p:cNvPr>
@@ -9133,7 +14761,7 @@
           <a:p>
             <a:fld id="{27C6CCC6-2BE5-4E42-96A4-D1E8E81A3D8E}" type="slidenum">
               <a:rPr lang="fr-FR" smtClean="0"/>
-              <a:t>6</a:t>
+              <a:t>8</a:t>
             </a:fld>
             <a:endParaRPr lang="fr-FR"/>
           </a:p>
@@ -9144,7 +14772,7 @@
           <p:cNvPr id="6" name="Image 5" descr="Une image contenant Police, logo, Graphique, symbole&#10;&#10;Le contenu généré par l’IA peut être incorrect.">
             <a:extLst>
               <a:ext uri="{FF2B5EF4-FFF2-40B4-BE49-F238E27FC236}">
-                <a16:creationId xmlns:a16="http://schemas.microsoft.com/office/drawing/2014/main" id="{BE95F7AB-8310-C5D1-33E3-BFFC5D382C7A}"/>
+                <a16:creationId xmlns:a16="http://schemas.microsoft.com/office/drawing/2014/main" id="{16B665D6-254B-AA5D-182C-06343CFCF6FC}"/>
               </a:ext>
             </a:extLst>
           </p:cNvPr>
@@ -9172,7 +14800,7 @@
     </p:spTree>
     <p:extLst>
       <p:ext uri="{BB962C8B-B14F-4D97-AF65-F5344CB8AC3E}">
-        <p14:creationId xmlns:p14="http://schemas.microsoft.com/office/powerpoint/2010/main" val="425265609"/>
+        <p14:creationId xmlns:p14="http://schemas.microsoft.com/office/powerpoint/2010/main" val="2851014654"/>
       </p:ext>
     </p:extLst>
   </p:cSld>
@@ -9182,7 +14810,7 @@
 </p:sld>
 </file>
 
-<file path=ppt/slides/slide7.xml><?xml version="1.0" encoding="utf-8"?>
+<file path=ppt/slides/slide9.xml><?xml version="1.0" encoding="utf-8"?>
 <p:sld xmlns:a="http://schemas.openxmlformats.org/drawingml/2006/main" xmlns:r="http://schemas.openxmlformats.org/officeDocument/2006/relationships" xmlns:p="http://schemas.openxmlformats.org/presentationml/2006/main">
   <p:cSld>
     <p:spTree>
@@ -9190,7 +14818,7 @@
         <p:cNvPr id="1" name="">
           <a:extLst>
             <a:ext uri="{FF2B5EF4-FFF2-40B4-BE49-F238E27FC236}">
-              <a16:creationId xmlns:a16="http://schemas.microsoft.com/office/drawing/2014/main" id="{BCB5FE94-CE39-5ABD-1C97-67D6C38E6D3D}"/>
+              <a16:creationId xmlns:a16="http://schemas.microsoft.com/office/drawing/2014/main" id="{B2D82A08-1BB9-1CED-302A-A0C43FD239D6}"/>
             </a:ext>
           </a:extLst>
         </p:cNvPr>
@@ -9210,7 +14838,7 @@
           <p:cNvPr id="3" name="ZoneTexte 6">
             <a:extLst>
               <a:ext uri="{FF2B5EF4-FFF2-40B4-BE49-F238E27FC236}">
-                <a16:creationId xmlns:a16="http://schemas.microsoft.com/office/drawing/2014/main" id="{4CE22694-8091-D734-27B9-8D878832A0A8}"/>
+                <a16:creationId xmlns:a16="http://schemas.microsoft.com/office/drawing/2014/main" id="{E0A939D5-ABE6-0717-F391-61A31A2A9D30}"/>
               </a:ext>
             </a:extLst>
           </p:cNvPr>
@@ -9376,7 +15004,7 @@
           <p:cNvPr id="4" name="Rectangle 1">
             <a:extLst>
               <a:ext uri="{FF2B5EF4-FFF2-40B4-BE49-F238E27FC236}">
-                <a16:creationId xmlns:a16="http://schemas.microsoft.com/office/drawing/2014/main" id="{6DA08C98-DE60-19CD-8D69-0E036D4081B5}"/>
+                <a16:creationId xmlns:a16="http://schemas.microsoft.com/office/drawing/2014/main" id="{6683E478-8769-1577-B72F-F90E0C9AF3C8}"/>
               </a:ext>
             </a:extLst>
           </p:cNvPr>
@@ -9385,18 +15013,28 @@
         </p:nvSpPr>
         <p:spPr>
           <a:xfrm>
-            <a:off x="692289" y="1379467"/>
-            <a:ext cx="10803891" cy="4750028"/>
+            <a:off x="692289" y="1379466"/>
+            <a:ext cx="10803891" cy="3252823"/>
           </a:xfrm>
           <a:prstGeom prst="rect">
             <a:avLst/>
           </a:prstGeom>
-          <a:noFill/>
-          <a:ln>
-            <a:noFill/>
-            <a:prstDash val="solid"/>
-          </a:ln>
+          <a:ln/>
         </p:spPr>
+        <p:style>
+          <a:lnRef idx="2">
+            <a:schemeClr val="dk1"/>
+          </a:lnRef>
+          <a:fillRef idx="1">
+            <a:schemeClr val="lt1"/>
+          </a:fillRef>
+          <a:effectRef idx="0">
+            <a:schemeClr val="dk1"/>
+          </a:effectRef>
+          <a:fontRef idx="minor">
+            <a:schemeClr val="dk1"/>
+          </a:fontRef>
+        </p:style>
         <p:txBody>
           <a:bodyPr vert="horz" wrap="square" lIns="91673" tIns="45837" rIns="91673" bIns="45837" anchor="t" anchorCtr="0" compatLnSpc="0">
             <a:noAutofit/>
@@ -9499,11 +15137,11 @@
           <a:p>
             <a:r>
               <a:rPr lang="fr-FR" dirty="0"/>
-              <a:t> {{</a:t>
+              <a:t>{{</a:t>
             </a:r>
             <a:r>
               <a:rPr lang="fr-FR" dirty="0" err="1"/>
-              <a:t>chart:types</a:t>
+              <a:t>chart:cumulative_flow_diagram</a:t>
             </a:r>
             <a:r>
               <a:rPr lang="fr-FR" dirty="0"/>
@@ -9517,7 +15155,7 @@
           <p:cNvPr id="5" name="Espace réservé du numéro de diapositive 4">
             <a:extLst>
               <a:ext uri="{FF2B5EF4-FFF2-40B4-BE49-F238E27FC236}">
-                <a16:creationId xmlns:a16="http://schemas.microsoft.com/office/drawing/2014/main" id="{34DF3F68-011F-66D1-2C15-3315AB94AD66}"/>
+                <a16:creationId xmlns:a16="http://schemas.microsoft.com/office/drawing/2014/main" id="{B8551533-36FF-4E03-FCA6-0A4E33DBD5FC}"/>
               </a:ext>
             </a:extLst>
           </p:cNvPr>
@@ -9535,7 +15173,7 @@
           <a:p>
             <a:fld id="{27C6CCC6-2BE5-4E42-96A4-D1E8E81A3D8E}" type="slidenum">
               <a:rPr lang="fr-FR" smtClean="0"/>
-              <a:t>7</a:t>
+              <a:t>9</a:t>
             </a:fld>
             <a:endParaRPr lang="fr-FR"/>
           </a:p>
@@ -9546,7 +15184,7 @@
           <p:cNvPr id="6" name="Image 5" descr="Une image contenant Police, logo, Graphique, symbole&#10;&#10;Le contenu généré par l’IA peut être incorrect.">
             <a:extLst>
               <a:ext uri="{FF2B5EF4-FFF2-40B4-BE49-F238E27FC236}">
-                <a16:creationId xmlns:a16="http://schemas.microsoft.com/office/drawing/2014/main" id="{E23286A1-7071-4CBA-3011-588367EA5D17}"/>
+                <a16:creationId xmlns:a16="http://schemas.microsoft.com/office/drawing/2014/main" id="{E7B15856-C9EC-2929-34B3-7114ACA76A09}"/>
               </a:ext>
             </a:extLst>
           </p:cNvPr>
@@ -9574,811 +15212,7 @@
     </p:spTree>
     <p:extLst>
       <p:ext uri="{BB962C8B-B14F-4D97-AF65-F5344CB8AC3E}">
-        <p14:creationId xmlns:p14="http://schemas.microsoft.com/office/powerpoint/2010/main" val="2987312959"/>
-      </p:ext>
-    </p:extLst>
-  </p:cSld>
-  <p:clrMapOvr>
-    <a:masterClrMapping/>
-  </p:clrMapOvr>
-</p:sld>
-</file>
-
-<file path=ppt/slides/slide8.xml><?xml version="1.0" encoding="utf-8"?>
-<p:sld xmlns:a="http://schemas.openxmlformats.org/drawingml/2006/main" xmlns:r="http://schemas.openxmlformats.org/officeDocument/2006/relationships" xmlns:p="http://schemas.openxmlformats.org/presentationml/2006/main">
-  <p:cSld>
-    <p:spTree>
-      <p:nvGrpSpPr>
-        <p:cNvPr id="1" name="">
-          <a:extLst>
-            <a:ext uri="{FF2B5EF4-FFF2-40B4-BE49-F238E27FC236}">
-              <a16:creationId xmlns:a16="http://schemas.microsoft.com/office/drawing/2014/main" id="{B42C7235-8D19-C7A5-EBEE-B3C0A9259820}"/>
-            </a:ext>
-          </a:extLst>
-        </p:cNvPr>
-        <p:cNvGrpSpPr/>
-        <p:nvPr/>
-      </p:nvGrpSpPr>
-      <p:grpSpPr>
-        <a:xfrm>
-          <a:off x="0" y="0"/>
-          <a:ext cx="0" cy="0"/>
-          <a:chOff x="0" y="0"/>
-          <a:chExt cx="0" cy="0"/>
-        </a:xfrm>
-      </p:grpSpPr>
-      <p:sp>
-        <p:nvSpPr>
-          <p:cNvPr id="3" name="ZoneTexte 6">
-            <a:extLst>
-              <a:ext uri="{FF2B5EF4-FFF2-40B4-BE49-F238E27FC236}">
-                <a16:creationId xmlns:a16="http://schemas.microsoft.com/office/drawing/2014/main" id="{E4F3CC4C-8826-5849-DC88-6E6682E7BE78}"/>
-              </a:ext>
-            </a:extLst>
-          </p:cNvPr>
-          <p:cNvSpPr txBox="1"/>
-          <p:nvPr/>
-        </p:nvSpPr>
-        <p:spPr>
-          <a:xfrm>
-            <a:off x="692289" y="365303"/>
-            <a:ext cx="8756869" cy="656185"/>
-          </a:xfrm>
-          <a:prstGeom prst="rect">
-            <a:avLst/>
-          </a:prstGeom>
-          <a:noFill/>
-          <a:ln>
-            <a:noFill/>
-          </a:ln>
-        </p:spPr>
-        <p:txBody>
-          <a:bodyPr vert="horz" wrap="square" lIns="91673" tIns="45837" rIns="91673" bIns="45837" anchor="t" anchorCtr="0" compatLnSpc="0">
-            <a:spAutoFit/>
-          </a:bodyPr>
-          <a:lstStyle>
-            <a:defPPr>
-              <a:defRPr lang="fr-FR"/>
-            </a:defPPr>
-            <a:lvl1pPr marL="0" algn="l" defTabSz="930493" rtl="0" eaLnBrk="1" latinLnBrk="0" hangingPunct="1">
-              <a:defRPr sz="1832" kern="1200">
-                <a:solidFill>
-                  <a:schemeClr val="tx1"/>
-                </a:solidFill>
-                <a:latin typeface="+mn-lt"/>
-                <a:ea typeface="+mn-ea"/>
-                <a:cs typeface="+mn-cs"/>
-              </a:defRPr>
-            </a:lvl1pPr>
-            <a:lvl2pPr marL="465247" algn="l" defTabSz="930493" rtl="0" eaLnBrk="1" latinLnBrk="0" hangingPunct="1">
-              <a:defRPr sz="1832" kern="1200">
-                <a:solidFill>
-                  <a:schemeClr val="tx1"/>
-                </a:solidFill>
-                <a:latin typeface="+mn-lt"/>
-                <a:ea typeface="+mn-ea"/>
-                <a:cs typeface="+mn-cs"/>
-              </a:defRPr>
-            </a:lvl2pPr>
-            <a:lvl3pPr marL="930493" algn="l" defTabSz="930493" rtl="0" eaLnBrk="1" latinLnBrk="0" hangingPunct="1">
-              <a:defRPr sz="1832" kern="1200">
-                <a:solidFill>
-                  <a:schemeClr val="tx1"/>
-                </a:solidFill>
-                <a:latin typeface="+mn-lt"/>
-                <a:ea typeface="+mn-ea"/>
-                <a:cs typeface="+mn-cs"/>
-              </a:defRPr>
-            </a:lvl3pPr>
-            <a:lvl4pPr marL="1395740" algn="l" defTabSz="930493" rtl="0" eaLnBrk="1" latinLnBrk="0" hangingPunct="1">
-              <a:defRPr sz="1832" kern="1200">
-                <a:solidFill>
-                  <a:schemeClr val="tx1"/>
-                </a:solidFill>
-                <a:latin typeface="+mn-lt"/>
-                <a:ea typeface="+mn-ea"/>
-                <a:cs typeface="+mn-cs"/>
-              </a:defRPr>
-            </a:lvl4pPr>
-            <a:lvl5pPr marL="1860987" algn="l" defTabSz="930493" rtl="0" eaLnBrk="1" latinLnBrk="0" hangingPunct="1">
-              <a:defRPr sz="1832" kern="1200">
-                <a:solidFill>
-                  <a:schemeClr val="tx1"/>
-                </a:solidFill>
-                <a:latin typeface="+mn-lt"/>
-                <a:ea typeface="+mn-ea"/>
-                <a:cs typeface="+mn-cs"/>
-              </a:defRPr>
-            </a:lvl5pPr>
-            <a:lvl6pPr marL="2326234" algn="l" defTabSz="930493" rtl="0" eaLnBrk="1" latinLnBrk="0" hangingPunct="1">
-              <a:defRPr sz="1832" kern="1200">
-                <a:solidFill>
-                  <a:schemeClr val="tx1"/>
-                </a:solidFill>
-                <a:latin typeface="+mn-lt"/>
-                <a:ea typeface="+mn-ea"/>
-                <a:cs typeface="+mn-cs"/>
-              </a:defRPr>
-            </a:lvl6pPr>
-            <a:lvl7pPr marL="2791480" algn="l" defTabSz="930493" rtl="0" eaLnBrk="1" latinLnBrk="0" hangingPunct="1">
-              <a:defRPr sz="1832" kern="1200">
-                <a:solidFill>
-                  <a:schemeClr val="tx1"/>
-                </a:solidFill>
-                <a:latin typeface="+mn-lt"/>
-                <a:ea typeface="+mn-ea"/>
-                <a:cs typeface="+mn-cs"/>
-              </a:defRPr>
-            </a:lvl7pPr>
-            <a:lvl8pPr marL="3256727" algn="l" defTabSz="930493" rtl="0" eaLnBrk="1" latinLnBrk="0" hangingPunct="1">
-              <a:defRPr sz="1832" kern="1200">
-                <a:solidFill>
-                  <a:schemeClr val="tx1"/>
-                </a:solidFill>
-                <a:latin typeface="+mn-lt"/>
-                <a:ea typeface="+mn-ea"/>
-                <a:cs typeface="+mn-cs"/>
-              </a:defRPr>
-            </a:lvl8pPr>
-            <a:lvl9pPr marL="3721974" algn="l" defTabSz="930493" rtl="0" eaLnBrk="1" latinLnBrk="0" hangingPunct="1">
-              <a:defRPr sz="1832" kern="1200">
-                <a:solidFill>
-                  <a:schemeClr val="tx1"/>
-                </a:solidFill>
-                <a:latin typeface="+mn-lt"/>
-                <a:ea typeface="+mn-ea"/>
-                <a:cs typeface="+mn-cs"/>
-              </a:defRPr>
-            </a:lvl9pPr>
-          </a:lstStyle>
-          <a:p>
-            <a:pPr>
-              <a:defRPr sz="1630"/>
-            </a:pPr>
-            <a:r>
-              <a:rPr lang="fr-FR" sz="3600" kern="0" dirty="0">
-                <a:solidFill>
-                  <a:srgbClr val="1F4E79"/>
-                </a:solidFill>
-                <a:ea typeface="+mn-lt"/>
-                <a:cs typeface="+mn-lt"/>
-              </a:rPr>
-              <a:t>{{</a:t>
-            </a:r>
-            <a:r>
-              <a:rPr lang="fr-FR" sz="3600" kern="0" dirty="0" err="1">
-                <a:solidFill>
-                  <a:srgbClr val="1F4E79"/>
-                </a:solidFill>
-                <a:ea typeface="+mn-lt"/>
-                <a:cs typeface="+mn-lt"/>
-              </a:rPr>
-              <a:t>project_name</a:t>
-            </a:r>
-            <a:r>
-              <a:rPr lang="fr-FR" sz="3600" kern="0" dirty="0">
-                <a:solidFill>
-                  <a:srgbClr val="1F4E79"/>
-                </a:solidFill>
-                <a:ea typeface="+mn-lt"/>
-                <a:cs typeface="+mn-lt"/>
-              </a:rPr>
-              <a:t>}}</a:t>
-            </a:r>
-            <a:endParaRPr lang="fr-FR" sz="3600" kern="0" dirty="0">
-              <a:solidFill>
-                <a:srgbClr val="1F4E79"/>
-              </a:solidFill>
-            </a:endParaRPr>
-          </a:p>
-        </p:txBody>
-      </p:sp>
-      <p:sp>
-        <p:nvSpPr>
-          <p:cNvPr id="4" name="Rectangle 1">
-            <a:extLst>
-              <a:ext uri="{FF2B5EF4-FFF2-40B4-BE49-F238E27FC236}">
-                <a16:creationId xmlns:a16="http://schemas.microsoft.com/office/drawing/2014/main" id="{86293E5A-80FC-F271-BDE8-F0BD674E2AC6}"/>
-              </a:ext>
-            </a:extLst>
-          </p:cNvPr>
-          <p:cNvSpPr/>
-          <p:nvPr/>
-        </p:nvSpPr>
-        <p:spPr>
-          <a:xfrm>
-            <a:off x="692289" y="1379467"/>
-            <a:ext cx="10803891" cy="4750028"/>
-          </a:xfrm>
-          <a:prstGeom prst="rect">
-            <a:avLst/>
-          </a:prstGeom>
-          <a:noFill/>
-          <a:ln>
-            <a:noFill/>
-            <a:prstDash val="solid"/>
-          </a:ln>
-        </p:spPr>
-        <p:txBody>
-          <a:bodyPr vert="horz" wrap="square" lIns="91673" tIns="45837" rIns="91673" bIns="45837" anchor="t" anchorCtr="0" compatLnSpc="0">
-            <a:noAutofit/>
-          </a:bodyPr>
-          <a:lstStyle>
-            <a:defPPr>
-              <a:defRPr lang="fr-FR"/>
-            </a:defPPr>
-            <a:lvl1pPr marL="0" algn="l" defTabSz="930493" rtl="0" eaLnBrk="1" latinLnBrk="0" hangingPunct="1">
-              <a:defRPr sz="1832" kern="1200">
-                <a:solidFill>
-                  <a:schemeClr val="tx1"/>
-                </a:solidFill>
-                <a:latin typeface="+mn-lt"/>
-                <a:ea typeface="+mn-ea"/>
-                <a:cs typeface="+mn-cs"/>
-              </a:defRPr>
-            </a:lvl1pPr>
-            <a:lvl2pPr marL="465247" algn="l" defTabSz="930493" rtl="0" eaLnBrk="1" latinLnBrk="0" hangingPunct="1">
-              <a:defRPr sz="1832" kern="1200">
-                <a:solidFill>
-                  <a:schemeClr val="tx1"/>
-                </a:solidFill>
-                <a:latin typeface="+mn-lt"/>
-                <a:ea typeface="+mn-ea"/>
-                <a:cs typeface="+mn-cs"/>
-              </a:defRPr>
-            </a:lvl2pPr>
-            <a:lvl3pPr marL="930493" algn="l" defTabSz="930493" rtl="0" eaLnBrk="1" latinLnBrk="0" hangingPunct="1">
-              <a:defRPr sz="1832" kern="1200">
-                <a:solidFill>
-                  <a:schemeClr val="tx1"/>
-                </a:solidFill>
-                <a:latin typeface="+mn-lt"/>
-                <a:ea typeface="+mn-ea"/>
-                <a:cs typeface="+mn-cs"/>
-              </a:defRPr>
-            </a:lvl3pPr>
-            <a:lvl4pPr marL="1395740" algn="l" defTabSz="930493" rtl="0" eaLnBrk="1" latinLnBrk="0" hangingPunct="1">
-              <a:defRPr sz="1832" kern="1200">
-                <a:solidFill>
-                  <a:schemeClr val="tx1"/>
-                </a:solidFill>
-                <a:latin typeface="+mn-lt"/>
-                <a:ea typeface="+mn-ea"/>
-                <a:cs typeface="+mn-cs"/>
-              </a:defRPr>
-            </a:lvl4pPr>
-            <a:lvl5pPr marL="1860987" algn="l" defTabSz="930493" rtl="0" eaLnBrk="1" latinLnBrk="0" hangingPunct="1">
-              <a:defRPr sz="1832" kern="1200">
-                <a:solidFill>
-                  <a:schemeClr val="tx1"/>
-                </a:solidFill>
-                <a:latin typeface="+mn-lt"/>
-                <a:ea typeface="+mn-ea"/>
-                <a:cs typeface="+mn-cs"/>
-              </a:defRPr>
-            </a:lvl5pPr>
-            <a:lvl6pPr marL="2326234" algn="l" defTabSz="930493" rtl="0" eaLnBrk="1" latinLnBrk="0" hangingPunct="1">
-              <a:defRPr sz="1832" kern="1200">
-                <a:solidFill>
-                  <a:schemeClr val="tx1"/>
-                </a:solidFill>
-                <a:latin typeface="+mn-lt"/>
-                <a:ea typeface="+mn-ea"/>
-                <a:cs typeface="+mn-cs"/>
-              </a:defRPr>
-            </a:lvl6pPr>
-            <a:lvl7pPr marL="2791480" algn="l" defTabSz="930493" rtl="0" eaLnBrk="1" latinLnBrk="0" hangingPunct="1">
-              <a:defRPr sz="1832" kern="1200">
-                <a:solidFill>
-                  <a:schemeClr val="tx1"/>
-                </a:solidFill>
-                <a:latin typeface="+mn-lt"/>
-                <a:ea typeface="+mn-ea"/>
-                <a:cs typeface="+mn-cs"/>
-              </a:defRPr>
-            </a:lvl7pPr>
-            <a:lvl8pPr marL="3256727" algn="l" defTabSz="930493" rtl="0" eaLnBrk="1" latinLnBrk="0" hangingPunct="1">
-              <a:defRPr sz="1832" kern="1200">
-                <a:solidFill>
-                  <a:schemeClr val="tx1"/>
-                </a:solidFill>
-                <a:latin typeface="+mn-lt"/>
-                <a:ea typeface="+mn-ea"/>
-                <a:cs typeface="+mn-cs"/>
-              </a:defRPr>
-            </a:lvl8pPr>
-            <a:lvl9pPr marL="3721974" algn="l" defTabSz="930493" rtl="0" eaLnBrk="1" latinLnBrk="0" hangingPunct="1">
-              <a:defRPr sz="1832" kern="1200">
-                <a:solidFill>
-                  <a:schemeClr val="tx1"/>
-                </a:solidFill>
-                <a:latin typeface="+mn-lt"/>
-                <a:ea typeface="+mn-ea"/>
-                <a:cs typeface="+mn-cs"/>
-              </a:defRPr>
-            </a:lvl9pPr>
-          </a:lstStyle>
-          <a:p>
-            <a:r>
-              <a:rPr lang="fr-FR" dirty="0"/>
-              <a:t> {{</a:t>
-            </a:r>
-            <a:r>
-              <a:rPr lang="fr-FR" dirty="0" err="1"/>
-              <a:t>chart:types_conso</a:t>
-            </a:r>
-            <a:r>
-              <a:rPr lang="fr-FR" dirty="0"/>
-              <a:t>}}</a:t>
-            </a:r>
-          </a:p>
-        </p:txBody>
-      </p:sp>
-      <p:sp>
-        <p:nvSpPr>
-          <p:cNvPr id="5" name="Espace réservé du numéro de diapositive 4">
-            <a:extLst>
-              <a:ext uri="{FF2B5EF4-FFF2-40B4-BE49-F238E27FC236}">
-                <a16:creationId xmlns:a16="http://schemas.microsoft.com/office/drawing/2014/main" id="{9D2BA1EF-32B9-67FD-03DC-579D11B0111C}"/>
-              </a:ext>
-            </a:extLst>
-          </p:cNvPr>
-          <p:cNvSpPr>
-            <a:spLocks noGrp="1"/>
-          </p:cNvSpPr>
-          <p:nvPr>
-            <p:ph type="sldNum" sz="quarter" idx="12"/>
-          </p:nvPr>
-        </p:nvSpPr>
-        <p:spPr/>
-        <p:txBody>
-          <a:bodyPr/>
-          <a:lstStyle/>
-          <a:p>
-            <a:fld id="{27C6CCC6-2BE5-4E42-96A4-D1E8E81A3D8E}" type="slidenum">
-              <a:rPr lang="fr-FR" smtClean="0"/>
-              <a:t>8</a:t>
-            </a:fld>
-            <a:endParaRPr lang="fr-FR"/>
-          </a:p>
-        </p:txBody>
-      </p:sp>
-      <p:pic>
-        <p:nvPicPr>
-          <p:cNvPr id="6" name="Image 5" descr="Une image contenant Police, logo, Graphique, symbole&#10;&#10;Le contenu généré par l’IA peut être incorrect.">
-            <a:extLst>
-              <a:ext uri="{FF2B5EF4-FFF2-40B4-BE49-F238E27FC236}">
-                <a16:creationId xmlns:a16="http://schemas.microsoft.com/office/drawing/2014/main" id="{D0A65CC1-4B96-627A-BEE7-4F6952A70C77}"/>
-              </a:ext>
-            </a:extLst>
-          </p:cNvPr>
-          <p:cNvPicPr>
-            <a:picLocks noChangeAspect="1"/>
-          </p:cNvPicPr>
-          <p:nvPr/>
-        </p:nvPicPr>
-        <p:blipFill>
-          <a:blip r:embed="rId3"/>
-          <a:stretch>
-            <a:fillRect/>
-          </a:stretch>
-        </p:blipFill>
-        <p:spPr>
-          <a:xfrm>
-            <a:off x="9978572" y="507546"/>
-            <a:ext cx="1524000" cy="400050"/>
-          </a:xfrm>
-          <a:prstGeom prst="rect">
-            <a:avLst/>
-          </a:prstGeom>
-        </p:spPr>
-      </p:pic>
-    </p:spTree>
-    <p:extLst>
-      <p:ext uri="{BB962C8B-B14F-4D97-AF65-F5344CB8AC3E}">
-        <p14:creationId xmlns:p14="http://schemas.microsoft.com/office/powerpoint/2010/main" val="1262607477"/>
-      </p:ext>
-    </p:extLst>
-  </p:cSld>
-  <p:clrMapOvr>
-    <a:masterClrMapping/>
-  </p:clrMapOvr>
-</p:sld>
-</file>
-
-<file path=ppt/slides/slide9.xml><?xml version="1.0" encoding="utf-8"?>
-<p:sld xmlns:a="http://schemas.openxmlformats.org/drawingml/2006/main" xmlns:r="http://schemas.openxmlformats.org/officeDocument/2006/relationships" xmlns:p="http://schemas.openxmlformats.org/presentationml/2006/main">
-  <p:cSld>
-    <p:spTree>
-      <p:nvGrpSpPr>
-        <p:cNvPr id="1" name="">
-          <a:extLst>
-            <a:ext uri="{FF2B5EF4-FFF2-40B4-BE49-F238E27FC236}">
-              <a16:creationId xmlns:a16="http://schemas.microsoft.com/office/drawing/2014/main" id="{322B55C1-531A-C1A0-EE63-7FC14F3DE318}"/>
-            </a:ext>
-          </a:extLst>
-        </p:cNvPr>
-        <p:cNvGrpSpPr/>
-        <p:nvPr/>
-      </p:nvGrpSpPr>
-      <p:grpSpPr>
-        <a:xfrm>
-          <a:off x="0" y="0"/>
-          <a:ext cx="0" cy="0"/>
-          <a:chOff x="0" y="0"/>
-          <a:chExt cx="0" cy="0"/>
-        </a:xfrm>
-      </p:grpSpPr>
-      <p:sp>
-        <p:nvSpPr>
-          <p:cNvPr id="3" name="ZoneTexte 6">
-            <a:extLst>
-              <a:ext uri="{FF2B5EF4-FFF2-40B4-BE49-F238E27FC236}">
-                <a16:creationId xmlns:a16="http://schemas.microsoft.com/office/drawing/2014/main" id="{F8E051DD-27A9-B713-F917-AEEC05ACEF37}"/>
-              </a:ext>
-            </a:extLst>
-          </p:cNvPr>
-          <p:cNvSpPr txBox="1"/>
-          <p:nvPr/>
-        </p:nvSpPr>
-        <p:spPr>
-          <a:xfrm>
-            <a:off x="692289" y="365303"/>
-            <a:ext cx="8756869" cy="656185"/>
-          </a:xfrm>
-          <a:prstGeom prst="rect">
-            <a:avLst/>
-          </a:prstGeom>
-          <a:noFill/>
-          <a:ln>
-            <a:noFill/>
-          </a:ln>
-        </p:spPr>
-        <p:txBody>
-          <a:bodyPr vert="horz" wrap="square" lIns="91673" tIns="45837" rIns="91673" bIns="45837" anchor="t" anchorCtr="0" compatLnSpc="0">
-            <a:spAutoFit/>
-          </a:bodyPr>
-          <a:lstStyle>
-            <a:defPPr>
-              <a:defRPr lang="fr-FR"/>
-            </a:defPPr>
-            <a:lvl1pPr marL="0" algn="l" defTabSz="930493" rtl="0" eaLnBrk="1" latinLnBrk="0" hangingPunct="1">
-              <a:defRPr sz="1832" kern="1200">
-                <a:solidFill>
-                  <a:schemeClr val="tx1"/>
-                </a:solidFill>
-                <a:latin typeface="+mn-lt"/>
-                <a:ea typeface="+mn-ea"/>
-                <a:cs typeface="+mn-cs"/>
-              </a:defRPr>
-            </a:lvl1pPr>
-            <a:lvl2pPr marL="465247" algn="l" defTabSz="930493" rtl="0" eaLnBrk="1" latinLnBrk="0" hangingPunct="1">
-              <a:defRPr sz="1832" kern="1200">
-                <a:solidFill>
-                  <a:schemeClr val="tx1"/>
-                </a:solidFill>
-                <a:latin typeface="+mn-lt"/>
-                <a:ea typeface="+mn-ea"/>
-                <a:cs typeface="+mn-cs"/>
-              </a:defRPr>
-            </a:lvl2pPr>
-            <a:lvl3pPr marL="930493" algn="l" defTabSz="930493" rtl="0" eaLnBrk="1" latinLnBrk="0" hangingPunct="1">
-              <a:defRPr sz="1832" kern="1200">
-                <a:solidFill>
-                  <a:schemeClr val="tx1"/>
-                </a:solidFill>
-                <a:latin typeface="+mn-lt"/>
-                <a:ea typeface="+mn-ea"/>
-                <a:cs typeface="+mn-cs"/>
-              </a:defRPr>
-            </a:lvl3pPr>
-            <a:lvl4pPr marL="1395740" algn="l" defTabSz="930493" rtl="0" eaLnBrk="1" latinLnBrk="0" hangingPunct="1">
-              <a:defRPr sz="1832" kern="1200">
-                <a:solidFill>
-                  <a:schemeClr val="tx1"/>
-                </a:solidFill>
-                <a:latin typeface="+mn-lt"/>
-                <a:ea typeface="+mn-ea"/>
-                <a:cs typeface="+mn-cs"/>
-              </a:defRPr>
-            </a:lvl4pPr>
-            <a:lvl5pPr marL="1860987" algn="l" defTabSz="930493" rtl="0" eaLnBrk="1" latinLnBrk="0" hangingPunct="1">
-              <a:defRPr sz="1832" kern="1200">
-                <a:solidFill>
-                  <a:schemeClr val="tx1"/>
-                </a:solidFill>
-                <a:latin typeface="+mn-lt"/>
-                <a:ea typeface="+mn-ea"/>
-                <a:cs typeface="+mn-cs"/>
-              </a:defRPr>
-            </a:lvl5pPr>
-            <a:lvl6pPr marL="2326234" algn="l" defTabSz="930493" rtl="0" eaLnBrk="1" latinLnBrk="0" hangingPunct="1">
-              <a:defRPr sz="1832" kern="1200">
-                <a:solidFill>
-                  <a:schemeClr val="tx1"/>
-                </a:solidFill>
-                <a:latin typeface="+mn-lt"/>
-                <a:ea typeface="+mn-ea"/>
-                <a:cs typeface="+mn-cs"/>
-              </a:defRPr>
-            </a:lvl6pPr>
-            <a:lvl7pPr marL="2791480" algn="l" defTabSz="930493" rtl="0" eaLnBrk="1" latinLnBrk="0" hangingPunct="1">
-              <a:defRPr sz="1832" kern="1200">
-                <a:solidFill>
-                  <a:schemeClr val="tx1"/>
-                </a:solidFill>
-                <a:latin typeface="+mn-lt"/>
-                <a:ea typeface="+mn-ea"/>
-                <a:cs typeface="+mn-cs"/>
-              </a:defRPr>
-            </a:lvl7pPr>
-            <a:lvl8pPr marL="3256727" algn="l" defTabSz="930493" rtl="0" eaLnBrk="1" latinLnBrk="0" hangingPunct="1">
-              <a:defRPr sz="1832" kern="1200">
-                <a:solidFill>
-                  <a:schemeClr val="tx1"/>
-                </a:solidFill>
-                <a:latin typeface="+mn-lt"/>
-                <a:ea typeface="+mn-ea"/>
-                <a:cs typeface="+mn-cs"/>
-              </a:defRPr>
-            </a:lvl8pPr>
-            <a:lvl9pPr marL="3721974" algn="l" defTabSz="930493" rtl="0" eaLnBrk="1" latinLnBrk="0" hangingPunct="1">
-              <a:defRPr sz="1832" kern="1200">
-                <a:solidFill>
-                  <a:schemeClr val="tx1"/>
-                </a:solidFill>
-                <a:latin typeface="+mn-lt"/>
-                <a:ea typeface="+mn-ea"/>
-                <a:cs typeface="+mn-cs"/>
-              </a:defRPr>
-            </a:lvl9pPr>
-          </a:lstStyle>
-          <a:p>
-            <a:pPr>
-              <a:defRPr sz="1630"/>
-            </a:pPr>
-            <a:r>
-              <a:rPr lang="fr-FR" sz="3600" kern="0" dirty="0">
-                <a:solidFill>
-                  <a:srgbClr val="1F4E79"/>
-                </a:solidFill>
-                <a:ea typeface="+mn-lt"/>
-                <a:cs typeface="+mn-lt"/>
-              </a:rPr>
-              <a:t>{{</a:t>
-            </a:r>
-            <a:r>
-              <a:rPr lang="fr-FR" sz="3600" kern="0" dirty="0" err="1">
-                <a:solidFill>
-                  <a:srgbClr val="1F4E79"/>
-                </a:solidFill>
-                <a:ea typeface="+mn-lt"/>
-                <a:cs typeface="+mn-lt"/>
-              </a:rPr>
-              <a:t>project_name</a:t>
-            </a:r>
-            <a:r>
-              <a:rPr lang="fr-FR" sz="3600" kern="0" dirty="0">
-                <a:solidFill>
-                  <a:srgbClr val="1F4E79"/>
-                </a:solidFill>
-                <a:ea typeface="+mn-lt"/>
-                <a:cs typeface="+mn-lt"/>
-              </a:rPr>
-              <a:t>}}</a:t>
-            </a:r>
-            <a:endParaRPr lang="fr-FR" sz="3600" kern="0" dirty="0">
-              <a:solidFill>
-                <a:srgbClr val="1F4E79"/>
-              </a:solidFill>
-            </a:endParaRPr>
-          </a:p>
-        </p:txBody>
-      </p:sp>
-      <p:sp>
-        <p:nvSpPr>
-          <p:cNvPr id="4" name="Rectangle 1">
-            <a:extLst>
-              <a:ext uri="{FF2B5EF4-FFF2-40B4-BE49-F238E27FC236}">
-                <a16:creationId xmlns:a16="http://schemas.microsoft.com/office/drawing/2014/main" id="{75D236C2-2A20-8FE6-D391-E48D4F14A540}"/>
-              </a:ext>
-            </a:extLst>
-          </p:cNvPr>
-          <p:cNvSpPr/>
-          <p:nvPr/>
-        </p:nvSpPr>
-        <p:spPr>
-          <a:xfrm>
-            <a:off x="692289" y="1379467"/>
-            <a:ext cx="10803891" cy="4750028"/>
-          </a:xfrm>
-          <a:prstGeom prst="rect">
-            <a:avLst/>
-          </a:prstGeom>
-          <a:noFill/>
-          <a:ln>
-            <a:noFill/>
-            <a:prstDash val="solid"/>
-          </a:ln>
-        </p:spPr>
-        <p:txBody>
-          <a:bodyPr vert="horz" wrap="square" lIns="91673" tIns="45837" rIns="91673" bIns="45837" anchor="t" anchorCtr="0" compatLnSpc="0">
-            <a:noAutofit/>
-          </a:bodyPr>
-          <a:lstStyle>
-            <a:defPPr>
-              <a:defRPr lang="fr-FR"/>
-            </a:defPPr>
-            <a:lvl1pPr marL="0" algn="l" defTabSz="930493" rtl="0" eaLnBrk="1" latinLnBrk="0" hangingPunct="1">
-              <a:defRPr sz="1832" kern="1200">
-                <a:solidFill>
-                  <a:schemeClr val="tx1"/>
-                </a:solidFill>
-                <a:latin typeface="+mn-lt"/>
-                <a:ea typeface="+mn-ea"/>
-                <a:cs typeface="+mn-cs"/>
-              </a:defRPr>
-            </a:lvl1pPr>
-            <a:lvl2pPr marL="465247" algn="l" defTabSz="930493" rtl="0" eaLnBrk="1" latinLnBrk="0" hangingPunct="1">
-              <a:defRPr sz="1832" kern="1200">
-                <a:solidFill>
-                  <a:schemeClr val="tx1"/>
-                </a:solidFill>
-                <a:latin typeface="+mn-lt"/>
-                <a:ea typeface="+mn-ea"/>
-                <a:cs typeface="+mn-cs"/>
-              </a:defRPr>
-            </a:lvl2pPr>
-            <a:lvl3pPr marL="930493" algn="l" defTabSz="930493" rtl="0" eaLnBrk="1" latinLnBrk="0" hangingPunct="1">
-              <a:defRPr sz="1832" kern="1200">
-                <a:solidFill>
-                  <a:schemeClr val="tx1"/>
-                </a:solidFill>
-                <a:latin typeface="+mn-lt"/>
-                <a:ea typeface="+mn-ea"/>
-                <a:cs typeface="+mn-cs"/>
-              </a:defRPr>
-            </a:lvl3pPr>
-            <a:lvl4pPr marL="1395740" algn="l" defTabSz="930493" rtl="0" eaLnBrk="1" latinLnBrk="0" hangingPunct="1">
-              <a:defRPr sz="1832" kern="1200">
-                <a:solidFill>
-                  <a:schemeClr val="tx1"/>
-                </a:solidFill>
-                <a:latin typeface="+mn-lt"/>
-                <a:ea typeface="+mn-ea"/>
-                <a:cs typeface="+mn-cs"/>
-              </a:defRPr>
-            </a:lvl4pPr>
-            <a:lvl5pPr marL="1860987" algn="l" defTabSz="930493" rtl="0" eaLnBrk="1" latinLnBrk="0" hangingPunct="1">
-              <a:defRPr sz="1832" kern="1200">
-                <a:solidFill>
-                  <a:schemeClr val="tx1"/>
-                </a:solidFill>
-                <a:latin typeface="+mn-lt"/>
-                <a:ea typeface="+mn-ea"/>
-                <a:cs typeface="+mn-cs"/>
-              </a:defRPr>
-            </a:lvl5pPr>
-            <a:lvl6pPr marL="2326234" algn="l" defTabSz="930493" rtl="0" eaLnBrk="1" latinLnBrk="0" hangingPunct="1">
-              <a:defRPr sz="1832" kern="1200">
-                <a:solidFill>
-                  <a:schemeClr val="tx1"/>
-                </a:solidFill>
-                <a:latin typeface="+mn-lt"/>
-                <a:ea typeface="+mn-ea"/>
-                <a:cs typeface="+mn-cs"/>
-              </a:defRPr>
-            </a:lvl6pPr>
-            <a:lvl7pPr marL="2791480" algn="l" defTabSz="930493" rtl="0" eaLnBrk="1" latinLnBrk="0" hangingPunct="1">
-              <a:defRPr sz="1832" kern="1200">
-                <a:solidFill>
-                  <a:schemeClr val="tx1"/>
-                </a:solidFill>
-                <a:latin typeface="+mn-lt"/>
-                <a:ea typeface="+mn-ea"/>
-                <a:cs typeface="+mn-cs"/>
-              </a:defRPr>
-            </a:lvl7pPr>
-            <a:lvl8pPr marL="3256727" algn="l" defTabSz="930493" rtl="0" eaLnBrk="1" latinLnBrk="0" hangingPunct="1">
-              <a:defRPr sz="1832" kern="1200">
-                <a:solidFill>
-                  <a:schemeClr val="tx1"/>
-                </a:solidFill>
-                <a:latin typeface="+mn-lt"/>
-                <a:ea typeface="+mn-ea"/>
-                <a:cs typeface="+mn-cs"/>
-              </a:defRPr>
-            </a:lvl8pPr>
-            <a:lvl9pPr marL="3721974" algn="l" defTabSz="930493" rtl="0" eaLnBrk="1" latinLnBrk="0" hangingPunct="1">
-              <a:defRPr sz="1832" kern="1200">
-                <a:solidFill>
-                  <a:schemeClr val="tx1"/>
-                </a:solidFill>
-                <a:latin typeface="+mn-lt"/>
-                <a:ea typeface="+mn-ea"/>
-                <a:cs typeface="+mn-cs"/>
-              </a:defRPr>
-            </a:lvl9pPr>
-          </a:lstStyle>
-          <a:p>
-            <a:r>
-              <a:rPr lang="fr-FR" dirty="0"/>
-              <a:t> {{</a:t>
-            </a:r>
-            <a:r>
-              <a:rPr lang="fr-FR" dirty="0" err="1"/>
-              <a:t>chart:cycle_time</a:t>
-            </a:r>
-            <a:r>
-              <a:rPr lang="fr-FR" dirty="0"/>
-              <a:t>}}</a:t>
-            </a:r>
-          </a:p>
-        </p:txBody>
-      </p:sp>
-      <p:sp>
-        <p:nvSpPr>
-          <p:cNvPr id="5" name="Espace réservé du numéro de diapositive 4">
-            <a:extLst>
-              <a:ext uri="{FF2B5EF4-FFF2-40B4-BE49-F238E27FC236}">
-                <a16:creationId xmlns:a16="http://schemas.microsoft.com/office/drawing/2014/main" id="{3A5F20CE-4B2D-6098-5E28-99B86EBBF701}"/>
-              </a:ext>
-            </a:extLst>
-          </p:cNvPr>
-          <p:cNvSpPr>
-            <a:spLocks noGrp="1"/>
-          </p:cNvSpPr>
-          <p:nvPr>
-            <p:ph type="sldNum" sz="quarter" idx="12"/>
-          </p:nvPr>
-        </p:nvSpPr>
-        <p:spPr/>
-        <p:txBody>
-          <a:bodyPr/>
-          <a:lstStyle/>
-          <a:p>
-            <a:fld id="{27C6CCC6-2BE5-4E42-96A4-D1E8E81A3D8E}" type="slidenum">
-              <a:rPr lang="fr-FR" smtClean="0"/>
-              <a:t>9</a:t>
-            </a:fld>
-            <a:endParaRPr lang="fr-FR"/>
-          </a:p>
-        </p:txBody>
-      </p:sp>
-      <p:pic>
-        <p:nvPicPr>
-          <p:cNvPr id="6" name="Image 5" descr="Une image contenant Police, logo, Graphique, symbole&#10;&#10;Le contenu généré par l’IA peut être incorrect.">
-            <a:extLst>
-              <a:ext uri="{FF2B5EF4-FFF2-40B4-BE49-F238E27FC236}">
-                <a16:creationId xmlns:a16="http://schemas.microsoft.com/office/drawing/2014/main" id="{A3B9D28A-36CC-78FF-3BA1-A3B948F4E481}"/>
-              </a:ext>
-            </a:extLst>
-          </p:cNvPr>
-          <p:cNvPicPr>
-            <a:picLocks noChangeAspect="1"/>
-          </p:cNvPicPr>
-          <p:nvPr/>
-        </p:nvPicPr>
-        <p:blipFill>
-          <a:blip r:embed="rId3"/>
-          <a:stretch>
-            <a:fillRect/>
-          </a:stretch>
-        </p:blipFill>
-        <p:spPr>
-          <a:xfrm>
-            <a:off x="9978572" y="507546"/>
-            <a:ext cx="1524000" cy="400050"/>
-          </a:xfrm>
-          <a:prstGeom prst="rect">
-            <a:avLst/>
-          </a:prstGeom>
-        </p:spPr>
-      </p:pic>
-    </p:spTree>
-    <p:extLst>
-      <p:ext uri="{BB962C8B-B14F-4D97-AF65-F5344CB8AC3E}">
-        <p14:creationId xmlns:p14="http://schemas.microsoft.com/office/powerpoint/2010/main" val="3354197382"/>
+        <p14:creationId xmlns:p14="http://schemas.microsoft.com/office/powerpoint/2010/main" val="1456271508"/>
       </p:ext>
     </p:extLst>
   </p:cSld>

--- a/skills/jira-report/scaffold/template.pptx
+++ b/skills/jira-report/scaffold/template.pptx
@@ -23,6 +23,7 @@
     <p:sldId id="309" r:id="rId14"/>
     <p:sldId id="312" r:id="rId15"/>
     <p:sldId id="314" r:id="rId16"/>
+    <p:sldId id="326" r:id="rId28"/>
     <p:sldId id="313" r:id="rId17"/>
     <p:sldId id="318" r:id="rId18"/>
     <p:sldId id="310" r:id="rId19"/>
@@ -7479,11 +7480,9 @@
           <a:bodyPr/>
           <a:lstStyle/>
           <a:p>
-            <a:fld id="{27C6CCC6-2BE5-4E42-96A4-D1E8E81A3D8E}" type="slidenum">
-              <a:rPr lang="fr-FR" smtClean="0"/>
+            <a:r>
               <a:t>1</a:t>
-            </a:fld>
-            <a:endParaRPr lang="fr-FR"/>
+            </a:r>
           </a:p>
         </p:txBody>
       </p:sp>
@@ -7851,11 +7850,9 @@
           <a:bodyPr/>
           <a:lstStyle/>
           <a:p>
-            <a:fld id="{27C6CCC6-2BE5-4E42-96A4-D1E8E81A3D8E}" type="slidenum">
-              <a:rPr lang="fr-FR" smtClean="0"/>
+            <a:r>
               <a:t>10</a:t>
-            </a:fld>
-            <a:endParaRPr lang="fr-FR"/>
+            </a:r>
           </a:p>
         </p:txBody>
       </p:sp>
@@ -8253,11 +8250,9 @@
           <a:bodyPr/>
           <a:lstStyle/>
           <a:p>
-            <a:fld id="{27C6CCC6-2BE5-4E42-96A4-D1E8E81A3D8E}" type="slidenum">
-              <a:rPr lang="fr-FR" smtClean="0"/>
+            <a:r>
               <a:t>11</a:t>
-            </a:fld>
-            <a:endParaRPr lang="fr-FR"/>
+            </a:r>
           </a:p>
         </p:txBody>
       </p:sp>
@@ -8655,11 +8650,9 @@
           <a:bodyPr/>
           <a:lstStyle/>
           <a:p>
-            <a:fld id="{27C6CCC6-2BE5-4E42-96A4-D1E8E81A3D8E}" type="slidenum">
-              <a:rPr lang="fr-FR" smtClean="0"/>
+            <a:r>
               <a:t>12</a:t>
-            </a:fld>
-            <a:endParaRPr lang="fr-FR"/>
+            </a:r>
           </a:p>
         </p:txBody>
       </p:sp>
@@ -9057,11 +9050,9 @@
           <a:bodyPr/>
           <a:lstStyle/>
           <a:p>
-            <a:fld id="{27C6CCC6-2BE5-4E42-96A4-D1E8E81A3D8E}" type="slidenum">
-              <a:rPr lang="fr-FR" smtClean="0"/>
+            <a:r>
               <a:t>13</a:t>
-            </a:fld>
-            <a:endParaRPr lang="fr-FR"/>
+            </a:r>
           </a:p>
         </p:txBody>
       </p:sp>
@@ -9459,11 +9450,9 @@
           <a:bodyPr/>
           <a:lstStyle/>
           <a:p>
-            <a:fld id="{27C6CCC6-2BE5-4E42-96A4-D1E8E81A3D8E}" type="slidenum">
-              <a:rPr lang="fr-FR" smtClean="0"/>
+            <a:r>
               <a:t>14</a:t>
-            </a:fld>
-            <a:endParaRPr lang="fr-FR"/>
+            </a:r>
           </a:p>
         </p:txBody>
       </p:sp>
@@ -9861,11 +9850,9 @@
           <a:bodyPr/>
           <a:lstStyle/>
           <a:p>
-            <a:fld id="{27C6CCC6-2BE5-4E42-96A4-D1E8E81A3D8E}" type="slidenum">
-              <a:rPr lang="fr-FR" smtClean="0"/>
+            <a:r>
               <a:t>15</a:t>
-            </a:fld>
-            <a:endParaRPr lang="fr-FR"/>
+            </a:r>
           </a:p>
         </p:txBody>
       </p:sp>
@@ -10263,11 +10250,9 @@
           <a:bodyPr/>
           <a:lstStyle/>
           <a:p>
-            <a:fld id="{27C6CCC6-2BE5-4E42-96A4-D1E8E81A3D8E}" type="slidenum">
-              <a:rPr lang="fr-FR" smtClean="0"/>
-              <a:t>16</a:t>
-            </a:fld>
-            <a:endParaRPr lang="fr-FR"/>
+            <a:r>
+              <a:t>17</a:t>
+            </a:r>
           </a:p>
         </p:txBody>
       </p:sp>
@@ -10665,11 +10650,9 @@
           <a:bodyPr/>
           <a:lstStyle/>
           <a:p>
-            <a:fld id="{27C6CCC6-2BE5-4E42-96A4-D1E8E81A3D8E}" type="slidenum">
-              <a:rPr lang="fr-FR" smtClean="0"/>
-              <a:t>17</a:t>
-            </a:fld>
-            <a:endParaRPr lang="fr-FR"/>
+            <a:r>
+              <a:t>18</a:t>
+            </a:r>
           </a:p>
         </p:txBody>
       </p:sp>
@@ -11067,11 +11050,9 @@
           <a:bodyPr/>
           <a:lstStyle/>
           <a:p>
-            <a:fld id="{27C6CCC6-2BE5-4E42-96A4-D1E8E81A3D8E}" type="slidenum">
-              <a:rPr lang="fr-FR" smtClean="0"/>
-              <a:t>18</a:t>
-            </a:fld>
-            <a:endParaRPr lang="fr-FR"/>
+            <a:r>
+              <a:t>19</a:t>
+            </a:r>
           </a:p>
         </p:txBody>
       </p:sp>
@@ -11466,11 +11447,9 @@
           <a:bodyPr/>
           <a:lstStyle/>
           <a:p>
-            <a:fld id="{27C6CCC6-2BE5-4E42-96A4-D1E8E81A3D8E}" type="slidenum">
-              <a:rPr lang="fr-FR" smtClean="0"/>
-              <a:t>19</a:t>
-            </a:fld>
-            <a:endParaRPr lang="fr-FR"/>
+            <a:r>
+              <a:t>20</a:t>
+            </a:r>
           </a:p>
         </p:txBody>
       </p:sp>
@@ -11879,11 +11858,9 @@
           <a:bodyPr/>
           <a:lstStyle/>
           <a:p>
-            <a:fld id="{27C6CCC6-2BE5-4E42-96A4-D1E8E81A3D8E}" type="slidenum">
-              <a:rPr lang="fr-FR" smtClean="0"/>
+            <a:r>
               <a:t>2</a:t>
-            </a:fld>
-            <a:endParaRPr lang="fr-FR"/>
+            </a:r>
           </a:p>
         </p:txBody>
       </p:sp>
@@ -12282,11 +12259,9 @@
           <a:bodyPr/>
           <a:lstStyle/>
           <a:p>
-            <a:fld id="{27C6CCC6-2BE5-4E42-96A4-D1E8E81A3D8E}" type="slidenum">
-              <a:rPr lang="fr-FR" smtClean="0"/>
-              <a:t>20</a:t>
-            </a:fld>
-            <a:endParaRPr lang="fr-FR"/>
+            <a:r>
+              <a:t>21</a:t>
+            </a:r>
           </a:p>
         </p:txBody>
       </p:sp>
@@ -12333,6 +12308,388 @@
 </p:sld>
 </file>
 
+<file path=ppt/slides/slide21.xml><?xml version="1.0" encoding="utf-8"?>
+<p:sld xmlns:a="http://schemas.openxmlformats.org/drawingml/2006/main" xmlns:p="http://schemas.openxmlformats.org/presentationml/2006/main" xmlns:r="http://schemas.openxmlformats.org/officeDocument/2006/relationships">
+  <p:cSld>
+    <p:spTree>
+      <p:nvGrpSpPr>
+        <p:cNvPr id="1" name=""/>
+        <p:cNvGrpSpPr/>
+        <p:nvPr/>
+      </p:nvGrpSpPr>
+      <p:grpSpPr/>
+      <p:sp>
+        <p:nvSpPr>
+          <p:cNvPr id="3" name="ZoneTexte 6">
+            <a:extLst>
+              <a:ext uri="{FF2B5EF4-FFF2-40B4-BE49-F238E27FC236}">
+                <a16:creationId xmlns:a16="http://schemas.microsoft.com/office/drawing/2014/main" id="{E4F3CC4C-8826-5849-DC88-6E6682E7BE78}"/>
+              </a:ext>
+            </a:extLst>
+          </p:cNvPr>
+          <p:cNvSpPr txBox="1"/>
+          <p:nvPr/>
+        </p:nvSpPr>
+        <p:spPr>
+          <a:xfrm>
+            <a:off x="692289" y="365303"/>
+            <a:ext cx="8756869" cy="656185"/>
+          </a:xfrm>
+          <a:prstGeom prst="rect">
+            <a:avLst/>
+          </a:prstGeom>
+          <a:noFill/>
+          <a:ln>
+            <a:noFill/>
+          </a:ln>
+        </p:spPr>
+        <p:txBody>
+          <a:bodyPr vert="horz" wrap="square" lIns="91673" tIns="45837" rIns="91673" bIns="45837" anchor="t" anchorCtr="0" compatLnSpc="0">
+            <a:spAutoFit/>
+          </a:bodyPr>
+          <a:lstStyle>
+            <a:defPPr>
+              <a:defRPr lang="fr-FR"/>
+            </a:defPPr>
+            <a:lvl1pPr marL="0" algn="l" defTabSz="930493" rtl="0" eaLnBrk="1" latinLnBrk="0" hangingPunct="1">
+              <a:defRPr sz="1832" kern="1200">
+                <a:solidFill>
+                  <a:schemeClr val="tx1"/>
+                </a:solidFill>
+                <a:latin typeface="+mn-lt"/>
+                <a:ea typeface="+mn-ea"/>
+                <a:cs typeface="+mn-cs"/>
+              </a:defRPr>
+            </a:lvl1pPr>
+            <a:lvl2pPr marL="465247" algn="l" defTabSz="930493" rtl="0" eaLnBrk="1" latinLnBrk="0" hangingPunct="1">
+              <a:defRPr sz="1832" kern="1200">
+                <a:solidFill>
+                  <a:schemeClr val="tx1"/>
+                </a:solidFill>
+                <a:latin typeface="+mn-lt"/>
+                <a:ea typeface="+mn-ea"/>
+                <a:cs typeface="+mn-cs"/>
+              </a:defRPr>
+            </a:lvl2pPr>
+            <a:lvl3pPr marL="930493" algn="l" defTabSz="930493" rtl="0" eaLnBrk="1" latinLnBrk="0" hangingPunct="1">
+              <a:defRPr sz="1832" kern="1200">
+                <a:solidFill>
+                  <a:schemeClr val="tx1"/>
+                </a:solidFill>
+                <a:latin typeface="+mn-lt"/>
+                <a:ea typeface="+mn-ea"/>
+                <a:cs typeface="+mn-cs"/>
+              </a:defRPr>
+            </a:lvl3pPr>
+            <a:lvl4pPr marL="1395740" algn="l" defTabSz="930493" rtl="0" eaLnBrk="1" latinLnBrk="0" hangingPunct="1">
+              <a:defRPr sz="1832" kern="1200">
+                <a:solidFill>
+                  <a:schemeClr val="tx1"/>
+                </a:solidFill>
+                <a:latin typeface="+mn-lt"/>
+                <a:ea typeface="+mn-ea"/>
+                <a:cs typeface="+mn-cs"/>
+              </a:defRPr>
+            </a:lvl4pPr>
+            <a:lvl5pPr marL="1860987" algn="l" defTabSz="930493" rtl="0" eaLnBrk="1" latinLnBrk="0" hangingPunct="1">
+              <a:defRPr sz="1832" kern="1200">
+                <a:solidFill>
+                  <a:schemeClr val="tx1"/>
+                </a:solidFill>
+                <a:latin typeface="+mn-lt"/>
+                <a:ea typeface="+mn-ea"/>
+                <a:cs typeface="+mn-cs"/>
+              </a:defRPr>
+            </a:lvl5pPr>
+            <a:lvl6pPr marL="2326234" algn="l" defTabSz="930493" rtl="0" eaLnBrk="1" latinLnBrk="0" hangingPunct="1">
+              <a:defRPr sz="1832" kern="1200">
+                <a:solidFill>
+                  <a:schemeClr val="tx1"/>
+                </a:solidFill>
+                <a:latin typeface="+mn-lt"/>
+                <a:ea typeface="+mn-ea"/>
+                <a:cs typeface="+mn-cs"/>
+              </a:defRPr>
+            </a:lvl6pPr>
+            <a:lvl7pPr marL="2791480" algn="l" defTabSz="930493" rtl="0" eaLnBrk="1" latinLnBrk="0" hangingPunct="1">
+              <a:defRPr sz="1832" kern="1200">
+                <a:solidFill>
+                  <a:schemeClr val="tx1"/>
+                </a:solidFill>
+                <a:latin typeface="+mn-lt"/>
+                <a:ea typeface="+mn-ea"/>
+                <a:cs typeface="+mn-cs"/>
+              </a:defRPr>
+            </a:lvl7pPr>
+            <a:lvl8pPr marL="3256727" algn="l" defTabSz="930493" rtl="0" eaLnBrk="1" latinLnBrk="0" hangingPunct="1">
+              <a:defRPr sz="1832" kern="1200">
+                <a:solidFill>
+                  <a:schemeClr val="tx1"/>
+                </a:solidFill>
+                <a:latin typeface="+mn-lt"/>
+                <a:ea typeface="+mn-ea"/>
+                <a:cs typeface="+mn-cs"/>
+              </a:defRPr>
+            </a:lvl8pPr>
+            <a:lvl9pPr marL="3721974" algn="l" defTabSz="930493" rtl="0" eaLnBrk="1" latinLnBrk="0" hangingPunct="1">
+              <a:defRPr sz="1832" kern="1200">
+                <a:solidFill>
+                  <a:schemeClr val="tx1"/>
+                </a:solidFill>
+                <a:latin typeface="+mn-lt"/>
+                <a:ea typeface="+mn-ea"/>
+                <a:cs typeface="+mn-cs"/>
+              </a:defRPr>
+            </a:lvl9pPr>
+          </a:lstStyle>
+          <a:p>
+            <a:pPr>
+              <a:defRPr sz="1630"/>
+            </a:pPr>
+            <a:r>
+              <a:rPr lang="fr-FR" sz="3600" kern="0" dirty="0">
+                <a:solidFill>
+                  <a:srgbClr val="1F4E79"/>
+                </a:solidFill>
+                <a:ea typeface="+mn-lt"/>
+                <a:cs typeface="+mn-lt"/>
+              </a:rPr>
+              <a:t>{{</a:t>
+            </a:r>
+            <a:r>
+              <a:rPr lang="fr-FR" sz="3600" kern="0" dirty="0" err="1">
+                <a:solidFill>
+                  <a:srgbClr val="1F4E79"/>
+                </a:solidFill>
+                <a:ea typeface="+mn-lt"/>
+                <a:cs typeface="+mn-lt"/>
+              </a:rPr>
+              <a:t>project_name</a:t>
+            </a:r>
+            <a:r>
+              <a:rPr lang="fr-FR" sz="3600" kern="0" dirty="0">
+                <a:solidFill>
+                  <a:srgbClr val="1F4E79"/>
+                </a:solidFill>
+                <a:ea typeface="+mn-lt"/>
+                <a:cs typeface="+mn-lt"/>
+              </a:rPr>
+              <a:t>}}</a:t>
+            </a:r>
+            <a:endParaRPr lang="fr-FR" sz="3600" kern="0" dirty="0">
+              <a:solidFill>
+                <a:srgbClr val="1F4E79"/>
+              </a:solidFill>
+            </a:endParaRPr>
+          </a:p>
+        </p:txBody>
+      </p:sp>
+      <p:sp>
+        <p:nvSpPr>
+          <p:cNvPr id="4" name="Rectangle 1">
+            <a:extLst>
+              <a:ext uri="{FF2B5EF4-FFF2-40B4-BE49-F238E27FC236}">
+                <a16:creationId xmlns:a16="http://schemas.microsoft.com/office/drawing/2014/main" id="{86293E5A-80FC-F271-BDE8-F0BD674E2AC6}"/>
+              </a:ext>
+            </a:extLst>
+          </p:cNvPr>
+          <p:cNvSpPr/>
+          <p:nvPr/>
+        </p:nvSpPr>
+        <p:spPr>
+          <a:xfrm>
+            <a:off x="692289" y="1379467"/>
+            <a:ext cx="10803891" cy="4750028"/>
+          </a:xfrm>
+          <a:prstGeom prst="rect">
+            <a:avLst/>
+          </a:prstGeom>
+          <a:noFill/>
+          <a:ln>
+            <a:noFill/>
+            <a:prstDash val="solid"/>
+          </a:ln>
+        </p:spPr>
+        <p:txBody>
+          <a:bodyPr vert="horz" wrap="square" lIns="91673" tIns="45837" rIns="91673" bIns="45837" anchor="t" anchorCtr="0" compatLnSpc="0">
+            <a:noAutofit/>
+          </a:bodyPr>
+          <a:lstStyle>
+            <a:defPPr>
+              <a:defRPr lang="fr-FR"/>
+            </a:defPPr>
+            <a:lvl1pPr marL="0" algn="l" defTabSz="930493" rtl="0" eaLnBrk="1" latinLnBrk="0" hangingPunct="1">
+              <a:defRPr sz="1832" kern="1200">
+                <a:solidFill>
+                  <a:schemeClr val="tx1"/>
+                </a:solidFill>
+                <a:latin typeface="+mn-lt"/>
+                <a:ea typeface="+mn-ea"/>
+                <a:cs typeface="+mn-cs"/>
+              </a:defRPr>
+            </a:lvl1pPr>
+            <a:lvl2pPr marL="465247" algn="l" defTabSz="930493" rtl="0" eaLnBrk="1" latinLnBrk="0" hangingPunct="1">
+              <a:defRPr sz="1832" kern="1200">
+                <a:solidFill>
+                  <a:schemeClr val="tx1"/>
+                </a:solidFill>
+                <a:latin typeface="+mn-lt"/>
+                <a:ea typeface="+mn-ea"/>
+                <a:cs typeface="+mn-cs"/>
+              </a:defRPr>
+            </a:lvl2pPr>
+            <a:lvl3pPr marL="930493" algn="l" defTabSz="930493" rtl="0" eaLnBrk="1" latinLnBrk="0" hangingPunct="1">
+              <a:defRPr sz="1832" kern="1200">
+                <a:solidFill>
+                  <a:schemeClr val="tx1"/>
+                </a:solidFill>
+                <a:latin typeface="+mn-lt"/>
+                <a:ea typeface="+mn-ea"/>
+                <a:cs typeface="+mn-cs"/>
+              </a:defRPr>
+            </a:lvl3pPr>
+            <a:lvl4pPr marL="1395740" algn="l" defTabSz="930493" rtl="0" eaLnBrk="1" latinLnBrk="0" hangingPunct="1">
+              <a:defRPr sz="1832" kern="1200">
+                <a:solidFill>
+                  <a:schemeClr val="tx1"/>
+                </a:solidFill>
+                <a:latin typeface="+mn-lt"/>
+                <a:ea typeface="+mn-ea"/>
+                <a:cs typeface="+mn-cs"/>
+              </a:defRPr>
+            </a:lvl4pPr>
+            <a:lvl5pPr marL="1860987" algn="l" defTabSz="930493" rtl="0" eaLnBrk="1" latinLnBrk="0" hangingPunct="1">
+              <a:defRPr sz="1832" kern="1200">
+                <a:solidFill>
+                  <a:schemeClr val="tx1"/>
+                </a:solidFill>
+                <a:latin typeface="+mn-lt"/>
+                <a:ea typeface="+mn-ea"/>
+                <a:cs typeface="+mn-cs"/>
+              </a:defRPr>
+            </a:lvl5pPr>
+            <a:lvl6pPr marL="2326234" algn="l" defTabSz="930493" rtl="0" eaLnBrk="1" latinLnBrk="0" hangingPunct="1">
+              <a:defRPr sz="1832" kern="1200">
+                <a:solidFill>
+                  <a:schemeClr val="tx1"/>
+                </a:solidFill>
+                <a:latin typeface="+mn-lt"/>
+                <a:ea typeface="+mn-ea"/>
+                <a:cs typeface="+mn-cs"/>
+              </a:defRPr>
+            </a:lvl6pPr>
+            <a:lvl7pPr marL="2791480" algn="l" defTabSz="930493" rtl="0" eaLnBrk="1" latinLnBrk="0" hangingPunct="1">
+              <a:defRPr sz="1832" kern="1200">
+                <a:solidFill>
+                  <a:schemeClr val="tx1"/>
+                </a:solidFill>
+                <a:latin typeface="+mn-lt"/>
+                <a:ea typeface="+mn-ea"/>
+                <a:cs typeface="+mn-cs"/>
+              </a:defRPr>
+            </a:lvl7pPr>
+            <a:lvl8pPr marL="3256727" algn="l" defTabSz="930493" rtl="0" eaLnBrk="1" latinLnBrk="0" hangingPunct="1">
+              <a:defRPr sz="1832" kern="1200">
+                <a:solidFill>
+                  <a:schemeClr val="tx1"/>
+                </a:solidFill>
+                <a:latin typeface="+mn-lt"/>
+                <a:ea typeface="+mn-ea"/>
+                <a:cs typeface="+mn-cs"/>
+              </a:defRPr>
+            </a:lvl8pPr>
+            <a:lvl9pPr marL="3721974" algn="l" defTabSz="930493" rtl="0" eaLnBrk="1" latinLnBrk="0" hangingPunct="1">
+              <a:defRPr sz="1832" kern="1200">
+                <a:solidFill>
+                  <a:schemeClr val="tx1"/>
+                </a:solidFill>
+                <a:latin typeface="+mn-lt"/>
+                <a:ea typeface="+mn-ea"/>
+                <a:cs typeface="+mn-cs"/>
+              </a:defRPr>
+            </a:lvl9pPr>
+          </a:lstStyle>
+          <a:p>
+            <a:r>
+              <a:rPr lang="fr-FR" dirty="0"/>
+              <a:t> {{chart:conso_corrective}}</a:t>
+            </a:r>
+            <a:r>
+              <a:rPr lang="fr-FR" dirty="0" err="1"/>
+              <a:t/>
+            </a:r>
+            <a:r>
+              <a:rPr lang="fr-FR" dirty="0"/>
+              <a:t/>
+            </a:r>
+          </a:p>
+        </p:txBody>
+      </p:sp>
+      <p:sp>
+        <p:nvSpPr>
+          <p:cNvPr id="5" name="Espace réservé du numéro de diapositive 4">
+            <a:extLst>
+              <a:ext uri="{FF2B5EF4-FFF2-40B4-BE49-F238E27FC236}">
+                <a16:creationId xmlns:a16="http://schemas.microsoft.com/office/drawing/2014/main" id="{9D2BA1EF-32B9-67FD-03DC-579D11B0111C}"/>
+              </a:ext>
+            </a:extLst>
+          </p:cNvPr>
+          <p:cNvSpPr>
+            <a:spLocks noGrp="1"/>
+          </p:cNvSpPr>
+          <p:nvPr>
+            <p:ph type="sldNum" sz="quarter" idx="12"/>
+          </p:nvPr>
+        </p:nvSpPr>
+        <p:spPr/>
+        <p:txBody>
+          <a:bodyPr/>
+          <a:lstStyle/>
+          <a:p>
+            <a:r>
+              <a:t>16</a:t>
+            </a:r>
+          </a:p>
+        </p:txBody>
+      </p:sp>
+      <p:pic>
+        <p:nvPicPr>
+          <p:cNvPr id="6" name="Image 5" descr="Une image contenant Police, logo, Graphique, symbole&#10;&#10;Le contenu généré par l’IA peut être incorrect.">
+            <a:extLst>
+              <a:ext uri="{FF2B5EF4-FFF2-40B4-BE49-F238E27FC236}">
+                <a16:creationId xmlns:a16="http://schemas.microsoft.com/office/drawing/2014/main" id="{D0A65CC1-4B96-627A-BEE7-4F6952A70C77}"/>
+              </a:ext>
+            </a:extLst>
+          </p:cNvPr>
+          <p:cNvPicPr>
+            <a:picLocks noChangeAspect="1"/>
+          </p:cNvPicPr>
+          <p:nvPr/>
+        </p:nvPicPr>
+        <p:blipFill>
+          <a:blip r:embed="rId3"/>
+          <a:stretch>
+            <a:fillRect/>
+          </a:stretch>
+        </p:blipFill>
+        <p:spPr>
+          <a:xfrm>
+            <a:off x="9978572" y="507546"/>
+            <a:ext cx="1524000" cy="400050"/>
+          </a:xfrm>
+          <a:prstGeom prst="rect">
+            <a:avLst/>
+          </a:prstGeom>
+        </p:spPr>
+      </p:pic>
+    </p:spTree>
+  </p:cSld>
+  <p:clrMapOvr>
+    <a:masterClrMapping/>
+  </p:clrMapOvr>
+</p:sld>
+</file>
+
 <file path=ppt/slides/slide3.xml><?xml version="1.0" encoding="utf-8"?>
 <p:sld xmlns:a="http://schemas.openxmlformats.org/drawingml/2006/main" xmlns:r="http://schemas.openxmlformats.org/officeDocument/2006/relationships" xmlns:p="http://schemas.openxmlformats.org/presentationml/2006/main">
   <p:cSld>
@@ -12699,11 +13056,9 @@
           <a:bodyPr/>
           <a:lstStyle/>
           <a:p>
-            <a:fld id="{27C6CCC6-2BE5-4E42-96A4-D1E8E81A3D8E}" type="slidenum">
-              <a:rPr lang="fr-FR" smtClean="0"/>
+            <a:r>
               <a:t>3</a:t>
-            </a:fld>
-            <a:endParaRPr lang="fr-FR"/>
+            </a:r>
           </a:p>
         </p:txBody>
       </p:sp>
@@ -13111,11 +13466,9 @@
           <a:bodyPr/>
           <a:lstStyle/>
           <a:p>
-            <a:fld id="{27C6CCC6-2BE5-4E42-96A4-D1E8E81A3D8E}" type="slidenum">
-              <a:rPr lang="fr-FR" smtClean="0"/>
+            <a:r>
               <a:t>4</a:t>
-            </a:fld>
-            <a:endParaRPr lang="fr-FR"/>
+            </a:r>
           </a:p>
         </p:txBody>
       </p:sp>
@@ -13523,11 +13876,9 @@
           <a:bodyPr/>
           <a:lstStyle/>
           <a:p>
-            <a:fld id="{27C6CCC6-2BE5-4E42-96A4-D1E8E81A3D8E}" type="slidenum">
-              <a:rPr lang="fr-FR" smtClean="0"/>
+            <a:r>
               <a:t>5</a:t>
-            </a:fld>
-            <a:endParaRPr lang="fr-FR"/>
+            </a:r>
           </a:p>
         </p:txBody>
       </p:sp>
@@ -13935,11 +14286,9 @@
           <a:bodyPr/>
           <a:lstStyle/>
           <a:p>
-            <a:fld id="{27C6CCC6-2BE5-4E42-96A4-D1E8E81A3D8E}" type="slidenum">
-              <a:rPr lang="fr-FR" smtClean="0"/>
+            <a:r>
               <a:t>6</a:t>
-            </a:fld>
-            <a:endParaRPr lang="fr-FR"/>
+            </a:r>
           </a:p>
         </p:txBody>
       </p:sp>
@@ -14347,11 +14696,9 @@
           <a:bodyPr/>
           <a:lstStyle/>
           <a:p>
-            <a:fld id="{27C6CCC6-2BE5-4E42-96A4-D1E8E81A3D8E}" type="slidenum">
-              <a:rPr lang="fr-FR" smtClean="0"/>
+            <a:r>
               <a:t>7</a:t>
-            </a:fld>
-            <a:endParaRPr lang="fr-FR"/>
+            </a:r>
           </a:p>
         </p:txBody>
       </p:sp>
@@ -14759,11 +15106,9 @@
           <a:bodyPr/>
           <a:lstStyle/>
           <a:p>
-            <a:fld id="{27C6CCC6-2BE5-4E42-96A4-D1E8E81A3D8E}" type="slidenum">
-              <a:rPr lang="fr-FR" smtClean="0"/>
+            <a:r>
               <a:t>8</a:t>
-            </a:fld>
-            <a:endParaRPr lang="fr-FR"/>
+            </a:r>
           </a:p>
         </p:txBody>
       </p:sp>
@@ -15171,11 +15516,9 @@
           <a:bodyPr/>
           <a:lstStyle/>
           <a:p>
-            <a:fld id="{27C6CCC6-2BE5-4E42-96A4-D1E8E81A3D8E}" type="slidenum">
-              <a:rPr lang="fr-FR" smtClean="0"/>
+            <a:r>
               <a:t>9</a:t>
-            </a:fld>
-            <a:endParaRPr lang="fr-FR"/>
+            </a:r>
           </a:p>
         </p:txBody>
       </p:sp>

--- a/skills/jira-report/scaffold/template.pptx
+++ b/skills/jira-report/scaffold/template.pptx
@@ -24,6 +24,7 @@
     <p:sldId id="312" r:id="rId15"/>
     <p:sldId id="314" r:id="rId16"/>
     <p:sldId id="326" r:id="rId28"/>
+    <p:sldId id="327" r:id="rId29"/>
     <p:sldId id="313" r:id="rId17"/>
     <p:sldId id="318" r:id="rId18"/>
     <p:sldId id="310" r:id="rId19"/>
@@ -9900,6 +9901,388 @@
 </file>
 
 <file path=ppt/slides/slide16.xml><?xml version="1.0" encoding="utf-8"?>
+<p:sld xmlns:a="http://schemas.openxmlformats.org/drawingml/2006/main" xmlns:p="http://schemas.openxmlformats.org/presentationml/2006/main" xmlns:r="http://schemas.openxmlformats.org/officeDocument/2006/relationships">
+  <p:cSld>
+    <p:spTree>
+      <p:nvGrpSpPr>
+        <p:cNvPr id="1" name=""/>
+        <p:cNvGrpSpPr/>
+        <p:nvPr/>
+      </p:nvGrpSpPr>
+      <p:grpSpPr/>
+      <p:sp>
+        <p:nvSpPr>
+          <p:cNvPr id="3" name="ZoneTexte 6">
+            <a:extLst>
+              <a:ext uri="{FF2B5EF4-FFF2-40B4-BE49-F238E27FC236}">
+                <a16:creationId xmlns:a16="http://schemas.microsoft.com/office/drawing/2014/main" id="{E4F3CC4C-8826-5849-DC88-6E6682E7BE78}"/>
+              </a:ext>
+            </a:extLst>
+          </p:cNvPr>
+          <p:cNvSpPr txBox="1"/>
+          <p:nvPr/>
+        </p:nvSpPr>
+        <p:spPr>
+          <a:xfrm>
+            <a:off x="692289" y="365303"/>
+            <a:ext cx="8756869" cy="656185"/>
+          </a:xfrm>
+          <a:prstGeom prst="rect">
+            <a:avLst/>
+          </a:prstGeom>
+          <a:noFill/>
+          <a:ln>
+            <a:noFill/>
+          </a:ln>
+        </p:spPr>
+        <p:txBody>
+          <a:bodyPr vert="horz" wrap="square" lIns="91673" tIns="45837" rIns="91673" bIns="45837" anchor="t" anchorCtr="0" compatLnSpc="0">
+            <a:spAutoFit/>
+          </a:bodyPr>
+          <a:lstStyle>
+            <a:defPPr>
+              <a:defRPr lang="fr-FR"/>
+            </a:defPPr>
+            <a:lvl1pPr marL="0" algn="l" defTabSz="930493" rtl="0" eaLnBrk="1" latinLnBrk="0" hangingPunct="1">
+              <a:defRPr sz="1832" kern="1200">
+                <a:solidFill>
+                  <a:schemeClr val="tx1"/>
+                </a:solidFill>
+                <a:latin typeface="+mn-lt"/>
+                <a:ea typeface="+mn-ea"/>
+                <a:cs typeface="+mn-cs"/>
+              </a:defRPr>
+            </a:lvl1pPr>
+            <a:lvl2pPr marL="465247" algn="l" defTabSz="930493" rtl="0" eaLnBrk="1" latinLnBrk="0" hangingPunct="1">
+              <a:defRPr sz="1832" kern="1200">
+                <a:solidFill>
+                  <a:schemeClr val="tx1"/>
+                </a:solidFill>
+                <a:latin typeface="+mn-lt"/>
+                <a:ea typeface="+mn-ea"/>
+                <a:cs typeface="+mn-cs"/>
+              </a:defRPr>
+            </a:lvl2pPr>
+            <a:lvl3pPr marL="930493" algn="l" defTabSz="930493" rtl="0" eaLnBrk="1" latinLnBrk="0" hangingPunct="1">
+              <a:defRPr sz="1832" kern="1200">
+                <a:solidFill>
+                  <a:schemeClr val="tx1"/>
+                </a:solidFill>
+                <a:latin typeface="+mn-lt"/>
+                <a:ea typeface="+mn-ea"/>
+                <a:cs typeface="+mn-cs"/>
+              </a:defRPr>
+            </a:lvl3pPr>
+            <a:lvl4pPr marL="1395740" algn="l" defTabSz="930493" rtl="0" eaLnBrk="1" latinLnBrk="0" hangingPunct="1">
+              <a:defRPr sz="1832" kern="1200">
+                <a:solidFill>
+                  <a:schemeClr val="tx1"/>
+                </a:solidFill>
+                <a:latin typeface="+mn-lt"/>
+                <a:ea typeface="+mn-ea"/>
+                <a:cs typeface="+mn-cs"/>
+              </a:defRPr>
+            </a:lvl4pPr>
+            <a:lvl5pPr marL="1860987" algn="l" defTabSz="930493" rtl="0" eaLnBrk="1" latinLnBrk="0" hangingPunct="1">
+              <a:defRPr sz="1832" kern="1200">
+                <a:solidFill>
+                  <a:schemeClr val="tx1"/>
+                </a:solidFill>
+                <a:latin typeface="+mn-lt"/>
+                <a:ea typeface="+mn-ea"/>
+                <a:cs typeface="+mn-cs"/>
+              </a:defRPr>
+            </a:lvl5pPr>
+            <a:lvl6pPr marL="2326234" algn="l" defTabSz="930493" rtl="0" eaLnBrk="1" latinLnBrk="0" hangingPunct="1">
+              <a:defRPr sz="1832" kern="1200">
+                <a:solidFill>
+                  <a:schemeClr val="tx1"/>
+                </a:solidFill>
+                <a:latin typeface="+mn-lt"/>
+                <a:ea typeface="+mn-ea"/>
+                <a:cs typeface="+mn-cs"/>
+              </a:defRPr>
+            </a:lvl6pPr>
+            <a:lvl7pPr marL="2791480" algn="l" defTabSz="930493" rtl="0" eaLnBrk="1" latinLnBrk="0" hangingPunct="1">
+              <a:defRPr sz="1832" kern="1200">
+                <a:solidFill>
+                  <a:schemeClr val="tx1"/>
+                </a:solidFill>
+                <a:latin typeface="+mn-lt"/>
+                <a:ea typeface="+mn-ea"/>
+                <a:cs typeface="+mn-cs"/>
+              </a:defRPr>
+            </a:lvl7pPr>
+            <a:lvl8pPr marL="3256727" algn="l" defTabSz="930493" rtl="0" eaLnBrk="1" latinLnBrk="0" hangingPunct="1">
+              <a:defRPr sz="1832" kern="1200">
+                <a:solidFill>
+                  <a:schemeClr val="tx1"/>
+                </a:solidFill>
+                <a:latin typeface="+mn-lt"/>
+                <a:ea typeface="+mn-ea"/>
+                <a:cs typeface="+mn-cs"/>
+              </a:defRPr>
+            </a:lvl8pPr>
+            <a:lvl9pPr marL="3721974" algn="l" defTabSz="930493" rtl="0" eaLnBrk="1" latinLnBrk="0" hangingPunct="1">
+              <a:defRPr sz="1832" kern="1200">
+                <a:solidFill>
+                  <a:schemeClr val="tx1"/>
+                </a:solidFill>
+                <a:latin typeface="+mn-lt"/>
+                <a:ea typeface="+mn-ea"/>
+                <a:cs typeface="+mn-cs"/>
+              </a:defRPr>
+            </a:lvl9pPr>
+          </a:lstStyle>
+          <a:p>
+            <a:pPr>
+              <a:defRPr sz="1630"/>
+            </a:pPr>
+            <a:r>
+              <a:rPr lang="fr-FR" sz="3600" kern="0" dirty="0">
+                <a:solidFill>
+                  <a:srgbClr val="1F4E79"/>
+                </a:solidFill>
+                <a:ea typeface="+mn-lt"/>
+                <a:cs typeface="+mn-lt"/>
+              </a:rPr>
+              <a:t>{{</a:t>
+            </a:r>
+            <a:r>
+              <a:rPr lang="fr-FR" sz="3600" kern="0" dirty="0" err="1">
+                <a:solidFill>
+                  <a:srgbClr val="1F4E79"/>
+                </a:solidFill>
+                <a:ea typeface="+mn-lt"/>
+                <a:cs typeface="+mn-lt"/>
+              </a:rPr>
+              <a:t>project_name</a:t>
+            </a:r>
+            <a:r>
+              <a:rPr lang="fr-FR" sz="3600" kern="0" dirty="0">
+                <a:solidFill>
+                  <a:srgbClr val="1F4E79"/>
+                </a:solidFill>
+                <a:ea typeface="+mn-lt"/>
+                <a:cs typeface="+mn-lt"/>
+              </a:rPr>
+              <a:t>}}</a:t>
+            </a:r>
+            <a:endParaRPr lang="fr-FR" sz="3600" kern="0" dirty="0">
+              <a:solidFill>
+                <a:srgbClr val="1F4E79"/>
+              </a:solidFill>
+            </a:endParaRPr>
+          </a:p>
+        </p:txBody>
+      </p:sp>
+      <p:sp>
+        <p:nvSpPr>
+          <p:cNvPr id="4" name="Rectangle 1">
+            <a:extLst>
+              <a:ext uri="{FF2B5EF4-FFF2-40B4-BE49-F238E27FC236}">
+                <a16:creationId xmlns:a16="http://schemas.microsoft.com/office/drawing/2014/main" id="{86293E5A-80FC-F271-BDE8-F0BD674E2AC6}"/>
+              </a:ext>
+            </a:extLst>
+          </p:cNvPr>
+          <p:cNvSpPr/>
+          <p:nvPr/>
+        </p:nvSpPr>
+        <p:spPr>
+          <a:xfrm>
+            <a:off x="692289" y="1379467"/>
+            <a:ext cx="10803891" cy="4750028"/>
+          </a:xfrm>
+          <a:prstGeom prst="rect">
+            <a:avLst/>
+          </a:prstGeom>
+          <a:noFill/>
+          <a:ln>
+            <a:noFill/>
+            <a:prstDash val="solid"/>
+          </a:ln>
+        </p:spPr>
+        <p:txBody>
+          <a:bodyPr vert="horz" wrap="square" lIns="91673" tIns="45837" rIns="91673" bIns="45837" anchor="t" anchorCtr="0" compatLnSpc="0">
+            <a:noAutofit/>
+          </a:bodyPr>
+          <a:lstStyle>
+            <a:defPPr>
+              <a:defRPr lang="fr-FR"/>
+            </a:defPPr>
+            <a:lvl1pPr marL="0" algn="l" defTabSz="930493" rtl="0" eaLnBrk="1" latinLnBrk="0" hangingPunct="1">
+              <a:defRPr sz="1832" kern="1200">
+                <a:solidFill>
+                  <a:schemeClr val="tx1"/>
+                </a:solidFill>
+                <a:latin typeface="+mn-lt"/>
+                <a:ea typeface="+mn-ea"/>
+                <a:cs typeface="+mn-cs"/>
+              </a:defRPr>
+            </a:lvl1pPr>
+            <a:lvl2pPr marL="465247" algn="l" defTabSz="930493" rtl="0" eaLnBrk="1" latinLnBrk="0" hangingPunct="1">
+              <a:defRPr sz="1832" kern="1200">
+                <a:solidFill>
+                  <a:schemeClr val="tx1"/>
+                </a:solidFill>
+                <a:latin typeface="+mn-lt"/>
+                <a:ea typeface="+mn-ea"/>
+                <a:cs typeface="+mn-cs"/>
+              </a:defRPr>
+            </a:lvl2pPr>
+            <a:lvl3pPr marL="930493" algn="l" defTabSz="930493" rtl="0" eaLnBrk="1" latinLnBrk="0" hangingPunct="1">
+              <a:defRPr sz="1832" kern="1200">
+                <a:solidFill>
+                  <a:schemeClr val="tx1"/>
+                </a:solidFill>
+                <a:latin typeface="+mn-lt"/>
+                <a:ea typeface="+mn-ea"/>
+                <a:cs typeface="+mn-cs"/>
+              </a:defRPr>
+            </a:lvl3pPr>
+            <a:lvl4pPr marL="1395740" algn="l" defTabSz="930493" rtl="0" eaLnBrk="1" latinLnBrk="0" hangingPunct="1">
+              <a:defRPr sz="1832" kern="1200">
+                <a:solidFill>
+                  <a:schemeClr val="tx1"/>
+                </a:solidFill>
+                <a:latin typeface="+mn-lt"/>
+                <a:ea typeface="+mn-ea"/>
+                <a:cs typeface="+mn-cs"/>
+              </a:defRPr>
+            </a:lvl4pPr>
+            <a:lvl5pPr marL="1860987" algn="l" defTabSz="930493" rtl="0" eaLnBrk="1" latinLnBrk="0" hangingPunct="1">
+              <a:defRPr sz="1832" kern="1200">
+                <a:solidFill>
+                  <a:schemeClr val="tx1"/>
+                </a:solidFill>
+                <a:latin typeface="+mn-lt"/>
+                <a:ea typeface="+mn-ea"/>
+                <a:cs typeface="+mn-cs"/>
+              </a:defRPr>
+            </a:lvl5pPr>
+            <a:lvl6pPr marL="2326234" algn="l" defTabSz="930493" rtl="0" eaLnBrk="1" latinLnBrk="0" hangingPunct="1">
+              <a:defRPr sz="1832" kern="1200">
+                <a:solidFill>
+                  <a:schemeClr val="tx1"/>
+                </a:solidFill>
+                <a:latin typeface="+mn-lt"/>
+                <a:ea typeface="+mn-ea"/>
+                <a:cs typeface="+mn-cs"/>
+              </a:defRPr>
+            </a:lvl6pPr>
+            <a:lvl7pPr marL="2791480" algn="l" defTabSz="930493" rtl="0" eaLnBrk="1" latinLnBrk="0" hangingPunct="1">
+              <a:defRPr sz="1832" kern="1200">
+                <a:solidFill>
+                  <a:schemeClr val="tx1"/>
+                </a:solidFill>
+                <a:latin typeface="+mn-lt"/>
+                <a:ea typeface="+mn-ea"/>
+                <a:cs typeface="+mn-cs"/>
+              </a:defRPr>
+            </a:lvl7pPr>
+            <a:lvl8pPr marL="3256727" algn="l" defTabSz="930493" rtl="0" eaLnBrk="1" latinLnBrk="0" hangingPunct="1">
+              <a:defRPr sz="1832" kern="1200">
+                <a:solidFill>
+                  <a:schemeClr val="tx1"/>
+                </a:solidFill>
+                <a:latin typeface="+mn-lt"/>
+                <a:ea typeface="+mn-ea"/>
+                <a:cs typeface="+mn-cs"/>
+              </a:defRPr>
+            </a:lvl8pPr>
+            <a:lvl9pPr marL="3721974" algn="l" defTabSz="930493" rtl="0" eaLnBrk="1" latinLnBrk="0" hangingPunct="1">
+              <a:defRPr sz="1832" kern="1200">
+                <a:solidFill>
+                  <a:schemeClr val="tx1"/>
+                </a:solidFill>
+                <a:latin typeface="+mn-lt"/>
+                <a:ea typeface="+mn-ea"/>
+                <a:cs typeface="+mn-cs"/>
+              </a:defRPr>
+            </a:lvl9pPr>
+          </a:lstStyle>
+          <a:p>
+            <a:r>
+              <a:rPr lang="fr-FR" dirty="0"/>
+              <a:t> {{chart:conso_corrective}}</a:t>
+            </a:r>
+            <a:r>
+              <a:rPr lang="fr-FR" dirty="0" err="1"/>
+              <a:t/>
+            </a:r>
+            <a:r>
+              <a:rPr lang="fr-FR" dirty="0"/>
+              <a:t/>
+            </a:r>
+          </a:p>
+        </p:txBody>
+      </p:sp>
+      <p:sp>
+        <p:nvSpPr>
+          <p:cNvPr id="5" name="Espace réservé du numéro de diapositive 4">
+            <a:extLst>
+              <a:ext uri="{FF2B5EF4-FFF2-40B4-BE49-F238E27FC236}">
+                <a16:creationId xmlns:a16="http://schemas.microsoft.com/office/drawing/2014/main" id="{9D2BA1EF-32B9-67FD-03DC-579D11B0111C}"/>
+              </a:ext>
+            </a:extLst>
+          </p:cNvPr>
+          <p:cNvSpPr>
+            <a:spLocks noGrp="1"/>
+          </p:cNvSpPr>
+          <p:nvPr>
+            <p:ph type="sldNum" sz="quarter" idx="12"/>
+          </p:nvPr>
+        </p:nvSpPr>
+        <p:spPr/>
+        <p:txBody>
+          <a:bodyPr/>
+          <a:lstStyle/>
+          <a:p>
+            <a:r>
+              <a:t>16</a:t>
+            </a:r>
+          </a:p>
+        </p:txBody>
+      </p:sp>
+      <p:pic>
+        <p:nvPicPr>
+          <p:cNvPr id="6" name="Image 5" descr="Une image contenant Police, logo, Graphique, symbole&#10;&#10;Le contenu généré par l’IA peut être incorrect.">
+            <a:extLst>
+              <a:ext uri="{FF2B5EF4-FFF2-40B4-BE49-F238E27FC236}">
+                <a16:creationId xmlns:a16="http://schemas.microsoft.com/office/drawing/2014/main" id="{D0A65CC1-4B96-627A-BEE7-4F6952A70C77}"/>
+              </a:ext>
+            </a:extLst>
+          </p:cNvPr>
+          <p:cNvPicPr>
+            <a:picLocks noChangeAspect="1"/>
+          </p:cNvPicPr>
+          <p:nvPr/>
+        </p:nvPicPr>
+        <p:blipFill>
+          <a:blip r:embed="rId3"/>
+          <a:stretch>
+            <a:fillRect/>
+          </a:stretch>
+        </p:blipFill>
+        <p:spPr>
+          <a:xfrm>
+            <a:off x="9978572" y="507546"/>
+            <a:ext cx="1524000" cy="400050"/>
+          </a:xfrm>
+          <a:prstGeom prst="rect">
+            <a:avLst/>
+          </a:prstGeom>
+        </p:spPr>
+      </p:pic>
+    </p:spTree>
+  </p:cSld>
+  <p:clrMapOvr>
+    <a:masterClrMapping/>
+  </p:clrMapOvr>
+</p:sld>
+</file>
+
+<file path=ppt/slides/slide17.xml><?xml version="1.0" encoding="utf-8"?>
 <p:sld xmlns:a="http://schemas.openxmlformats.org/drawingml/2006/main" xmlns:r="http://schemas.openxmlformats.org/officeDocument/2006/relationships" xmlns:p="http://schemas.openxmlformats.org/presentationml/2006/main">
   <p:cSld>
     <p:spTree>
@@ -10251,7 +10634,7 @@
           <a:lstStyle/>
           <a:p>
             <a:r>
-              <a:t>17</a:t>
+              <a:t>18</a:t>
             </a:r>
           </a:p>
         </p:txBody>
@@ -10299,7 +10682,7 @@
 </p:sld>
 </file>
 
-<file path=ppt/slides/slide17.xml><?xml version="1.0" encoding="utf-8"?>
+<file path=ppt/slides/slide18.xml><?xml version="1.0" encoding="utf-8"?>
 <p:sld xmlns:a="http://schemas.openxmlformats.org/drawingml/2006/main" xmlns:r="http://schemas.openxmlformats.org/officeDocument/2006/relationships" xmlns:p="http://schemas.openxmlformats.org/presentationml/2006/main">
   <p:cSld>
     <p:spTree>
@@ -10651,7 +11034,7 @@
           <a:lstStyle/>
           <a:p>
             <a:r>
-              <a:t>18</a:t>
+              <a:t>19</a:t>
             </a:r>
           </a:p>
         </p:txBody>
@@ -10699,7 +11082,7 @@
 </p:sld>
 </file>
 
-<file path=ppt/slides/slide18.xml><?xml version="1.0" encoding="utf-8"?>
+<file path=ppt/slides/slide19.xml><?xml version="1.0" encoding="utf-8"?>
 <p:sld xmlns:a="http://schemas.openxmlformats.org/drawingml/2006/main" xmlns:r="http://schemas.openxmlformats.org/officeDocument/2006/relationships" xmlns:p="http://schemas.openxmlformats.org/presentationml/2006/main">
   <p:cSld>
     <p:spTree>
@@ -11051,7 +11434,7 @@
           <a:lstStyle/>
           <a:p>
             <a:r>
-              <a:t>19</a:t>
+              <a:t>20</a:t>
             </a:r>
           </a:p>
         </p:txBody>
@@ -11090,403 +11473,6 @@
     <p:extLst>
       <p:ext uri="{BB962C8B-B14F-4D97-AF65-F5344CB8AC3E}">
         <p14:creationId xmlns:p14="http://schemas.microsoft.com/office/powerpoint/2010/main" val="1400401208"/>
-      </p:ext>
-    </p:extLst>
-  </p:cSld>
-  <p:clrMapOvr>
-    <a:masterClrMapping/>
-  </p:clrMapOvr>
-</p:sld>
-</file>
-
-<file path=ppt/slides/slide19.xml><?xml version="1.0" encoding="utf-8"?>
-<p:sld xmlns:a="http://schemas.openxmlformats.org/drawingml/2006/main" xmlns:r="http://schemas.openxmlformats.org/officeDocument/2006/relationships" xmlns:p="http://schemas.openxmlformats.org/presentationml/2006/main">
-  <p:cSld>
-    <p:spTree>
-      <p:nvGrpSpPr>
-        <p:cNvPr id="1" name="">
-          <a:extLst>
-            <a:ext uri="{FF2B5EF4-FFF2-40B4-BE49-F238E27FC236}">
-              <a16:creationId xmlns:a16="http://schemas.microsoft.com/office/drawing/2014/main" id="{E1155EEF-EA18-EAEE-99AA-D13AE5638621}"/>
-            </a:ext>
-          </a:extLst>
-        </p:cNvPr>
-        <p:cNvGrpSpPr/>
-        <p:nvPr/>
-      </p:nvGrpSpPr>
-      <p:grpSpPr>
-        <a:xfrm>
-          <a:off x="0" y="0"/>
-          <a:ext cx="0" cy="0"/>
-          <a:chOff x="0" y="0"/>
-          <a:chExt cx="0" cy="0"/>
-        </a:xfrm>
-      </p:grpSpPr>
-      <p:sp>
-        <p:nvSpPr>
-          <p:cNvPr id="3" name="ZoneTexte 6">
-            <a:extLst>
-              <a:ext uri="{FF2B5EF4-FFF2-40B4-BE49-F238E27FC236}">
-                <a16:creationId xmlns:a16="http://schemas.microsoft.com/office/drawing/2014/main" id="{50A52150-838A-0826-B9BA-3ABF18DBCE87}"/>
-              </a:ext>
-            </a:extLst>
-          </p:cNvPr>
-          <p:cNvSpPr txBox="1"/>
-          <p:nvPr/>
-        </p:nvSpPr>
-        <p:spPr>
-          <a:xfrm>
-            <a:off x="692289" y="365303"/>
-            <a:ext cx="8756869" cy="656185"/>
-          </a:xfrm>
-          <a:prstGeom prst="rect">
-            <a:avLst/>
-          </a:prstGeom>
-          <a:noFill/>
-          <a:ln>
-            <a:noFill/>
-          </a:ln>
-        </p:spPr>
-        <p:txBody>
-          <a:bodyPr vert="horz" wrap="square" lIns="91673" tIns="45837" rIns="91673" bIns="45837" anchor="t" anchorCtr="0" compatLnSpc="0">
-            <a:spAutoFit/>
-          </a:bodyPr>
-          <a:lstStyle>
-            <a:defPPr>
-              <a:defRPr lang="fr-FR"/>
-            </a:defPPr>
-            <a:lvl1pPr marL="0" algn="l" defTabSz="930493" rtl="0" eaLnBrk="1" latinLnBrk="0" hangingPunct="1">
-              <a:defRPr sz="1832" kern="1200">
-                <a:solidFill>
-                  <a:schemeClr val="tx1"/>
-                </a:solidFill>
-                <a:latin typeface="+mn-lt"/>
-                <a:ea typeface="+mn-ea"/>
-                <a:cs typeface="+mn-cs"/>
-              </a:defRPr>
-            </a:lvl1pPr>
-            <a:lvl2pPr marL="465247" algn="l" defTabSz="930493" rtl="0" eaLnBrk="1" latinLnBrk="0" hangingPunct="1">
-              <a:defRPr sz="1832" kern="1200">
-                <a:solidFill>
-                  <a:schemeClr val="tx1"/>
-                </a:solidFill>
-                <a:latin typeface="+mn-lt"/>
-                <a:ea typeface="+mn-ea"/>
-                <a:cs typeface="+mn-cs"/>
-              </a:defRPr>
-            </a:lvl2pPr>
-            <a:lvl3pPr marL="930493" algn="l" defTabSz="930493" rtl="0" eaLnBrk="1" latinLnBrk="0" hangingPunct="1">
-              <a:defRPr sz="1832" kern="1200">
-                <a:solidFill>
-                  <a:schemeClr val="tx1"/>
-                </a:solidFill>
-                <a:latin typeface="+mn-lt"/>
-                <a:ea typeface="+mn-ea"/>
-                <a:cs typeface="+mn-cs"/>
-              </a:defRPr>
-            </a:lvl3pPr>
-            <a:lvl4pPr marL="1395740" algn="l" defTabSz="930493" rtl="0" eaLnBrk="1" latinLnBrk="0" hangingPunct="1">
-              <a:defRPr sz="1832" kern="1200">
-                <a:solidFill>
-                  <a:schemeClr val="tx1"/>
-                </a:solidFill>
-                <a:latin typeface="+mn-lt"/>
-                <a:ea typeface="+mn-ea"/>
-                <a:cs typeface="+mn-cs"/>
-              </a:defRPr>
-            </a:lvl4pPr>
-            <a:lvl5pPr marL="1860987" algn="l" defTabSz="930493" rtl="0" eaLnBrk="1" latinLnBrk="0" hangingPunct="1">
-              <a:defRPr sz="1832" kern="1200">
-                <a:solidFill>
-                  <a:schemeClr val="tx1"/>
-                </a:solidFill>
-                <a:latin typeface="+mn-lt"/>
-                <a:ea typeface="+mn-ea"/>
-                <a:cs typeface="+mn-cs"/>
-              </a:defRPr>
-            </a:lvl5pPr>
-            <a:lvl6pPr marL="2326234" algn="l" defTabSz="930493" rtl="0" eaLnBrk="1" latinLnBrk="0" hangingPunct="1">
-              <a:defRPr sz="1832" kern="1200">
-                <a:solidFill>
-                  <a:schemeClr val="tx1"/>
-                </a:solidFill>
-                <a:latin typeface="+mn-lt"/>
-                <a:ea typeface="+mn-ea"/>
-                <a:cs typeface="+mn-cs"/>
-              </a:defRPr>
-            </a:lvl6pPr>
-            <a:lvl7pPr marL="2791480" algn="l" defTabSz="930493" rtl="0" eaLnBrk="1" latinLnBrk="0" hangingPunct="1">
-              <a:defRPr sz="1832" kern="1200">
-                <a:solidFill>
-                  <a:schemeClr val="tx1"/>
-                </a:solidFill>
-                <a:latin typeface="+mn-lt"/>
-                <a:ea typeface="+mn-ea"/>
-                <a:cs typeface="+mn-cs"/>
-              </a:defRPr>
-            </a:lvl7pPr>
-            <a:lvl8pPr marL="3256727" algn="l" defTabSz="930493" rtl="0" eaLnBrk="1" latinLnBrk="0" hangingPunct="1">
-              <a:defRPr sz="1832" kern="1200">
-                <a:solidFill>
-                  <a:schemeClr val="tx1"/>
-                </a:solidFill>
-                <a:latin typeface="+mn-lt"/>
-                <a:ea typeface="+mn-ea"/>
-                <a:cs typeface="+mn-cs"/>
-              </a:defRPr>
-            </a:lvl8pPr>
-            <a:lvl9pPr marL="3721974" algn="l" defTabSz="930493" rtl="0" eaLnBrk="1" latinLnBrk="0" hangingPunct="1">
-              <a:defRPr sz="1832" kern="1200">
-                <a:solidFill>
-                  <a:schemeClr val="tx1"/>
-                </a:solidFill>
-                <a:latin typeface="+mn-lt"/>
-                <a:ea typeface="+mn-ea"/>
-                <a:cs typeface="+mn-cs"/>
-              </a:defRPr>
-            </a:lvl9pPr>
-          </a:lstStyle>
-          <a:p>
-            <a:pPr>
-              <a:defRPr sz="1630"/>
-            </a:pPr>
-            <a:r>
-              <a:rPr lang="fr-FR" sz="3600" kern="0" dirty="0">
-                <a:solidFill>
-                  <a:srgbClr val="1F4E79"/>
-                </a:solidFill>
-                <a:ea typeface="+mn-lt"/>
-                <a:cs typeface="+mn-lt"/>
-              </a:rPr>
-              <a:t>{{</a:t>
-            </a:r>
-            <a:r>
-              <a:rPr lang="fr-FR" sz="3600" kern="0" dirty="0" err="1">
-                <a:solidFill>
-                  <a:srgbClr val="1F4E79"/>
-                </a:solidFill>
-                <a:ea typeface="+mn-lt"/>
-                <a:cs typeface="+mn-lt"/>
-              </a:rPr>
-              <a:t>project_name</a:t>
-            </a:r>
-            <a:r>
-              <a:rPr lang="fr-FR" sz="3600" kern="0" dirty="0">
-                <a:solidFill>
-                  <a:srgbClr val="1F4E79"/>
-                </a:solidFill>
-                <a:ea typeface="+mn-lt"/>
-                <a:cs typeface="+mn-lt"/>
-              </a:rPr>
-              <a:t>}}</a:t>
-            </a:r>
-            <a:endParaRPr lang="fr-FR" sz="3600" kern="0" dirty="0">
-              <a:solidFill>
-                <a:srgbClr val="1F4E79"/>
-              </a:solidFill>
-            </a:endParaRPr>
-          </a:p>
-        </p:txBody>
-      </p:sp>
-      <p:sp>
-        <p:nvSpPr>
-          <p:cNvPr id="4" name="Rectangle 1">
-            <a:extLst>
-              <a:ext uri="{FF2B5EF4-FFF2-40B4-BE49-F238E27FC236}">
-                <a16:creationId xmlns:a16="http://schemas.microsoft.com/office/drawing/2014/main" id="{6DE34CF7-44AB-E47D-5244-6C9FB6881536}"/>
-              </a:ext>
-            </a:extLst>
-          </p:cNvPr>
-          <p:cNvSpPr/>
-          <p:nvPr/>
-        </p:nvSpPr>
-        <p:spPr>
-          <a:xfrm>
-            <a:off x="692289" y="1379466"/>
-            <a:ext cx="10803891" cy="4862992"/>
-          </a:xfrm>
-          <a:prstGeom prst="rect">
-            <a:avLst/>
-          </a:prstGeom>
-          <a:noFill/>
-          <a:ln>
-            <a:noFill/>
-            <a:prstDash val="solid"/>
-          </a:ln>
-        </p:spPr>
-        <p:txBody>
-          <a:bodyPr vert="horz" wrap="square" lIns="91673" tIns="45837" rIns="91673" bIns="45837" anchor="t" anchorCtr="0" compatLnSpc="0">
-            <a:noAutofit/>
-          </a:bodyPr>
-          <a:lstStyle>
-            <a:defPPr>
-              <a:defRPr lang="fr-FR"/>
-            </a:defPPr>
-            <a:lvl1pPr marL="0" algn="l" defTabSz="930493" rtl="0" eaLnBrk="1" latinLnBrk="0" hangingPunct="1">
-              <a:defRPr sz="1832" kern="1200">
-                <a:solidFill>
-                  <a:schemeClr val="tx1"/>
-                </a:solidFill>
-                <a:latin typeface="+mn-lt"/>
-                <a:ea typeface="+mn-ea"/>
-                <a:cs typeface="+mn-cs"/>
-              </a:defRPr>
-            </a:lvl1pPr>
-            <a:lvl2pPr marL="465247" algn="l" defTabSz="930493" rtl="0" eaLnBrk="1" latinLnBrk="0" hangingPunct="1">
-              <a:defRPr sz="1832" kern="1200">
-                <a:solidFill>
-                  <a:schemeClr val="tx1"/>
-                </a:solidFill>
-                <a:latin typeface="+mn-lt"/>
-                <a:ea typeface="+mn-ea"/>
-                <a:cs typeface="+mn-cs"/>
-              </a:defRPr>
-            </a:lvl2pPr>
-            <a:lvl3pPr marL="930493" algn="l" defTabSz="930493" rtl="0" eaLnBrk="1" latinLnBrk="0" hangingPunct="1">
-              <a:defRPr sz="1832" kern="1200">
-                <a:solidFill>
-                  <a:schemeClr val="tx1"/>
-                </a:solidFill>
-                <a:latin typeface="+mn-lt"/>
-                <a:ea typeface="+mn-ea"/>
-                <a:cs typeface="+mn-cs"/>
-              </a:defRPr>
-            </a:lvl3pPr>
-            <a:lvl4pPr marL="1395740" algn="l" defTabSz="930493" rtl="0" eaLnBrk="1" latinLnBrk="0" hangingPunct="1">
-              <a:defRPr sz="1832" kern="1200">
-                <a:solidFill>
-                  <a:schemeClr val="tx1"/>
-                </a:solidFill>
-                <a:latin typeface="+mn-lt"/>
-                <a:ea typeface="+mn-ea"/>
-                <a:cs typeface="+mn-cs"/>
-              </a:defRPr>
-            </a:lvl4pPr>
-            <a:lvl5pPr marL="1860987" algn="l" defTabSz="930493" rtl="0" eaLnBrk="1" latinLnBrk="0" hangingPunct="1">
-              <a:defRPr sz="1832" kern="1200">
-                <a:solidFill>
-                  <a:schemeClr val="tx1"/>
-                </a:solidFill>
-                <a:latin typeface="+mn-lt"/>
-                <a:ea typeface="+mn-ea"/>
-                <a:cs typeface="+mn-cs"/>
-              </a:defRPr>
-            </a:lvl5pPr>
-            <a:lvl6pPr marL="2326234" algn="l" defTabSz="930493" rtl="0" eaLnBrk="1" latinLnBrk="0" hangingPunct="1">
-              <a:defRPr sz="1832" kern="1200">
-                <a:solidFill>
-                  <a:schemeClr val="tx1"/>
-                </a:solidFill>
-                <a:latin typeface="+mn-lt"/>
-                <a:ea typeface="+mn-ea"/>
-                <a:cs typeface="+mn-cs"/>
-              </a:defRPr>
-            </a:lvl6pPr>
-            <a:lvl7pPr marL="2791480" algn="l" defTabSz="930493" rtl="0" eaLnBrk="1" latinLnBrk="0" hangingPunct="1">
-              <a:defRPr sz="1832" kern="1200">
-                <a:solidFill>
-                  <a:schemeClr val="tx1"/>
-                </a:solidFill>
-                <a:latin typeface="+mn-lt"/>
-                <a:ea typeface="+mn-ea"/>
-                <a:cs typeface="+mn-cs"/>
-              </a:defRPr>
-            </a:lvl7pPr>
-            <a:lvl8pPr marL="3256727" algn="l" defTabSz="930493" rtl="0" eaLnBrk="1" latinLnBrk="0" hangingPunct="1">
-              <a:defRPr sz="1832" kern="1200">
-                <a:solidFill>
-                  <a:schemeClr val="tx1"/>
-                </a:solidFill>
-                <a:latin typeface="+mn-lt"/>
-                <a:ea typeface="+mn-ea"/>
-                <a:cs typeface="+mn-cs"/>
-              </a:defRPr>
-            </a:lvl8pPr>
-            <a:lvl9pPr marL="3721974" algn="l" defTabSz="930493" rtl="0" eaLnBrk="1" latinLnBrk="0" hangingPunct="1">
-              <a:defRPr sz="1832" kern="1200">
-                <a:solidFill>
-                  <a:schemeClr val="tx1"/>
-                </a:solidFill>
-                <a:latin typeface="+mn-lt"/>
-                <a:ea typeface="+mn-ea"/>
-                <a:cs typeface="+mn-cs"/>
-              </a:defRPr>
-            </a:lvl9pPr>
-          </a:lstStyle>
-          <a:p>
-            <a:r>
-              <a:rPr lang="fr-FR" dirty="0"/>
-              <a:t>{{</a:t>
-            </a:r>
-            <a:r>
-              <a:rPr lang="fr-FR"/>
-              <a:t>liste_epics}}</a:t>
-            </a:r>
-            <a:endParaRPr lang="fr-FR" dirty="0"/>
-          </a:p>
-        </p:txBody>
-      </p:sp>
-      <p:sp>
-        <p:nvSpPr>
-          <p:cNvPr id="5" name="Espace réservé du numéro de diapositive 4">
-            <a:extLst>
-              <a:ext uri="{FF2B5EF4-FFF2-40B4-BE49-F238E27FC236}">
-                <a16:creationId xmlns:a16="http://schemas.microsoft.com/office/drawing/2014/main" id="{1B62C832-8453-AC15-8AF0-C294CF34856C}"/>
-              </a:ext>
-            </a:extLst>
-          </p:cNvPr>
-          <p:cNvSpPr>
-            <a:spLocks noGrp="1"/>
-          </p:cNvSpPr>
-          <p:nvPr>
-            <p:ph type="sldNum" sz="quarter" idx="12"/>
-          </p:nvPr>
-        </p:nvSpPr>
-        <p:spPr/>
-        <p:txBody>
-          <a:bodyPr/>
-          <a:lstStyle/>
-          <a:p>
-            <a:r>
-              <a:t>20</a:t>
-            </a:r>
-          </a:p>
-        </p:txBody>
-      </p:sp>
-      <p:pic>
-        <p:nvPicPr>
-          <p:cNvPr id="6" name="Image 5" descr="Une image contenant Police, logo, Graphique, symbole&#10;&#10;Le contenu généré par l’IA peut être incorrect.">
-            <a:extLst>
-              <a:ext uri="{FF2B5EF4-FFF2-40B4-BE49-F238E27FC236}">
-                <a16:creationId xmlns:a16="http://schemas.microsoft.com/office/drawing/2014/main" id="{82A37344-6655-8A80-0259-1CAA4FDDD771}"/>
-              </a:ext>
-            </a:extLst>
-          </p:cNvPr>
-          <p:cNvPicPr>
-            <a:picLocks noChangeAspect="1"/>
-          </p:cNvPicPr>
-          <p:nvPr/>
-        </p:nvPicPr>
-        <p:blipFill>
-          <a:blip r:embed="rId3"/>
-          <a:stretch>
-            <a:fillRect/>
-          </a:stretch>
-        </p:blipFill>
-        <p:spPr>
-          <a:xfrm>
-            <a:off x="9978572" y="507546"/>
-            <a:ext cx="1524000" cy="400050"/>
-          </a:xfrm>
-          <a:prstGeom prst="rect">
-            <a:avLst/>
-          </a:prstGeom>
-        </p:spPr>
-      </p:pic>
-    </p:spTree>
-    <p:extLst>
-      <p:ext uri="{BB962C8B-B14F-4D97-AF65-F5344CB8AC3E}">
-        <p14:creationId xmlns:p14="http://schemas.microsoft.com/office/powerpoint/2010/main" val="193094097"/>
       </p:ext>
     </p:extLst>
   </p:cSld>
@@ -11915,6 +11901,403 @@
         <p:cNvPr id="1" name="">
           <a:extLst>
             <a:ext uri="{FF2B5EF4-FFF2-40B4-BE49-F238E27FC236}">
+              <a16:creationId xmlns:a16="http://schemas.microsoft.com/office/drawing/2014/main" id="{E1155EEF-EA18-EAEE-99AA-D13AE5638621}"/>
+            </a:ext>
+          </a:extLst>
+        </p:cNvPr>
+        <p:cNvGrpSpPr/>
+        <p:nvPr/>
+      </p:nvGrpSpPr>
+      <p:grpSpPr>
+        <a:xfrm>
+          <a:off x="0" y="0"/>
+          <a:ext cx="0" cy="0"/>
+          <a:chOff x="0" y="0"/>
+          <a:chExt cx="0" cy="0"/>
+        </a:xfrm>
+      </p:grpSpPr>
+      <p:sp>
+        <p:nvSpPr>
+          <p:cNvPr id="3" name="ZoneTexte 6">
+            <a:extLst>
+              <a:ext uri="{FF2B5EF4-FFF2-40B4-BE49-F238E27FC236}">
+                <a16:creationId xmlns:a16="http://schemas.microsoft.com/office/drawing/2014/main" id="{50A52150-838A-0826-B9BA-3ABF18DBCE87}"/>
+              </a:ext>
+            </a:extLst>
+          </p:cNvPr>
+          <p:cNvSpPr txBox="1"/>
+          <p:nvPr/>
+        </p:nvSpPr>
+        <p:spPr>
+          <a:xfrm>
+            <a:off x="692289" y="365303"/>
+            <a:ext cx="8756869" cy="656185"/>
+          </a:xfrm>
+          <a:prstGeom prst="rect">
+            <a:avLst/>
+          </a:prstGeom>
+          <a:noFill/>
+          <a:ln>
+            <a:noFill/>
+          </a:ln>
+        </p:spPr>
+        <p:txBody>
+          <a:bodyPr vert="horz" wrap="square" lIns="91673" tIns="45837" rIns="91673" bIns="45837" anchor="t" anchorCtr="0" compatLnSpc="0">
+            <a:spAutoFit/>
+          </a:bodyPr>
+          <a:lstStyle>
+            <a:defPPr>
+              <a:defRPr lang="fr-FR"/>
+            </a:defPPr>
+            <a:lvl1pPr marL="0" algn="l" defTabSz="930493" rtl="0" eaLnBrk="1" latinLnBrk="0" hangingPunct="1">
+              <a:defRPr sz="1832" kern="1200">
+                <a:solidFill>
+                  <a:schemeClr val="tx1"/>
+                </a:solidFill>
+                <a:latin typeface="+mn-lt"/>
+                <a:ea typeface="+mn-ea"/>
+                <a:cs typeface="+mn-cs"/>
+              </a:defRPr>
+            </a:lvl1pPr>
+            <a:lvl2pPr marL="465247" algn="l" defTabSz="930493" rtl="0" eaLnBrk="1" latinLnBrk="0" hangingPunct="1">
+              <a:defRPr sz="1832" kern="1200">
+                <a:solidFill>
+                  <a:schemeClr val="tx1"/>
+                </a:solidFill>
+                <a:latin typeface="+mn-lt"/>
+                <a:ea typeface="+mn-ea"/>
+                <a:cs typeface="+mn-cs"/>
+              </a:defRPr>
+            </a:lvl2pPr>
+            <a:lvl3pPr marL="930493" algn="l" defTabSz="930493" rtl="0" eaLnBrk="1" latinLnBrk="0" hangingPunct="1">
+              <a:defRPr sz="1832" kern="1200">
+                <a:solidFill>
+                  <a:schemeClr val="tx1"/>
+                </a:solidFill>
+                <a:latin typeface="+mn-lt"/>
+                <a:ea typeface="+mn-ea"/>
+                <a:cs typeface="+mn-cs"/>
+              </a:defRPr>
+            </a:lvl3pPr>
+            <a:lvl4pPr marL="1395740" algn="l" defTabSz="930493" rtl="0" eaLnBrk="1" latinLnBrk="0" hangingPunct="1">
+              <a:defRPr sz="1832" kern="1200">
+                <a:solidFill>
+                  <a:schemeClr val="tx1"/>
+                </a:solidFill>
+                <a:latin typeface="+mn-lt"/>
+                <a:ea typeface="+mn-ea"/>
+                <a:cs typeface="+mn-cs"/>
+              </a:defRPr>
+            </a:lvl4pPr>
+            <a:lvl5pPr marL="1860987" algn="l" defTabSz="930493" rtl="0" eaLnBrk="1" latinLnBrk="0" hangingPunct="1">
+              <a:defRPr sz="1832" kern="1200">
+                <a:solidFill>
+                  <a:schemeClr val="tx1"/>
+                </a:solidFill>
+                <a:latin typeface="+mn-lt"/>
+                <a:ea typeface="+mn-ea"/>
+                <a:cs typeface="+mn-cs"/>
+              </a:defRPr>
+            </a:lvl5pPr>
+            <a:lvl6pPr marL="2326234" algn="l" defTabSz="930493" rtl="0" eaLnBrk="1" latinLnBrk="0" hangingPunct="1">
+              <a:defRPr sz="1832" kern="1200">
+                <a:solidFill>
+                  <a:schemeClr val="tx1"/>
+                </a:solidFill>
+                <a:latin typeface="+mn-lt"/>
+                <a:ea typeface="+mn-ea"/>
+                <a:cs typeface="+mn-cs"/>
+              </a:defRPr>
+            </a:lvl6pPr>
+            <a:lvl7pPr marL="2791480" algn="l" defTabSz="930493" rtl="0" eaLnBrk="1" latinLnBrk="0" hangingPunct="1">
+              <a:defRPr sz="1832" kern="1200">
+                <a:solidFill>
+                  <a:schemeClr val="tx1"/>
+                </a:solidFill>
+                <a:latin typeface="+mn-lt"/>
+                <a:ea typeface="+mn-ea"/>
+                <a:cs typeface="+mn-cs"/>
+              </a:defRPr>
+            </a:lvl7pPr>
+            <a:lvl8pPr marL="3256727" algn="l" defTabSz="930493" rtl="0" eaLnBrk="1" latinLnBrk="0" hangingPunct="1">
+              <a:defRPr sz="1832" kern="1200">
+                <a:solidFill>
+                  <a:schemeClr val="tx1"/>
+                </a:solidFill>
+                <a:latin typeface="+mn-lt"/>
+                <a:ea typeface="+mn-ea"/>
+                <a:cs typeface="+mn-cs"/>
+              </a:defRPr>
+            </a:lvl8pPr>
+            <a:lvl9pPr marL="3721974" algn="l" defTabSz="930493" rtl="0" eaLnBrk="1" latinLnBrk="0" hangingPunct="1">
+              <a:defRPr sz="1832" kern="1200">
+                <a:solidFill>
+                  <a:schemeClr val="tx1"/>
+                </a:solidFill>
+                <a:latin typeface="+mn-lt"/>
+                <a:ea typeface="+mn-ea"/>
+                <a:cs typeface="+mn-cs"/>
+              </a:defRPr>
+            </a:lvl9pPr>
+          </a:lstStyle>
+          <a:p>
+            <a:pPr>
+              <a:defRPr sz="1630"/>
+            </a:pPr>
+            <a:r>
+              <a:rPr lang="fr-FR" sz="3600" kern="0" dirty="0">
+                <a:solidFill>
+                  <a:srgbClr val="1F4E79"/>
+                </a:solidFill>
+                <a:ea typeface="+mn-lt"/>
+                <a:cs typeface="+mn-lt"/>
+              </a:rPr>
+              <a:t>{{</a:t>
+            </a:r>
+            <a:r>
+              <a:rPr lang="fr-FR" sz="3600" kern="0" dirty="0" err="1">
+                <a:solidFill>
+                  <a:srgbClr val="1F4E79"/>
+                </a:solidFill>
+                <a:ea typeface="+mn-lt"/>
+                <a:cs typeface="+mn-lt"/>
+              </a:rPr>
+              <a:t>project_name</a:t>
+            </a:r>
+            <a:r>
+              <a:rPr lang="fr-FR" sz="3600" kern="0" dirty="0">
+                <a:solidFill>
+                  <a:srgbClr val="1F4E79"/>
+                </a:solidFill>
+                <a:ea typeface="+mn-lt"/>
+                <a:cs typeface="+mn-lt"/>
+              </a:rPr>
+              <a:t>}}</a:t>
+            </a:r>
+            <a:endParaRPr lang="fr-FR" sz="3600" kern="0" dirty="0">
+              <a:solidFill>
+                <a:srgbClr val="1F4E79"/>
+              </a:solidFill>
+            </a:endParaRPr>
+          </a:p>
+        </p:txBody>
+      </p:sp>
+      <p:sp>
+        <p:nvSpPr>
+          <p:cNvPr id="4" name="Rectangle 1">
+            <a:extLst>
+              <a:ext uri="{FF2B5EF4-FFF2-40B4-BE49-F238E27FC236}">
+                <a16:creationId xmlns:a16="http://schemas.microsoft.com/office/drawing/2014/main" id="{6DE34CF7-44AB-E47D-5244-6C9FB6881536}"/>
+              </a:ext>
+            </a:extLst>
+          </p:cNvPr>
+          <p:cNvSpPr/>
+          <p:nvPr/>
+        </p:nvSpPr>
+        <p:spPr>
+          <a:xfrm>
+            <a:off x="692289" y="1379466"/>
+            <a:ext cx="10803891" cy="4862992"/>
+          </a:xfrm>
+          <a:prstGeom prst="rect">
+            <a:avLst/>
+          </a:prstGeom>
+          <a:noFill/>
+          <a:ln>
+            <a:noFill/>
+            <a:prstDash val="solid"/>
+          </a:ln>
+        </p:spPr>
+        <p:txBody>
+          <a:bodyPr vert="horz" wrap="square" lIns="91673" tIns="45837" rIns="91673" bIns="45837" anchor="t" anchorCtr="0" compatLnSpc="0">
+            <a:noAutofit/>
+          </a:bodyPr>
+          <a:lstStyle>
+            <a:defPPr>
+              <a:defRPr lang="fr-FR"/>
+            </a:defPPr>
+            <a:lvl1pPr marL="0" algn="l" defTabSz="930493" rtl="0" eaLnBrk="1" latinLnBrk="0" hangingPunct="1">
+              <a:defRPr sz="1832" kern="1200">
+                <a:solidFill>
+                  <a:schemeClr val="tx1"/>
+                </a:solidFill>
+                <a:latin typeface="+mn-lt"/>
+                <a:ea typeface="+mn-ea"/>
+                <a:cs typeface="+mn-cs"/>
+              </a:defRPr>
+            </a:lvl1pPr>
+            <a:lvl2pPr marL="465247" algn="l" defTabSz="930493" rtl="0" eaLnBrk="1" latinLnBrk="0" hangingPunct="1">
+              <a:defRPr sz="1832" kern="1200">
+                <a:solidFill>
+                  <a:schemeClr val="tx1"/>
+                </a:solidFill>
+                <a:latin typeface="+mn-lt"/>
+                <a:ea typeface="+mn-ea"/>
+                <a:cs typeface="+mn-cs"/>
+              </a:defRPr>
+            </a:lvl2pPr>
+            <a:lvl3pPr marL="930493" algn="l" defTabSz="930493" rtl="0" eaLnBrk="1" latinLnBrk="0" hangingPunct="1">
+              <a:defRPr sz="1832" kern="1200">
+                <a:solidFill>
+                  <a:schemeClr val="tx1"/>
+                </a:solidFill>
+                <a:latin typeface="+mn-lt"/>
+                <a:ea typeface="+mn-ea"/>
+                <a:cs typeface="+mn-cs"/>
+              </a:defRPr>
+            </a:lvl3pPr>
+            <a:lvl4pPr marL="1395740" algn="l" defTabSz="930493" rtl="0" eaLnBrk="1" latinLnBrk="0" hangingPunct="1">
+              <a:defRPr sz="1832" kern="1200">
+                <a:solidFill>
+                  <a:schemeClr val="tx1"/>
+                </a:solidFill>
+                <a:latin typeface="+mn-lt"/>
+                <a:ea typeface="+mn-ea"/>
+                <a:cs typeface="+mn-cs"/>
+              </a:defRPr>
+            </a:lvl4pPr>
+            <a:lvl5pPr marL="1860987" algn="l" defTabSz="930493" rtl="0" eaLnBrk="1" latinLnBrk="0" hangingPunct="1">
+              <a:defRPr sz="1832" kern="1200">
+                <a:solidFill>
+                  <a:schemeClr val="tx1"/>
+                </a:solidFill>
+                <a:latin typeface="+mn-lt"/>
+                <a:ea typeface="+mn-ea"/>
+                <a:cs typeface="+mn-cs"/>
+              </a:defRPr>
+            </a:lvl5pPr>
+            <a:lvl6pPr marL="2326234" algn="l" defTabSz="930493" rtl="0" eaLnBrk="1" latinLnBrk="0" hangingPunct="1">
+              <a:defRPr sz="1832" kern="1200">
+                <a:solidFill>
+                  <a:schemeClr val="tx1"/>
+                </a:solidFill>
+                <a:latin typeface="+mn-lt"/>
+                <a:ea typeface="+mn-ea"/>
+                <a:cs typeface="+mn-cs"/>
+              </a:defRPr>
+            </a:lvl6pPr>
+            <a:lvl7pPr marL="2791480" algn="l" defTabSz="930493" rtl="0" eaLnBrk="1" latinLnBrk="0" hangingPunct="1">
+              <a:defRPr sz="1832" kern="1200">
+                <a:solidFill>
+                  <a:schemeClr val="tx1"/>
+                </a:solidFill>
+                <a:latin typeface="+mn-lt"/>
+                <a:ea typeface="+mn-ea"/>
+                <a:cs typeface="+mn-cs"/>
+              </a:defRPr>
+            </a:lvl7pPr>
+            <a:lvl8pPr marL="3256727" algn="l" defTabSz="930493" rtl="0" eaLnBrk="1" latinLnBrk="0" hangingPunct="1">
+              <a:defRPr sz="1832" kern="1200">
+                <a:solidFill>
+                  <a:schemeClr val="tx1"/>
+                </a:solidFill>
+                <a:latin typeface="+mn-lt"/>
+                <a:ea typeface="+mn-ea"/>
+                <a:cs typeface="+mn-cs"/>
+              </a:defRPr>
+            </a:lvl8pPr>
+            <a:lvl9pPr marL="3721974" algn="l" defTabSz="930493" rtl="0" eaLnBrk="1" latinLnBrk="0" hangingPunct="1">
+              <a:defRPr sz="1832" kern="1200">
+                <a:solidFill>
+                  <a:schemeClr val="tx1"/>
+                </a:solidFill>
+                <a:latin typeface="+mn-lt"/>
+                <a:ea typeface="+mn-ea"/>
+                <a:cs typeface="+mn-cs"/>
+              </a:defRPr>
+            </a:lvl9pPr>
+          </a:lstStyle>
+          <a:p>
+            <a:r>
+              <a:rPr lang="fr-FR" dirty="0"/>
+              <a:t>{{</a:t>
+            </a:r>
+            <a:r>
+              <a:rPr lang="fr-FR"/>
+              <a:t>liste_epics}}</a:t>
+            </a:r>
+            <a:endParaRPr lang="fr-FR" dirty="0"/>
+          </a:p>
+        </p:txBody>
+      </p:sp>
+      <p:sp>
+        <p:nvSpPr>
+          <p:cNvPr id="5" name="Espace réservé du numéro de diapositive 4">
+            <a:extLst>
+              <a:ext uri="{FF2B5EF4-FFF2-40B4-BE49-F238E27FC236}">
+                <a16:creationId xmlns:a16="http://schemas.microsoft.com/office/drawing/2014/main" id="{1B62C832-8453-AC15-8AF0-C294CF34856C}"/>
+              </a:ext>
+            </a:extLst>
+          </p:cNvPr>
+          <p:cNvSpPr>
+            <a:spLocks noGrp="1"/>
+          </p:cNvSpPr>
+          <p:nvPr>
+            <p:ph type="sldNum" sz="quarter" idx="12"/>
+          </p:nvPr>
+        </p:nvSpPr>
+        <p:spPr/>
+        <p:txBody>
+          <a:bodyPr/>
+          <a:lstStyle/>
+          <a:p>
+            <a:r>
+              <a:t>21</a:t>
+            </a:r>
+          </a:p>
+        </p:txBody>
+      </p:sp>
+      <p:pic>
+        <p:nvPicPr>
+          <p:cNvPr id="6" name="Image 5" descr="Une image contenant Police, logo, Graphique, symbole&#10;&#10;Le contenu généré par l’IA peut être incorrect.">
+            <a:extLst>
+              <a:ext uri="{FF2B5EF4-FFF2-40B4-BE49-F238E27FC236}">
+                <a16:creationId xmlns:a16="http://schemas.microsoft.com/office/drawing/2014/main" id="{82A37344-6655-8A80-0259-1CAA4FDDD771}"/>
+              </a:ext>
+            </a:extLst>
+          </p:cNvPr>
+          <p:cNvPicPr>
+            <a:picLocks noChangeAspect="1"/>
+          </p:cNvPicPr>
+          <p:nvPr/>
+        </p:nvPicPr>
+        <p:blipFill>
+          <a:blip r:embed="rId3"/>
+          <a:stretch>
+            <a:fillRect/>
+          </a:stretch>
+        </p:blipFill>
+        <p:spPr>
+          <a:xfrm>
+            <a:off x="9978572" y="507546"/>
+            <a:ext cx="1524000" cy="400050"/>
+          </a:xfrm>
+          <a:prstGeom prst="rect">
+            <a:avLst/>
+          </a:prstGeom>
+        </p:spPr>
+      </p:pic>
+    </p:spTree>
+    <p:extLst>
+      <p:ext uri="{BB962C8B-B14F-4D97-AF65-F5344CB8AC3E}">
+        <p14:creationId xmlns:p14="http://schemas.microsoft.com/office/powerpoint/2010/main" val="193094097"/>
+      </p:ext>
+    </p:extLst>
+  </p:cSld>
+  <p:clrMapOvr>
+    <a:masterClrMapping/>
+  </p:clrMapOvr>
+</p:sld>
+</file>
+
+<file path=ppt/slides/slide21.xml><?xml version="1.0" encoding="utf-8"?>
+<p:sld xmlns:a="http://schemas.openxmlformats.org/drawingml/2006/main" xmlns:r="http://schemas.openxmlformats.org/officeDocument/2006/relationships" xmlns:p="http://schemas.openxmlformats.org/presentationml/2006/main">
+  <p:cSld>
+    <p:spTree>
+      <p:nvGrpSpPr>
+        <p:cNvPr id="1" name="">
+          <a:extLst>
+            <a:ext uri="{FF2B5EF4-FFF2-40B4-BE49-F238E27FC236}">
               <a16:creationId xmlns:a16="http://schemas.microsoft.com/office/drawing/2014/main" id="{AE161B2E-F3A1-6715-D479-582C8458E9D2}"/>
             </a:ext>
           </a:extLst>
@@ -12260,7 +12643,7 @@
           <a:lstStyle/>
           <a:p>
             <a:r>
-              <a:t>21</a:t>
+              <a:t>22</a:t>
             </a:r>
           </a:p>
         </p:txBody>
@@ -12308,7 +12691,7 @@
 </p:sld>
 </file>
 
-<file path=ppt/slides/slide21.xml><?xml version="1.0" encoding="utf-8"?>
+<file path=ppt/slides/slide22.xml><?xml version="1.0" encoding="utf-8"?>
 <p:sld xmlns:a="http://schemas.openxmlformats.org/drawingml/2006/main" xmlns:p="http://schemas.openxmlformats.org/presentationml/2006/main" xmlns:r="http://schemas.openxmlformats.org/officeDocument/2006/relationships">
   <p:cSld>
     <p:spTree>
@@ -12612,7 +12995,7 @@
           <a:p>
             <a:r>
               <a:rPr lang="fr-FR" dirty="0"/>
-              <a:t> {{chart:conso_corrective}}</a:t>
+              <a:t> {{chart:tempo_conso}}</a:t>
             </a:r>
             <a:r>
               <a:rPr lang="fr-FR" dirty="0" err="1"/>
@@ -12647,7 +13030,7 @@
           <a:lstStyle/>
           <a:p>
             <a:r>
-              <a:t>16</a:t>
+              <a:t>17</a:t>
             </a:r>
           </a:p>
         </p:txBody>

--- a/skills/jira-report/scaffold/template.pptx
+++ b/skills/jira-report/scaffold/template.pptx
@@ -30,6 +30,7 @@
     <p:sldId id="310" r:id="rId19"/>
     <p:sldId id="316" r:id="rId20"/>
     <p:sldId id="317" r:id="rId21"/>
+    <p:sldId id="328" r:id="rId30"/>
   </p:sldIdLst>
   <p:sldSz cx="12192000" cy="6858000"/>
   <p:notesSz cx="6858000" cy="9144000"/>
@@ -10283,6 +10284,388 @@
 </file>
 
 <file path=ppt/slides/slide17.xml><?xml version="1.0" encoding="utf-8"?>
+<p:sld xmlns:a="http://schemas.openxmlformats.org/drawingml/2006/main" xmlns:p="http://schemas.openxmlformats.org/presentationml/2006/main" xmlns:r="http://schemas.openxmlformats.org/officeDocument/2006/relationships">
+  <p:cSld>
+    <p:spTree>
+      <p:nvGrpSpPr>
+        <p:cNvPr id="1" name=""/>
+        <p:cNvGrpSpPr/>
+        <p:nvPr/>
+      </p:nvGrpSpPr>
+      <p:grpSpPr/>
+      <p:sp>
+        <p:nvSpPr>
+          <p:cNvPr id="3" name="ZoneTexte 6">
+            <a:extLst>
+              <a:ext uri="{FF2B5EF4-FFF2-40B4-BE49-F238E27FC236}">
+                <a16:creationId xmlns:a16="http://schemas.microsoft.com/office/drawing/2014/main" id="{E4F3CC4C-8826-5849-DC88-6E6682E7BE78}"/>
+              </a:ext>
+            </a:extLst>
+          </p:cNvPr>
+          <p:cNvSpPr txBox="1"/>
+          <p:nvPr/>
+        </p:nvSpPr>
+        <p:spPr>
+          <a:xfrm>
+            <a:off x="692289" y="365303"/>
+            <a:ext cx="8756869" cy="656185"/>
+          </a:xfrm>
+          <a:prstGeom prst="rect">
+            <a:avLst/>
+          </a:prstGeom>
+          <a:noFill/>
+          <a:ln>
+            <a:noFill/>
+          </a:ln>
+        </p:spPr>
+        <p:txBody>
+          <a:bodyPr vert="horz" wrap="square" lIns="91673" tIns="45837" rIns="91673" bIns="45837" anchor="t" anchorCtr="0" compatLnSpc="0">
+            <a:spAutoFit/>
+          </a:bodyPr>
+          <a:lstStyle>
+            <a:defPPr>
+              <a:defRPr lang="fr-FR"/>
+            </a:defPPr>
+            <a:lvl1pPr marL="0" algn="l" defTabSz="930493" rtl="0" eaLnBrk="1" latinLnBrk="0" hangingPunct="1">
+              <a:defRPr sz="1832" kern="1200">
+                <a:solidFill>
+                  <a:schemeClr val="tx1"/>
+                </a:solidFill>
+                <a:latin typeface="+mn-lt"/>
+                <a:ea typeface="+mn-ea"/>
+                <a:cs typeface="+mn-cs"/>
+              </a:defRPr>
+            </a:lvl1pPr>
+            <a:lvl2pPr marL="465247" algn="l" defTabSz="930493" rtl="0" eaLnBrk="1" latinLnBrk="0" hangingPunct="1">
+              <a:defRPr sz="1832" kern="1200">
+                <a:solidFill>
+                  <a:schemeClr val="tx1"/>
+                </a:solidFill>
+                <a:latin typeface="+mn-lt"/>
+                <a:ea typeface="+mn-ea"/>
+                <a:cs typeface="+mn-cs"/>
+              </a:defRPr>
+            </a:lvl2pPr>
+            <a:lvl3pPr marL="930493" algn="l" defTabSz="930493" rtl="0" eaLnBrk="1" latinLnBrk="0" hangingPunct="1">
+              <a:defRPr sz="1832" kern="1200">
+                <a:solidFill>
+                  <a:schemeClr val="tx1"/>
+                </a:solidFill>
+                <a:latin typeface="+mn-lt"/>
+                <a:ea typeface="+mn-ea"/>
+                <a:cs typeface="+mn-cs"/>
+              </a:defRPr>
+            </a:lvl3pPr>
+            <a:lvl4pPr marL="1395740" algn="l" defTabSz="930493" rtl="0" eaLnBrk="1" latinLnBrk="0" hangingPunct="1">
+              <a:defRPr sz="1832" kern="1200">
+                <a:solidFill>
+                  <a:schemeClr val="tx1"/>
+                </a:solidFill>
+                <a:latin typeface="+mn-lt"/>
+                <a:ea typeface="+mn-ea"/>
+                <a:cs typeface="+mn-cs"/>
+              </a:defRPr>
+            </a:lvl4pPr>
+            <a:lvl5pPr marL="1860987" algn="l" defTabSz="930493" rtl="0" eaLnBrk="1" latinLnBrk="0" hangingPunct="1">
+              <a:defRPr sz="1832" kern="1200">
+                <a:solidFill>
+                  <a:schemeClr val="tx1"/>
+                </a:solidFill>
+                <a:latin typeface="+mn-lt"/>
+                <a:ea typeface="+mn-ea"/>
+                <a:cs typeface="+mn-cs"/>
+              </a:defRPr>
+            </a:lvl5pPr>
+            <a:lvl6pPr marL="2326234" algn="l" defTabSz="930493" rtl="0" eaLnBrk="1" latinLnBrk="0" hangingPunct="1">
+              <a:defRPr sz="1832" kern="1200">
+                <a:solidFill>
+                  <a:schemeClr val="tx1"/>
+                </a:solidFill>
+                <a:latin typeface="+mn-lt"/>
+                <a:ea typeface="+mn-ea"/>
+                <a:cs typeface="+mn-cs"/>
+              </a:defRPr>
+            </a:lvl6pPr>
+            <a:lvl7pPr marL="2791480" algn="l" defTabSz="930493" rtl="0" eaLnBrk="1" latinLnBrk="0" hangingPunct="1">
+              <a:defRPr sz="1832" kern="1200">
+                <a:solidFill>
+                  <a:schemeClr val="tx1"/>
+                </a:solidFill>
+                <a:latin typeface="+mn-lt"/>
+                <a:ea typeface="+mn-ea"/>
+                <a:cs typeface="+mn-cs"/>
+              </a:defRPr>
+            </a:lvl7pPr>
+            <a:lvl8pPr marL="3256727" algn="l" defTabSz="930493" rtl="0" eaLnBrk="1" latinLnBrk="0" hangingPunct="1">
+              <a:defRPr sz="1832" kern="1200">
+                <a:solidFill>
+                  <a:schemeClr val="tx1"/>
+                </a:solidFill>
+                <a:latin typeface="+mn-lt"/>
+                <a:ea typeface="+mn-ea"/>
+                <a:cs typeface="+mn-cs"/>
+              </a:defRPr>
+            </a:lvl8pPr>
+            <a:lvl9pPr marL="3721974" algn="l" defTabSz="930493" rtl="0" eaLnBrk="1" latinLnBrk="0" hangingPunct="1">
+              <a:defRPr sz="1832" kern="1200">
+                <a:solidFill>
+                  <a:schemeClr val="tx1"/>
+                </a:solidFill>
+                <a:latin typeface="+mn-lt"/>
+                <a:ea typeface="+mn-ea"/>
+                <a:cs typeface="+mn-cs"/>
+              </a:defRPr>
+            </a:lvl9pPr>
+          </a:lstStyle>
+          <a:p>
+            <a:pPr>
+              <a:defRPr sz="1630"/>
+            </a:pPr>
+            <a:r>
+              <a:rPr lang="fr-FR" sz="3600" kern="0" dirty="0">
+                <a:solidFill>
+                  <a:srgbClr val="1F4E79"/>
+                </a:solidFill>
+                <a:ea typeface="+mn-lt"/>
+                <a:cs typeface="+mn-lt"/>
+              </a:rPr>
+              <a:t>{{</a:t>
+            </a:r>
+            <a:r>
+              <a:rPr lang="fr-FR" sz="3600" kern="0" dirty="0" err="1">
+                <a:solidFill>
+                  <a:srgbClr val="1F4E79"/>
+                </a:solidFill>
+                <a:ea typeface="+mn-lt"/>
+                <a:cs typeface="+mn-lt"/>
+              </a:rPr>
+              <a:t>project_name</a:t>
+            </a:r>
+            <a:r>
+              <a:rPr lang="fr-FR" sz="3600" kern="0" dirty="0">
+                <a:solidFill>
+                  <a:srgbClr val="1F4E79"/>
+                </a:solidFill>
+                <a:ea typeface="+mn-lt"/>
+                <a:cs typeface="+mn-lt"/>
+              </a:rPr>
+              <a:t>}}</a:t>
+            </a:r>
+            <a:endParaRPr lang="fr-FR" sz="3600" kern="0" dirty="0">
+              <a:solidFill>
+                <a:srgbClr val="1F4E79"/>
+              </a:solidFill>
+            </a:endParaRPr>
+          </a:p>
+        </p:txBody>
+      </p:sp>
+      <p:sp>
+        <p:nvSpPr>
+          <p:cNvPr id="4" name="Rectangle 1">
+            <a:extLst>
+              <a:ext uri="{FF2B5EF4-FFF2-40B4-BE49-F238E27FC236}">
+                <a16:creationId xmlns:a16="http://schemas.microsoft.com/office/drawing/2014/main" id="{86293E5A-80FC-F271-BDE8-F0BD674E2AC6}"/>
+              </a:ext>
+            </a:extLst>
+          </p:cNvPr>
+          <p:cNvSpPr/>
+          <p:nvPr/>
+        </p:nvSpPr>
+        <p:spPr>
+          <a:xfrm>
+            <a:off x="692289" y="1379467"/>
+            <a:ext cx="10803891" cy="4750028"/>
+          </a:xfrm>
+          <a:prstGeom prst="rect">
+            <a:avLst/>
+          </a:prstGeom>
+          <a:noFill/>
+          <a:ln>
+            <a:noFill/>
+            <a:prstDash val="solid"/>
+          </a:ln>
+        </p:spPr>
+        <p:txBody>
+          <a:bodyPr vert="horz" wrap="square" lIns="91673" tIns="45837" rIns="91673" bIns="45837" anchor="t" anchorCtr="0" compatLnSpc="0">
+            <a:noAutofit/>
+          </a:bodyPr>
+          <a:lstStyle>
+            <a:defPPr>
+              <a:defRPr lang="fr-FR"/>
+            </a:defPPr>
+            <a:lvl1pPr marL="0" algn="l" defTabSz="930493" rtl="0" eaLnBrk="1" latinLnBrk="0" hangingPunct="1">
+              <a:defRPr sz="1832" kern="1200">
+                <a:solidFill>
+                  <a:schemeClr val="tx1"/>
+                </a:solidFill>
+                <a:latin typeface="+mn-lt"/>
+                <a:ea typeface="+mn-ea"/>
+                <a:cs typeface="+mn-cs"/>
+              </a:defRPr>
+            </a:lvl1pPr>
+            <a:lvl2pPr marL="465247" algn="l" defTabSz="930493" rtl="0" eaLnBrk="1" latinLnBrk="0" hangingPunct="1">
+              <a:defRPr sz="1832" kern="1200">
+                <a:solidFill>
+                  <a:schemeClr val="tx1"/>
+                </a:solidFill>
+                <a:latin typeface="+mn-lt"/>
+                <a:ea typeface="+mn-ea"/>
+                <a:cs typeface="+mn-cs"/>
+              </a:defRPr>
+            </a:lvl2pPr>
+            <a:lvl3pPr marL="930493" algn="l" defTabSz="930493" rtl="0" eaLnBrk="1" latinLnBrk="0" hangingPunct="1">
+              <a:defRPr sz="1832" kern="1200">
+                <a:solidFill>
+                  <a:schemeClr val="tx1"/>
+                </a:solidFill>
+                <a:latin typeface="+mn-lt"/>
+                <a:ea typeface="+mn-ea"/>
+                <a:cs typeface="+mn-cs"/>
+              </a:defRPr>
+            </a:lvl3pPr>
+            <a:lvl4pPr marL="1395740" algn="l" defTabSz="930493" rtl="0" eaLnBrk="1" latinLnBrk="0" hangingPunct="1">
+              <a:defRPr sz="1832" kern="1200">
+                <a:solidFill>
+                  <a:schemeClr val="tx1"/>
+                </a:solidFill>
+                <a:latin typeface="+mn-lt"/>
+                <a:ea typeface="+mn-ea"/>
+                <a:cs typeface="+mn-cs"/>
+              </a:defRPr>
+            </a:lvl4pPr>
+            <a:lvl5pPr marL="1860987" algn="l" defTabSz="930493" rtl="0" eaLnBrk="1" latinLnBrk="0" hangingPunct="1">
+              <a:defRPr sz="1832" kern="1200">
+                <a:solidFill>
+                  <a:schemeClr val="tx1"/>
+                </a:solidFill>
+                <a:latin typeface="+mn-lt"/>
+                <a:ea typeface="+mn-ea"/>
+                <a:cs typeface="+mn-cs"/>
+              </a:defRPr>
+            </a:lvl5pPr>
+            <a:lvl6pPr marL="2326234" algn="l" defTabSz="930493" rtl="0" eaLnBrk="1" latinLnBrk="0" hangingPunct="1">
+              <a:defRPr sz="1832" kern="1200">
+                <a:solidFill>
+                  <a:schemeClr val="tx1"/>
+                </a:solidFill>
+                <a:latin typeface="+mn-lt"/>
+                <a:ea typeface="+mn-ea"/>
+                <a:cs typeface="+mn-cs"/>
+              </a:defRPr>
+            </a:lvl6pPr>
+            <a:lvl7pPr marL="2791480" algn="l" defTabSz="930493" rtl="0" eaLnBrk="1" latinLnBrk="0" hangingPunct="1">
+              <a:defRPr sz="1832" kern="1200">
+                <a:solidFill>
+                  <a:schemeClr val="tx1"/>
+                </a:solidFill>
+                <a:latin typeface="+mn-lt"/>
+                <a:ea typeface="+mn-ea"/>
+                <a:cs typeface="+mn-cs"/>
+              </a:defRPr>
+            </a:lvl7pPr>
+            <a:lvl8pPr marL="3256727" algn="l" defTabSz="930493" rtl="0" eaLnBrk="1" latinLnBrk="0" hangingPunct="1">
+              <a:defRPr sz="1832" kern="1200">
+                <a:solidFill>
+                  <a:schemeClr val="tx1"/>
+                </a:solidFill>
+                <a:latin typeface="+mn-lt"/>
+                <a:ea typeface="+mn-ea"/>
+                <a:cs typeface="+mn-cs"/>
+              </a:defRPr>
+            </a:lvl8pPr>
+            <a:lvl9pPr marL="3721974" algn="l" defTabSz="930493" rtl="0" eaLnBrk="1" latinLnBrk="0" hangingPunct="1">
+              <a:defRPr sz="1832" kern="1200">
+                <a:solidFill>
+                  <a:schemeClr val="tx1"/>
+                </a:solidFill>
+                <a:latin typeface="+mn-lt"/>
+                <a:ea typeface="+mn-ea"/>
+                <a:cs typeface="+mn-cs"/>
+              </a:defRPr>
+            </a:lvl9pPr>
+          </a:lstStyle>
+          <a:p>
+            <a:r>
+              <a:rPr lang="fr-FR" dirty="0"/>
+              <a:t> {{chart:tempo_conso}}</a:t>
+            </a:r>
+            <a:r>
+              <a:rPr lang="fr-FR" dirty="0" err="1"/>
+              <a:t/>
+            </a:r>
+            <a:r>
+              <a:rPr lang="fr-FR" dirty="0"/>
+              <a:t/>
+            </a:r>
+          </a:p>
+        </p:txBody>
+      </p:sp>
+      <p:sp>
+        <p:nvSpPr>
+          <p:cNvPr id="5" name="Espace réservé du numéro de diapositive 4">
+            <a:extLst>
+              <a:ext uri="{FF2B5EF4-FFF2-40B4-BE49-F238E27FC236}">
+                <a16:creationId xmlns:a16="http://schemas.microsoft.com/office/drawing/2014/main" id="{9D2BA1EF-32B9-67FD-03DC-579D11B0111C}"/>
+              </a:ext>
+            </a:extLst>
+          </p:cNvPr>
+          <p:cNvSpPr>
+            <a:spLocks noGrp="1"/>
+          </p:cNvSpPr>
+          <p:nvPr>
+            <p:ph type="sldNum" sz="quarter" idx="12"/>
+          </p:nvPr>
+        </p:nvSpPr>
+        <p:spPr/>
+        <p:txBody>
+          <a:bodyPr/>
+          <a:lstStyle/>
+          <a:p>
+            <a:r>
+              <a:t>17</a:t>
+            </a:r>
+          </a:p>
+        </p:txBody>
+      </p:sp>
+      <p:pic>
+        <p:nvPicPr>
+          <p:cNvPr id="6" name="Image 5" descr="Une image contenant Police, logo, Graphique, symbole&#10;&#10;Le contenu généré par l’IA peut être incorrect.">
+            <a:extLst>
+              <a:ext uri="{FF2B5EF4-FFF2-40B4-BE49-F238E27FC236}">
+                <a16:creationId xmlns:a16="http://schemas.microsoft.com/office/drawing/2014/main" id="{D0A65CC1-4B96-627A-BEE7-4F6952A70C77}"/>
+              </a:ext>
+            </a:extLst>
+          </p:cNvPr>
+          <p:cNvPicPr>
+            <a:picLocks noChangeAspect="1"/>
+          </p:cNvPicPr>
+          <p:nvPr/>
+        </p:nvPicPr>
+        <p:blipFill>
+          <a:blip r:embed="rId3"/>
+          <a:stretch>
+            <a:fillRect/>
+          </a:stretch>
+        </p:blipFill>
+        <p:spPr>
+          <a:xfrm>
+            <a:off x="9978572" y="507546"/>
+            <a:ext cx="1524000" cy="400050"/>
+          </a:xfrm>
+          <a:prstGeom prst="rect">
+            <a:avLst/>
+          </a:prstGeom>
+        </p:spPr>
+      </p:pic>
+    </p:spTree>
+  </p:cSld>
+  <p:clrMapOvr>
+    <a:masterClrMapping/>
+  </p:clrMapOvr>
+</p:sld>
+</file>
+
+<file path=ppt/slides/slide18.xml><?xml version="1.0" encoding="utf-8"?>
 <p:sld xmlns:a="http://schemas.openxmlformats.org/drawingml/2006/main" xmlns:r="http://schemas.openxmlformats.org/officeDocument/2006/relationships" xmlns:p="http://schemas.openxmlformats.org/presentationml/2006/main">
   <p:cSld>
     <p:spTree>
@@ -10682,7 +11065,7 @@
 </p:sld>
 </file>
 
-<file path=ppt/slides/slide18.xml><?xml version="1.0" encoding="utf-8"?>
+<file path=ppt/slides/slide19.xml><?xml version="1.0" encoding="utf-8"?>
 <p:sld xmlns:a="http://schemas.openxmlformats.org/drawingml/2006/main" xmlns:r="http://schemas.openxmlformats.org/officeDocument/2006/relationships" xmlns:p="http://schemas.openxmlformats.org/presentationml/2006/main">
   <p:cSld>
     <p:spTree>
@@ -11073,406 +11456,6 @@
     <p:extLst>
       <p:ext uri="{BB962C8B-B14F-4D97-AF65-F5344CB8AC3E}">
         <p14:creationId xmlns:p14="http://schemas.microsoft.com/office/powerpoint/2010/main" val="3237748381"/>
-      </p:ext>
-    </p:extLst>
-  </p:cSld>
-  <p:clrMapOvr>
-    <a:masterClrMapping/>
-  </p:clrMapOvr>
-</p:sld>
-</file>
-
-<file path=ppt/slides/slide19.xml><?xml version="1.0" encoding="utf-8"?>
-<p:sld xmlns:a="http://schemas.openxmlformats.org/drawingml/2006/main" xmlns:r="http://schemas.openxmlformats.org/officeDocument/2006/relationships" xmlns:p="http://schemas.openxmlformats.org/presentationml/2006/main">
-  <p:cSld>
-    <p:spTree>
-      <p:nvGrpSpPr>
-        <p:cNvPr id="1" name="">
-          <a:extLst>
-            <a:ext uri="{FF2B5EF4-FFF2-40B4-BE49-F238E27FC236}">
-              <a16:creationId xmlns:a16="http://schemas.microsoft.com/office/drawing/2014/main" id="{E64F4507-4003-6B47-37B5-AF2FF333D19F}"/>
-            </a:ext>
-          </a:extLst>
-        </p:cNvPr>
-        <p:cNvGrpSpPr/>
-        <p:nvPr/>
-      </p:nvGrpSpPr>
-      <p:grpSpPr>
-        <a:xfrm>
-          <a:off x="0" y="0"/>
-          <a:ext cx="0" cy="0"/>
-          <a:chOff x="0" y="0"/>
-          <a:chExt cx="0" cy="0"/>
-        </a:xfrm>
-      </p:grpSpPr>
-      <p:sp>
-        <p:nvSpPr>
-          <p:cNvPr id="3" name="ZoneTexte 6">
-            <a:extLst>
-              <a:ext uri="{FF2B5EF4-FFF2-40B4-BE49-F238E27FC236}">
-                <a16:creationId xmlns:a16="http://schemas.microsoft.com/office/drawing/2014/main" id="{78AD2C6A-8213-C0E4-C79D-D32B560D5182}"/>
-              </a:ext>
-            </a:extLst>
-          </p:cNvPr>
-          <p:cNvSpPr txBox="1"/>
-          <p:nvPr/>
-        </p:nvSpPr>
-        <p:spPr>
-          <a:xfrm>
-            <a:off x="692289" y="365303"/>
-            <a:ext cx="8756869" cy="656185"/>
-          </a:xfrm>
-          <a:prstGeom prst="rect">
-            <a:avLst/>
-          </a:prstGeom>
-          <a:noFill/>
-          <a:ln>
-            <a:noFill/>
-          </a:ln>
-        </p:spPr>
-        <p:txBody>
-          <a:bodyPr vert="horz" wrap="square" lIns="91673" tIns="45837" rIns="91673" bIns="45837" anchor="t" anchorCtr="0" compatLnSpc="0">
-            <a:spAutoFit/>
-          </a:bodyPr>
-          <a:lstStyle>
-            <a:defPPr>
-              <a:defRPr lang="fr-FR"/>
-            </a:defPPr>
-            <a:lvl1pPr marL="0" algn="l" defTabSz="930493" rtl="0" eaLnBrk="1" latinLnBrk="0" hangingPunct="1">
-              <a:defRPr sz="1832" kern="1200">
-                <a:solidFill>
-                  <a:schemeClr val="tx1"/>
-                </a:solidFill>
-                <a:latin typeface="+mn-lt"/>
-                <a:ea typeface="+mn-ea"/>
-                <a:cs typeface="+mn-cs"/>
-              </a:defRPr>
-            </a:lvl1pPr>
-            <a:lvl2pPr marL="465247" algn="l" defTabSz="930493" rtl="0" eaLnBrk="1" latinLnBrk="0" hangingPunct="1">
-              <a:defRPr sz="1832" kern="1200">
-                <a:solidFill>
-                  <a:schemeClr val="tx1"/>
-                </a:solidFill>
-                <a:latin typeface="+mn-lt"/>
-                <a:ea typeface="+mn-ea"/>
-                <a:cs typeface="+mn-cs"/>
-              </a:defRPr>
-            </a:lvl2pPr>
-            <a:lvl3pPr marL="930493" algn="l" defTabSz="930493" rtl="0" eaLnBrk="1" latinLnBrk="0" hangingPunct="1">
-              <a:defRPr sz="1832" kern="1200">
-                <a:solidFill>
-                  <a:schemeClr val="tx1"/>
-                </a:solidFill>
-                <a:latin typeface="+mn-lt"/>
-                <a:ea typeface="+mn-ea"/>
-                <a:cs typeface="+mn-cs"/>
-              </a:defRPr>
-            </a:lvl3pPr>
-            <a:lvl4pPr marL="1395740" algn="l" defTabSz="930493" rtl="0" eaLnBrk="1" latinLnBrk="0" hangingPunct="1">
-              <a:defRPr sz="1832" kern="1200">
-                <a:solidFill>
-                  <a:schemeClr val="tx1"/>
-                </a:solidFill>
-                <a:latin typeface="+mn-lt"/>
-                <a:ea typeface="+mn-ea"/>
-                <a:cs typeface="+mn-cs"/>
-              </a:defRPr>
-            </a:lvl4pPr>
-            <a:lvl5pPr marL="1860987" algn="l" defTabSz="930493" rtl="0" eaLnBrk="1" latinLnBrk="0" hangingPunct="1">
-              <a:defRPr sz="1832" kern="1200">
-                <a:solidFill>
-                  <a:schemeClr val="tx1"/>
-                </a:solidFill>
-                <a:latin typeface="+mn-lt"/>
-                <a:ea typeface="+mn-ea"/>
-                <a:cs typeface="+mn-cs"/>
-              </a:defRPr>
-            </a:lvl5pPr>
-            <a:lvl6pPr marL="2326234" algn="l" defTabSz="930493" rtl="0" eaLnBrk="1" latinLnBrk="0" hangingPunct="1">
-              <a:defRPr sz="1832" kern="1200">
-                <a:solidFill>
-                  <a:schemeClr val="tx1"/>
-                </a:solidFill>
-                <a:latin typeface="+mn-lt"/>
-                <a:ea typeface="+mn-ea"/>
-                <a:cs typeface="+mn-cs"/>
-              </a:defRPr>
-            </a:lvl6pPr>
-            <a:lvl7pPr marL="2791480" algn="l" defTabSz="930493" rtl="0" eaLnBrk="1" latinLnBrk="0" hangingPunct="1">
-              <a:defRPr sz="1832" kern="1200">
-                <a:solidFill>
-                  <a:schemeClr val="tx1"/>
-                </a:solidFill>
-                <a:latin typeface="+mn-lt"/>
-                <a:ea typeface="+mn-ea"/>
-                <a:cs typeface="+mn-cs"/>
-              </a:defRPr>
-            </a:lvl7pPr>
-            <a:lvl8pPr marL="3256727" algn="l" defTabSz="930493" rtl="0" eaLnBrk="1" latinLnBrk="0" hangingPunct="1">
-              <a:defRPr sz="1832" kern="1200">
-                <a:solidFill>
-                  <a:schemeClr val="tx1"/>
-                </a:solidFill>
-                <a:latin typeface="+mn-lt"/>
-                <a:ea typeface="+mn-ea"/>
-                <a:cs typeface="+mn-cs"/>
-              </a:defRPr>
-            </a:lvl8pPr>
-            <a:lvl9pPr marL="3721974" algn="l" defTabSz="930493" rtl="0" eaLnBrk="1" latinLnBrk="0" hangingPunct="1">
-              <a:defRPr sz="1832" kern="1200">
-                <a:solidFill>
-                  <a:schemeClr val="tx1"/>
-                </a:solidFill>
-                <a:latin typeface="+mn-lt"/>
-                <a:ea typeface="+mn-ea"/>
-                <a:cs typeface="+mn-cs"/>
-              </a:defRPr>
-            </a:lvl9pPr>
-          </a:lstStyle>
-          <a:p>
-            <a:pPr>
-              <a:defRPr sz="1630"/>
-            </a:pPr>
-            <a:r>
-              <a:rPr lang="fr-FR" sz="3600" kern="0" dirty="0">
-                <a:solidFill>
-                  <a:srgbClr val="1F4E79"/>
-                </a:solidFill>
-                <a:ea typeface="+mn-lt"/>
-                <a:cs typeface="+mn-lt"/>
-              </a:rPr>
-              <a:t>{{</a:t>
-            </a:r>
-            <a:r>
-              <a:rPr lang="fr-FR" sz="3600" kern="0" dirty="0" err="1">
-                <a:solidFill>
-                  <a:srgbClr val="1F4E79"/>
-                </a:solidFill>
-                <a:ea typeface="+mn-lt"/>
-                <a:cs typeface="+mn-lt"/>
-              </a:rPr>
-              <a:t>project_name</a:t>
-            </a:r>
-            <a:r>
-              <a:rPr lang="fr-FR" sz="3600" kern="0" dirty="0">
-                <a:solidFill>
-                  <a:srgbClr val="1F4E79"/>
-                </a:solidFill>
-                <a:ea typeface="+mn-lt"/>
-                <a:cs typeface="+mn-lt"/>
-              </a:rPr>
-              <a:t>}}</a:t>
-            </a:r>
-            <a:endParaRPr lang="fr-FR" sz="3600" kern="0" dirty="0">
-              <a:solidFill>
-                <a:srgbClr val="1F4E79"/>
-              </a:solidFill>
-            </a:endParaRPr>
-          </a:p>
-        </p:txBody>
-      </p:sp>
-      <p:sp>
-        <p:nvSpPr>
-          <p:cNvPr id="4" name="Rectangle 1">
-            <a:extLst>
-              <a:ext uri="{FF2B5EF4-FFF2-40B4-BE49-F238E27FC236}">
-                <a16:creationId xmlns:a16="http://schemas.microsoft.com/office/drawing/2014/main" id="{01868FE7-8647-6313-9F6A-69CA188970EE}"/>
-              </a:ext>
-            </a:extLst>
-          </p:cNvPr>
-          <p:cNvSpPr/>
-          <p:nvPr/>
-        </p:nvSpPr>
-        <p:spPr>
-          <a:xfrm>
-            <a:off x="692289" y="1379466"/>
-            <a:ext cx="10803891" cy="1132621"/>
-          </a:xfrm>
-          <a:prstGeom prst="rect">
-            <a:avLst/>
-          </a:prstGeom>
-          <a:noFill/>
-          <a:ln>
-            <a:noFill/>
-            <a:prstDash val="solid"/>
-          </a:ln>
-        </p:spPr>
-        <p:txBody>
-          <a:bodyPr vert="horz" wrap="square" lIns="91673" tIns="45837" rIns="91673" bIns="45837" anchor="t" anchorCtr="0" compatLnSpc="0">
-            <a:noAutofit/>
-          </a:bodyPr>
-          <a:lstStyle>
-            <a:defPPr>
-              <a:defRPr lang="fr-FR"/>
-            </a:defPPr>
-            <a:lvl1pPr marL="0" algn="l" defTabSz="930493" rtl="0" eaLnBrk="1" latinLnBrk="0" hangingPunct="1">
-              <a:defRPr sz="1832" kern="1200">
-                <a:solidFill>
-                  <a:schemeClr val="tx1"/>
-                </a:solidFill>
-                <a:latin typeface="+mn-lt"/>
-                <a:ea typeface="+mn-ea"/>
-                <a:cs typeface="+mn-cs"/>
-              </a:defRPr>
-            </a:lvl1pPr>
-            <a:lvl2pPr marL="465247" algn="l" defTabSz="930493" rtl="0" eaLnBrk="1" latinLnBrk="0" hangingPunct="1">
-              <a:defRPr sz="1832" kern="1200">
-                <a:solidFill>
-                  <a:schemeClr val="tx1"/>
-                </a:solidFill>
-                <a:latin typeface="+mn-lt"/>
-                <a:ea typeface="+mn-ea"/>
-                <a:cs typeface="+mn-cs"/>
-              </a:defRPr>
-            </a:lvl2pPr>
-            <a:lvl3pPr marL="930493" algn="l" defTabSz="930493" rtl="0" eaLnBrk="1" latinLnBrk="0" hangingPunct="1">
-              <a:defRPr sz="1832" kern="1200">
-                <a:solidFill>
-                  <a:schemeClr val="tx1"/>
-                </a:solidFill>
-                <a:latin typeface="+mn-lt"/>
-                <a:ea typeface="+mn-ea"/>
-                <a:cs typeface="+mn-cs"/>
-              </a:defRPr>
-            </a:lvl3pPr>
-            <a:lvl4pPr marL="1395740" algn="l" defTabSz="930493" rtl="0" eaLnBrk="1" latinLnBrk="0" hangingPunct="1">
-              <a:defRPr sz="1832" kern="1200">
-                <a:solidFill>
-                  <a:schemeClr val="tx1"/>
-                </a:solidFill>
-                <a:latin typeface="+mn-lt"/>
-                <a:ea typeface="+mn-ea"/>
-                <a:cs typeface="+mn-cs"/>
-              </a:defRPr>
-            </a:lvl4pPr>
-            <a:lvl5pPr marL="1860987" algn="l" defTabSz="930493" rtl="0" eaLnBrk="1" latinLnBrk="0" hangingPunct="1">
-              <a:defRPr sz="1832" kern="1200">
-                <a:solidFill>
-                  <a:schemeClr val="tx1"/>
-                </a:solidFill>
-                <a:latin typeface="+mn-lt"/>
-                <a:ea typeface="+mn-ea"/>
-                <a:cs typeface="+mn-cs"/>
-              </a:defRPr>
-            </a:lvl5pPr>
-            <a:lvl6pPr marL="2326234" algn="l" defTabSz="930493" rtl="0" eaLnBrk="1" latinLnBrk="0" hangingPunct="1">
-              <a:defRPr sz="1832" kern="1200">
-                <a:solidFill>
-                  <a:schemeClr val="tx1"/>
-                </a:solidFill>
-                <a:latin typeface="+mn-lt"/>
-                <a:ea typeface="+mn-ea"/>
-                <a:cs typeface="+mn-cs"/>
-              </a:defRPr>
-            </a:lvl6pPr>
-            <a:lvl7pPr marL="2791480" algn="l" defTabSz="930493" rtl="0" eaLnBrk="1" latinLnBrk="0" hangingPunct="1">
-              <a:defRPr sz="1832" kern="1200">
-                <a:solidFill>
-                  <a:schemeClr val="tx1"/>
-                </a:solidFill>
-                <a:latin typeface="+mn-lt"/>
-                <a:ea typeface="+mn-ea"/>
-                <a:cs typeface="+mn-cs"/>
-              </a:defRPr>
-            </a:lvl7pPr>
-            <a:lvl8pPr marL="3256727" algn="l" defTabSz="930493" rtl="0" eaLnBrk="1" latinLnBrk="0" hangingPunct="1">
-              <a:defRPr sz="1832" kern="1200">
-                <a:solidFill>
-                  <a:schemeClr val="tx1"/>
-                </a:solidFill>
-                <a:latin typeface="+mn-lt"/>
-                <a:ea typeface="+mn-ea"/>
-                <a:cs typeface="+mn-cs"/>
-              </a:defRPr>
-            </a:lvl8pPr>
-            <a:lvl9pPr marL="3721974" algn="l" defTabSz="930493" rtl="0" eaLnBrk="1" latinLnBrk="0" hangingPunct="1">
-              <a:defRPr sz="1832" kern="1200">
-                <a:solidFill>
-                  <a:schemeClr val="tx1"/>
-                </a:solidFill>
-                <a:latin typeface="+mn-lt"/>
-                <a:ea typeface="+mn-ea"/>
-                <a:cs typeface="+mn-cs"/>
-              </a:defRPr>
-            </a:lvl9pPr>
-          </a:lstStyle>
-          <a:p>
-            <a:r>
-              <a:rPr lang="fr-FR" dirty="0"/>
-              <a:t>{{</a:t>
-            </a:r>
-            <a:r>
-              <a:rPr lang="fr-FR" dirty="0" err="1"/>
-              <a:t>kpi</a:t>
-            </a:r>
-            <a:r>
-              <a:rPr lang="fr-FR" dirty="0"/>
-              <a:t>:*}}</a:t>
-            </a:r>
-          </a:p>
-        </p:txBody>
-      </p:sp>
-      <p:sp>
-        <p:nvSpPr>
-          <p:cNvPr id="5" name="Espace réservé du numéro de diapositive 4">
-            <a:extLst>
-              <a:ext uri="{FF2B5EF4-FFF2-40B4-BE49-F238E27FC236}">
-                <a16:creationId xmlns:a16="http://schemas.microsoft.com/office/drawing/2014/main" id="{13A75C6B-E9B2-8895-8604-B6FF66B4292D}"/>
-              </a:ext>
-            </a:extLst>
-          </p:cNvPr>
-          <p:cNvSpPr>
-            <a:spLocks noGrp="1"/>
-          </p:cNvSpPr>
-          <p:nvPr>
-            <p:ph type="sldNum" sz="quarter" idx="12"/>
-          </p:nvPr>
-        </p:nvSpPr>
-        <p:spPr/>
-        <p:txBody>
-          <a:bodyPr/>
-          <a:lstStyle/>
-          <a:p>
-            <a:r>
-              <a:t>20</a:t>
-            </a:r>
-          </a:p>
-        </p:txBody>
-      </p:sp>
-      <p:pic>
-        <p:nvPicPr>
-          <p:cNvPr id="6" name="Image 5" descr="Une image contenant Police, logo, Graphique, symbole&#10;&#10;Le contenu généré par l’IA peut être incorrect.">
-            <a:extLst>
-              <a:ext uri="{FF2B5EF4-FFF2-40B4-BE49-F238E27FC236}">
-                <a16:creationId xmlns:a16="http://schemas.microsoft.com/office/drawing/2014/main" id="{176EC631-4EAE-8D44-3A33-7AE3F1322321}"/>
-              </a:ext>
-            </a:extLst>
-          </p:cNvPr>
-          <p:cNvPicPr>
-            <a:picLocks noChangeAspect="1"/>
-          </p:cNvPicPr>
-          <p:nvPr/>
-        </p:nvPicPr>
-        <p:blipFill>
-          <a:blip r:embed="rId3"/>
-          <a:stretch>
-            <a:fillRect/>
-          </a:stretch>
-        </p:blipFill>
-        <p:spPr>
-          <a:xfrm>
-            <a:off x="9978572" y="507546"/>
-            <a:ext cx="1524000" cy="400050"/>
-          </a:xfrm>
-          <a:prstGeom prst="rect">
-            <a:avLst/>
-          </a:prstGeom>
-        </p:spPr>
-      </p:pic>
-    </p:spTree>
-    <p:extLst>
-      <p:ext uri="{BB962C8B-B14F-4D97-AF65-F5344CB8AC3E}">
-        <p14:creationId xmlns:p14="http://schemas.microsoft.com/office/powerpoint/2010/main" val="1400401208"/>
       </p:ext>
     </p:extLst>
   </p:cSld>
@@ -11901,6 +11884,406 @@
         <p:cNvPr id="1" name="">
           <a:extLst>
             <a:ext uri="{FF2B5EF4-FFF2-40B4-BE49-F238E27FC236}">
+              <a16:creationId xmlns:a16="http://schemas.microsoft.com/office/drawing/2014/main" id="{E64F4507-4003-6B47-37B5-AF2FF333D19F}"/>
+            </a:ext>
+          </a:extLst>
+        </p:cNvPr>
+        <p:cNvGrpSpPr/>
+        <p:nvPr/>
+      </p:nvGrpSpPr>
+      <p:grpSpPr>
+        <a:xfrm>
+          <a:off x="0" y="0"/>
+          <a:ext cx="0" cy="0"/>
+          <a:chOff x="0" y="0"/>
+          <a:chExt cx="0" cy="0"/>
+        </a:xfrm>
+      </p:grpSpPr>
+      <p:sp>
+        <p:nvSpPr>
+          <p:cNvPr id="3" name="ZoneTexte 6">
+            <a:extLst>
+              <a:ext uri="{FF2B5EF4-FFF2-40B4-BE49-F238E27FC236}">
+                <a16:creationId xmlns:a16="http://schemas.microsoft.com/office/drawing/2014/main" id="{78AD2C6A-8213-C0E4-C79D-D32B560D5182}"/>
+              </a:ext>
+            </a:extLst>
+          </p:cNvPr>
+          <p:cNvSpPr txBox="1"/>
+          <p:nvPr/>
+        </p:nvSpPr>
+        <p:spPr>
+          <a:xfrm>
+            <a:off x="692289" y="365303"/>
+            <a:ext cx="8756869" cy="656185"/>
+          </a:xfrm>
+          <a:prstGeom prst="rect">
+            <a:avLst/>
+          </a:prstGeom>
+          <a:noFill/>
+          <a:ln>
+            <a:noFill/>
+          </a:ln>
+        </p:spPr>
+        <p:txBody>
+          <a:bodyPr vert="horz" wrap="square" lIns="91673" tIns="45837" rIns="91673" bIns="45837" anchor="t" anchorCtr="0" compatLnSpc="0">
+            <a:spAutoFit/>
+          </a:bodyPr>
+          <a:lstStyle>
+            <a:defPPr>
+              <a:defRPr lang="fr-FR"/>
+            </a:defPPr>
+            <a:lvl1pPr marL="0" algn="l" defTabSz="930493" rtl="0" eaLnBrk="1" latinLnBrk="0" hangingPunct="1">
+              <a:defRPr sz="1832" kern="1200">
+                <a:solidFill>
+                  <a:schemeClr val="tx1"/>
+                </a:solidFill>
+                <a:latin typeface="+mn-lt"/>
+                <a:ea typeface="+mn-ea"/>
+                <a:cs typeface="+mn-cs"/>
+              </a:defRPr>
+            </a:lvl1pPr>
+            <a:lvl2pPr marL="465247" algn="l" defTabSz="930493" rtl="0" eaLnBrk="1" latinLnBrk="0" hangingPunct="1">
+              <a:defRPr sz="1832" kern="1200">
+                <a:solidFill>
+                  <a:schemeClr val="tx1"/>
+                </a:solidFill>
+                <a:latin typeface="+mn-lt"/>
+                <a:ea typeface="+mn-ea"/>
+                <a:cs typeface="+mn-cs"/>
+              </a:defRPr>
+            </a:lvl2pPr>
+            <a:lvl3pPr marL="930493" algn="l" defTabSz="930493" rtl="0" eaLnBrk="1" latinLnBrk="0" hangingPunct="1">
+              <a:defRPr sz="1832" kern="1200">
+                <a:solidFill>
+                  <a:schemeClr val="tx1"/>
+                </a:solidFill>
+                <a:latin typeface="+mn-lt"/>
+                <a:ea typeface="+mn-ea"/>
+                <a:cs typeface="+mn-cs"/>
+              </a:defRPr>
+            </a:lvl3pPr>
+            <a:lvl4pPr marL="1395740" algn="l" defTabSz="930493" rtl="0" eaLnBrk="1" latinLnBrk="0" hangingPunct="1">
+              <a:defRPr sz="1832" kern="1200">
+                <a:solidFill>
+                  <a:schemeClr val="tx1"/>
+                </a:solidFill>
+                <a:latin typeface="+mn-lt"/>
+                <a:ea typeface="+mn-ea"/>
+                <a:cs typeface="+mn-cs"/>
+              </a:defRPr>
+            </a:lvl4pPr>
+            <a:lvl5pPr marL="1860987" algn="l" defTabSz="930493" rtl="0" eaLnBrk="1" latinLnBrk="0" hangingPunct="1">
+              <a:defRPr sz="1832" kern="1200">
+                <a:solidFill>
+                  <a:schemeClr val="tx1"/>
+                </a:solidFill>
+                <a:latin typeface="+mn-lt"/>
+                <a:ea typeface="+mn-ea"/>
+                <a:cs typeface="+mn-cs"/>
+              </a:defRPr>
+            </a:lvl5pPr>
+            <a:lvl6pPr marL="2326234" algn="l" defTabSz="930493" rtl="0" eaLnBrk="1" latinLnBrk="0" hangingPunct="1">
+              <a:defRPr sz="1832" kern="1200">
+                <a:solidFill>
+                  <a:schemeClr val="tx1"/>
+                </a:solidFill>
+                <a:latin typeface="+mn-lt"/>
+                <a:ea typeface="+mn-ea"/>
+                <a:cs typeface="+mn-cs"/>
+              </a:defRPr>
+            </a:lvl6pPr>
+            <a:lvl7pPr marL="2791480" algn="l" defTabSz="930493" rtl="0" eaLnBrk="1" latinLnBrk="0" hangingPunct="1">
+              <a:defRPr sz="1832" kern="1200">
+                <a:solidFill>
+                  <a:schemeClr val="tx1"/>
+                </a:solidFill>
+                <a:latin typeface="+mn-lt"/>
+                <a:ea typeface="+mn-ea"/>
+                <a:cs typeface="+mn-cs"/>
+              </a:defRPr>
+            </a:lvl7pPr>
+            <a:lvl8pPr marL="3256727" algn="l" defTabSz="930493" rtl="0" eaLnBrk="1" latinLnBrk="0" hangingPunct="1">
+              <a:defRPr sz="1832" kern="1200">
+                <a:solidFill>
+                  <a:schemeClr val="tx1"/>
+                </a:solidFill>
+                <a:latin typeface="+mn-lt"/>
+                <a:ea typeface="+mn-ea"/>
+                <a:cs typeface="+mn-cs"/>
+              </a:defRPr>
+            </a:lvl8pPr>
+            <a:lvl9pPr marL="3721974" algn="l" defTabSz="930493" rtl="0" eaLnBrk="1" latinLnBrk="0" hangingPunct="1">
+              <a:defRPr sz="1832" kern="1200">
+                <a:solidFill>
+                  <a:schemeClr val="tx1"/>
+                </a:solidFill>
+                <a:latin typeface="+mn-lt"/>
+                <a:ea typeface="+mn-ea"/>
+                <a:cs typeface="+mn-cs"/>
+              </a:defRPr>
+            </a:lvl9pPr>
+          </a:lstStyle>
+          <a:p>
+            <a:pPr>
+              <a:defRPr sz="1630"/>
+            </a:pPr>
+            <a:r>
+              <a:rPr lang="fr-FR" sz="3600" kern="0" dirty="0">
+                <a:solidFill>
+                  <a:srgbClr val="1F4E79"/>
+                </a:solidFill>
+                <a:ea typeface="+mn-lt"/>
+                <a:cs typeface="+mn-lt"/>
+              </a:rPr>
+              <a:t>{{</a:t>
+            </a:r>
+            <a:r>
+              <a:rPr lang="fr-FR" sz="3600" kern="0" dirty="0" err="1">
+                <a:solidFill>
+                  <a:srgbClr val="1F4E79"/>
+                </a:solidFill>
+                <a:ea typeface="+mn-lt"/>
+                <a:cs typeface="+mn-lt"/>
+              </a:rPr>
+              <a:t>project_name</a:t>
+            </a:r>
+            <a:r>
+              <a:rPr lang="fr-FR" sz="3600" kern="0" dirty="0">
+                <a:solidFill>
+                  <a:srgbClr val="1F4E79"/>
+                </a:solidFill>
+                <a:ea typeface="+mn-lt"/>
+                <a:cs typeface="+mn-lt"/>
+              </a:rPr>
+              <a:t>}}</a:t>
+            </a:r>
+            <a:endParaRPr lang="fr-FR" sz="3600" kern="0" dirty="0">
+              <a:solidFill>
+                <a:srgbClr val="1F4E79"/>
+              </a:solidFill>
+            </a:endParaRPr>
+          </a:p>
+        </p:txBody>
+      </p:sp>
+      <p:sp>
+        <p:nvSpPr>
+          <p:cNvPr id="4" name="Rectangle 1">
+            <a:extLst>
+              <a:ext uri="{FF2B5EF4-FFF2-40B4-BE49-F238E27FC236}">
+                <a16:creationId xmlns:a16="http://schemas.microsoft.com/office/drawing/2014/main" id="{01868FE7-8647-6313-9F6A-69CA188970EE}"/>
+              </a:ext>
+            </a:extLst>
+          </p:cNvPr>
+          <p:cNvSpPr/>
+          <p:nvPr/>
+        </p:nvSpPr>
+        <p:spPr>
+          <a:xfrm>
+            <a:off x="692289" y="1379466"/>
+            <a:ext cx="10803891" cy="1132621"/>
+          </a:xfrm>
+          <a:prstGeom prst="rect">
+            <a:avLst/>
+          </a:prstGeom>
+          <a:noFill/>
+          <a:ln>
+            <a:noFill/>
+            <a:prstDash val="solid"/>
+          </a:ln>
+        </p:spPr>
+        <p:txBody>
+          <a:bodyPr vert="horz" wrap="square" lIns="91673" tIns="45837" rIns="91673" bIns="45837" anchor="t" anchorCtr="0" compatLnSpc="0">
+            <a:noAutofit/>
+          </a:bodyPr>
+          <a:lstStyle>
+            <a:defPPr>
+              <a:defRPr lang="fr-FR"/>
+            </a:defPPr>
+            <a:lvl1pPr marL="0" algn="l" defTabSz="930493" rtl="0" eaLnBrk="1" latinLnBrk="0" hangingPunct="1">
+              <a:defRPr sz="1832" kern="1200">
+                <a:solidFill>
+                  <a:schemeClr val="tx1"/>
+                </a:solidFill>
+                <a:latin typeface="+mn-lt"/>
+                <a:ea typeface="+mn-ea"/>
+                <a:cs typeface="+mn-cs"/>
+              </a:defRPr>
+            </a:lvl1pPr>
+            <a:lvl2pPr marL="465247" algn="l" defTabSz="930493" rtl="0" eaLnBrk="1" latinLnBrk="0" hangingPunct="1">
+              <a:defRPr sz="1832" kern="1200">
+                <a:solidFill>
+                  <a:schemeClr val="tx1"/>
+                </a:solidFill>
+                <a:latin typeface="+mn-lt"/>
+                <a:ea typeface="+mn-ea"/>
+                <a:cs typeface="+mn-cs"/>
+              </a:defRPr>
+            </a:lvl2pPr>
+            <a:lvl3pPr marL="930493" algn="l" defTabSz="930493" rtl="0" eaLnBrk="1" latinLnBrk="0" hangingPunct="1">
+              <a:defRPr sz="1832" kern="1200">
+                <a:solidFill>
+                  <a:schemeClr val="tx1"/>
+                </a:solidFill>
+                <a:latin typeface="+mn-lt"/>
+                <a:ea typeface="+mn-ea"/>
+                <a:cs typeface="+mn-cs"/>
+              </a:defRPr>
+            </a:lvl3pPr>
+            <a:lvl4pPr marL="1395740" algn="l" defTabSz="930493" rtl="0" eaLnBrk="1" latinLnBrk="0" hangingPunct="1">
+              <a:defRPr sz="1832" kern="1200">
+                <a:solidFill>
+                  <a:schemeClr val="tx1"/>
+                </a:solidFill>
+                <a:latin typeface="+mn-lt"/>
+                <a:ea typeface="+mn-ea"/>
+                <a:cs typeface="+mn-cs"/>
+              </a:defRPr>
+            </a:lvl4pPr>
+            <a:lvl5pPr marL="1860987" algn="l" defTabSz="930493" rtl="0" eaLnBrk="1" latinLnBrk="0" hangingPunct="1">
+              <a:defRPr sz="1832" kern="1200">
+                <a:solidFill>
+                  <a:schemeClr val="tx1"/>
+                </a:solidFill>
+                <a:latin typeface="+mn-lt"/>
+                <a:ea typeface="+mn-ea"/>
+                <a:cs typeface="+mn-cs"/>
+              </a:defRPr>
+            </a:lvl5pPr>
+            <a:lvl6pPr marL="2326234" algn="l" defTabSz="930493" rtl="0" eaLnBrk="1" latinLnBrk="0" hangingPunct="1">
+              <a:defRPr sz="1832" kern="1200">
+                <a:solidFill>
+                  <a:schemeClr val="tx1"/>
+                </a:solidFill>
+                <a:latin typeface="+mn-lt"/>
+                <a:ea typeface="+mn-ea"/>
+                <a:cs typeface="+mn-cs"/>
+              </a:defRPr>
+            </a:lvl6pPr>
+            <a:lvl7pPr marL="2791480" algn="l" defTabSz="930493" rtl="0" eaLnBrk="1" latinLnBrk="0" hangingPunct="1">
+              <a:defRPr sz="1832" kern="1200">
+                <a:solidFill>
+                  <a:schemeClr val="tx1"/>
+                </a:solidFill>
+                <a:latin typeface="+mn-lt"/>
+                <a:ea typeface="+mn-ea"/>
+                <a:cs typeface="+mn-cs"/>
+              </a:defRPr>
+            </a:lvl7pPr>
+            <a:lvl8pPr marL="3256727" algn="l" defTabSz="930493" rtl="0" eaLnBrk="1" latinLnBrk="0" hangingPunct="1">
+              <a:defRPr sz="1832" kern="1200">
+                <a:solidFill>
+                  <a:schemeClr val="tx1"/>
+                </a:solidFill>
+                <a:latin typeface="+mn-lt"/>
+                <a:ea typeface="+mn-ea"/>
+                <a:cs typeface="+mn-cs"/>
+              </a:defRPr>
+            </a:lvl8pPr>
+            <a:lvl9pPr marL="3721974" algn="l" defTabSz="930493" rtl="0" eaLnBrk="1" latinLnBrk="0" hangingPunct="1">
+              <a:defRPr sz="1832" kern="1200">
+                <a:solidFill>
+                  <a:schemeClr val="tx1"/>
+                </a:solidFill>
+                <a:latin typeface="+mn-lt"/>
+                <a:ea typeface="+mn-ea"/>
+                <a:cs typeface="+mn-cs"/>
+              </a:defRPr>
+            </a:lvl9pPr>
+          </a:lstStyle>
+          <a:p>
+            <a:r>
+              <a:rPr lang="fr-FR" dirty="0"/>
+              <a:t>{{</a:t>
+            </a:r>
+            <a:r>
+              <a:rPr lang="fr-FR" dirty="0" err="1"/>
+              <a:t>kpi</a:t>
+            </a:r>
+            <a:r>
+              <a:rPr lang="fr-FR" dirty="0"/>
+              <a:t>:*}}</a:t>
+            </a:r>
+          </a:p>
+        </p:txBody>
+      </p:sp>
+      <p:sp>
+        <p:nvSpPr>
+          <p:cNvPr id="5" name="Espace réservé du numéro de diapositive 4">
+            <a:extLst>
+              <a:ext uri="{FF2B5EF4-FFF2-40B4-BE49-F238E27FC236}">
+                <a16:creationId xmlns:a16="http://schemas.microsoft.com/office/drawing/2014/main" id="{13A75C6B-E9B2-8895-8604-B6FF66B4292D}"/>
+              </a:ext>
+            </a:extLst>
+          </p:cNvPr>
+          <p:cNvSpPr>
+            <a:spLocks noGrp="1"/>
+          </p:cNvSpPr>
+          <p:nvPr>
+            <p:ph type="sldNum" sz="quarter" idx="12"/>
+          </p:nvPr>
+        </p:nvSpPr>
+        <p:spPr/>
+        <p:txBody>
+          <a:bodyPr/>
+          <a:lstStyle/>
+          <a:p>
+            <a:r>
+              <a:t>20</a:t>
+            </a:r>
+          </a:p>
+        </p:txBody>
+      </p:sp>
+      <p:pic>
+        <p:nvPicPr>
+          <p:cNvPr id="6" name="Image 5" descr="Une image contenant Police, logo, Graphique, symbole&#10;&#10;Le contenu généré par l’IA peut être incorrect.">
+            <a:extLst>
+              <a:ext uri="{FF2B5EF4-FFF2-40B4-BE49-F238E27FC236}">
+                <a16:creationId xmlns:a16="http://schemas.microsoft.com/office/drawing/2014/main" id="{176EC631-4EAE-8D44-3A33-7AE3F1322321}"/>
+              </a:ext>
+            </a:extLst>
+          </p:cNvPr>
+          <p:cNvPicPr>
+            <a:picLocks noChangeAspect="1"/>
+          </p:cNvPicPr>
+          <p:nvPr/>
+        </p:nvPicPr>
+        <p:blipFill>
+          <a:blip r:embed="rId3"/>
+          <a:stretch>
+            <a:fillRect/>
+          </a:stretch>
+        </p:blipFill>
+        <p:spPr>
+          <a:xfrm>
+            <a:off x="9978572" y="507546"/>
+            <a:ext cx="1524000" cy="400050"/>
+          </a:xfrm>
+          <a:prstGeom prst="rect">
+            <a:avLst/>
+          </a:prstGeom>
+        </p:spPr>
+      </p:pic>
+    </p:spTree>
+    <p:extLst>
+      <p:ext uri="{BB962C8B-B14F-4D97-AF65-F5344CB8AC3E}">
+        <p14:creationId xmlns:p14="http://schemas.microsoft.com/office/powerpoint/2010/main" val="1400401208"/>
+      </p:ext>
+    </p:extLst>
+  </p:cSld>
+  <p:clrMapOvr>
+    <a:masterClrMapping/>
+  </p:clrMapOvr>
+</p:sld>
+</file>
+
+<file path=ppt/slides/slide21.xml><?xml version="1.0" encoding="utf-8"?>
+<p:sld xmlns:a="http://schemas.openxmlformats.org/drawingml/2006/main" xmlns:r="http://schemas.openxmlformats.org/officeDocument/2006/relationships" xmlns:p="http://schemas.openxmlformats.org/presentationml/2006/main">
+  <p:cSld>
+    <p:spTree>
+      <p:nvGrpSpPr>
+        <p:cNvPr id="1" name="">
+          <a:extLst>
+            <a:ext uri="{FF2B5EF4-FFF2-40B4-BE49-F238E27FC236}">
               <a16:creationId xmlns:a16="http://schemas.microsoft.com/office/drawing/2014/main" id="{E1155EEF-EA18-EAEE-99AA-D13AE5638621}"/>
             </a:ext>
           </a:extLst>
@@ -12290,7 +12673,7 @@
 </p:sld>
 </file>
 
-<file path=ppt/slides/slide21.xml><?xml version="1.0" encoding="utf-8"?>
+<file path=ppt/slides/slide22.xml><?xml version="1.0" encoding="utf-8"?>
 <p:sld xmlns:a="http://schemas.openxmlformats.org/drawingml/2006/main" xmlns:r="http://schemas.openxmlformats.org/officeDocument/2006/relationships" xmlns:p="http://schemas.openxmlformats.org/presentationml/2006/main">
   <p:cSld>
     <p:spTree>
@@ -12691,7 +13074,7 @@
 </p:sld>
 </file>
 
-<file path=ppt/slides/slide22.xml><?xml version="1.0" encoding="utf-8"?>
+<file path=ppt/slides/slide23.xml><?xml version="1.0" encoding="utf-8"?>
 <p:sld xmlns:a="http://schemas.openxmlformats.org/drawingml/2006/main" xmlns:p="http://schemas.openxmlformats.org/presentationml/2006/main" xmlns:r="http://schemas.openxmlformats.org/officeDocument/2006/relationships">
   <p:cSld>
     <p:spTree>
@@ -12706,7 +13089,7 @@
           <p:cNvPr id="3" name="ZoneTexte 6">
             <a:extLst>
               <a:ext uri="{FF2B5EF4-FFF2-40B4-BE49-F238E27FC236}">
-                <a16:creationId xmlns:a16="http://schemas.microsoft.com/office/drawing/2014/main" id="{E4F3CC4C-8826-5849-DC88-6E6682E7BE78}"/>
+                <a16:creationId xmlns:a16="http://schemas.microsoft.com/office/drawing/2014/main" id="{F671D6AF-B33C-55A4-E3D4-F29DCBE126F3}"/>
               </a:ext>
             </a:extLst>
           </p:cNvPr>
@@ -12872,7 +13255,7 @@
           <p:cNvPr id="4" name="Rectangle 1">
             <a:extLst>
               <a:ext uri="{FF2B5EF4-FFF2-40B4-BE49-F238E27FC236}">
-                <a16:creationId xmlns:a16="http://schemas.microsoft.com/office/drawing/2014/main" id="{86293E5A-80FC-F271-BDE8-F0BD674E2AC6}"/>
+                <a16:creationId xmlns:a16="http://schemas.microsoft.com/office/drawing/2014/main" id="{4A694671-6459-F711-A2DA-FA3182BCF63F}"/>
               </a:ext>
             </a:extLst>
           </p:cNvPr>
@@ -12881,8 +13264,8 @@
         </p:nvSpPr>
         <p:spPr>
           <a:xfrm>
-            <a:off x="692289" y="1379467"/>
-            <a:ext cx="10803891" cy="4750028"/>
+            <a:off x="692289" y="1379466"/>
+            <a:ext cx="10803891" cy="4862992"/>
           </a:xfrm>
           <a:prstGeom prst="rect">
             <a:avLst/>
@@ -12995,16 +13378,17 @@
           <a:p>
             <a:r>
               <a:rPr lang="fr-FR" dirty="0"/>
-              <a:t> {{chart:tempo_conso}}</a:t>
+              <a:t>{{coach:decisions}}</a:t>
             </a:r>
             <a:r>
               <a:rPr lang="fr-FR" dirty="0" err="1"/>
               <a:t/>
             </a:r>
             <a:r>
-              <a:rPr lang="fr-FR" dirty="0"/>
+              <a:rPr lang="fr-FR"/>
               <a:t/>
             </a:r>
+            <a:endParaRPr lang="fr-FR" dirty="0"/>
           </a:p>
         </p:txBody>
       </p:sp>
@@ -13013,7 +13397,7 @@
           <p:cNvPr id="5" name="Espace réservé du numéro de diapositive 4">
             <a:extLst>
               <a:ext uri="{FF2B5EF4-FFF2-40B4-BE49-F238E27FC236}">
-                <a16:creationId xmlns:a16="http://schemas.microsoft.com/office/drawing/2014/main" id="{9D2BA1EF-32B9-67FD-03DC-579D11B0111C}"/>
+                <a16:creationId xmlns:a16="http://schemas.microsoft.com/office/drawing/2014/main" id="{7DE1A1E7-2665-2610-920B-5373E0A1EF10}"/>
               </a:ext>
             </a:extLst>
           </p:cNvPr>
@@ -13030,7 +13414,7 @@
           <a:lstStyle/>
           <a:p>
             <a:r>
-              <a:t>17</a:t>
+              <a:t>23</a:t>
             </a:r>
           </a:p>
         </p:txBody>
@@ -13040,7 +13424,7 @@
           <p:cNvPr id="6" name="Image 5" descr="Une image contenant Police, logo, Graphique, symbole&#10;&#10;Le contenu généré par l’IA peut être incorrect.">
             <a:extLst>
               <a:ext uri="{FF2B5EF4-FFF2-40B4-BE49-F238E27FC236}">
-                <a16:creationId xmlns:a16="http://schemas.microsoft.com/office/drawing/2014/main" id="{D0A65CC1-4B96-627A-BEE7-4F6952A70C77}"/>
+                <a16:creationId xmlns:a16="http://schemas.microsoft.com/office/drawing/2014/main" id="{99226B3D-7813-1DD5-B7D2-566DAA90B733}"/>
               </a:ext>
             </a:extLst>
           </p:cNvPr>

--- a/skills/jira-report/scaffold/template.pptx
+++ b/skills/jira-report/scaffold/template.pptx
@@ -25,6 +25,7 @@
     <p:sldId id="314" r:id="rId16"/>
     <p:sldId id="326" r:id="rId28"/>
     <p:sldId id="327" r:id="rId29"/>
+    <p:sldId id="329" r:id="rId31"/>
     <p:sldId id="313" r:id="rId17"/>
     <p:sldId id="318" r:id="rId18"/>
     <p:sldId id="310" r:id="rId19"/>
@@ -11017,7 +11018,7 @@
           <a:lstStyle/>
           <a:p>
             <a:r>
-              <a:t>18</a:t>
+              <a:t>19</a:t>
             </a:r>
           </a:p>
         </p:txBody>
@@ -11417,7 +11418,7 @@
           <a:lstStyle/>
           <a:p>
             <a:r>
-              <a:t>19</a:t>
+              <a:t>20</a:t>
             </a:r>
           </a:p>
         </p:txBody>
@@ -12228,7 +12229,7 @@
           <a:lstStyle/>
           <a:p>
             <a:r>
-              <a:t>20</a:t>
+              <a:t>21</a:t>
             </a:r>
           </a:p>
         </p:txBody>
@@ -12625,7 +12626,7 @@
           <a:lstStyle/>
           <a:p>
             <a:r>
-              <a:t>21</a:t>
+              <a:t>22</a:t>
             </a:r>
           </a:p>
         </p:txBody>
@@ -13026,7 +13027,7 @@
           <a:lstStyle/>
           <a:p>
             <a:r>
-              <a:t>22</a:t>
+              <a:t>23</a:t>
             </a:r>
           </a:p>
         </p:txBody>
@@ -13414,7 +13415,7 @@
           <a:lstStyle/>
           <a:p>
             <a:r>
-              <a:t>23</a:t>
+              <a:t>24</a:t>
             </a:r>
           </a:p>
         </p:txBody>
@@ -13425,6 +13426,388 @@
             <a:extLst>
               <a:ext uri="{FF2B5EF4-FFF2-40B4-BE49-F238E27FC236}">
                 <a16:creationId xmlns:a16="http://schemas.microsoft.com/office/drawing/2014/main" id="{99226B3D-7813-1DD5-B7D2-566DAA90B733}"/>
+              </a:ext>
+            </a:extLst>
+          </p:cNvPr>
+          <p:cNvPicPr>
+            <a:picLocks noChangeAspect="1"/>
+          </p:cNvPicPr>
+          <p:nvPr/>
+        </p:nvPicPr>
+        <p:blipFill>
+          <a:blip r:embed="rId3"/>
+          <a:stretch>
+            <a:fillRect/>
+          </a:stretch>
+        </p:blipFill>
+        <p:spPr>
+          <a:xfrm>
+            <a:off x="9978572" y="507546"/>
+            <a:ext cx="1524000" cy="400050"/>
+          </a:xfrm>
+          <a:prstGeom prst="rect">
+            <a:avLst/>
+          </a:prstGeom>
+        </p:spPr>
+      </p:pic>
+    </p:spTree>
+  </p:cSld>
+  <p:clrMapOvr>
+    <a:masterClrMapping/>
+  </p:clrMapOvr>
+</p:sld>
+</file>
+
+<file path=ppt/slides/slide24.xml><?xml version="1.0" encoding="utf-8"?>
+<p:sld xmlns:a="http://schemas.openxmlformats.org/drawingml/2006/main" xmlns:p="http://schemas.openxmlformats.org/presentationml/2006/main" xmlns:r="http://schemas.openxmlformats.org/officeDocument/2006/relationships">
+  <p:cSld>
+    <p:spTree>
+      <p:nvGrpSpPr>
+        <p:cNvPr id="1" name=""/>
+        <p:cNvGrpSpPr/>
+        <p:nvPr/>
+      </p:nvGrpSpPr>
+      <p:grpSpPr/>
+      <p:sp>
+        <p:nvSpPr>
+          <p:cNvPr id="3" name="ZoneTexte 6">
+            <a:extLst>
+              <a:ext uri="{FF2B5EF4-FFF2-40B4-BE49-F238E27FC236}">
+                <a16:creationId xmlns:a16="http://schemas.microsoft.com/office/drawing/2014/main" id="{E4F3CC4C-8826-5849-DC88-6E6682E7BE78}"/>
+              </a:ext>
+            </a:extLst>
+          </p:cNvPr>
+          <p:cNvSpPr txBox="1"/>
+          <p:nvPr/>
+        </p:nvSpPr>
+        <p:spPr>
+          <a:xfrm>
+            <a:off x="692289" y="365303"/>
+            <a:ext cx="8756869" cy="656185"/>
+          </a:xfrm>
+          <a:prstGeom prst="rect">
+            <a:avLst/>
+          </a:prstGeom>
+          <a:noFill/>
+          <a:ln>
+            <a:noFill/>
+          </a:ln>
+        </p:spPr>
+        <p:txBody>
+          <a:bodyPr vert="horz" wrap="square" lIns="91673" tIns="45837" rIns="91673" bIns="45837" anchor="t" anchorCtr="0" compatLnSpc="0">
+            <a:spAutoFit/>
+          </a:bodyPr>
+          <a:lstStyle>
+            <a:defPPr>
+              <a:defRPr lang="fr-FR"/>
+            </a:defPPr>
+            <a:lvl1pPr marL="0" algn="l" defTabSz="930493" rtl="0" eaLnBrk="1" latinLnBrk="0" hangingPunct="1">
+              <a:defRPr sz="1832" kern="1200">
+                <a:solidFill>
+                  <a:schemeClr val="tx1"/>
+                </a:solidFill>
+                <a:latin typeface="+mn-lt"/>
+                <a:ea typeface="+mn-ea"/>
+                <a:cs typeface="+mn-cs"/>
+              </a:defRPr>
+            </a:lvl1pPr>
+            <a:lvl2pPr marL="465247" algn="l" defTabSz="930493" rtl="0" eaLnBrk="1" latinLnBrk="0" hangingPunct="1">
+              <a:defRPr sz="1832" kern="1200">
+                <a:solidFill>
+                  <a:schemeClr val="tx1"/>
+                </a:solidFill>
+                <a:latin typeface="+mn-lt"/>
+                <a:ea typeface="+mn-ea"/>
+                <a:cs typeface="+mn-cs"/>
+              </a:defRPr>
+            </a:lvl2pPr>
+            <a:lvl3pPr marL="930493" algn="l" defTabSz="930493" rtl="0" eaLnBrk="1" latinLnBrk="0" hangingPunct="1">
+              <a:defRPr sz="1832" kern="1200">
+                <a:solidFill>
+                  <a:schemeClr val="tx1"/>
+                </a:solidFill>
+                <a:latin typeface="+mn-lt"/>
+                <a:ea typeface="+mn-ea"/>
+                <a:cs typeface="+mn-cs"/>
+              </a:defRPr>
+            </a:lvl3pPr>
+            <a:lvl4pPr marL="1395740" algn="l" defTabSz="930493" rtl="0" eaLnBrk="1" latinLnBrk="0" hangingPunct="1">
+              <a:defRPr sz="1832" kern="1200">
+                <a:solidFill>
+                  <a:schemeClr val="tx1"/>
+                </a:solidFill>
+                <a:latin typeface="+mn-lt"/>
+                <a:ea typeface="+mn-ea"/>
+                <a:cs typeface="+mn-cs"/>
+              </a:defRPr>
+            </a:lvl4pPr>
+            <a:lvl5pPr marL="1860987" algn="l" defTabSz="930493" rtl="0" eaLnBrk="1" latinLnBrk="0" hangingPunct="1">
+              <a:defRPr sz="1832" kern="1200">
+                <a:solidFill>
+                  <a:schemeClr val="tx1"/>
+                </a:solidFill>
+                <a:latin typeface="+mn-lt"/>
+                <a:ea typeface="+mn-ea"/>
+                <a:cs typeface="+mn-cs"/>
+              </a:defRPr>
+            </a:lvl5pPr>
+            <a:lvl6pPr marL="2326234" algn="l" defTabSz="930493" rtl="0" eaLnBrk="1" latinLnBrk="0" hangingPunct="1">
+              <a:defRPr sz="1832" kern="1200">
+                <a:solidFill>
+                  <a:schemeClr val="tx1"/>
+                </a:solidFill>
+                <a:latin typeface="+mn-lt"/>
+                <a:ea typeface="+mn-ea"/>
+                <a:cs typeface="+mn-cs"/>
+              </a:defRPr>
+            </a:lvl6pPr>
+            <a:lvl7pPr marL="2791480" algn="l" defTabSz="930493" rtl="0" eaLnBrk="1" latinLnBrk="0" hangingPunct="1">
+              <a:defRPr sz="1832" kern="1200">
+                <a:solidFill>
+                  <a:schemeClr val="tx1"/>
+                </a:solidFill>
+                <a:latin typeface="+mn-lt"/>
+                <a:ea typeface="+mn-ea"/>
+                <a:cs typeface="+mn-cs"/>
+              </a:defRPr>
+            </a:lvl7pPr>
+            <a:lvl8pPr marL="3256727" algn="l" defTabSz="930493" rtl="0" eaLnBrk="1" latinLnBrk="0" hangingPunct="1">
+              <a:defRPr sz="1832" kern="1200">
+                <a:solidFill>
+                  <a:schemeClr val="tx1"/>
+                </a:solidFill>
+                <a:latin typeface="+mn-lt"/>
+                <a:ea typeface="+mn-ea"/>
+                <a:cs typeface="+mn-cs"/>
+              </a:defRPr>
+            </a:lvl8pPr>
+            <a:lvl9pPr marL="3721974" algn="l" defTabSz="930493" rtl="0" eaLnBrk="1" latinLnBrk="0" hangingPunct="1">
+              <a:defRPr sz="1832" kern="1200">
+                <a:solidFill>
+                  <a:schemeClr val="tx1"/>
+                </a:solidFill>
+                <a:latin typeface="+mn-lt"/>
+                <a:ea typeface="+mn-ea"/>
+                <a:cs typeface="+mn-cs"/>
+              </a:defRPr>
+            </a:lvl9pPr>
+          </a:lstStyle>
+          <a:p>
+            <a:pPr>
+              <a:defRPr sz="1630"/>
+            </a:pPr>
+            <a:r>
+              <a:rPr lang="fr-FR" sz="3600" kern="0" dirty="0">
+                <a:solidFill>
+                  <a:srgbClr val="1F4E79"/>
+                </a:solidFill>
+                <a:ea typeface="+mn-lt"/>
+                <a:cs typeface="+mn-lt"/>
+              </a:rPr>
+              <a:t>{{</a:t>
+            </a:r>
+            <a:r>
+              <a:rPr lang="fr-FR" sz="3600" kern="0" dirty="0" err="1">
+                <a:solidFill>
+                  <a:srgbClr val="1F4E79"/>
+                </a:solidFill>
+                <a:ea typeface="+mn-lt"/>
+                <a:cs typeface="+mn-lt"/>
+              </a:rPr>
+              <a:t>project_name</a:t>
+            </a:r>
+            <a:r>
+              <a:rPr lang="fr-FR" sz="3600" kern="0" dirty="0">
+                <a:solidFill>
+                  <a:srgbClr val="1F4E79"/>
+                </a:solidFill>
+                <a:ea typeface="+mn-lt"/>
+                <a:cs typeface="+mn-lt"/>
+              </a:rPr>
+              <a:t>}}</a:t>
+            </a:r>
+            <a:endParaRPr lang="fr-FR" sz="3600" kern="0" dirty="0">
+              <a:solidFill>
+                <a:srgbClr val="1F4E79"/>
+              </a:solidFill>
+            </a:endParaRPr>
+          </a:p>
+        </p:txBody>
+      </p:sp>
+      <p:sp>
+        <p:nvSpPr>
+          <p:cNvPr id="4" name="Rectangle 1">
+            <a:extLst>
+              <a:ext uri="{FF2B5EF4-FFF2-40B4-BE49-F238E27FC236}">
+                <a16:creationId xmlns:a16="http://schemas.microsoft.com/office/drawing/2014/main" id="{86293E5A-80FC-F271-BDE8-F0BD674E2AC6}"/>
+              </a:ext>
+            </a:extLst>
+          </p:cNvPr>
+          <p:cNvSpPr/>
+          <p:nvPr/>
+        </p:nvSpPr>
+        <p:spPr>
+          <a:xfrm>
+            <a:off x="692289" y="1379467"/>
+            <a:ext cx="10803891" cy="4750028"/>
+          </a:xfrm>
+          <a:prstGeom prst="rect">
+            <a:avLst/>
+          </a:prstGeom>
+          <a:noFill/>
+          <a:ln>
+            <a:noFill/>
+            <a:prstDash val="solid"/>
+          </a:ln>
+        </p:spPr>
+        <p:txBody>
+          <a:bodyPr vert="horz" wrap="square" lIns="91673" tIns="45837" rIns="91673" bIns="45837" anchor="t" anchorCtr="0" compatLnSpc="0">
+            <a:noAutofit/>
+          </a:bodyPr>
+          <a:lstStyle>
+            <a:defPPr>
+              <a:defRPr lang="fr-FR"/>
+            </a:defPPr>
+            <a:lvl1pPr marL="0" algn="l" defTabSz="930493" rtl="0" eaLnBrk="1" latinLnBrk="0" hangingPunct="1">
+              <a:defRPr sz="1832" kern="1200">
+                <a:solidFill>
+                  <a:schemeClr val="tx1"/>
+                </a:solidFill>
+                <a:latin typeface="+mn-lt"/>
+                <a:ea typeface="+mn-ea"/>
+                <a:cs typeface="+mn-cs"/>
+              </a:defRPr>
+            </a:lvl1pPr>
+            <a:lvl2pPr marL="465247" algn="l" defTabSz="930493" rtl="0" eaLnBrk="1" latinLnBrk="0" hangingPunct="1">
+              <a:defRPr sz="1832" kern="1200">
+                <a:solidFill>
+                  <a:schemeClr val="tx1"/>
+                </a:solidFill>
+                <a:latin typeface="+mn-lt"/>
+                <a:ea typeface="+mn-ea"/>
+                <a:cs typeface="+mn-cs"/>
+              </a:defRPr>
+            </a:lvl2pPr>
+            <a:lvl3pPr marL="930493" algn="l" defTabSz="930493" rtl="0" eaLnBrk="1" latinLnBrk="0" hangingPunct="1">
+              <a:defRPr sz="1832" kern="1200">
+                <a:solidFill>
+                  <a:schemeClr val="tx1"/>
+                </a:solidFill>
+                <a:latin typeface="+mn-lt"/>
+                <a:ea typeface="+mn-ea"/>
+                <a:cs typeface="+mn-cs"/>
+              </a:defRPr>
+            </a:lvl3pPr>
+            <a:lvl4pPr marL="1395740" algn="l" defTabSz="930493" rtl="0" eaLnBrk="1" latinLnBrk="0" hangingPunct="1">
+              <a:defRPr sz="1832" kern="1200">
+                <a:solidFill>
+                  <a:schemeClr val="tx1"/>
+                </a:solidFill>
+                <a:latin typeface="+mn-lt"/>
+                <a:ea typeface="+mn-ea"/>
+                <a:cs typeface="+mn-cs"/>
+              </a:defRPr>
+            </a:lvl4pPr>
+            <a:lvl5pPr marL="1860987" algn="l" defTabSz="930493" rtl="0" eaLnBrk="1" latinLnBrk="0" hangingPunct="1">
+              <a:defRPr sz="1832" kern="1200">
+                <a:solidFill>
+                  <a:schemeClr val="tx1"/>
+                </a:solidFill>
+                <a:latin typeface="+mn-lt"/>
+                <a:ea typeface="+mn-ea"/>
+                <a:cs typeface="+mn-cs"/>
+              </a:defRPr>
+            </a:lvl5pPr>
+            <a:lvl6pPr marL="2326234" algn="l" defTabSz="930493" rtl="0" eaLnBrk="1" latinLnBrk="0" hangingPunct="1">
+              <a:defRPr sz="1832" kern="1200">
+                <a:solidFill>
+                  <a:schemeClr val="tx1"/>
+                </a:solidFill>
+                <a:latin typeface="+mn-lt"/>
+                <a:ea typeface="+mn-ea"/>
+                <a:cs typeface="+mn-cs"/>
+              </a:defRPr>
+            </a:lvl6pPr>
+            <a:lvl7pPr marL="2791480" algn="l" defTabSz="930493" rtl="0" eaLnBrk="1" latinLnBrk="0" hangingPunct="1">
+              <a:defRPr sz="1832" kern="1200">
+                <a:solidFill>
+                  <a:schemeClr val="tx1"/>
+                </a:solidFill>
+                <a:latin typeface="+mn-lt"/>
+                <a:ea typeface="+mn-ea"/>
+                <a:cs typeface="+mn-cs"/>
+              </a:defRPr>
+            </a:lvl7pPr>
+            <a:lvl8pPr marL="3256727" algn="l" defTabSz="930493" rtl="0" eaLnBrk="1" latinLnBrk="0" hangingPunct="1">
+              <a:defRPr sz="1832" kern="1200">
+                <a:solidFill>
+                  <a:schemeClr val="tx1"/>
+                </a:solidFill>
+                <a:latin typeface="+mn-lt"/>
+                <a:ea typeface="+mn-ea"/>
+                <a:cs typeface="+mn-cs"/>
+              </a:defRPr>
+            </a:lvl8pPr>
+            <a:lvl9pPr marL="3721974" algn="l" defTabSz="930493" rtl="0" eaLnBrk="1" latinLnBrk="0" hangingPunct="1">
+              <a:defRPr sz="1832" kern="1200">
+                <a:solidFill>
+                  <a:schemeClr val="tx1"/>
+                </a:solidFill>
+                <a:latin typeface="+mn-lt"/>
+                <a:ea typeface="+mn-ea"/>
+                <a:cs typeface="+mn-cs"/>
+              </a:defRPr>
+            </a:lvl9pPr>
+          </a:lstStyle>
+          <a:p>
+            <a:r>
+              <a:rPr lang="fr-FR" dirty="0"/>
+              <a:t> {{chart:tempo_types}}</a:t>
+            </a:r>
+            <a:r>
+              <a:rPr lang="fr-FR" dirty="0" err="1"/>
+              <a:t/>
+            </a:r>
+            <a:r>
+              <a:rPr lang="fr-FR" dirty="0"/>
+              <a:t/>
+            </a:r>
+          </a:p>
+        </p:txBody>
+      </p:sp>
+      <p:sp>
+        <p:nvSpPr>
+          <p:cNvPr id="5" name="Espace réservé du numéro de diapositive 4">
+            <a:extLst>
+              <a:ext uri="{FF2B5EF4-FFF2-40B4-BE49-F238E27FC236}">
+                <a16:creationId xmlns:a16="http://schemas.microsoft.com/office/drawing/2014/main" id="{9D2BA1EF-32B9-67FD-03DC-579D11B0111C}"/>
+              </a:ext>
+            </a:extLst>
+          </p:cNvPr>
+          <p:cNvSpPr>
+            <a:spLocks noGrp="1"/>
+          </p:cNvSpPr>
+          <p:nvPr>
+            <p:ph type="sldNum" sz="quarter" idx="12"/>
+          </p:nvPr>
+        </p:nvSpPr>
+        <p:spPr/>
+        <p:txBody>
+          <a:bodyPr/>
+          <a:lstStyle/>
+          <a:p>
+            <a:r>
+              <a:t>18</a:t>
+            </a:r>
+          </a:p>
+        </p:txBody>
+      </p:sp>
+      <p:pic>
+        <p:nvPicPr>
+          <p:cNvPr id="6" name="Image 5" descr="Une image contenant Police, logo, Graphique, symbole&#10;&#10;Le contenu généré par l’IA peut être incorrect.">
+            <a:extLst>
+              <a:ext uri="{FF2B5EF4-FFF2-40B4-BE49-F238E27FC236}">
+                <a16:creationId xmlns:a16="http://schemas.microsoft.com/office/drawing/2014/main" id="{D0A65CC1-4B96-627A-BEE7-4F6952A70C77}"/>
               </a:ext>
             </a:extLst>
           </p:cNvPr>
